--- a/examples/reference-only/01-modular-agent-reference-only/redraw.pptx
+++ b/examples/reference-only/01-modular-agent-reference-only/redraw.pptx
@@ -3090,7 +3090,7 @@
       <p:grpSpPr/>
       <p:sp>
         <p:nvSpPr>
-          <p:cNvPr id="2" name="af-background-rect-01"/>
+          <p:cNvPr id="2" name="af-background-rect-01" descr="{&quot;autofigure_element_id&quot;:&quot;background&quot;}"/>
           <p:cNvSpPr/>
           <p:nvPr/>
         </p:nvSpPr>
@@ -3134,7 +3134,7 @@
       </p:sp>
       <p:sp>
         <p:nvSpPr>
-          <p:cNvPr id="3" name="af-joint-panel-rect-01"/>
+          <p:cNvPr id="3" name="af-joint-panel-rect-01" descr="{&quot;autofigure_element_id&quot;:&quot;joint-panel&quot;}"/>
           <p:cNvSpPr/>
           <p:nvPr/>
         </p:nvSpPr>
@@ -3154,6 +3154,7 @@
               <a:srgbClr val="17355F"/>
             </a:solidFill>
             <a:prstDash val="sysDot"/>
+            <a:miter/>
           </a:ln>
           <a:effectLst/>
         </p:spPr>
@@ -3181,7 +3182,7 @@
       </p:sp>
       <p:sp>
         <p:nvSpPr>
-          <p:cNvPr id="4" name="af-behavior-panel-rect-01"/>
+          <p:cNvPr id="4" name="af-behavior-panel-rect-01" descr="{&quot;autofigure_element_id&quot;:&quot;behavior-panel&quot;}"/>
           <p:cNvSpPr/>
           <p:nvPr/>
         </p:nvSpPr>
@@ -3201,6 +3202,7 @@
               <a:srgbClr val="17355F"/>
             </a:solidFill>
             <a:prstDash val="sysDot"/>
+            <a:miter/>
           </a:ln>
           <a:effectLst/>
         </p:spPr>
@@ -3228,7 +3230,7 @@
       </p:sp>
       <p:sp>
         <p:nvSpPr>
-          <p:cNvPr id="5" name="af-task-input-box-rect-01"/>
+          <p:cNvPr id="5" name="af-task-input-box-rect-01" descr="{&quot;autofigure_element_id&quot;:&quot;task-input-box&quot;}"/>
           <p:cNvSpPr/>
           <p:nvPr/>
         </p:nvSpPr>
@@ -3249,6 +3251,7 @@
             <a:solidFill>
               <a:srgbClr val="18345C"/>
             </a:solidFill>
+            <a:miter/>
           </a:ln>
           <a:effectLst/>
         </p:spPr>
@@ -3276,7 +3279,7 @@
       </p:sp>
       <p:sp>
         <p:nvSpPr>
-          <p:cNvPr id="6" name="af-user-icon-ring-ellipse-01"/>
+          <p:cNvPr id="6" name="af-user-icon-ring-ellipse-01" descr="{&quot;autofigure_element_id&quot;:&quot;user-icon-ring&quot;}"/>
           <p:cNvSpPr/>
           <p:nvPr/>
         </p:nvSpPr>
@@ -3295,6 +3298,7 @@
             <a:solidFill>
               <a:srgbClr val="000000"/>
             </a:solidFill>
+            <a:miter/>
           </a:ln>
           <a:effectLst/>
         </p:spPr>
@@ -3322,7 +3326,7 @@
       </p:sp>
       <p:sp>
         <p:nvSpPr>
-          <p:cNvPr id="7" name="af-user-icon-head-ellipse-01"/>
+          <p:cNvPr id="7" name="af-user-icon-head-ellipse-01" descr="{&quot;autofigure_element_id&quot;:&quot;user-icon-head&quot;}"/>
           <p:cNvSpPr/>
           <p:nvPr/>
         </p:nvSpPr>
@@ -3366,7 +3370,7 @@
       </p:sp>
       <p:sp>
         <p:nvSpPr>
-          <p:cNvPr id="8" name="af-user-icon-body-freeform-01"/>
+          <p:cNvPr id="8" name="af-user-icon-body-freeform-01" descr="{&quot;autofigure_element_id&quot;:&quot;user-icon-body&quot;}"/>
           <p:cNvSpPr/>
           <p:nvPr/>
         </p:nvSpPr>
@@ -3414,7 +3418,7 @@
       </p:sp>
       <p:sp>
         <p:nvSpPr>
-          <p:cNvPr id="9" name="af-task-line-1-text-01"/>
+          <p:cNvPr id="9" name="af-task-line-1-text-01" descr="{&quot;autofigure_element_id&quot;:&quot;task-line-1&quot;}"/>
           <p:cNvSpPr txBox="1"/>
           <p:nvPr/>
         </p:nvSpPr>
@@ -3431,7 +3435,7 @@
         </p:spPr>
         <p:txBody>
           <a:bodyPr wrap="none" anchor="t" lIns="0" rIns="0" tIns="0" bIns="0">
-            <a:spAutoFit/>
+            <a:noAutofit/>
           </a:bodyPr>
           <a:lstStyle/>
           <a:p>
@@ -3450,7 +3454,7 @@
       </p:sp>
       <p:sp>
         <p:nvSpPr>
-          <p:cNvPr id="10" name="af-task-line-2-text-01"/>
+          <p:cNvPr id="10" name="af-task-line-2-text-01" descr="{&quot;autofigure_element_id&quot;:&quot;task-line-2&quot;}"/>
           <p:cNvSpPr txBox="1"/>
           <p:nvPr/>
         </p:nvSpPr>
@@ -3467,7 +3471,7 @@
         </p:spPr>
         <p:txBody>
           <a:bodyPr wrap="none" anchor="t" lIns="0" rIns="0" tIns="0" bIns="0">
-            <a:spAutoFit/>
+            <a:noAutofit/>
           </a:bodyPr>
           <a:lstStyle/>
           <a:p>
@@ -3486,7 +3490,7 @@
       </p:sp>
       <p:sp>
         <p:nvSpPr>
-          <p:cNvPr id="11" name="af-task-encoder-rect-01"/>
+          <p:cNvPr id="11" name="af-task-encoder-rect-01" descr="{&quot;autofigure_element_id&quot;:&quot;task-encoder&quot;}"/>
           <p:cNvSpPr/>
           <p:nvPr/>
         </p:nvSpPr>
@@ -3532,7 +3536,7 @@
       </p:sp>
       <p:sp>
         <p:nvSpPr>
-          <p:cNvPr id="12" name="af-task-encoder-line1-text-01"/>
+          <p:cNvPr id="12" name="af-task-encoder-line1-text-01" descr="{&quot;autofigure_element_id&quot;:&quot;task-encoder-line1&quot;}"/>
           <p:cNvSpPr txBox="1"/>
           <p:nvPr/>
         </p:nvSpPr>
@@ -3549,7 +3553,7 @@
         </p:spPr>
         <p:txBody>
           <a:bodyPr wrap="none" anchor="t" lIns="0" rIns="0" tIns="0" bIns="0">
-            <a:spAutoFit/>
+            <a:noAutofit/>
           </a:bodyPr>
           <a:lstStyle/>
           <a:p>
@@ -3568,7 +3572,7 @@
       </p:sp>
       <p:sp>
         <p:nvSpPr>
-          <p:cNvPr id="13" name="af-task-encoder-line2-text-01"/>
+          <p:cNvPr id="13" name="af-task-encoder-line2-text-01" descr="{&quot;autofigure_element_id&quot;:&quot;task-encoder-line2&quot;}"/>
           <p:cNvSpPr txBox="1"/>
           <p:nvPr/>
         </p:nvSpPr>
@@ -3585,7 +3589,7 @@
         </p:spPr>
         <p:txBody>
           <a:bodyPr wrap="none" anchor="t" lIns="0" rIns="0" tIns="0" bIns="0">
-            <a:spAutoFit/>
+            <a:noAutofit/>
           </a:bodyPr>
           <a:lstStyle/>
           <a:p>
@@ -3604,7 +3608,7 @@
       </p:sp>
       <p:sp>
         <p:nvSpPr>
-          <p:cNvPr id="14" name="af-tau-box-rect-01"/>
+          <p:cNvPr id="14" name="af-tau-box-rect-01" descr="{&quot;autofigure_element_id&quot;:&quot;tau-box&quot;}"/>
           <p:cNvSpPr/>
           <p:nvPr/>
         </p:nvSpPr>
@@ -3623,6 +3627,7 @@
             <a:solidFill>
               <a:srgbClr val="18345C"/>
             </a:solidFill>
+            <a:miter/>
           </a:ln>
           <a:effectLst/>
         </p:spPr>
@@ -3669,7 +3674,7 @@
             </p:spPr>
             <p:txBody>
               <a:bodyPr wrap="none" anchor="t" lIns="0" rIns="0" tIns="0" bIns="0">
-                <a:spAutoFit/>
+                <a:noAutofit/>
               </a:bodyPr>
               <a:lstStyle/>
               <a:p>
@@ -3717,7 +3722,7 @@
             </p:spPr>
             <p:txBody>
               <a:bodyPr wrap="none" anchor="t" lIns="0" rIns="0" tIns="0" bIns="0">
-                <a:spAutoFit/>
+                <a:noAutofit/>
               </a:bodyPr>
               <a:lstStyle/>
               <a:p>
@@ -3742,7 +3747,7 @@
       </mc:AlternateContent>
       <p:sp>
         <p:nvSpPr>
-          <p:cNvPr id="16" name="af-tau-node-1-ellipse-01"/>
+          <p:cNvPr id="16" name="af-tau-node-1-ellipse-01" descr="{&quot;autofigure_element_id&quot;:&quot;tau-node-1&quot;}"/>
           <p:cNvSpPr/>
           <p:nvPr/>
         </p:nvSpPr>
@@ -3786,7 +3791,7 @@
       </p:sp>
       <p:sp>
         <p:nvSpPr>
-          <p:cNvPr id="17" name="af-tau-node-2-ellipse-01"/>
+          <p:cNvPr id="17" name="af-tau-node-2-ellipse-01" descr="{&quot;autofigure_element_id&quot;:&quot;tau-node-2&quot;}"/>
           <p:cNvSpPr/>
           <p:nvPr/>
         </p:nvSpPr>
@@ -3830,7 +3835,7 @@
       </p:sp>
       <p:sp>
         <p:nvSpPr>
-          <p:cNvPr id="18" name="af-tau-node-3-ellipse-01"/>
+          <p:cNvPr id="18" name="af-tau-node-3-ellipse-01" descr="{&quot;autofigure_element_id&quot;:&quot;tau-node-3&quot;}"/>
           <p:cNvSpPr/>
           <p:nvPr/>
         </p:nvSpPr>
@@ -3874,7 +3879,7 @@
       </p:sp>
       <p:sp>
         <p:nvSpPr>
-          <p:cNvPr id="19" name="af-mapping-box-rect-01"/>
+          <p:cNvPr id="19" name="af-mapping-box-rect-01" descr="{&quot;autofigure_element_id&quot;:&quot;mapping-box&quot;}"/>
           <p:cNvSpPr/>
           <p:nvPr/>
         </p:nvSpPr>
@@ -3920,7 +3925,7 @@
       </p:sp>
       <p:sp>
         <p:nvSpPr>
-          <p:cNvPr id="20" name="af-mapping-label-text-01"/>
+          <p:cNvPr id="20" name="af-mapping-label-text-01" descr="{&quot;autofigure_element_id&quot;:&quot;mapping-label&quot;}"/>
           <p:cNvSpPr txBox="1"/>
           <p:nvPr/>
         </p:nvSpPr>
@@ -3937,7 +3942,7 @@
         </p:spPr>
         <p:txBody>
           <a:bodyPr wrap="none" anchor="t" lIns="0" rIns="0" tIns="0" bIns="0">
-            <a:spAutoFit/>
+            <a:noAutofit/>
           </a:bodyPr>
           <a:lstStyle/>
           <a:p>
@@ -3975,7 +3980,7 @@
             </p:spPr>
             <p:txBody>
               <a:bodyPr wrap="none" anchor="t" lIns="0" rIns="0" tIns="0" bIns="0">
-                <a:spAutoFit/>
+                <a:noAutofit/>
               </a:bodyPr>
               <a:lstStyle/>
               <a:p>
@@ -4038,7 +4043,7 @@
             </p:spPr>
             <p:txBody>
               <a:bodyPr wrap="none" anchor="t" lIns="0" rIns="0" tIns="0" bIns="0">
-                <a:spAutoFit/>
+                <a:noAutofit/>
               </a:bodyPr>
               <a:lstStyle/>
               <a:p>
@@ -4063,7 +4068,7 @@
       </mc:AlternateContent>
       <p:cxnSp>
         <p:nvCxnSpPr>
-          <p:cNvPr id="22" name="af-task-input-to-encoder-connector-01"/>
+          <p:cNvPr id="22" name="af-task-input-to-encoder-connector-01" descr="{&quot;arrow_spec_sha256&quot;:&quot;7d5ed98d70de50a89dd6a62b357199f31c630caa2dd759ba7ae7a496a0e1eecf&quot;,&quot;autofigure_element_id&quot;:&quot;task-input-to-encoder&quot;}"/>
           <p:cNvCxnSpPr>
             <a:stCxn id="5" idx="0"/>
             <a:endCxn id="11" idx="0"/>
@@ -4082,6 +4087,7 @@
             <a:solidFill>
               <a:srgbClr val="7F7F7F"/>
             </a:solidFill>
+            <a:miter/>
             <a:tailEnd type="triangle" w="sm" len="sm"/>
           </a:ln>
           <a:effectLst/>
@@ -4103,7 +4109,7 @@
       </p:cxnSp>
       <p:cxnSp>
         <p:nvCxnSpPr>
-          <p:cNvPr id="23" name="af-task-encoder-to-tau-connector-01"/>
+          <p:cNvPr id="23" name="af-task-encoder-to-tau-connector-01" descr="{&quot;arrow_spec_sha256&quot;:&quot;05f855fe9d4755df68c702b5553583fc088577e9b45784efd59df6e8c718dd59&quot;,&quot;autofigure_element_id&quot;:&quot;task-encoder-to-tau&quot;}"/>
           <p:cNvCxnSpPr>
             <a:stCxn id="11" idx="0"/>
             <a:endCxn id="14" idx="0"/>
@@ -4122,6 +4128,7 @@
             <a:solidFill>
               <a:srgbClr val="7F7F7F"/>
             </a:solidFill>
+            <a:miter/>
             <a:tailEnd type="triangle" w="sm" len="sm"/>
           </a:ln>
           <a:effectLst/>
@@ -4143,7 +4150,7 @@
       </p:cxnSp>
       <p:cxnSp>
         <p:nvCxnSpPr>
-          <p:cNvPr id="24" name="af-tau-to-mapping-connector-01"/>
+          <p:cNvPr id="24" name="af-tau-to-mapping-connector-01" descr="{&quot;arrow_spec_sha256&quot;:&quot;33f6262b8e70635ec86353616d887f9de74d8a4b1bbaa2086a181b9ce9bf3ca8&quot;,&quot;autofigure_element_id&quot;:&quot;tau-to-mapping&quot;}"/>
           <p:cNvCxnSpPr>
             <a:stCxn id="14" idx="0"/>
             <a:endCxn id="19" idx="0"/>
@@ -4162,6 +4169,7 @@
             <a:solidFill>
               <a:srgbClr val="7F7F7F"/>
             </a:solidFill>
+            <a:miter/>
             <a:tailEnd type="triangle" w="sm" len="sm"/>
           </a:ln>
           <a:effectLst/>
@@ -4183,7 +4191,7 @@
       </p:cxnSp>
       <p:sp>
         <p:nvSpPr>
-          <p:cNvPr id="25" name="af-legend-sem-rect-01"/>
+          <p:cNvPr id="25" name="af-legend-sem-rect-01" descr="{&quot;autofigure_element_id&quot;:&quot;legend-sem&quot;}"/>
           <p:cNvSpPr/>
           <p:nvPr/>
         </p:nvSpPr>
@@ -4229,7 +4237,7 @@
       </p:sp>
       <p:sp>
         <p:nvSpPr>
-          <p:cNvPr id="26" name="af-legend-sem-short-text-01"/>
+          <p:cNvPr id="26" name="af-legend-sem-short-text-01" descr="{&quot;autofigure_element_id&quot;:&quot;legend-sem-short&quot;}"/>
           <p:cNvSpPr txBox="1"/>
           <p:nvPr/>
         </p:nvSpPr>
@@ -4246,7 +4254,7 @@
         </p:spPr>
         <p:txBody>
           <a:bodyPr wrap="none" anchor="t" lIns="0" rIns="0" tIns="0" bIns="0">
-            <a:spAutoFit/>
+            <a:noAutofit/>
           </a:bodyPr>
           <a:lstStyle/>
           <a:p>
@@ -4265,7 +4273,7 @@
       </p:sp>
       <p:sp>
         <p:nvSpPr>
-          <p:cNvPr id="27" name="af-legend-sem-long-text-01"/>
+          <p:cNvPr id="27" name="af-legend-sem-long-text-01" descr="{&quot;autofigure_element_id&quot;:&quot;legend-sem-long&quot;}"/>
           <p:cNvSpPr txBox="1"/>
           <p:nvPr/>
         </p:nvSpPr>
@@ -4282,7 +4290,7 @@
         </p:spPr>
         <p:txBody>
           <a:bodyPr wrap="none" anchor="t" lIns="0" rIns="0" tIns="0" bIns="0">
-            <a:spAutoFit/>
+            <a:noAutofit/>
           </a:bodyPr>
           <a:lstStyle/>
           <a:p>
@@ -4301,7 +4309,7 @@
       </p:sp>
       <p:sp>
         <p:nvSpPr>
-          <p:cNvPr id="28" name="af-legend-dyn-rect-01"/>
+          <p:cNvPr id="28" name="af-legend-dyn-rect-01" descr="{&quot;autofigure_element_id&quot;:&quot;legend-dyn&quot;}"/>
           <p:cNvSpPr/>
           <p:nvPr/>
         </p:nvSpPr>
@@ -4347,7 +4355,7 @@
       </p:sp>
       <p:sp>
         <p:nvSpPr>
-          <p:cNvPr id="29" name="af-legend-dyn-short-text-01"/>
+          <p:cNvPr id="29" name="af-legend-dyn-short-text-01" descr="{&quot;autofigure_element_id&quot;:&quot;legend-dyn-short&quot;}"/>
           <p:cNvSpPr txBox="1"/>
           <p:nvPr/>
         </p:nvSpPr>
@@ -4364,7 +4372,7 @@
         </p:spPr>
         <p:txBody>
           <a:bodyPr wrap="none" anchor="t" lIns="0" rIns="0" tIns="0" bIns="0">
-            <a:spAutoFit/>
+            <a:noAutofit/>
           </a:bodyPr>
           <a:lstStyle/>
           <a:p>
@@ -4383,7 +4391,7 @@
       </p:sp>
       <p:sp>
         <p:nvSpPr>
-          <p:cNvPr id="30" name="af-legend-dyn-long-text-01"/>
+          <p:cNvPr id="30" name="af-legend-dyn-long-text-01" descr="{&quot;autofigure_element_id&quot;:&quot;legend-dyn-long&quot;}"/>
           <p:cNvSpPr txBox="1"/>
           <p:nvPr/>
         </p:nvSpPr>
@@ -4400,7 +4408,7 @@
         </p:spPr>
         <p:txBody>
           <a:bodyPr wrap="none" anchor="t" lIns="0" rIns="0" tIns="0" bIns="0">
-            <a:spAutoFit/>
+            <a:noAutofit/>
           </a:bodyPr>
           <a:lstStyle/>
           <a:p>
@@ -4419,7 +4427,7 @@
       </p:sp>
       <p:sp>
         <p:nvSpPr>
-          <p:cNvPr id="31" name="af-joint-title-text-01"/>
+          <p:cNvPr id="31" name="af-joint-title-text-01" descr="{&quot;autofigure_element_id&quot;:&quot;joint-title&quot;}"/>
           <p:cNvSpPr txBox="1"/>
           <p:nvPr/>
         </p:nvSpPr>
@@ -4436,7 +4444,7 @@
         </p:spPr>
         <p:txBody>
           <a:bodyPr wrap="none" anchor="t" lIns="0" rIns="0" tIns="0" bIns="0">
-            <a:spAutoFit/>
+            <a:noAutofit/>
           </a:bodyPr>
           <a:lstStyle/>
           <a:p>
@@ -4455,7 +4463,7 @@
       </p:sp>
       <p:sp>
         <p:nvSpPr>
-          <p:cNvPr id="32" name="af-allocator-box-rect-01"/>
+          <p:cNvPr id="32" name="af-allocator-box-rect-01" descr="{&quot;autofigure_element_id&quot;:&quot;allocator-box&quot;}"/>
           <p:cNvSpPr/>
           <p:nvPr/>
         </p:nvSpPr>
@@ -4474,6 +4482,7 @@
             <a:solidFill>
               <a:srgbClr val="4776CC"/>
             </a:solidFill>
+            <a:miter/>
           </a:ln>
           <a:effectLst/>
         </p:spPr>
@@ -4501,7 +4510,7 @@
       </p:sp>
       <p:sp>
         <p:nvSpPr>
-          <p:cNvPr id="33" name="af-allocator-label-text-01"/>
+          <p:cNvPr id="33" name="af-allocator-label-text-01" descr="{&quot;autofigure_element_id&quot;:&quot;allocator-label&quot;}"/>
           <p:cNvSpPr txBox="1"/>
           <p:nvPr/>
         </p:nvSpPr>
@@ -4518,7 +4527,7 @@
         </p:spPr>
         <p:txBody>
           <a:bodyPr wrap="none" anchor="t" lIns="0" rIns="0" tIns="0" bIns="0">
-            <a:spAutoFit/>
+            <a:noAutofit/>
           </a:bodyPr>
           <a:lstStyle/>
           <a:p>
@@ -4537,7 +4546,7 @@
       </p:sp>
       <p:sp>
         <p:nvSpPr>
-          <p:cNvPr id="34" name="af-allocator-funnel-freeform-01"/>
+          <p:cNvPr id="34" name="af-allocator-funnel-freeform-01" descr="{&quot;autofigure_element_id&quot;:&quot;allocator-funnel&quot;}"/>
           <p:cNvSpPr/>
           <p:nvPr/>
         </p:nvSpPr>
@@ -4594,114 +4603,61 @@
           <a:p/>
         </p:txBody>
       </p:sp>
-      <p:grpSp>
-        <p:nvGrpSpPr>
-          <p:cNvPr id="37" name="af-tau-to-allocator-arrow-group-01"/>
-          <p:cNvGrpSpPr/>
-          <p:nvPr/>
-        </p:nvGrpSpPr>
-        <p:grpSpPr>
-          <a:xfrm>
-            <a:off x="0" y="0"/>
-            <a:ext cx="13611225" cy="5972175"/>
-            <a:chOff x="0" y="0"/>
-            <a:chExt cx="13611225" cy="5972175"/>
-          </a:xfrm>
-        </p:grpSpPr>
-        <p:cxnSp>
-          <p:nvCxnSpPr>
-            <p:cNvPr id="35" name="af-tau-to-allocator-connector-01"/>
-            <p:cNvCxnSpPr>
-              <a:stCxn id="14" idx="0"/>
-              <a:endCxn id="32" idx="0"/>
-            </p:cNvCxnSpPr>
-            <p:nvPr/>
-          </p:nvCxnSpPr>
-          <p:spPr>
-            <a:xfrm>
-              <a:off x="6286500" y="762000"/>
-              <a:ext cx="0" cy="447675"/>
-            </a:xfrm>
-            <a:prstGeom prst="line">
-              <a:avLst/>
-            </a:prstGeom>
-            <a:ln w="28575">
-              <a:solidFill>
-                <a:srgbClr val="4776CC"/>
-              </a:solidFill>
-            </a:ln>
-            <a:effectLst/>
-          </p:spPr>
-          <p:style>
-            <a:lnRef idx="2">
-              <a:schemeClr val="accent1"/>
-            </a:lnRef>
-            <a:fillRef idx="0">
-              <a:schemeClr val="accent1"/>
-            </a:fillRef>
-            <a:effectRef idx="1">
-              <a:schemeClr val="accent1"/>
-            </a:effectRef>
-            <a:fontRef idx="minor">
-              <a:schemeClr val="tx1"/>
-            </a:fontRef>
-          </p:style>
-        </p:cxnSp>
-        <p:sp>
-          <p:nvSpPr>
-            <p:cNvPr id="36" name="af-tau-to-allocator-arrowhead-fallback-01"/>
-            <p:cNvSpPr/>
-            <p:nvPr/>
-          </p:nvSpPr>
-          <p:spPr>
-            <a:xfrm>
-              <a:off x="6234112" y="1123950"/>
-              <a:ext cx="104775" cy="95250"/>
-            </a:xfrm>
-            <a:custGeom>
-              <a:avLst/>
-              <a:gdLst/>
-              <a:ahLst/>
-              <a:cxnLst/>
-              <a:rect l="0" t="0" r="0" b="0"/>
-              <a:pathLst>
-                <a:path w="104775" h="95250">
-                  <a:moveTo>
-                    <a:pt x="104775" y="0"/>
-                  </a:moveTo>
-                  <a:lnTo>
-                    <a:pt x="52388" y="95250"/>
-                  </a:lnTo>
-                  <a:lnTo>
-                    <a:pt x="0" y="0"/>
-                  </a:lnTo>
-                  <a:close/>
-                </a:path>
-              </a:pathLst>
-            </a:custGeom>
+      <p:cxnSp>
+        <p:nvCxnSpPr>
+          <p:cNvPr id="35" name="af-tau-to-allocator-connector-01" descr="{&quot;arrow_spec_sha256&quot;:&quot;d8c4063c82e8d9a3ade452a78b6f955ac9341a0939856ec54367e9fa98b620ea&quot;,&quot;autofigure_element_id&quot;:&quot;tau-to-allocator&quot;}"/>
+          <p:cNvCxnSpPr>
+            <a:stCxn id="14" idx="0"/>
+            <a:endCxn id="32" idx="0"/>
+          </p:cNvCxnSpPr>
+          <p:nvPr/>
+        </p:nvCxnSpPr>
+        <p:spPr>
+          <a:xfrm>
+            <a:off x="6286500" y="762000"/>
+            <a:ext cx="0" cy="447675"/>
+          </a:xfrm>
+          <a:prstGeom prst="line">
+            <a:avLst/>
+          </a:prstGeom>
+          <a:ln w="28575">
             <a:solidFill>
-              <a:srgbClr val="3567B7"/>
+              <a:srgbClr val="4776CC"/>
             </a:solidFill>
-            <a:ln>
-              <a:noFill/>
-            </a:ln>
-          </p:spPr>
-        </p:sp>
-      </p:grpSp>
-      <p:sp>
-        <p:nvSpPr>
-          <p:cNvPr id="38" name="af-mllm-encoder-rect-01"/>
+            <a:miter/>
+            <a:tailEnd type="triangle" w="med" len="med"/>
+          </a:ln>
+          <a:effectLst/>
+        </p:spPr>
+        <p:style>
+          <a:lnRef idx="2">
+            <a:schemeClr val="accent1"/>
+          </a:lnRef>
+          <a:fillRef idx="0">
+            <a:schemeClr val="accent1"/>
+          </a:fillRef>
+          <a:effectRef idx="1">
+            <a:schemeClr val="accent1"/>
+          </a:effectRef>
+          <a:fontRef idx="minor">
+            <a:schemeClr val="tx1"/>
+          </a:fontRef>
+        </p:style>
+      </p:cxnSp>
+      <p:sp>
+        <p:nvSpPr>
+          <p:cNvPr id="36" name="af-mllm-encoder-rect-01" descr="{&quot;autofigure_element_id&quot;:&quot;mllm-encoder&quot;}"/>
           <p:cNvSpPr/>
           <p:nvPr/>
         </p:nvSpPr>
         <p:spPr>
           <a:xfrm>
-            <a:off x="1790700" y="2314575"/>
-            <a:ext cx="1181100" cy="1066800"/>
+            <a:off x="1781175" y="2305050"/>
+            <a:ext cx="1181100" cy="742950"/>
           </a:xfrm>
           <a:prstGeom prst="roundRect">
             <a:avLst>
-              <a:gd name="adj" fmla="val 12500"/>
+              <a:gd name="adj" fmla="val 16666"/>
             </a:avLst>
           </a:prstGeom>
           <a:solidFill>
@@ -4736,7 +4692,7 @@
       </p:sp>
       <p:sp>
         <p:nvSpPr>
-          <p:cNvPr id="39" name="af-mllm-line1-text-01"/>
+          <p:cNvPr id="37" name="af-mllm-line1-text-01" descr="{&quot;autofigure_element_id&quot;:&quot;mllm-line1&quot;}"/>
           <p:cNvSpPr txBox="1"/>
           <p:nvPr/>
         </p:nvSpPr>
@@ -4753,7 +4709,7 @@
         </p:spPr>
         <p:txBody>
           <a:bodyPr wrap="none" anchor="t" lIns="0" rIns="0" tIns="0" bIns="0">
-            <a:spAutoFit/>
+            <a:noAutofit/>
           </a:bodyPr>
           <a:lstStyle/>
           <a:p>
@@ -4772,14 +4728,14 @@
       </p:sp>
       <p:sp>
         <p:nvSpPr>
-          <p:cNvPr id="40" name="af-mllm-line2-text-01"/>
+          <p:cNvPr id="38" name="af-mllm-line2-text-01" descr="{&quot;autofigure_element_id&quot;:&quot;mllm-line2&quot;}"/>
           <p:cNvSpPr txBox="1"/>
           <p:nvPr/>
         </p:nvSpPr>
         <p:spPr>
           <a:xfrm>
-            <a:off x="1865805" y="2705576"/>
-            <a:ext cx="1030891" cy="440531"/>
+            <a:off x="1866900" y="2705576"/>
+            <a:ext cx="1028700" cy="275749"/>
           </a:xfrm>
           <a:prstGeom prst="rect">
             <a:avLst/>
@@ -4789,7 +4745,7 @@
         </p:spPr>
         <p:txBody>
           <a:bodyPr wrap="none" anchor="t" lIns="0" rIns="0" tIns="0" bIns="0">
-            <a:spAutoFit/>
+            <a:noAutofit/>
           </a:bodyPr>
           <a:lstStyle/>
           <a:p>
@@ -4808,18 +4764,18 @@
       </p:sp>
       <p:sp>
         <p:nvSpPr>
-          <p:cNvPr id="41" name="af-wm-encoder-rect-01"/>
+          <p:cNvPr id="39" name="af-wm-encoder-rect-01" descr="{&quot;autofigure_element_id&quot;:&quot;wm-encoder&quot;}"/>
           <p:cNvSpPr/>
           <p:nvPr/>
         </p:nvSpPr>
         <p:spPr>
           <a:xfrm>
             <a:off x="1790700" y="3819525"/>
-            <a:ext cx="1181100" cy="828675"/>
+            <a:ext cx="1190625" cy="742950"/>
           </a:xfrm>
           <a:prstGeom prst="roundRect">
             <a:avLst>
-              <a:gd name="adj" fmla="val 16091"/>
+              <a:gd name="adj" fmla="val 16666"/>
             </a:avLst>
           </a:prstGeom>
           <a:solidFill>
@@ -4854,7 +4810,7 @@
       </p:sp>
       <p:sp>
         <p:nvSpPr>
-          <p:cNvPr id="42" name="af-wm-line1-text-01"/>
+          <p:cNvPr id="40" name="af-wm-line1-text-01" descr="{&quot;autofigure_element_id&quot;:&quot;wm-line1&quot;}"/>
           <p:cNvSpPr txBox="1"/>
           <p:nvPr/>
         </p:nvSpPr>
@@ -4871,7 +4827,7 @@
         </p:spPr>
         <p:txBody>
           <a:bodyPr wrap="none" anchor="t" lIns="0" rIns="0" tIns="0" bIns="0">
-            <a:spAutoFit/>
+            <a:noAutofit/>
           </a:bodyPr>
           <a:lstStyle/>
           <a:p>
@@ -4890,14 +4846,14 @@
       </p:sp>
       <p:sp>
         <p:nvSpPr>
-          <p:cNvPr id="43" name="af-wm-line2-text-01"/>
+          <p:cNvPr id="41" name="af-wm-line2-text-01" descr="{&quot;autofigure_element_id&quot;:&quot;wm-line2&quot;}"/>
           <p:cNvSpPr txBox="1"/>
           <p:nvPr/>
         </p:nvSpPr>
         <p:spPr>
           <a:xfrm>
             <a:off x="1865805" y="4229576"/>
-            <a:ext cx="1030891" cy="351949"/>
+            <a:ext cx="1030891" cy="266224"/>
           </a:xfrm>
           <a:prstGeom prst="rect">
             <a:avLst/>
@@ -4907,7 +4863,7 @@
         </p:spPr>
         <p:txBody>
           <a:bodyPr wrap="none" anchor="t" lIns="0" rIns="0" tIns="0" bIns="0">
-            <a:spAutoFit/>
+            <a:noAutofit/>
           </a:bodyPr>
           <a:lstStyle/>
           <a:p>
@@ -4926,7 +4882,7 @@
       </p:sp>
       <p:pic>
         <p:nvPicPr>
-          <p:cNvPr id="44" name="af-atomic-observation-atomic-raster-01" descr="image.png"/>
+          <p:cNvPr id="42" name="af-atomic-observation-atomic-raster-01" descr="{&quot;autofigure_element_id&quot;:&quot;atomic:observation&quot;}"/>
           <p:cNvPicPr>
             <a:picLocks noChangeAspect="1"/>
           </p:cNvPicPr>
@@ -4954,7 +4910,7 @@
       </p:pic>
       <p:sp>
         <p:nvSpPr>
-          <p:cNvPr id="45" name="af-observation-ellipsis-text-01"/>
+          <p:cNvPr id="43" name="af-observation-ellipsis-text-01" descr="{&quot;autofigure_element_id&quot;:&quot;observation-ellipsis&quot;}"/>
           <p:cNvSpPr txBox="1"/>
           <p:nvPr/>
         </p:nvSpPr>
@@ -4971,7 +4927,7 @@
         </p:spPr>
         <p:txBody>
           <a:bodyPr wrap="none" anchor="t" lIns="0" rIns="0" tIns="0" bIns="0">
-            <a:spAutoFit/>
+            <a:noAutofit/>
           </a:bodyPr>
           <a:lstStyle/>
           <a:p>
@@ -4990,7 +4946,7 @@
       </p:sp>
       <p:sp>
         <p:nvSpPr>
-          <p:cNvPr id="46" name="af-observation-label-text-01"/>
+          <p:cNvPr id="44" name="af-observation-label-text-01" descr="{&quot;autofigure_element_id&quot;:&quot;observation-label&quot;}"/>
           <p:cNvSpPr txBox="1"/>
           <p:nvPr/>
         </p:nvSpPr>
@@ -5007,7 +4963,7 @@
         </p:spPr>
         <p:txBody>
           <a:bodyPr wrap="none" anchor="t" lIns="0" rIns="0" tIns="0" bIns="0">
-            <a:spAutoFit/>
+            <a:noAutofit/>
           </a:bodyPr>
           <a:lstStyle/>
           <a:p>
@@ -5026,10 +4982,10 @@
       </p:sp>
       <p:cxnSp>
         <p:nvCxnSpPr>
-          <p:cNvPr id="47" name="af-observation-to-mllm-connector-01"/>
+          <p:cNvPr id="45" name="af-observation-to-mllm-connector-01" descr="{&quot;arrow_spec_sha256&quot;:&quot;3cab0196d88eae7a9574892caff0477e76eab7638867f5c01b82892d8e2985fb&quot;,&quot;autofigure_element_id&quot;:&quot;observation-to-mllm&quot;}"/>
           <p:cNvCxnSpPr>
-            <a:stCxn id="44" idx="0"/>
-            <a:endCxn id="38" idx="0"/>
+            <a:stCxn id="42" idx="0"/>
+            <a:endCxn id="36" idx="0"/>
           </p:cNvCxnSpPr>
           <p:nvPr/>
         </p:nvCxnSpPr>
@@ -5045,6 +5001,7 @@
             <a:solidFill>
               <a:srgbClr val="F27622"/>
             </a:solidFill>
+            <a:miter/>
             <a:tailEnd type="triangle" w="sm" len="sm"/>
           </a:ln>
           <a:effectLst/>
@@ -5066,10 +5023,10 @@
       </p:cxnSp>
       <p:cxnSp>
         <p:nvCxnSpPr>
-          <p:cNvPr id="48" name="af-observation-to-wm-connector-01"/>
+          <p:cNvPr id="46" name="af-observation-to-wm-connector-01" descr="{&quot;arrow_spec_sha256&quot;:&quot;1d0f12eeb40e0a9811ab7ed54c4f80700c2b2a1969d6ebdd788ab71ed95eed10&quot;,&quot;autofigure_element_id&quot;:&quot;observation-to-wm&quot;}"/>
           <p:cNvCxnSpPr>
-            <a:stCxn id="44" idx="0"/>
-            <a:endCxn id="41" idx="0"/>
+            <a:stCxn id="42" idx="0"/>
+            <a:endCxn id="39" idx="0"/>
           </p:cNvCxnSpPr>
           <p:nvPr/>
         </p:nvCxnSpPr>
@@ -5085,6 +5042,7 @@
             <a:solidFill>
               <a:srgbClr val="3567B7"/>
             </a:solidFill>
+            <a:miter/>
             <a:tailEnd type="triangle" w="sm" len="sm"/>
           </a:ln>
           <a:effectLst/>
@@ -5106,10 +5064,10 @@
       </p:cxnSp>
       <p:cxnSp>
         <p:nvCxnSpPr>
-          <p:cNvPr id="49" name="af-mllm-to-ev-connector-01"/>
+          <p:cNvPr id="47" name="af-mllm-to-ev-connector-01" descr="{&quot;arrow_spec_sha256&quot;:&quot;c5231c3d364c2a3a757f4df602ea7f81e74ded078934016208a5db594f840fb8&quot;,&quot;autofigure_element_id&quot;:&quot;mllm-to-ev&quot;}"/>
           <p:cNvCxnSpPr>
-            <a:stCxn id="38" idx="0"/>
-            <a:endCxn id="51" idx="0"/>
+            <a:stCxn id="36" idx="0"/>
+            <a:endCxn id="49" idx="0"/>
           </p:cNvCxnSpPr>
           <p:nvPr/>
         </p:nvCxnSpPr>
@@ -5125,6 +5083,7 @@
             <a:solidFill>
               <a:srgbClr val="F27622"/>
             </a:solidFill>
+            <a:miter/>
             <a:tailEnd type="triangle" w="sm" len="sm"/>
           </a:ln>
           <a:effectLst/>
@@ -5146,10 +5105,10 @@
       </p:cxnSp>
       <p:cxnSp>
         <p:nvCxnSpPr>
-          <p:cNvPr id="50" name="af-wm-to-st-connector-01"/>
+          <p:cNvPr id="48" name="af-wm-to-st-connector-01" descr="{&quot;arrow_spec_sha256&quot;:&quot;6ee36a15d74b8141f18e430f2effd81d2e629dffe0badd2fb924d38745dd2e47&quot;,&quot;autofigure_element_id&quot;:&quot;wm-to-st&quot;}"/>
           <p:cNvCxnSpPr>
-            <a:stCxn id="41" idx="0"/>
-            <a:endCxn id="56" idx="0"/>
+            <a:stCxn id="39" idx="0"/>
+            <a:endCxn id="54" idx="0"/>
           </p:cNvCxnSpPr>
           <p:nvPr/>
         </p:nvCxnSpPr>
@@ -5165,6 +5124,7 @@
             <a:solidFill>
               <a:srgbClr val="3567B7"/>
             </a:solidFill>
+            <a:miter/>
             <a:tailEnd type="triangle" w="sm" len="sm"/>
           </a:ln>
           <a:effectLst/>
@@ -5186,7 +5146,7 @@
       </p:cxnSp>
       <p:sp>
         <p:nvSpPr>
-          <p:cNvPr id="51" name="af-ev-box-rect-01"/>
+          <p:cNvPr id="49" name="af-ev-box-rect-01" descr="{&quot;autofigure_element_id&quot;:&quot;ev-box&quot;}"/>
           <p:cNvSpPr/>
           <p:nvPr/>
         </p:nvSpPr>
@@ -5205,6 +5165,7 @@
             <a:solidFill>
               <a:srgbClr val="19365F"/>
             </a:solidFill>
+            <a:miter/>
           </a:ln>
           <a:effectLst/>
         </p:spPr>
@@ -5234,7 +5195,7 @@
         <mc:Choice xmlns:a14="http://schemas.microsoft.com/office/drawing/2010/main" Requires="a14">
           <p:sp>
             <p:nvSpPr>
-              <p:cNvPr id="52" name="math:003" descr="AI_AUTOFIGURE_NATIVE_MATH_V1:eyJjb250ZW50X3J1bnMiOlt7ImNhbm9uaWNhbF9sYXRleCI6ImVfe3Z9IiwiZm9ybXVsYV9pZCI6IkVRMDAzIiwia2luZCI6Im1hdGgiLCJsYXRleF9zaGEyNTYiOiIyZWZkODE5ZTcyNTZiNTkwYTRmNTFkMTVkMWIzZjdmYzgwODhhMGE0Mzc3ZWQyZTExMWUwZmQ5NDAyNjc5YzhkIiwibW9kZSI6ImlubGluZSIsIm9tbWxfc2hhMjU2IjoiNjM1YTA1MmI0MjllMzI3Y2I5ZmZlNTI5MTI0YjJjOGRlMDBlYzlkMmRiZDI3ZjE1MWJmZTM4ZmIwZjhjNzc3MiIsInNlbWFudGljX29tbWxfcHJvZmlsZSI6Im9mZmljZS1tYXRoLXNlbWFudGljLXYyIiwic2VtYW50aWNfb21tbF9zaGEyNTYiOiIyZjRlZjJkZTQ0NjBlNTJiN2I5NjdlNWFiZjRmZGI5OTQ5NzIzYWVlNmNkMzc5MTlkNGNlOTY2NmVmZTAyN2E4In1dLCJmb3JtdWxhcyI6W3siY2Fub25pY2FsX2xhdGV4IjoiZV97dn0iLCJmb3JtdWxhX2lkIjoiRVEwMDMiLCJsYXRleF9zaGEyNTYiOiIyZWZkODE5ZTcyNTZiNTkwYTRmNTFkMTVkMWIzZjdmYzgwODhhMGE0Mzc3ZWQyZTExMWUwZmQ5NDAyNjc5YzhkIiwibW9kZSI6ImlubGluZSIsIm9tbWxfc2hhMjU2IjoiNjM1YTA1MmI0MjllMzI3Y2I5ZmZlNTI5MTI0YjJjOGRlMDBlYzlkMmRiZDI3ZjE1MWJmZTM4ZmIwZjhjNzc3MiIsInNlbWFudGljX29tbWxfcHJvZmlsZSI6Im9mZmljZS1tYXRoLXNlbWFudGljLXYyIiwic2VtYW50aWNfb21tbF9zaGEyNTYiOiIyZjRlZjJkZTQ0NjBlNTJiN2I5NjdlNWFiZjRmZGI5OTQ5NzIzYWVlNmNkMzc5MTlkNGNlOTY2NmVmZTAyN2E4In1dLCJraW5kIjoibmF0aXZlX29mZmljZV9tYXRoIiwicGxhY2Vob2xkZXJfbmFtZSI6Im1hdGg6MDAzIiwic2NoZW1hX3ZlcnNpb24iOiIxLjAifQ=="/>
+              <p:cNvPr id="50" name="math:003" descr="AI_AUTOFIGURE_NATIVE_MATH_V1:eyJjb250ZW50X3J1bnMiOlt7ImNhbm9uaWNhbF9sYXRleCI6ImVfe3Z9IiwiZm9ybXVsYV9pZCI6IkVRMDAzIiwia2luZCI6Im1hdGgiLCJsYXRleF9zaGEyNTYiOiIyZWZkODE5ZTcyNTZiNTkwYTRmNTFkMTVkMWIzZjdmYzgwODhhMGE0Mzc3ZWQyZTExMWUwZmQ5NDAyNjc5YzhkIiwibW9kZSI6ImlubGluZSIsIm9tbWxfc2hhMjU2IjoiNjM1YTA1MmI0MjllMzI3Y2I5ZmZlNTI5MTI0YjJjOGRlMDBlYzlkMmRiZDI3ZjE1MWJmZTM4ZmIwZjhjNzc3MiIsInNlbWFudGljX29tbWxfcHJvZmlsZSI6Im9mZmljZS1tYXRoLXNlbWFudGljLXYyIiwic2VtYW50aWNfb21tbF9zaGEyNTYiOiIyZjRlZjJkZTQ0NjBlNTJiN2I5NjdlNWFiZjRmZGI5OTQ5NzIzYWVlNmNkMzc5MTlkNGNlOTY2NmVmZTAyN2E4In1dLCJmb3JtdWxhcyI6W3siY2Fub25pY2FsX2xhdGV4IjoiZV97dn0iLCJmb3JtdWxhX2lkIjoiRVEwMDMiLCJsYXRleF9zaGEyNTYiOiIyZWZkODE5ZTcyNTZiNTkwYTRmNTFkMTVkMWIzZjdmYzgwODhhMGE0Mzc3ZWQyZTExMWUwZmQ5NDAyNjc5YzhkIiwibW9kZSI6ImlubGluZSIsIm9tbWxfc2hhMjU2IjoiNjM1YTA1MmI0MjllMzI3Y2I5ZmZlNTI5MTI0YjJjOGRlMDBlYzlkMmRiZDI3ZjE1MWJmZTM4ZmIwZjhjNzc3MiIsInNlbWFudGljX29tbWxfcHJvZmlsZSI6Im9mZmljZS1tYXRoLXNlbWFudGljLXYyIiwic2VtYW50aWNfb21tbF9zaGEyNTYiOiIyZjRlZjJkZTQ0NjBlNTJiN2I5NjdlNWFiZjRmZGI5OTQ5NzIzYWVlNmNkMzc5MTlkNGNlOTY2NmVmZTAyN2E4In1dLCJraW5kIjoibmF0aXZlX29mZmljZV9tYXRoIiwicGxhY2Vob2xkZXJfbmFtZSI6Im1hdGg6MDAzIiwic2NoZW1hX3ZlcnNpb24iOiIxLjAifQ=="/>
               <p:cNvSpPr txBox="1"/>
               <p:nvPr/>
             </p:nvSpPr>
@@ -5251,7 +5212,7 @@
             </p:spPr>
             <p:txBody>
               <a:bodyPr wrap="none" anchor="t" lIns="0" rIns="0" tIns="0" bIns="0">
-                <a:spAutoFit/>
+                <a:noAutofit/>
               </a:bodyPr>
               <a:lstStyle/>
               <a:p>
@@ -5297,7 +5258,7 @@
         <mc:Fallback>
           <p:sp>
             <p:nvSpPr>
-              <p:cNvPr id="52" name="math:003" descr="AI_AUTOFIGURE_MATH_FALLBACK_ONLY_V1:eyJjb250ZW50X3J1bnMiOlt7ImNhbm9uaWNhbF9sYXRleCI6ImVfe3Z9IiwiZm9ybXVsYV9pZCI6IkVRMDAzIiwia2luZCI6Im1hdGgiLCJsYXRleF9zaGEyNTYiOiIyZWZkODE5ZTcyNTZiNTkwYTRmNTFkMTVkMWIzZjdmYzgwODhhMGE0Mzc3ZWQyZTExMWUwZmQ5NDAyNjc5YzhkIiwibW9kZSI6ImlubGluZSIsIm9tbWxfc2hhMjU2IjoiNjM1YTA1MmI0MjllMzI3Y2I5ZmZlNTI5MTI0YjJjOGRlMDBlYzlkMmRiZDI3ZjE1MWJmZTM4ZmIwZjhjNzc3MiIsInNlbWFudGljX29tbWxfcHJvZmlsZSI6Im9mZmljZS1tYXRoLXNlbWFudGljLXYyIiwic2VtYW50aWNfb21tbF9zaGEyNTYiOiIyZjRlZjJkZTQ0NjBlNTJiN2I5NjdlNWFiZjRmZGI5OTQ5NzIzYWVlNmNkMzc5MTlkNGNlOTY2NmVmZTAyN2E4In1dLCJmb3JtdWxhcyI6W3siY2Fub25pY2FsX2xhdGV4IjoiZV97dn0iLCJmb3JtdWxhX2lkIjoiRVEwMDMiLCJsYXRleF9zaGEyNTYiOiIyZWZkODE5ZTcyNTZiNTkwYTRmNTFkMTVkMWIzZjdmYzgwODhhMGE0Mzc3ZWQyZTExMWUwZmQ5NDAyNjc5YzhkIiwibW9kZSI6ImlubGluZSIsIm9tbWxfc2hhMjU2IjoiNjM1YTA1MmI0MjllMzI3Y2I5ZmZlNTI5MTI0YjJjOGRlMDBlYzlkMmRiZDI3ZjE1MWJmZTM4ZmIwZjhjNzc3MiIsInNlbWFudGljX29tbWxfcHJvZmlsZSI6Im9mZmljZS1tYXRoLXNlbWFudGljLXYyIiwic2VtYW50aWNfb21tbF9zaGEyNTYiOiIyZjRlZjJkZTQ0NjBlNTJiN2I5NjdlNWFiZjRmZGI5OTQ5NzIzYWVlNmNkMzc5MTlkNGNlOTY2NmVmZTAyN2E4In1dLCJraW5kIjoibmF0aXZlX29mZmljZV9tYXRoIiwicGxhY2Vob2xkZXJfbmFtZSI6Im1hdGg6MDAzIiwic2NoZW1hX3ZlcnNpb24iOiIxLjAifQ=="/>
+              <p:cNvPr id="50" name="math:003" descr="AI_AUTOFIGURE_MATH_FALLBACK_ONLY_V1:eyJjb250ZW50X3J1bnMiOlt7ImNhbm9uaWNhbF9sYXRleCI6ImVfe3Z9IiwiZm9ybXVsYV9pZCI6IkVRMDAzIiwia2luZCI6Im1hdGgiLCJsYXRleF9zaGEyNTYiOiIyZWZkODE5ZTcyNTZiNTkwYTRmNTFkMTVkMWIzZjdmYzgwODhhMGE0Mzc3ZWQyZTExMWUwZmQ5NDAyNjc5YzhkIiwibW9kZSI6ImlubGluZSIsIm9tbWxfc2hhMjU2IjoiNjM1YTA1MmI0MjllMzI3Y2I5ZmZlNTI5MTI0YjJjOGRlMDBlYzlkMmRiZDI3ZjE1MWJmZTM4ZmIwZjhjNzc3MiIsInNlbWFudGljX29tbWxfcHJvZmlsZSI6Im9mZmljZS1tYXRoLXNlbWFudGljLXYyIiwic2VtYW50aWNfb21tbF9zaGEyNTYiOiIyZjRlZjJkZTQ0NjBlNTJiN2I5NjdlNWFiZjRmZGI5OTQ5NzIzYWVlNmNkMzc5MTlkNGNlOTY2NmVmZTAyN2E4In1dLCJmb3JtdWxhcyI6W3siY2Fub25pY2FsX2xhdGV4IjoiZV97dn0iLCJmb3JtdWxhX2lkIjoiRVEwMDMiLCJsYXRleF9zaGEyNTYiOiIyZWZkODE5ZTcyNTZiNTkwYTRmNTFkMTVkMWIzZjdmYzgwODhhMGE0Mzc3ZWQyZTExMWUwZmQ5NDAyNjc5YzhkIiwibW9kZSI6ImlubGluZSIsIm9tbWxfc2hhMjU2IjoiNjM1YTA1MmI0MjllMzI3Y2I5ZmZlNTI5MTI0YjJjOGRlMDBlYzlkMmRiZDI3ZjE1MWJmZTM4ZmIwZjhjNzc3MiIsInNlbWFudGljX29tbWxfcHJvZmlsZSI6Im9mZmljZS1tYXRoLXNlbWFudGljLXYyIiwic2VtYW50aWNfb21tbF9zaGEyNTYiOiIyZjRlZjJkZTQ0NjBlNTJiN2I5NjdlNWFiZjRmZGI5OTQ5NzIzYWVlNmNkMzc5MTlkNGNlOTY2NmVmZTAyN2E4In1dLCJraW5kIjoibmF0aXZlX29mZmljZV9tYXRoIiwicGxhY2Vob2xkZXJfbmFtZSI6Im1hdGg6MDAzIiwic2NoZW1hX3ZlcnNpb24iOiIxLjAifQ=="/>
               <p:cNvSpPr txBox="1"/>
               <p:nvPr/>
             </p:nvSpPr>
@@ -5314,7 +5275,7 @@
             </p:spPr>
             <p:txBody>
               <a:bodyPr wrap="none" anchor="t" lIns="0" rIns="0" tIns="0" bIns="0">
-                <a:spAutoFit/>
+                <a:noAutofit/>
               </a:bodyPr>
               <a:lstStyle/>
               <a:p>
@@ -5339,7 +5300,7 @@
       </mc:AlternateContent>
       <p:sp>
         <p:nvSpPr>
-          <p:cNvPr id="53" name="af-ev-node-1-ellipse-01"/>
+          <p:cNvPr id="51" name="af-ev-node-1-ellipse-01" descr="{&quot;autofigure_element_id&quot;:&quot;ev-node-1&quot;}"/>
           <p:cNvSpPr/>
           <p:nvPr/>
         </p:nvSpPr>
@@ -5383,7 +5344,7 @@
       </p:sp>
       <p:sp>
         <p:nvSpPr>
-          <p:cNvPr id="54" name="af-ev-node-2-ellipse-01"/>
+          <p:cNvPr id="52" name="af-ev-node-2-ellipse-01" descr="{&quot;autofigure_element_id&quot;:&quot;ev-node-2&quot;}"/>
           <p:cNvSpPr/>
           <p:nvPr/>
         </p:nvSpPr>
@@ -5427,7 +5388,7 @@
       </p:sp>
       <p:sp>
         <p:nvSpPr>
-          <p:cNvPr id="55" name="af-ev-node-3-ellipse-01"/>
+          <p:cNvPr id="53" name="af-ev-node-3-ellipse-01" descr="{&quot;autofigure_element_id&quot;:&quot;ev-node-3&quot;}"/>
           <p:cNvSpPr/>
           <p:nvPr/>
         </p:nvSpPr>
@@ -5471,7 +5432,7 @@
       </p:sp>
       <p:sp>
         <p:nvSpPr>
-          <p:cNvPr id="56" name="af-st-box-rect-01"/>
+          <p:cNvPr id="54" name="af-st-box-rect-01" descr="{&quot;autofigure_element_id&quot;:&quot;st-box&quot;}"/>
           <p:cNvSpPr/>
           <p:nvPr/>
         </p:nvSpPr>
@@ -5490,6 +5451,7 @@
             <a:solidFill>
               <a:srgbClr val="19365F"/>
             </a:solidFill>
+            <a:miter/>
           </a:ln>
           <a:effectLst/>
         </p:spPr>
@@ -5519,7 +5481,7 @@
         <mc:Choice xmlns:a14="http://schemas.microsoft.com/office/drawing/2010/main" Requires="a14">
           <p:sp>
             <p:nvSpPr>
-              <p:cNvPr id="57" name="math:004" descr="AI_AUTOFIGURE_NATIVE_MATH_V1:eyJjb250ZW50X3J1bnMiOlt7ImNhbm9uaWNhbF9sYXRleCI6InNfe3R9IiwiZm9ybXVsYV9pZCI6IkVRMDA0Iiwia2luZCI6Im1hdGgiLCJsYXRleF9zaGEyNTYiOiIwMDE3ZmQ1YjUxNmM2YTU5ZjUxZTM3MWJlZTBmMjQ5ODI4ZWIzZDhlOTNhYTc0NzM3Y2M4ZWYxNTY5YzM1ZTIyIiwibW9kZSI6ImlubGluZSIsIm9tbWxfc2hhMjU2IjoiMWJhZjE4MDU3OTA4OTQ0ZmQxZmFiYzgwMzBhN2RiMWFmMjY1MmUxOGQ1Y2U3YjlhMGJiMWU2MWMzYTU3ZTg3NyIsInNlbWFudGljX29tbWxfcHJvZmlsZSI6Im9mZmljZS1tYXRoLXNlbWFudGljLXYyIiwic2VtYW50aWNfb21tbF9zaGEyNTYiOiI2OWRhZTcyNmY2OTRlNTQ3MDhmYjQ2Y2IxZjRjYTM5NzhhODhjOWIxZmJmMDc2ZjE2MWIxODVlZThhNDdiYzBkIn1dLCJmb3JtdWxhcyI6W3siY2Fub25pY2FsX2xhdGV4Ijoic197dH0iLCJmb3JtdWxhX2lkIjoiRVEwMDQiLCJsYXRleF9zaGEyNTYiOiIwMDE3ZmQ1YjUxNmM2YTU5ZjUxZTM3MWJlZTBmMjQ5ODI4ZWIzZDhlOTNhYTc0NzM3Y2M4ZWYxNTY5YzM1ZTIyIiwibW9kZSI6ImlubGluZSIsIm9tbWxfc2hhMjU2IjoiMWJhZjE4MDU3OTA4OTQ0ZmQxZmFiYzgwMzBhN2RiMWFmMjY1MmUxOGQ1Y2U3YjlhMGJiMWU2MWMzYTU3ZTg3NyIsInNlbWFudGljX29tbWxfcHJvZmlsZSI6Im9mZmljZS1tYXRoLXNlbWFudGljLXYyIiwic2VtYW50aWNfb21tbF9zaGEyNTYiOiI2OWRhZTcyNmY2OTRlNTQ3MDhmYjQ2Y2IxZjRjYTM5NzhhODhjOWIxZmJmMDc2ZjE2MWIxODVlZThhNDdiYzBkIn1dLCJraW5kIjoibmF0aXZlX29mZmljZV9tYXRoIiwicGxhY2Vob2xkZXJfbmFtZSI6Im1hdGg6MDA0Iiwic2NoZW1hX3ZlcnNpb24iOiIxLjAifQ=="/>
+              <p:cNvPr id="55" name="math:004" descr="AI_AUTOFIGURE_NATIVE_MATH_V1:eyJjb250ZW50X3J1bnMiOlt7ImNhbm9uaWNhbF9sYXRleCI6InNfe3R9IiwiZm9ybXVsYV9pZCI6IkVRMDA0Iiwia2luZCI6Im1hdGgiLCJsYXRleF9zaGEyNTYiOiIwMDE3ZmQ1YjUxNmM2YTU5ZjUxZTM3MWJlZTBmMjQ5ODI4ZWIzZDhlOTNhYTc0NzM3Y2M4ZWYxNTY5YzM1ZTIyIiwibW9kZSI6ImlubGluZSIsIm9tbWxfc2hhMjU2IjoiMWJhZjE4MDU3OTA4OTQ0ZmQxZmFiYzgwMzBhN2RiMWFmMjY1MmUxOGQ1Y2U3YjlhMGJiMWU2MWMzYTU3ZTg3NyIsInNlbWFudGljX29tbWxfcHJvZmlsZSI6Im9mZmljZS1tYXRoLXNlbWFudGljLXYyIiwic2VtYW50aWNfb21tbF9zaGEyNTYiOiI2OWRhZTcyNmY2OTRlNTQ3MDhmYjQ2Y2IxZjRjYTM5NzhhODhjOWIxZmJmMDc2ZjE2MWIxODVlZThhNDdiYzBkIn1dLCJmb3JtdWxhcyI6W3siY2Fub25pY2FsX2xhdGV4Ijoic197dH0iLCJmb3JtdWxhX2lkIjoiRVEwMDQiLCJsYXRleF9zaGEyNTYiOiIwMDE3ZmQ1YjUxNmM2YTU5ZjUxZTM3MWJlZTBmMjQ5ODI4ZWIzZDhlOTNhYTc0NzM3Y2M4ZWYxNTY5YzM1ZTIyIiwibW9kZSI6ImlubGluZSIsIm9tbWxfc2hhMjU2IjoiMWJhZjE4MDU3OTA4OTQ0ZmQxZmFiYzgwMzBhN2RiMWFmMjY1MmUxOGQ1Y2U3YjlhMGJiMWU2MWMzYTU3ZTg3NyIsInNlbWFudGljX29tbWxfcHJvZmlsZSI6Im9mZmljZS1tYXRoLXNlbWFudGljLXYyIiwic2VtYW50aWNfb21tbF9zaGEyNTYiOiI2OWRhZTcyNmY2OTRlNTQ3MDhmYjQ2Y2IxZjRjYTM5NzhhODhjOWIxZmJmMDc2ZjE2MWIxODVlZThhNDdiYzBkIn1dLCJraW5kIjoibmF0aXZlX29mZmljZV9tYXRoIiwicGxhY2Vob2xkZXJfbmFtZSI6Im1hdGg6MDA0Iiwic2NoZW1hX3ZlcnNpb24iOiIxLjAifQ=="/>
               <p:cNvSpPr txBox="1"/>
               <p:nvPr/>
             </p:nvSpPr>
@@ -5536,7 +5498,7 @@
             </p:spPr>
             <p:txBody>
               <a:bodyPr wrap="none" anchor="t" lIns="0" rIns="0" tIns="0" bIns="0">
-                <a:spAutoFit/>
+                <a:noAutofit/>
               </a:bodyPr>
               <a:lstStyle/>
               <a:p>
@@ -5582,7 +5544,7 @@
         <mc:Fallback>
           <p:sp>
             <p:nvSpPr>
-              <p:cNvPr id="57" name="math:004" descr="AI_AUTOFIGURE_MATH_FALLBACK_ONLY_V1:eyJjb250ZW50X3J1bnMiOlt7ImNhbm9uaWNhbF9sYXRleCI6InNfe3R9IiwiZm9ybXVsYV9pZCI6IkVRMDA0Iiwia2luZCI6Im1hdGgiLCJsYXRleF9zaGEyNTYiOiIwMDE3ZmQ1YjUxNmM2YTU5ZjUxZTM3MWJlZTBmMjQ5ODI4ZWIzZDhlOTNhYTc0NzM3Y2M4ZWYxNTY5YzM1ZTIyIiwibW9kZSI6ImlubGluZSIsIm9tbWxfc2hhMjU2IjoiMWJhZjE4MDU3OTA4OTQ0ZmQxZmFiYzgwMzBhN2RiMWFmMjY1MmUxOGQ1Y2U3YjlhMGJiMWU2MWMzYTU3ZTg3NyIsInNlbWFudGljX29tbWxfcHJvZmlsZSI6Im9mZmljZS1tYXRoLXNlbWFudGljLXYyIiwic2VtYW50aWNfb21tbF9zaGEyNTYiOiI2OWRhZTcyNmY2OTRlNTQ3MDhmYjQ2Y2IxZjRjYTM5NzhhODhjOWIxZmJmMDc2ZjE2MWIxODVlZThhNDdiYzBkIn1dLCJmb3JtdWxhcyI6W3siY2Fub25pY2FsX2xhdGV4Ijoic197dH0iLCJmb3JtdWxhX2lkIjoiRVEwMDQiLCJsYXRleF9zaGEyNTYiOiIwMDE3ZmQ1YjUxNmM2YTU5ZjUxZTM3MWJlZTBmMjQ5ODI4ZWIzZDhlOTNhYTc0NzM3Y2M4ZWYxNTY5YzM1ZTIyIiwibW9kZSI6ImlubGluZSIsIm9tbWxfc2hhMjU2IjoiMWJhZjE4MDU3OTA4OTQ0ZmQxZmFiYzgwMzBhN2RiMWFmMjY1MmUxOGQ1Y2U3YjlhMGJiMWU2MWMzYTU3ZTg3NyIsInNlbWFudGljX29tbWxfcHJvZmlsZSI6Im9mZmljZS1tYXRoLXNlbWFudGljLXYyIiwic2VtYW50aWNfb21tbF9zaGEyNTYiOiI2OWRhZTcyNmY2OTRlNTQ3MDhmYjQ2Y2IxZjRjYTM5NzhhODhjOWIxZmJmMDc2ZjE2MWIxODVlZThhNDdiYzBkIn1dLCJraW5kIjoibmF0aXZlX29mZmljZV9tYXRoIiwicGxhY2Vob2xkZXJfbmFtZSI6Im1hdGg6MDA0Iiwic2NoZW1hX3ZlcnNpb24iOiIxLjAifQ=="/>
+              <p:cNvPr id="55" name="math:004" descr="AI_AUTOFIGURE_MATH_FALLBACK_ONLY_V1:eyJjb250ZW50X3J1bnMiOlt7ImNhbm9uaWNhbF9sYXRleCI6InNfe3R9IiwiZm9ybXVsYV9pZCI6IkVRMDA0Iiwia2luZCI6Im1hdGgiLCJsYXRleF9zaGEyNTYiOiIwMDE3ZmQ1YjUxNmM2YTU5ZjUxZTM3MWJlZTBmMjQ5ODI4ZWIzZDhlOTNhYTc0NzM3Y2M4ZWYxNTY5YzM1ZTIyIiwibW9kZSI6ImlubGluZSIsIm9tbWxfc2hhMjU2IjoiMWJhZjE4MDU3OTA4OTQ0ZmQxZmFiYzgwMzBhN2RiMWFmMjY1MmUxOGQ1Y2U3YjlhMGJiMWU2MWMzYTU3ZTg3NyIsInNlbWFudGljX29tbWxfcHJvZmlsZSI6Im9mZmljZS1tYXRoLXNlbWFudGljLXYyIiwic2VtYW50aWNfb21tbF9zaGEyNTYiOiI2OWRhZTcyNmY2OTRlNTQ3MDhmYjQ2Y2IxZjRjYTM5NzhhODhjOWIxZmJmMDc2ZjE2MWIxODVlZThhNDdiYzBkIn1dLCJmb3JtdWxhcyI6W3siY2Fub25pY2FsX2xhdGV4Ijoic197dH0iLCJmb3JtdWxhX2lkIjoiRVEwMDQiLCJsYXRleF9zaGEyNTYiOiIwMDE3ZmQ1YjUxNmM2YTU5ZjUxZTM3MWJlZTBmMjQ5ODI4ZWIzZDhlOTNhYTc0NzM3Y2M4ZWYxNTY5YzM1ZTIyIiwibW9kZSI6ImlubGluZSIsIm9tbWxfc2hhMjU2IjoiMWJhZjE4MDU3OTA4OTQ0ZmQxZmFiYzgwMzBhN2RiMWFmMjY1MmUxOGQ1Y2U3YjlhMGJiMWU2MWMzYTU3ZTg3NyIsInNlbWFudGljX29tbWxfcHJvZmlsZSI6Im9mZmljZS1tYXRoLXNlbWFudGljLXYyIiwic2VtYW50aWNfb21tbF9zaGEyNTYiOiI2OWRhZTcyNmY2OTRlNTQ3MDhmYjQ2Y2IxZjRjYTM5NzhhODhjOWIxZmJmMDc2ZjE2MWIxODVlZThhNDdiYzBkIn1dLCJraW5kIjoibmF0aXZlX29mZmljZV9tYXRoIiwicGxhY2Vob2xkZXJfbmFtZSI6Im1hdGg6MDA0Iiwic2NoZW1hX3ZlcnNpb24iOiIxLjAifQ=="/>
               <p:cNvSpPr txBox="1"/>
               <p:nvPr/>
             </p:nvSpPr>
@@ -5599,7 +5561,7 @@
             </p:spPr>
             <p:txBody>
               <a:bodyPr wrap="none" anchor="t" lIns="0" rIns="0" tIns="0" bIns="0">
-                <a:spAutoFit/>
+                <a:noAutofit/>
               </a:bodyPr>
               <a:lstStyle/>
               <a:p>
@@ -5624,7 +5586,7 @@
       </mc:AlternateContent>
       <p:sp>
         <p:nvSpPr>
-          <p:cNvPr id="58" name="af-st-node-1-ellipse-01"/>
+          <p:cNvPr id="56" name="af-st-node-1-ellipse-01" descr="{&quot;autofigure_element_id&quot;:&quot;st-node-1&quot;}"/>
           <p:cNvSpPr/>
           <p:nvPr/>
         </p:nvSpPr>
@@ -5668,7 +5630,7 @@
       </p:sp>
       <p:sp>
         <p:nvSpPr>
-          <p:cNvPr id="59" name="af-st-node-2-ellipse-01"/>
+          <p:cNvPr id="57" name="af-st-node-2-ellipse-01" descr="{&quot;autofigure_element_id&quot;:&quot;st-node-2&quot;}"/>
           <p:cNvSpPr/>
           <p:nvPr/>
         </p:nvSpPr>
@@ -5712,7 +5674,7 @@
       </p:sp>
       <p:sp>
         <p:nvSpPr>
-          <p:cNvPr id="60" name="af-st-node-3-ellipse-01"/>
+          <p:cNvPr id="58" name="af-st-node-3-ellipse-01" descr="{&quot;autofigure_element_id&quot;:&quot;st-node-3&quot;}"/>
           <p:cNvSpPr/>
           <p:nvPr/>
         </p:nvSpPr>
@@ -5756,10 +5718,10 @@
       </p:sp>
       <p:cxnSp>
         <p:nvCxnSpPr>
-          <p:cNvPr id="61" name="af-ev-to-joint-connector-01"/>
+          <p:cNvPr id="59" name="af-ev-to-joint-connector-01" descr="{&quot;arrow_spec_sha256&quot;:&quot;2743c5155df451b92bded2a93e94e1343ea81788ad369fd3f1fd6364872ea2d3&quot;,&quot;autofigure_element_id&quot;:&quot;ev-to-joint&quot;}"/>
           <p:cNvCxnSpPr>
-            <a:stCxn id="51" idx="0"/>
-            <a:endCxn id="63" idx="0"/>
+            <a:stCxn id="49" idx="0"/>
+            <a:endCxn id="61" idx="0"/>
           </p:cNvCxnSpPr>
           <p:nvPr/>
         </p:nvCxnSpPr>
@@ -5775,6 +5737,7 @@
             <a:solidFill>
               <a:srgbClr val="F27622"/>
             </a:solidFill>
+            <a:miter/>
             <a:tailEnd type="triangle" w="sm" len="sm"/>
           </a:ln>
           <a:effectLst/>
@@ -5796,10 +5759,10 @@
       </p:cxnSp>
       <p:cxnSp>
         <p:nvCxnSpPr>
-          <p:cNvPr id="62" name="af-st-to-joint-connector-01"/>
+          <p:cNvPr id="60" name="af-st-to-joint-connector-01" descr="{&quot;arrow_spec_sha256&quot;:&quot;4f9a34eeaa8a625ad80fbbaae38c5b411ea19815ad1981009e623f09ee549901&quot;,&quot;autofigure_element_id&quot;:&quot;st-to-joint&quot;}"/>
           <p:cNvCxnSpPr>
-            <a:stCxn id="56" idx="0"/>
-            <a:endCxn id="63" idx="0"/>
+            <a:stCxn id="54" idx="0"/>
+            <a:endCxn id="61" idx="0"/>
           </p:cNvCxnSpPr>
           <p:nvPr/>
         </p:nvCxnSpPr>
@@ -5815,6 +5778,7 @@
             <a:solidFill>
               <a:srgbClr val="3567B7"/>
             </a:solidFill>
+            <a:miter/>
             <a:tailEnd type="triangle" w="sm" len="sm"/>
           </a:ln>
           <a:effectLst/>
@@ -5836,7 +5800,7 @@
       </p:cxnSp>
       <p:sp>
         <p:nvSpPr>
-          <p:cNvPr id="63" name="af-joint-core-rect-01"/>
+          <p:cNvPr id="61" name="af-joint-core-rect-01" descr="{&quot;autofigure_element_id&quot;:&quot;joint-core&quot;}"/>
           <p:cNvSpPr/>
           <p:nvPr/>
         </p:nvSpPr>
@@ -5857,6 +5821,7 @@
             <a:solidFill>
               <a:srgbClr val="19365F"/>
             </a:solidFill>
+            <a:miter/>
           </a:ln>
           <a:effectLst/>
         </p:spPr>
@@ -5884,7 +5849,7 @@
       </p:sp>
       <p:sp>
         <p:nvSpPr>
-          <p:cNvPr id="64" name="af-task-1-box-rect-01"/>
+          <p:cNvPr id="62" name="af-task-1-box-rect-01" descr="{&quot;autofigure_element_id&quot;:&quot;task-1-box&quot;}"/>
           <p:cNvSpPr/>
           <p:nvPr/>
         </p:nvSpPr>
@@ -5928,7 +5893,7 @@
       </p:sp>
       <p:sp>
         <p:nvSpPr>
-          <p:cNvPr id="65" name="af-task-1-label-text-01"/>
+          <p:cNvPr id="63" name="af-task-1-label-text-01" descr="{&quot;autofigure_element_id&quot;:&quot;task-1-label&quot;}"/>
           <p:cNvSpPr txBox="1"/>
           <p:nvPr/>
         </p:nvSpPr>
@@ -5945,7 +5910,7 @@
         </p:spPr>
         <p:txBody>
           <a:bodyPr wrap="none" anchor="t" lIns="0" rIns="0" tIns="0" bIns="0">
-            <a:spAutoFit/>
+            <a:noAutofit/>
           </a:bodyPr>
           <a:lstStyle/>
           <a:p>
@@ -5964,7 +5929,7 @@
       </p:sp>
       <p:sp>
         <p:nvSpPr>
-          <p:cNvPr id="66" name="af-task-2-box-rect-01"/>
+          <p:cNvPr id="64" name="af-task-2-box-rect-01" descr="{&quot;autofigure_element_id&quot;:&quot;task-2-box&quot;}"/>
           <p:cNvSpPr/>
           <p:nvPr/>
         </p:nvSpPr>
@@ -6008,7 +5973,7 @@
       </p:sp>
       <p:sp>
         <p:nvSpPr>
-          <p:cNvPr id="67" name="af-task-2-label-text-01"/>
+          <p:cNvPr id="65" name="af-task-2-label-text-01" descr="{&quot;autofigure_element_id&quot;:&quot;task-2-label&quot;}"/>
           <p:cNvSpPr txBox="1"/>
           <p:nvPr/>
         </p:nvSpPr>
@@ -6025,7 +5990,7 @@
         </p:spPr>
         <p:txBody>
           <a:bodyPr wrap="none" anchor="t" lIns="0" rIns="0" tIns="0" bIns="0">
-            <a:spAutoFit/>
+            <a:noAutofit/>
           </a:bodyPr>
           <a:lstStyle/>
           <a:p>
@@ -6044,14 +6009,14 @@
       </p:sp>
       <p:sp>
         <p:nvSpPr>
-          <p:cNvPr id="68" name="af-expert-1-box-rect-01"/>
+          <p:cNvPr id="66" name="af-expert-1-box-rect-01" descr="{&quot;autofigure_element_id&quot;:&quot;expert-1-box&quot;}"/>
           <p:cNvSpPr/>
           <p:nvPr/>
         </p:nvSpPr>
         <p:spPr>
           <a:xfrm>
             <a:off x="5257800" y="2181225"/>
-            <a:ext cx="485775" cy="2247900"/>
+            <a:ext cx="495300" cy="2257425"/>
           </a:xfrm>
           <a:prstGeom prst="rect">
             <a:avLst/>
@@ -6063,6 +6028,7 @@
             <a:solidFill>
               <a:srgbClr val="8C8C8C"/>
             </a:solidFill>
+            <a:miter/>
           </a:ln>
           <a:effectLst/>
         </p:spPr>
@@ -6090,7 +6056,7 @@
       </p:sp>
       <p:sp>
         <p:nvSpPr>
-          <p:cNvPr id="69" name="af-expert-1-sem-rect-01"/>
+          <p:cNvPr id="67" name="af-expert-1-sem-rect-01" descr="{&quot;autofigure_element_id&quot;:&quot;expert-1-sem&quot;}"/>
           <p:cNvSpPr/>
           <p:nvPr/>
         </p:nvSpPr>
@@ -6136,14 +6102,14 @@
       </p:sp>
       <p:sp>
         <p:nvSpPr>
-          <p:cNvPr id="70" name="af-expert-1-dyn-rect-01"/>
+          <p:cNvPr id="68" name="af-expert-1-dyn-rect-01" descr="{&quot;autofigure_element_id&quot;:&quot;expert-1-dyn&quot;}"/>
           <p:cNvSpPr/>
           <p:nvPr/>
         </p:nvSpPr>
         <p:spPr>
           <a:xfrm>
             <a:off x="5324475" y="3390900"/>
-            <a:ext cx="352425" cy="952500"/>
+            <a:ext cx="352425" cy="942975"/>
           </a:xfrm>
           <a:prstGeom prst="roundRect">
             <a:avLst>
@@ -6182,14 +6148,14 @@
       </p:sp>
       <p:sp>
         <p:nvSpPr>
-          <p:cNvPr id="71" name="af-expert-1-sem-label-text-01"/>
+          <p:cNvPr id="69" name="af-expert-1-sem-label-text-01" descr="{&quot;autofigure_element_id&quot;:&quot;expert-1-sem-label&quot;}"/>
           <p:cNvSpPr txBox="1"/>
           <p:nvPr/>
         </p:nvSpPr>
         <p:spPr>
-          <a:xfrm>
-            <a:off x="5362575" y="2520791"/>
-            <a:ext cx="285750" cy="345281"/>
+          <a:xfrm rot="5400000">
+            <a:off x="5110162" y="2595562"/>
+            <a:ext cx="781050" cy="390525"/>
           </a:xfrm>
           <a:prstGeom prst="rect">
             <a:avLst/>
@@ -6198,106 +6164,70 @@
           <a:effectLst/>
         </p:spPr>
         <p:txBody>
-          <a:bodyPr wrap="none" anchor="t" lIns="0" rIns="0" tIns="0" bIns="0">
-            <a:spAutoFit/>
+          <a:bodyPr wrap="none" anchor="ctr" lIns="0" rIns="0" tIns="0" bIns="0">
+            <a:noAutofit/>
           </a:bodyPr>
           <a:lstStyle/>
           <a:p>
             <a:pPr algn="ctr"/>
             <a:r>
-              <a:rPr sz="975">
+              <a:rPr sz="1350">
                 <a:solidFill>
                   <a:srgbClr val="000000"/>
                 </a:solidFill>
                 <a:latin typeface="Arial"/>
               </a:rPr>
-              <a:t>S</a:t>
+              <a:t>Sem</a:t>
             </a:r>
+          </a:p>
+        </p:txBody>
+      </p:sp>
+      <p:sp>
+        <p:nvSpPr>
+          <p:cNvPr id="70" name="af-expert-1-dyn-label-text-01" descr="{&quot;autofigure_element_id&quot;:&quot;expert-1-dyn-label&quot;}"/>
+          <p:cNvSpPr txBox="1"/>
+          <p:nvPr/>
+        </p:nvSpPr>
+        <p:spPr>
+          <a:xfrm rot="5400000">
+            <a:off x="5110162" y="3667125"/>
+            <a:ext cx="781050" cy="390525"/>
+          </a:xfrm>
+          <a:prstGeom prst="rect">
+            <a:avLst/>
+          </a:prstGeom>
+          <a:noFill/>
+          <a:effectLst/>
+        </p:spPr>
+        <p:txBody>
+          <a:bodyPr wrap="none" anchor="ctr" lIns="0" rIns="0" tIns="0" bIns="0">
+            <a:noAutofit/>
+          </a:bodyPr>
+          <a:lstStyle/>
+          <a:p>
+            <a:pPr algn="ctr"/>
             <a:r>
-              <a:rPr sz="975">
+              <a:rPr sz="1350">
                 <a:solidFill>
                   <a:srgbClr val="000000"/>
                 </a:solidFill>
                 <a:latin typeface="Arial"/>
               </a:rPr>
-              <a:t>e</a:t>
+              <a:t>Dyn</a:t>
             </a:r>
-            <a:r>
-              <a:rPr sz="975">
-                <a:solidFill>
-                  <a:srgbClr val="000000"/>
-                </a:solidFill>
-                <a:latin typeface="Arial"/>
-              </a:rPr>
-              <a:t>m</a:t>
-            </a:r>
-          </a:p>
-        </p:txBody>
-      </p:sp>
-      <p:sp>
-        <p:nvSpPr>
-          <p:cNvPr id="72" name="af-expert-1-dyn-label-text-01"/>
-          <p:cNvSpPr txBox="1"/>
-          <p:nvPr/>
-        </p:nvSpPr>
-        <p:spPr>
-          <a:xfrm>
-            <a:off x="5362575" y="3597116"/>
-            <a:ext cx="285750" cy="345281"/>
-          </a:xfrm>
-          <a:prstGeom prst="rect">
-            <a:avLst/>
-          </a:prstGeom>
-          <a:noFill/>
-          <a:effectLst/>
-        </p:spPr>
-        <p:txBody>
-          <a:bodyPr wrap="none" anchor="t" lIns="0" rIns="0" tIns="0" bIns="0">
-            <a:spAutoFit/>
-          </a:bodyPr>
-          <a:lstStyle/>
-          <a:p>
-            <a:pPr algn="ctr"/>
-            <a:r>
-              <a:rPr sz="975">
-                <a:solidFill>
-                  <a:srgbClr val="000000"/>
-                </a:solidFill>
-                <a:latin typeface="Arial"/>
-              </a:rPr>
-              <a:t>D</a:t>
-            </a:r>
-            <a:r>
-              <a:rPr sz="975">
-                <a:solidFill>
-                  <a:srgbClr val="000000"/>
-                </a:solidFill>
-                <a:latin typeface="Arial"/>
-              </a:rPr>
-              <a:t>y</a:t>
-            </a:r>
-            <a:r>
-              <a:rPr sz="975">
-                <a:solidFill>
-                  <a:srgbClr val="000000"/>
-                </a:solidFill>
-                <a:latin typeface="Arial"/>
-              </a:rPr>
-              <a:t>n</a:t>
-            </a:r>
-          </a:p>
-        </p:txBody>
-      </p:sp>
-      <p:sp>
-        <p:nvSpPr>
-          <p:cNvPr id="73" name="af-expert-2-box-rect-01"/>
+          </a:p>
+        </p:txBody>
+      </p:sp>
+      <p:sp>
+        <p:nvSpPr>
+          <p:cNvPr id="71" name="af-expert-2-box-rect-01" descr="{&quot;autofigure_element_id&quot;:&quot;expert-2-box&quot;}"/>
           <p:cNvSpPr/>
           <p:nvPr/>
         </p:nvSpPr>
         <p:spPr>
           <a:xfrm>
             <a:off x="5981700" y="2181225"/>
-            <a:ext cx="495300" cy="2247900"/>
+            <a:ext cx="495300" cy="2257425"/>
           </a:xfrm>
           <a:prstGeom prst="rect">
             <a:avLst/>
@@ -6309,6 +6239,7 @@
             <a:solidFill>
               <a:srgbClr val="8C8C8C"/>
             </a:solidFill>
+            <a:miter/>
           </a:ln>
           <a:effectLst/>
         </p:spPr>
@@ -6336,13 +6267,13 @@
       </p:sp>
       <p:sp>
         <p:nvSpPr>
-          <p:cNvPr id="74" name="af-expert-2-sem-rect-01"/>
+          <p:cNvPr id="72" name="af-expert-2-sem-rect-01" descr="{&quot;autofigure_element_id&quot;:&quot;expert-2-sem&quot;}"/>
           <p:cNvSpPr/>
           <p:nvPr/>
         </p:nvSpPr>
         <p:spPr>
           <a:xfrm>
-            <a:off x="6057900" y="2314575"/>
+            <a:off x="6048375" y="2314575"/>
             <a:ext cx="352425" cy="952500"/>
           </a:xfrm>
           <a:prstGeom prst="roundRect">
@@ -6382,14 +6313,14 @@
       </p:sp>
       <p:sp>
         <p:nvSpPr>
-          <p:cNvPr id="75" name="af-expert-2-dyn-rect-01"/>
+          <p:cNvPr id="73" name="af-expert-2-dyn-rect-01" descr="{&quot;autofigure_element_id&quot;:&quot;expert-2-dyn&quot;}"/>
           <p:cNvSpPr/>
           <p:nvPr/>
         </p:nvSpPr>
         <p:spPr>
           <a:xfrm>
-            <a:off x="6057900" y="3390900"/>
-            <a:ext cx="352425" cy="952500"/>
+            <a:off x="6048375" y="3390900"/>
+            <a:ext cx="352425" cy="942975"/>
           </a:xfrm>
           <a:prstGeom prst="roundRect">
             <a:avLst>
@@ -6428,14 +6359,14 @@
       </p:sp>
       <p:sp>
         <p:nvSpPr>
-          <p:cNvPr id="76" name="af-expert-2-sem-label-text-01"/>
+          <p:cNvPr id="74" name="af-expert-2-sem-label-text-01" descr="{&quot;autofigure_element_id&quot;:&quot;expert-2-sem-label&quot;}"/>
           <p:cNvSpPr txBox="1"/>
           <p:nvPr/>
         </p:nvSpPr>
         <p:spPr>
-          <a:xfrm>
-            <a:off x="6096000" y="2520791"/>
-            <a:ext cx="285750" cy="345281"/>
+          <a:xfrm rot="5400000">
+            <a:off x="5834062" y="2595562"/>
+            <a:ext cx="781050" cy="390525"/>
           </a:xfrm>
           <a:prstGeom prst="rect">
             <a:avLst/>
@@ -6444,106 +6375,70 @@
           <a:effectLst/>
         </p:spPr>
         <p:txBody>
-          <a:bodyPr wrap="none" anchor="t" lIns="0" rIns="0" tIns="0" bIns="0">
-            <a:spAutoFit/>
+          <a:bodyPr wrap="none" anchor="ctr" lIns="0" rIns="0" tIns="0" bIns="0">
+            <a:noAutofit/>
           </a:bodyPr>
           <a:lstStyle/>
           <a:p>
             <a:pPr algn="ctr"/>
             <a:r>
-              <a:rPr sz="975">
+              <a:rPr sz="1350">
                 <a:solidFill>
                   <a:srgbClr val="000000"/>
                 </a:solidFill>
                 <a:latin typeface="Arial"/>
               </a:rPr>
-              <a:t>S</a:t>
+              <a:t>Sem</a:t>
             </a:r>
+          </a:p>
+        </p:txBody>
+      </p:sp>
+      <p:sp>
+        <p:nvSpPr>
+          <p:cNvPr id="75" name="af-expert-2-dyn-label-text-01" descr="{&quot;autofigure_element_id&quot;:&quot;expert-2-dyn-label&quot;}"/>
+          <p:cNvSpPr txBox="1"/>
+          <p:nvPr/>
+        </p:nvSpPr>
+        <p:spPr>
+          <a:xfrm rot="5400000">
+            <a:off x="5834062" y="3667125"/>
+            <a:ext cx="781050" cy="390525"/>
+          </a:xfrm>
+          <a:prstGeom prst="rect">
+            <a:avLst/>
+          </a:prstGeom>
+          <a:noFill/>
+          <a:effectLst/>
+        </p:spPr>
+        <p:txBody>
+          <a:bodyPr wrap="none" anchor="ctr" lIns="0" rIns="0" tIns="0" bIns="0">
+            <a:noAutofit/>
+          </a:bodyPr>
+          <a:lstStyle/>
+          <a:p>
+            <a:pPr algn="ctr"/>
             <a:r>
-              <a:rPr sz="975">
+              <a:rPr sz="1350">
                 <a:solidFill>
                   <a:srgbClr val="000000"/>
                 </a:solidFill>
                 <a:latin typeface="Arial"/>
               </a:rPr>
-              <a:t>e</a:t>
+              <a:t>Dyn</a:t>
             </a:r>
-            <a:r>
-              <a:rPr sz="975">
-                <a:solidFill>
-                  <a:srgbClr val="000000"/>
-                </a:solidFill>
-                <a:latin typeface="Arial"/>
-              </a:rPr>
-              <a:t>m</a:t>
-            </a:r>
-          </a:p>
-        </p:txBody>
-      </p:sp>
-      <p:sp>
-        <p:nvSpPr>
-          <p:cNvPr id="77" name="af-expert-2-dyn-label-text-01"/>
-          <p:cNvSpPr txBox="1"/>
-          <p:nvPr/>
-        </p:nvSpPr>
-        <p:spPr>
-          <a:xfrm>
-            <a:off x="6096000" y="3597116"/>
-            <a:ext cx="285750" cy="345281"/>
-          </a:xfrm>
-          <a:prstGeom prst="rect">
-            <a:avLst/>
-          </a:prstGeom>
-          <a:noFill/>
-          <a:effectLst/>
-        </p:spPr>
-        <p:txBody>
-          <a:bodyPr wrap="none" anchor="t" lIns="0" rIns="0" tIns="0" bIns="0">
-            <a:spAutoFit/>
-          </a:bodyPr>
-          <a:lstStyle/>
-          <a:p>
-            <a:pPr algn="ctr"/>
-            <a:r>
-              <a:rPr sz="975">
-                <a:solidFill>
-                  <a:srgbClr val="000000"/>
-                </a:solidFill>
-                <a:latin typeface="Arial"/>
-              </a:rPr>
-              <a:t>D</a:t>
-            </a:r>
-            <a:r>
-              <a:rPr sz="975">
-                <a:solidFill>
-                  <a:srgbClr val="000000"/>
-                </a:solidFill>
-                <a:latin typeface="Arial"/>
-              </a:rPr>
-              <a:t>y</a:t>
-            </a:r>
-            <a:r>
-              <a:rPr sz="975">
-                <a:solidFill>
-                  <a:srgbClr val="000000"/>
-                </a:solidFill>
-                <a:latin typeface="Arial"/>
-              </a:rPr>
-              <a:t>n</a:t>
-            </a:r>
-          </a:p>
-        </p:txBody>
-      </p:sp>
-      <p:sp>
-        <p:nvSpPr>
-          <p:cNvPr id="78" name="af-expert-3-box-rect-01"/>
+          </a:p>
+        </p:txBody>
+      </p:sp>
+      <p:sp>
+        <p:nvSpPr>
+          <p:cNvPr id="76" name="af-expert-3-box-rect-01" descr="{&quot;autofigure_element_id&quot;:&quot;expert-3-box&quot;}"/>
           <p:cNvSpPr/>
           <p:nvPr/>
         </p:nvSpPr>
         <p:spPr>
           <a:xfrm>
-            <a:off x="6734175" y="2181225"/>
-            <a:ext cx="485775" cy="2247900"/>
+            <a:off x="6724650" y="2181225"/>
+            <a:ext cx="495300" cy="2257425"/>
           </a:xfrm>
           <a:prstGeom prst="rect">
             <a:avLst/>
@@ -6555,6 +6450,7 @@
             <a:solidFill>
               <a:srgbClr val="8C8C8C"/>
             </a:solidFill>
+            <a:miter/>
           </a:ln>
           <a:effectLst/>
         </p:spPr>
@@ -6582,13 +6478,13 @@
       </p:sp>
       <p:sp>
         <p:nvSpPr>
-          <p:cNvPr id="79" name="af-expert-3-sem-rect-01"/>
+          <p:cNvPr id="77" name="af-expert-3-sem-rect-01" descr="{&quot;autofigure_element_id&quot;:&quot;expert-3-sem&quot;}"/>
           <p:cNvSpPr/>
           <p:nvPr/>
         </p:nvSpPr>
         <p:spPr>
           <a:xfrm>
-            <a:off x="6800850" y="2314575"/>
+            <a:off x="6791325" y="2314575"/>
             <a:ext cx="352425" cy="952500"/>
           </a:xfrm>
           <a:prstGeom prst="roundRect">
@@ -6628,14 +6524,14 @@
       </p:sp>
       <p:sp>
         <p:nvSpPr>
-          <p:cNvPr id="80" name="af-expert-3-dyn-rect-01"/>
+          <p:cNvPr id="78" name="af-expert-3-dyn-rect-01" descr="{&quot;autofigure_element_id&quot;:&quot;expert-3-dyn&quot;}"/>
           <p:cNvSpPr/>
           <p:nvPr/>
         </p:nvSpPr>
         <p:spPr>
           <a:xfrm>
-            <a:off x="6800850" y="3390900"/>
-            <a:ext cx="352425" cy="952500"/>
+            <a:off x="6791325" y="3390900"/>
+            <a:ext cx="352425" cy="942975"/>
           </a:xfrm>
           <a:prstGeom prst="roundRect">
             <a:avLst>
@@ -6674,14 +6570,14 @@
       </p:sp>
       <p:sp>
         <p:nvSpPr>
-          <p:cNvPr id="81" name="af-expert-3-sem-label-text-01"/>
+          <p:cNvPr id="79" name="af-expert-3-sem-label-text-01" descr="{&quot;autofigure_element_id&quot;:&quot;expert-3-sem-label&quot;}"/>
           <p:cNvSpPr txBox="1"/>
           <p:nvPr/>
         </p:nvSpPr>
         <p:spPr>
-          <a:xfrm>
-            <a:off x="6838950" y="2520791"/>
-            <a:ext cx="285750" cy="345281"/>
+          <a:xfrm rot="5400000">
+            <a:off x="6577012" y="2595562"/>
+            <a:ext cx="781050" cy="390525"/>
           </a:xfrm>
           <a:prstGeom prst="rect">
             <a:avLst/>
@@ -6690,106 +6586,70 @@
           <a:effectLst/>
         </p:spPr>
         <p:txBody>
-          <a:bodyPr wrap="none" anchor="t" lIns="0" rIns="0" tIns="0" bIns="0">
-            <a:spAutoFit/>
+          <a:bodyPr wrap="none" anchor="ctr" lIns="0" rIns="0" tIns="0" bIns="0">
+            <a:noAutofit/>
           </a:bodyPr>
           <a:lstStyle/>
           <a:p>
             <a:pPr algn="ctr"/>
             <a:r>
-              <a:rPr sz="975">
+              <a:rPr sz="1350">
                 <a:solidFill>
                   <a:srgbClr val="000000"/>
                 </a:solidFill>
                 <a:latin typeface="Arial"/>
               </a:rPr>
-              <a:t>S</a:t>
+              <a:t>Sem</a:t>
             </a:r>
+          </a:p>
+        </p:txBody>
+      </p:sp>
+      <p:sp>
+        <p:nvSpPr>
+          <p:cNvPr id="80" name="af-expert-3-dyn-label-text-01" descr="{&quot;autofigure_element_id&quot;:&quot;expert-3-dyn-label&quot;}"/>
+          <p:cNvSpPr txBox="1"/>
+          <p:nvPr/>
+        </p:nvSpPr>
+        <p:spPr>
+          <a:xfrm rot="5400000">
+            <a:off x="6577012" y="3667125"/>
+            <a:ext cx="781050" cy="390525"/>
+          </a:xfrm>
+          <a:prstGeom prst="rect">
+            <a:avLst/>
+          </a:prstGeom>
+          <a:noFill/>
+          <a:effectLst/>
+        </p:spPr>
+        <p:txBody>
+          <a:bodyPr wrap="none" anchor="ctr" lIns="0" rIns="0" tIns="0" bIns="0">
+            <a:noAutofit/>
+          </a:bodyPr>
+          <a:lstStyle/>
+          <a:p>
+            <a:pPr algn="ctr"/>
             <a:r>
-              <a:rPr sz="975">
+              <a:rPr sz="1350">
                 <a:solidFill>
                   <a:srgbClr val="000000"/>
                 </a:solidFill>
                 <a:latin typeface="Arial"/>
               </a:rPr>
-              <a:t>e</a:t>
+              <a:t>Dyn</a:t>
             </a:r>
-            <a:r>
-              <a:rPr sz="975">
-                <a:solidFill>
-                  <a:srgbClr val="000000"/>
-                </a:solidFill>
-                <a:latin typeface="Arial"/>
-              </a:rPr>
-              <a:t>m</a:t>
-            </a:r>
-          </a:p>
-        </p:txBody>
-      </p:sp>
-      <p:sp>
-        <p:nvSpPr>
-          <p:cNvPr id="82" name="af-expert-3-dyn-label-text-01"/>
-          <p:cNvSpPr txBox="1"/>
-          <p:nvPr/>
-        </p:nvSpPr>
-        <p:spPr>
-          <a:xfrm>
-            <a:off x="6838950" y="3597116"/>
-            <a:ext cx="285750" cy="345281"/>
-          </a:xfrm>
-          <a:prstGeom prst="rect">
-            <a:avLst/>
-          </a:prstGeom>
-          <a:noFill/>
-          <a:effectLst/>
-        </p:spPr>
-        <p:txBody>
-          <a:bodyPr wrap="none" anchor="t" lIns="0" rIns="0" tIns="0" bIns="0">
-            <a:spAutoFit/>
-          </a:bodyPr>
-          <a:lstStyle/>
-          <a:p>
-            <a:pPr algn="ctr"/>
-            <a:r>
-              <a:rPr sz="975">
-                <a:solidFill>
-                  <a:srgbClr val="000000"/>
-                </a:solidFill>
-                <a:latin typeface="Arial"/>
-              </a:rPr>
-              <a:t>D</a:t>
-            </a:r>
-            <a:r>
-              <a:rPr sz="975">
-                <a:solidFill>
-                  <a:srgbClr val="000000"/>
-                </a:solidFill>
-                <a:latin typeface="Arial"/>
-              </a:rPr>
-              <a:t>y</a:t>
-            </a:r>
-            <a:r>
-              <a:rPr sz="975">
-                <a:solidFill>
-                  <a:srgbClr val="000000"/>
-                </a:solidFill>
-                <a:latin typeface="Arial"/>
-              </a:rPr>
-              <a:t>n</a:t>
-            </a:r>
-          </a:p>
-        </p:txBody>
-      </p:sp>
-      <p:sp>
-        <p:nvSpPr>
-          <p:cNvPr id="83" name="af-expert-4-box-rect-01"/>
+          </a:p>
+        </p:txBody>
+      </p:sp>
+      <p:sp>
+        <p:nvSpPr>
+          <p:cNvPr id="81" name="af-expert-4-box-rect-01" descr="{&quot;autofigure_element_id&quot;:&quot;expert-4-box&quot;}"/>
           <p:cNvSpPr/>
           <p:nvPr/>
         </p:nvSpPr>
         <p:spPr>
           <a:xfrm>
-            <a:off x="7610475" y="2181225"/>
-            <a:ext cx="495300" cy="2247900"/>
+            <a:off x="7629525" y="2181225"/>
+            <a:ext cx="495300" cy="2257425"/>
           </a:xfrm>
           <a:prstGeom prst="rect">
             <a:avLst/>
@@ -6801,6 +6661,7 @@
             <a:solidFill>
               <a:srgbClr val="8C8C8C"/>
             </a:solidFill>
+            <a:miter/>
           </a:ln>
           <a:effectLst/>
         </p:spPr>
@@ -6828,13 +6689,13 @@
       </p:sp>
       <p:sp>
         <p:nvSpPr>
-          <p:cNvPr id="84" name="af-expert-4-sem-rect-01"/>
+          <p:cNvPr id="82" name="af-expert-4-sem-rect-01" descr="{&quot;autofigure_element_id&quot;:&quot;expert-4-sem&quot;}"/>
           <p:cNvSpPr/>
           <p:nvPr/>
         </p:nvSpPr>
         <p:spPr>
           <a:xfrm>
-            <a:off x="7686675" y="2314575"/>
+            <a:off x="7696200" y="2314575"/>
             <a:ext cx="352425" cy="952500"/>
           </a:xfrm>
           <a:prstGeom prst="roundRect">
@@ -6874,14 +6735,14 @@
       </p:sp>
       <p:sp>
         <p:nvSpPr>
-          <p:cNvPr id="85" name="af-expert-4-dyn-rect-01"/>
+          <p:cNvPr id="83" name="af-expert-4-dyn-rect-01" descr="{&quot;autofigure_element_id&quot;:&quot;expert-4-dyn&quot;}"/>
           <p:cNvSpPr/>
           <p:nvPr/>
         </p:nvSpPr>
         <p:spPr>
           <a:xfrm>
-            <a:off x="7686675" y="3390900"/>
-            <a:ext cx="352425" cy="952500"/>
+            <a:off x="7696200" y="3390900"/>
+            <a:ext cx="352425" cy="942975"/>
           </a:xfrm>
           <a:prstGeom prst="roundRect">
             <a:avLst>
@@ -6920,14 +6781,14 @@
       </p:sp>
       <p:sp>
         <p:nvSpPr>
-          <p:cNvPr id="86" name="af-expert-4-sem-label-text-01"/>
+          <p:cNvPr id="84" name="af-expert-4-sem-label-text-01" descr="{&quot;autofigure_element_id&quot;:&quot;expert-4-sem-label&quot;}"/>
           <p:cNvSpPr txBox="1"/>
           <p:nvPr/>
         </p:nvSpPr>
         <p:spPr>
-          <a:xfrm>
-            <a:off x="7715250" y="2520791"/>
-            <a:ext cx="285750" cy="345281"/>
+          <a:xfrm rot="5400000">
+            <a:off x="7481888" y="2595562"/>
+            <a:ext cx="781050" cy="390525"/>
           </a:xfrm>
           <a:prstGeom prst="rect">
             <a:avLst/>
@@ -6936,99 +6797,63 @@
           <a:effectLst/>
         </p:spPr>
         <p:txBody>
-          <a:bodyPr wrap="none" anchor="t" lIns="0" rIns="0" tIns="0" bIns="0">
-            <a:spAutoFit/>
+          <a:bodyPr wrap="none" anchor="ctr" lIns="0" rIns="0" tIns="0" bIns="0">
+            <a:noAutofit/>
           </a:bodyPr>
           <a:lstStyle/>
           <a:p>
             <a:pPr algn="ctr"/>
             <a:r>
-              <a:rPr sz="975">
+              <a:rPr sz="1350">
                 <a:solidFill>
                   <a:srgbClr val="000000"/>
                 </a:solidFill>
                 <a:latin typeface="Arial"/>
               </a:rPr>
-              <a:t>S</a:t>
+              <a:t>Sem</a:t>
             </a:r>
+          </a:p>
+        </p:txBody>
+      </p:sp>
+      <p:sp>
+        <p:nvSpPr>
+          <p:cNvPr id="85" name="af-expert-4-dyn-label-text-01" descr="{&quot;autofigure_element_id&quot;:&quot;expert-4-dyn-label&quot;}"/>
+          <p:cNvSpPr txBox="1"/>
+          <p:nvPr/>
+        </p:nvSpPr>
+        <p:spPr>
+          <a:xfrm rot="5400000">
+            <a:off x="7481888" y="3667125"/>
+            <a:ext cx="781050" cy="390525"/>
+          </a:xfrm>
+          <a:prstGeom prst="rect">
+            <a:avLst/>
+          </a:prstGeom>
+          <a:noFill/>
+          <a:effectLst/>
+        </p:spPr>
+        <p:txBody>
+          <a:bodyPr wrap="none" anchor="ctr" lIns="0" rIns="0" tIns="0" bIns="0">
+            <a:noAutofit/>
+          </a:bodyPr>
+          <a:lstStyle/>
+          <a:p>
+            <a:pPr algn="ctr"/>
             <a:r>
-              <a:rPr sz="975">
+              <a:rPr sz="1350">
                 <a:solidFill>
                   <a:srgbClr val="000000"/>
                 </a:solidFill>
                 <a:latin typeface="Arial"/>
               </a:rPr>
-              <a:t>e</a:t>
+              <a:t>Dyn</a:t>
             </a:r>
-            <a:r>
-              <a:rPr sz="975">
-                <a:solidFill>
-                  <a:srgbClr val="000000"/>
-                </a:solidFill>
-                <a:latin typeface="Arial"/>
-              </a:rPr>
-              <a:t>m</a:t>
-            </a:r>
-          </a:p>
-        </p:txBody>
-      </p:sp>
-      <p:sp>
-        <p:nvSpPr>
-          <p:cNvPr id="87" name="af-expert-4-dyn-label-text-01"/>
-          <p:cNvSpPr txBox="1"/>
-          <p:nvPr/>
-        </p:nvSpPr>
-        <p:spPr>
-          <a:xfrm>
-            <a:off x="7715250" y="3597116"/>
-            <a:ext cx="285750" cy="345281"/>
-          </a:xfrm>
-          <a:prstGeom prst="rect">
-            <a:avLst/>
-          </a:prstGeom>
-          <a:noFill/>
-          <a:effectLst/>
-        </p:spPr>
-        <p:txBody>
-          <a:bodyPr wrap="none" anchor="t" lIns="0" rIns="0" tIns="0" bIns="0">
-            <a:spAutoFit/>
-          </a:bodyPr>
-          <a:lstStyle/>
-          <a:p>
-            <a:pPr algn="ctr"/>
-            <a:r>
-              <a:rPr sz="975">
-                <a:solidFill>
-                  <a:srgbClr val="000000"/>
-                </a:solidFill>
-                <a:latin typeface="Arial"/>
-              </a:rPr>
-              <a:t>D</a:t>
-            </a:r>
-            <a:r>
-              <a:rPr sz="975">
-                <a:solidFill>
-                  <a:srgbClr val="000000"/>
-                </a:solidFill>
-                <a:latin typeface="Arial"/>
-              </a:rPr>
-              <a:t>y</a:t>
-            </a:r>
-            <a:r>
-              <a:rPr sz="975">
-                <a:solidFill>
-                  <a:srgbClr val="000000"/>
-                </a:solidFill>
-                <a:latin typeface="Arial"/>
-              </a:rPr>
-              <a:t>n</a:t>
-            </a:r>
-          </a:p>
-        </p:txBody>
-      </p:sp>
-      <p:sp>
-        <p:nvSpPr>
-          <p:cNvPr id="88" name="af-expert-index-1-text-01"/>
+          </a:p>
+        </p:txBody>
+      </p:sp>
+      <p:sp>
+        <p:nvSpPr>
+          <p:cNvPr id="86" name="af-expert-index-1-text-01" descr="{&quot;autofigure_element_id&quot;:&quot;expert-index-1&quot;}"/>
           <p:cNvSpPr txBox="1"/>
           <p:nvPr/>
         </p:nvSpPr>
@@ -7045,7 +6870,7 @@
         </p:spPr>
         <p:txBody>
           <a:bodyPr wrap="none" anchor="t" lIns="0" rIns="0" tIns="0" bIns="0">
-            <a:spAutoFit/>
+            <a:noAutofit/>
           </a:bodyPr>
           <a:lstStyle/>
           <a:p>
@@ -7064,7 +6889,7 @@
       </p:sp>
       <p:sp>
         <p:nvSpPr>
-          <p:cNvPr id="89" name="af-expert-index-2-text-01"/>
+          <p:cNvPr id="87" name="af-expert-index-2-text-01" descr="{&quot;autofigure_element_id&quot;:&quot;expert-index-2&quot;}"/>
           <p:cNvSpPr txBox="1"/>
           <p:nvPr/>
         </p:nvSpPr>
@@ -7081,7 +6906,7 @@
         </p:spPr>
         <p:txBody>
           <a:bodyPr wrap="none" anchor="t" lIns="0" rIns="0" tIns="0" bIns="0">
-            <a:spAutoFit/>
+            <a:noAutofit/>
           </a:bodyPr>
           <a:lstStyle/>
           <a:p>
@@ -7100,7 +6925,7 @@
       </p:sp>
       <p:sp>
         <p:nvSpPr>
-          <p:cNvPr id="90" name="af-expert-index-3-text-01"/>
+          <p:cNvPr id="88" name="af-expert-index-3-text-01" descr="{&quot;autofigure_element_id&quot;:&quot;expert-index-3&quot;}"/>
           <p:cNvSpPr txBox="1"/>
           <p:nvPr/>
         </p:nvSpPr>
@@ -7117,7 +6942,7 @@
         </p:spPr>
         <p:txBody>
           <a:bodyPr wrap="none" anchor="t" lIns="0" rIns="0" tIns="0" bIns="0">
-            <a:spAutoFit/>
+            <a:noAutofit/>
           </a:bodyPr>
           <a:lstStyle/>
           <a:p>
@@ -7136,7 +6961,7 @@
       </p:sp>
       <p:sp>
         <p:nvSpPr>
-          <p:cNvPr id="91" name="af-expert-index-dots-text-01"/>
+          <p:cNvPr id="89" name="af-expert-index-dots-text-01" descr="{&quot;autofigure_element_id&quot;:&quot;expert-index-dots&quot;}"/>
           <p:cNvSpPr txBox="1"/>
           <p:nvPr/>
         </p:nvSpPr>
@@ -7153,7 +6978,7 @@
         </p:spPr>
         <p:txBody>
           <a:bodyPr wrap="none" anchor="t" lIns="0" rIns="0" tIns="0" bIns="0">
-            <a:spAutoFit/>
+            <a:noAutofit/>
           </a:bodyPr>
           <a:lstStyle/>
           <a:p>
@@ -7172,7 +6997,7 @@
       </p:sp>
       <p:sp>
         <p:nvSpPr>
-          <p:cNvPr id="92" name="af-expert-index-l-text-01"/>
+          <p:cNvPr id="90" name="af-expert-index-l-text-01" descr="{&quot;autofigure_element_id&quot;:&quot;expert-index-l&quot;}"/>
           <p:cNvSpPr txBox="1"/>
           <p:nvPr/>
         </p:nvSpPr>
@@ -7189,7 +7014,7 @@
         </p:spPr>
         <p:txBody>
           <a:bodyPr wrap="none" anchor="t" lIns="0" rIns="0" tIns="0" bIns="0">
-            <a:spAutoFit/>
+            <a:noAutofit/>
           </a:bodyPr>
           <a:lstStyle/>
           <a:p>
@@ -7206,16 +7031,139 @@
           </a:p>
         </p:txBody>
       </p:sp>
-      <p:sp>
-        <p:nvSpPr>
-          <p:cNvPr id="93" name="af-allocator-task1-route-1-freeform-arrow-01"/>
+      <p:cxnSp>
+        <p:nvCxnSpPr>
+          <p:cNvPr id="91" name="af-allocator-task1-route-1-connector-01" descr="{&quot;arrow_spec_sha256&quot;:&quot;b5bea0e182ef3ce4043d70053b8e87d0453d194fe89d9a2cb29e28180f568f8a&quot;,&quot;autofigure_element_id&quot;:&quot;allocator-task1-route-1&quot;}"/>
+          <p:cNvCxnSpPr>
+            <a:stCxn id="66" idx="3"/>
+            <a:endCxn id="71" idx="1"/>
+          </p:cNvCxnSpPr>
+          <p:nvPr/>
+        </p:nvCxnSpPr>
+        <p:spPr>
+          <a:xfrm>
+            <a:off x="5753100" y="3305175"/>
+            <a:ext cx="228600" cy="0"/>
+          </a:xfrm>
+          <a:prstGeom prst="line">
+            <a:avLst/>
+          </a:prstGeom>
+          <a:ln w="28575" cap="rnd">
+            <a:solidFill>
+              <a:srgbClr val="111111"/>
+            </a:solidFill>
+            <a:round/>
+            <a:tailEnd type="triangle" w="med" len="med"/>
+          </a:ln>
+          <a:effectLst/>
+        </p:spPr>
+        <p:style>
+          <a:lnRef idx="2">
+            <a:schemeClr val="accent1"/>
+          </a:lnRef>
+          <a:fillRef idx="0">
+            <a:schemeClr val="accent1"/>
+          </a:fillRef>
+          <a:effectRef idx="1">
+            <a:schemeClr val="accent1"/>
+          </a:effectRef>
+          <a:fontRef idx="minor">
+            <a:schemeClr val="tx1"/>
+          </a:fontRef>
+        </p:style>
+      </p:cxnSp>
+      <p:cxnSp>
+        <p:nvCxnSpPr>
+          <p:cNvPr id="92" name="af-allocator-task1-route-2-connector-01" descr="{&quot;arrow_spec_sha256&quot;:&quot;b7bde9d1bb63d8af3c4718594c86fb71006c13399cd8ff148661ac67d2cdb7e7&quot;,&quot;autofigure_element_id&quot;:&quot;allocator-task1-route-2&quot;}"/>
+          <p:cNvCxnSpPr>
+            <a:stCxn id="71" idx="3"/>
+            <a:endCxn id="76" idx="1"/>
+          </p:cNvCxnSpPr>
+          <p:nvPr/>
+        </p:nvCxnSpPr>
+        <p:spPr>
+          <a:xfrm>
+            <a:off x="6477000" y="3305175"/>
+            <a:ext cx="247650" cy="0"/>
+          </a:xfrm>
+          <a:prstGeom prst="line">
+            <a:avLst/>
+          </a:prstGeom>
+          <a:ln w="28575" cap="rnd">
+            <a:solidFill>
+              <a:srgbClr val="111111"/>
+            </a:solidFill>
+            <a:round/>
+            <a:tailEnd type="triangle" w="med" len="med"/>
+          </a:ln>
+          <a:effectLst/>
+        </p:spPr>
+        <p:style>
+          <a:lnRef idx="2">
+            <a:schemeClr val="accent1"/>
+          </a:lnRef>
+          <a:fillRef idx="0">
+            <a:schemeClr val="accent1"/>
+          </a:fillRef>
+          <a:effectRef idx="1">
+            <a:schemeClr val="accent1"/>
+          </a:effectRef>
+          <a:fontRef idx="minor">
+            <a:schemeClr val="tx1"/>
+          </a:fontRef>
+        </p:style>
+      </p:cxnSp>
+      <p:cxnSp>
+        <p:nvCxnSpPr>
+          <p:cNvPr id="93" name="af-allocator-task1-skip-edge-connector-01" descr="{&quot;arrow_spec_sha256&quot;:&quot;292d1612085c6f6c9d9ad25840e06098a6769ba8f23e73901111891a12021bfc&quot;,&quot;autofigure_element_id&quot;:&quot;allocator-task1-skip-edge&quot;}"/>
+          <p:cNvCxnSpPr>
+            <a:stCxn id="76" idx="3"/>
+            <a:endCxn id="81" idx="1"/>
+          </p:cNvCxnSpPr>
+          <p:nvPr/>
+        </p:nvCxnSpPr>
+        <p:spPr>
+          <a:xfrm>
+            <a:off x="7219950" y="3305175"/>
+            <a:ext cx="409575" cy="0"/>
+          </a:xfrm>
+          <a:prstGeom prst="line">
+            <a:avLst/>
+          </a:prstGeom>
+          <a:ln w="28575" cap="rnd">
+            <a:solidFill>
+              <a:srgbClr val="111111"/>
+            </a:solidFill>
+            <a:round/>
+            <a:tailEnd type="triangle" w="med" len="med"/>
+          </a:ln>
+          <a:effectLst/>
+        </p:spPr>
+        <p:style>
+          <a:lnRef idx="2">
+            <a:schemeClr val="accent1"/>
+          </a:lnRef>
+          <a:fillRef idx="0">
+            <a:schemeClr val="accent1"/>
+          </a:fillRef>
+          <a:effectRef idx="1">
+            <a:schemeClr val="accent1"/>
+          </a:effectRef>
+          <a:fontRef idx="minor">
+            <a:schemeClr val="tx1"/>
+          </a:fontRef>
+        </p:style>
+      </p:cxnSp>
+      <p:sp>
+        <p:nvSpPr>
+          <p:cNvPr id="94" name="af-allocator-task1-propagation-freeform-01" descr="{&quot;autofigure_element_id&quot;:&quot;allocator-task1-propagation&quot;}"/>
           <p:cNvSpPr/>
           <p:nvPr/>
         </p:nvSpPr>
         <p:spPr>
           <a:xfrm>
-            <a:off x="5114925" y="2476500"/>
-            <a:ext cx="771525" cy="828675"/>
+            <a:off x="5133975" y="2476500"/>
+            <a:ext cx="3448050" cy="1085850"/>
           </a:xfrm>
           <a:custGeom>
             <a:avLst/>
@@ -7224,25 +7172,50 @@
             <a:cxnLst/>
             <a:rect l="0" t="0" r="0" b="0"/>
             <a:pathLst>
-              <a:path w="771525" h="828675">
+              <a:path w="3448050" h="1085850">
                 <a:moveTo>
                   <a:pt x="0" y="276225"/>
                 </a:moveTo>
                 <a:cubicBezTo>
-                  <a:pt x="314325" y="0"/>
-                  <a:pt x="438150" y="161925"/>
-                  <a:pt x="771525" y="828675"/>
+                  <a:pt x="219075" y="0"/>
+                  <a:pt x="381000" y="142875"/>
+                  <a:pt x="485775" y="485775"/>
+                </a:cubicBezTo>
+                <a:cubicBezTo>
+                  <a:pt x="609600" y="857250"/>
+                  <a:pt x="819150" y="800100"/>
+                  <a:pt x="952500" y="581025"/>
+                </a:cubicBezTo>
+                <a:cubicBezTo>
+                  <a:pt x="1104900" y="323850"/>
+                  <a:pt x="1247775" y="371475"/>
+                  <a:pt x="1400175" y="733425"/>
+                </a:cubicBezTo>
+                <a:cubicBezTo>
+                  <a:pt x="1543050" y="1066800"/>
+                  <a:pt x="1733550" y="1085850"/>
+                  <a:pt x="1866900" y="704850"/>
+                </a:cubicBezTo>
+                <a:cubicBezTo>
+                  <a:pt x="2019300" y="257175"/>
+                  <a:pt x="2276475" y="180975"/>
+                  <a:pt x="2476500" y="276225"/>
+                </a:cubicBezTo>
+                <a:cubicBezTo>
+                  <a:pt x="2714625" y="381000"/>
+                  <a:pt x="2962275" y="47625"/>
+                  <a:pt x="3448050" y="257175"/>
                 </a:cubicBezTo>
               </a:path>
             </a:pathLst>
           </a:custGeom>
           <a:noFill/>
-          <a:ln w="28575">
+          <a:ln w="26670" cap="rnd">
             <a:solidFill>
-              <a:srgbClr val="3567B7"/>
+              <a:srgbClr val="2D5EA8"/>
             </a:solidFill>
-            <a:prstDash val="sysDot"/>
-            <a:tailEnd type="triangle" w="med" len="med"/>
+            <a:prstDash val="dot"/>
+            <a:round/>
           </a:ln>
         </p:spPr>
         <p:txBody>
@@ -7252,14 +7225,14 @@
       </p:sp>
       <p:sp>
         <p:nvSpPr>
-          <p:cNvPr id="94" name="af-allocator-task1-route-2-freeform-arrow-01"/>
+          <p:cNvPr id="95" name="af-allocator-task2-propagation-freeform-01" descr="{&quot;autofigure_element_id&quot;:&quot;allocator-task2-propagation&quot;}"/>
           <p:cNvSpPr/>
           <p:nvPr/>
         </p:nvSpPr>
         <p:spPr>
           <a:xfrm>
-            <a:off x="5124450" y="2381250"/>
-            <a:ext cx="3076575" cy="1714500"/>
+            <a:off x="5133975" y="2838450"/>
+            <a:ext cx="3448050" cy="1285875"/>
           </a:xfrm>
           <a:custGeom>
             <a:avLst/>
@@ -7268,30 +7241,45 @@
             <a:cxnLst/>
             <a:rect l="0" t="0" r="0" b="0"/>
             <a:pathLst>
-              <a:path w="3076575" h="1714500">
+              <a:path w="3448050" h="1285875">
                 <a:moveTo>
-                  <a:pt x="0" y="381000"/>
+                  <a:pt x="0" y="1066800"/>
                 </a:moveTo>
                 <a:cubicBezTo>
-                  <a:pt x="800100" y="0"/>
-                  <a:pt x="809625" y="1714500"/>
-                  <a:pt x="1543050" y="1695450"/>
+                  <a:pt x="247650" y="1000125"/>
+                  <a:pt x="485775" y="1200150"/>
+                  <a:pt x="752475" y="1143000"/>
                 </a:cubicBezTo>
                 <a:cubicBezTo>
-                  <a:pt x="2114550" y="1676400"/>
-                  <a:pt x="2352675" y="133350"/>
-                  <a:pt x="3076575" y="323850"/>
+                  <a:pt x="1019175" y="1066800"/>
+                  <a:pt x="1181100" y="685800"/>
+                  <a:pt x="1381125" y="342900"/>
+                </a:cubicBezTo>
+                <a:cubicBezTo>
+                  <a:pt x="1533525" y="95250"/>
+                  <a:pt x="1657350" y="0"/>
+                  <a:pt x="1800225" y="114300"/>
+                </a:cubicBezTo>
+                <a:cubicBezTo>
+                  <a:pt x="1962150" y="276225"/>
+                  <a:pt x="2085975" y="838200"/>
+                  <a:pt x="2362200" y="1066800"/>
+                </a:cubicBezTo>
+                <a:cubicBezTo>
+                  <a:pt x="2628900" y="1285875"/>
+                  <a:pt x="2905125" y="1162050"/>
+                  <a:pt x="3448050" y="1095375"/>
                 </a:cubicBezTo>
               </a:path>
             </a:pathLst>
           </a:custGeom>
           <a:noFill/>
-          <a:ln w="28575">
+          <a:ln w="26670" cap="rnd">
             <a:solidFill>
-              <a:srgbClr val="3567B7"/>
+              <a:srgbClr val="D20C0C"/>
             </a:solidFill>
-            <a:prstDash val="sysDot"/>
-            <a:tailEnd type="triangle" w="med" len="med"/>
+            <a:prstDash val="dot"/>
+            <a:round/>
           </a:ln>
         </p:spPr>
         <p:txBody>
@@ -7299,207 +7287,9 @@
           <a:p/>
         </p:txBody>
       </p:sp>
-      <p:grpSp>
-        <p:nvGrpSpPr>
-          <p:cNvPr id="97" name="af-allocator-task2-route-1-arrow-group-01"/>
-          <p:cNvGrpSpPr/>
-          <p:nvPr/>
-        </p:nvGrpSpPr>
-        <p:grpSpPr>
-          <a:xfrm>
-            <a:off x="0" y="0"/>
-            <a:ext cx="13611225" cy="5972175"/>
-            <a:chOff x="0" y="0"/>
-            <a:chExt cx="13611225" cy="5972175"/>
-          </a:xfrm>
-        </p:grpSpPr>
-        <p:sp>
-          <p:nvSpPr>
-            <p:cNvPr id="95" name="af-allocator-task2-route-1-freeform-arrow-01"/>
-            <p:cNvSpPr/>
-            <p:nvPr/>
-          </p:nvSpPr>
-          <p:spPr>
-            <a:xfrm>
-              <a:off x="5114925" y="2667000"/>
-              <a:ext cx="2066925" cy="1533525"/>
-            </a:xfrm>
-            <a:custGeom>
-              <a:avLst/>
-              <a:gdLst/>
-              <a:ahLst/>
-              <a:cxnLst/>
-              <a:rect l="0" t="0" r="0" b="0"/>
-              <a:pathLst>
-                <a:path w="2066925" h="1533525">
-                  <a:moveTo>
-                    <a:pt x="0" y="1238250"/>
-                  </a:moveTo>
-                  <a:cubicBezTo>
-                    <a:pt x="790575" y="1066800"/>
-                    <a:pt x="904875" y="1533525"/>
-                    <a:pt x="1381125" y="990600"/>
-                  </a:cubicBezTo>
-                  <a:cubicBezTo>
-                    <a:pt x="1704975" y="628650"/>
-                    <a:pt x="1743075" y="0"/>
-                    <a:pt x="2066925" y="19050"/>
-                  </a:cubicBezTo>
-                </a:path>
-              </a:pathLst>
-            </a:custGeom>
-            <a:noFill/>
-            <a:ln w="28575">
-              <a:solidFill>
-                <a:srgbClr val="D40000"/>
-              </a:solidFill>
-              <a:prstDash val="sysDot"/>
-            </a:ln>
-          </p:spPr>
-        </p:sp>
-        <p:sp>
-          <p:nvSpPr>
-            <p:cNvPr id="96" name="af-allocator-task2-route-1-arrowhead-fallback-01"/>
-            <p:cNvSpPr/>
-            <p:nvPr/>
-          </p:nvSpPr>
-          <p:spPr>
-            <a:xfrm>
-              <a:off x="7093197" y="2628719"/>
-              <a:ext cx="98162" cy="104594"/>
-            </a:xfrm>
-            <a:custGeom>
-              <a:avLst/>
-              <a:gdLst/>
-              <a:ahLst/>
-              <a:cxnLst/>
-              <a:rect l="0" t="0" r="0" b="0"/>
-              <a:pathLst>
-                <a:path w="98162" h="104594">
-                  <a:moveTo>
-                    <a:pt x="6153" y="0"/>
-                  </a:moveTo>
-                  <a:lnTo>
-                    <a:pt x="98162" y="57890"/>
-                  </a:lnTo>
-                  <a:lnTo>
-                    <a:pt x="0" y="104594"/>
-                  </a:lnTo>
-                  <a:close/>
-                </a:path>
-              </a:pathLst>
-            </a:custGeom>
-            <a:solidFill>
-              <a:srgbClr val="F27622"/>
-            </a:solidFill>
-            <a:ln>
-              <a:noFill/>
-            </a:ln>
-          </p:spPr>
-        </p:sp>
-      </p:grpSp>
-      <p:grpSp>
-        <p:nvGrpSpPr>
-          <p:cNvPr id="100" name="af-allocator-task2-route-2-arrow-group-01"/>
-          <p:cNvGrpSpPr/>
-          <p:nvPr/>
-        </p:nvGrpSpPr>
-        <p:grpSpPr>
-          <a:xfrm>
-            <a:off x="0" y="0"/>
-            <a:ext cx="13611225" cy="5972175"/>
-            <a:chOff x="0" y="0"/>
-            <a:chExt cx="13611225" cy="5972175"/>
-          </a:xfrm>
-        </p:grpSpPr>
-        <p:sp>
-          <p:nvSpPr>
-            <p:cNvPr id="98" name="af-allocator-task2-route-2-freeform-arrow-01"/>
-            <p:cNvSpPr/>
-            <p:nvPr/>
-          </p:nvSpPr>
-          <p:spPr>
-            <a:xfrm>
-              <a:off x="5114925" y="3228975"/>
-              <a:ext cx="3095625" cy="1104900"/>
-            </a:xfrm>
-            <a:custGeom>
-              <a:avLst/>
-              <a:gdLst/>
-              <a:ahLst/>
-              <a:cxnLst/>
-              <a:rect l="0" t="0" r="0" b="0"/>
-              <a:pathLst>
-                <a:path w="3095625" h="1104900">
-                  <a:moveTo>
-                    <a:pt x="0" y="676275"/>
-                  </a:moveTo>
-                  <a:cubicBezTo>
-                    <a:pt x="809625" y="609600"/>
-                    <a:pt x="1019175" y="809625"/>
-                    <a:pt x="1476375" y="409575"/>
-                  </a:cubicBezTo>
-                  <a:cubicBezTo>
-                    <a:pt x="1943100" y="0"/>
-                    <a:pt x="2324100" y="1104900"/>
-                    <a:pt x="3095625" y="752475"/>
-                  </a:cubicBezTo>
-                </a:path>
-              </a:pathLst>
-            </a:custGeom>
-            <a:noFill/>
-            <a:ln w="28575">
-              <a:solidFill>
-                <a:srgbClr val="D40000"/>
-              </a:solidFill>
-              <a:prstDash val="sysDot"/>
-            </a:ln>
-          </p:spPr>
-        </p:sp>
-        <p:sp>
-          <p:nvSpPr>
-            <p:cNvPr id="99" name="af-allocator-task2-route-2-arrowhead-fallback-01"/>
-            <p:cNvSpPr/>
-            <p:nvPr/>
-          </p:nvSpPr>
-          <p:spPr>
-            <a:xfrm>
-              <a:off x="8110808" y="3969417"/>
-              <a:ext cx="108406" cy="95303"/>
-            </a:xfrm>
-            <a:custGeom>
-              <a:avLst/>
-              <a:gdLst/>
-              <a:ahLst/>
-              <a:cxnLst/>
-              <a:rect l="0" t="0" r="0" b="0"/>
-              <a:pathLst>
-                <a:path w="108406" h="95303">
-                  <a:moveTo>
-                    <a:pt x="0" y="0"/>
-                  </a:moveTo>
-                  <a:lnTo>
-                    <a:pt x="108406" y="8076"/>
-                  </a:lnTo>
-                  <a:lnTo>
-                    <a:pt x="43533" y="95303"/>
-                  </a:lnTo>
-                  <a:close/>
-                </a:path>
-              </a:pathLst>
-            </a:custGeom>
-            <a:solidFill>
-              <a:srgbClr val="F27622"/>
-            </a:solidFill>
-            <a:ln>
-              <a:noFill/>
-            </a:ln>
-          </p:spPr>
-        </p:sp>
-      </p:grpSp>
-      <p:sp>
-        <p:nvSpPr>
-          <p:cNvPr id="101" name="af-zt-top-box-rect-01"/>
+      <p:sp>
+        <p:nvSpPr>
+          <p:cNvPr id="96" name="af-zt-top-box-rect-01" descr="{&quot;autofigure_element_id&quot;:&quot;zt-top-box&quot;}"/>
           <p:cNvSpPr/>
           <p:nvPr/>
         </p:nvSpPr>
@@ -7518,6 +7308,7 @@
             <a:solidFill>
               <a:srgbClr val="19365F"/>
             </a:solidFill>
+            <a:miter/>
           </a:ln>
           <a:effectLst/>
         </p:spPr>
@@ -7547,7 +7338,7 @@
         <mc:Choice xmlns:a14="http://schemas.microsoft.com/office/drawing/2010/main" Requires="a14">
           <p:sp>
             <p:nvSpPr>
-              <p:cNvPr id="102" name="math:005" descr="AI_AUTOFIGURE_NATIVE_MATH_V1:eyJjb250ZW50X3J1bnMiOlt7ImNhbm9uaWNhbF9sYXRleCI6Inpfe3R9IiwiZm9ybXVsYV9pZCI6IkVRMDA1Iiwia2luZCI6Im1hdGgiLCJsYXRleF9zaGEyNTYiOiI1MTFhZDkzYjNmYWU5ZDczZDU2MzY1NmZlYjNiZTY5M2Y0MjBjM2FkNDNmNjBkY2QzNWRiNjMxYWIwZTUwY2EzIiwibW9kZSI6ImlubGluZSIsIm9tbWxfc2hhMjU2IjoiOWNjMjA3NmY3N2U5ZDBlODdiOWE5Y2ZjYWFmZmRjNTBiNzU4ZDZiYmM1MTBjZWY4ZjNiYTU3NDhmODUyMmM1ZSIsInNlbWFudGljX29tbWxfcHJvZmlsZSI6Im9mZmljZS1tYXRoLXNlbWFudGljLXYyIiwic2VtYW50aWNfb21tbF9zaGEyNTYiOiI3MGQyYWI5NmM3NjkwMTQ0MjFhOGZjMTk5ZjQ0MzE0YjFhYWNlZjVkN2RhZGNiZjU2ZDI3MzJjMWJhMjU0MzI4In1dLCJmb3JtdWxhcyI6W3siY2Fub25pY2FsX2xhdGV4Ijoiel97dH0iLCJmb3JtdWxhX2lkIjoiRVEwMDUiLCJsYXRleF9zaGEyNTYiOiI1MTFhZDkzYjNmYWU5ZDczZDU2MzY1NmZlYjNiZTY5M2Y0MjBjM2FkNDNmNjBkY2QzNWRiNjMxYWIwZTUwY2EzIiwibW9kZSI6ImlubGluZSIsIm9tbWxfc2hhMjU2IjoiOWNjMjA3NmY3N2U5ZDBlODdiOWE5Y2ZjYWFmZmRjNTBiNzU4ZDZiYmM1MTBjZWY4ZjNiYTU3NDhmODUyMmM1ZSIsInNlbWFudGljX29tbWxfcHJvZmlsZSI6Im9mZmljZS1tYXRoLXNlbWFudGljLXYyIiwic2VtYW50aWNfb21tbF9zaGEyNTYiOiI3MGQyYWI5NmM3NjkwMTQ0MjFhOGZjMTk5ZjQ0MzE0YjFhYWNlZjVkN2RhZGNiZjU2ZDI3MzJjMWJhMjU0MzI4In1dLCJraW5kIjoibmF0aXZlX29mZmljZV9tYXRoIiwicGxhY2Vob2xkZXJfbmFtZSI6Im1hdGg6MDA1Iiwic2NoZW1hX3ZlcnNpb24iOiIxLjAifQ=="/>
+              <p:cNvPr id="97" name="math:005" descr="AI_AUTOFIGURE_NATIVE_MATH_V1:eyJjb250ZW50X3J1bnMiOlt7ImNhbm9uaWNhbF9sYXRleCI6Inpfe3R9IiwiZm9ybXVsYV9pZCI6IkVRMDA1Iiwia2luZCI6Im1hdGgiLCJsYXRleF9zaGEyNTYiOiI1MTFhZDkzYjNmYWU5ZDczZDU2MzY1NmZlYjNiZTY5M2Y0MjBjM2FkNDNmNjBkY2QzNWRiNjMxYWIwZTUwY2EzIiwibW9kZSI6ImlubGluZSIsIm9tbWxfc2hhMjU2IjoiOWNjMjA3NmY3N2U5ZDBlODdiOWE5Y2ZjYWFmZmRjNTBiNzU4ZDZiYmM1MTBjZWY4ZjNiYTU3NDhmODUyMmM1ZSIsInNlbWFudGljX29tbWxfcHJvZmlsZSI6Im9mZmljZS1tYXRoLXNlbWFudGljLXYyIiwic2VtYW50aWNfb21tbF9zaGEyNTYiOiI3MGQyYWI5NmM3NjkwMTQ0MjFhOGZjMTk5ZjQ0MzE0YjFhYWNlZjVkN2RhZGNiZjU2ZDI3MzJjMWJhMjU0MzI4In1dLCJmb3JtdWxhcyI6W3siY2Fub25pY2FsX2xhdGV4Ijoiel97dH0iLCJmb3JtdWxhX2lkIjoiRVEwMDUiLCJsYXRleF9zaGEyNTYiOiI1MTFhZDkzYjNmYWU5ZDczZDU2MzY1NmZlYjNiZTY5M2Y0MjBjM2FkNDNmNjBkY2QzNWRiNjMxYWIwZTUwY2EzIiwibW9kZSI6ImlubGluZSIsIm9tbWxfc2hhMjU2IjoiOWNjMjA3NmY3N2U5ZDBlODdiOWE5Y2ZjYWFmZmRjNTBiNzU4ZDZiYmM1MTBjZWY4ZjNiYTU3NDhmODUyMmM1ZSIsInNlbWFudGljX29tbWxfcHJvZmlsZSI6Im9mZmljZS1tYXRoLXNlbWFudGljLXYyIiwic2VtYW50aWNfb21tbF9zaGEyNTYiOiI3MGQyYWI5NmM3NjkwMTQ0MjFhOGZjMTk5ZjQ0MzE0YjFhYWNlZjVkN2RhZGNiZjU2ZDI3MzJjMWJhMjU0MzI4In1dLCJraW5kIjoibmF0aXZlX29mZmljZV9tYXRoIiwicGxhY2Vob2xkZXJfbmFtZSI6Im1hdGg6MDA1Iiwic2NoZW1hX3ZlcnNpb24iOiIxLjAifQ=="/>
               <p:cNvSpPr txBox="1"/>
               <p:nvPr/>
             </p:nvSpPr>
@@ -7564,7 +7355,7 @@
             </p:spPr>
             <p:txBody>
               <a:bodyPr wrap="none" anchor="t" lIns="0" rIns="0" tIns="0" bIns="0">
-                <a:spAutoFit/>
+                <a:noAutofit/>
               </a:bodyPr>
               <a:lstStyle/>
               <a:p>
@@ -7610,7 +7401,7 @@
         <mc:Fallback>
           <p:sp>
             <p:nvSpPr>
-              <p:cNvPr id="102" name="math:005" descr="AI_AUTOFIGURE_MATH_FALLBACK_ONLY_V1:eyJjb250ZW50X3J1bnMiOlt7ImNhbm9uaWNhbF9sYXRleCI6Inpfe3R9IiwiZm9ybXVsYV9pZCI6IkVRMDA1Iiwia2luZCI6Im1hdGgiLCJsYXRleF9zaGEyNTYiOiI1MTFhZDkzYjNmYWU5ZDczZDU2MzY1NmZlYjNiZTY5M2Y0MjBjM2FkNDNmNjBkY2QzNWRiNjMxYWIwZTUwY2EzIiwibW9kZSI6ImlubGluZSIsIm9tbWxfc2hhMjU2IjoiOWNjMjA3NmY3N2U5ZDBlODdiOWE5Y2ZjYWFmZmRjNTBiNzU4ZDZiYmM1MTBjZWY4ZjNiYTU3NDhmODUyMmM1ZSIsInNlbWFudGljX29tbWxfcHJvZmlsZSI6Im9mZmljZS1tYXRoLXNlbWFudGljLXYyIiwic2VtYW50aWNfb21tbF9zaGEyNTYiOiI3MGQyYWI5NmM3NjkwMTQ0MjFhOGZjMTk5ZjQ0MzE0YjFhYWNlZjVkN2RhZGNiZjU2ZDI3MzJjMWJhMjU0MzI4In1dLCJmb3JtdWxhcyI6W3siY2Fub25pY2FsX2xhdGV4Ijoiel97dH0iLCJmb3JtdWxhX2lkIjoiRVEwMDUiLCJsYXRleF9zaGEyNTYiOiI1MTFhZDkzYjNmYWU5ZDczZDU2MzY1NmZlYjNiZTY5M2Y0MjBjM2FkNDNmNjBkY2QzNWRiNjMxYWIwZTUwY2EzIiwibW9kZSI6ImlubGluZSIsIm9tbWxfc2hhMjU2IjoiOWNjMjA3NmY3N2U5ZDBlODdiOWE5Y2ZjYWFmZmRjNTBiNzU4ZDZiYmM1MTBjZWY4ZjNiYTU3NDhmODUyMmM1ZSIsInNlbWFudGljX29tbWxfcHJvZmlsZSI6Im9mZmljZS1tYXRoLXNlbWFudGljLXYyIiwic2VtYW50aWNfb21tbF9zaGEyNTYiOiI3MGQyYWI5NmM3NjkwMTQ0MjFhOGZjMTk5ZjQ0MzE0YjFhYWNlZjVkN2RhZGNiZjU2ZDI3MzJjMWJhMjU0MzI4In1dLCJraW5kIjoibmF0aXZlX29mZmljZV9tYXRoIiwicGxhY2Vob2xkZXJfbmFtZSI6Im1hdGg6MDA1Iiwic2NoZW1hX3ZlcnNpb24iOiIxLjAifQ=="/>
+              <p:cNvPr id="97" name="math:005" descr="AI_AUTOFIGURE_MATH_FALLBACK_ONLY_V1:eyJjb250ZW50X3J1bnMiOlt7ImNhbm9uaWNhbF9sYXRleCI6Inpfe3R9IiwiZm9ybXVsYV9pZCI6IkVRMDA1Iiwia2luZCI6Im1hdGgiLCJsYXRleF9zaGEyNTYiOiI1MTFhZDkzYjNmYWU5ZDczZDU2MzY1NmZlYjNiZTY5M2Y0MjBjM2FkNDNmNjBkY2QzNWRiNjMxYWIwZTUwY2EzIiwibW9kZSI6ImlubGluZSIsIm9tbWxfc2hhMjU2IjoiOWNjMjA3NmY3N2U5ZDBlODdiOWE5Y2ZjYWFmZmRjNTBiNzU4ZDZiYmM1MTBjZWY4ZjNiYTU3NDhmODUyMmM1ZSIsInNlbWFudGljX29tbWxfcHJvZmlsZSI6Im9mZmljZS1tYXRoLXNlbWFudGljLXYyIiwic2VtYW50aWNfb21tbF9zaGEyNTYiOiI3MGQyYWI5NmM3NjkwMTQ0MjFhOGZjMTk5ZjQ0MzE0YjFhYWNlZjVkN2RhZGNiZjU2ZDI3MzJjMWJhMjU0MzI4In1dLCJmb3JtdWxhcyI6W3siY2Fub25pY2FsX2xhdGV4Ijoiel97dH0iLCJmb3JtdWxhX2lkIjoiRVEwMDUiLCJsYXRleF9zaGEyNTYiOiI1MTFhZDkzYjNmYWU5ZDczZDU2MzY1NmZlYjNiZTY5M2Y0MjBjM2FkNDNmNjBkY2QzNWRiNjMxYWIwZTUwY2EzIiwibW9kZSI6ImlubGluZSIsIm9tbWxfc2hhMjU2IjoiOWNjMjA3NmY3N2U5ZDBlODdiOWE5Y2ZjYWFmZmRjNTBiNzU4ZDZiYmM1MTBjZWY4ZjNiYTU3NDhmODUyMmM1ZSIsInNlbWFudGljX29tbWxfcHJvZmlsZSI6Im9mZmljZS1tYXRoLXNlbWFudGljLXYyIiwic2VtYW50aWNfb21tbF9zaGEyNTYiOiI3MGQyYWI5NmM3NjkwMTQ0MjFhOGZjMTk5ZjQ0MzE0YjFhYWNlZjVkN2RhZGNiZjU2ZDI3MzJjMWJhMjU0MzI4In1dLCJraW5kIjoibmF0aXZlX29mZmljZV9tYXRoIiwicGxhY2Vob2xkZXJfbmFtZSI6Im1hdGg6MDA1Iiwic2NoZW1hX3ZlcnNpb24iOiIxLjAifQ=="/>
               <p:cNvSpPr txBox="1"/>
               <p:nvPr/>
             </p:nvSpPr>
@@ -7627,7 +7418,7 @@
             </p:spPr>
             <p:txBody>
               <a:bodyPr wrap="none" anchor="t" lIns="0" rIns="0" tIns="0" bIns="0">
-                <a:spAutoFit/>
+                <a:noAutofit/>
               </a:bodyPr>
               <a:lstStyle/>
               <a:p>
@@ -7652,7 +7443,7 @@
       </mc:AlternateContent>
       <p:sp>
         <p:nvSpPr>
-          <p:cNvPr id="103" name="af-zt-top-1-ellipse-01"/>
+          <p:cNvPr id="98" name="af-zt-top-1-ellipse-01" descr="{&quot;autofigure_element_id&quot;:&quot;zt-top-1&quot;}"/>
           <p:cNvSpPr/>
           <p:nvPr/>
         </p:nvSpPr>
@@ -7713,7 +7504,7 @@
       </p:sp>
       <p:sp>
         <p:nvSpPr>
-          <p:cNvPr id="104" name="af-zt-top-2-ellipse-01"/>
+          <p:cNvPr id="99" name="af-zt-top-2-ellipse-01" descr="{&quot;autofigure_element_id&quot;:&quot;zt-top-2&quot;}"/>
           <p:cNvSpPr/>
           <p:nvPr/>
         </p:nvSpPr>
@@ -7774,7 +7565,7 @@
       </p:sp>
       <p:sp>
         <p:nvSpPr>
-          <p:cNvPr id="105" name="af-zt-top-3-ellipse-01"/>
+          <p:cNvPr id="100" name="af-zt-top-3-ellipse-01" descr="{&quot;autofigure_element_id&quot;:&quot;zt-top-3&quot;}"/>
           <p:cNvSpPr/>
           <p:nvPr/>
         </p:nvSpPr>
@@ -7835,7 +7626,7 @@
       </p:sp>
       <p:sp>
         <p:nvSpPr>
-          <p:cNvPr id="106" name="af-zt-bottom-box-rect-01"/>
+          <p:cNvPr id="101" name="af-zt-bottom-box-rect-01" descr="{&quot;autofigure_element_id&quot;:&quot;zt-bottom-box&quot;}"/>
           <p:cNvSpPr/>
           <p:nvPr/>
         </p:nvSpPr>
@@ -7854,6 +7645,7 @@
             <a:solidFill>
               <a:srgbClr val="19365F"/>
             </a:solidFill>
+            <a:miter/>
           </a:ln>
           <a:effectLst/>
         </p:spPr>
@@ -7881,7 +7673,7 @@
       </p:sp>
       <p:sp>
         <p:nvSpPr>
-          <p:cNvPr id="107" name="af-zt-bottom-1-ellipse-01"/>
+          <p:cNvPr id="102" name="af-zt-bottom-1-ellipse-01" descr="{&quot;autofigure_element_id&quot;:&quot;zt-bottom-1&quot;}"/>
           <p:cNvSpPr/>
           <p:nvPr/>
         </p:nvSpPr>
@@ -7942,7 +7734,7 @@
       </p:sp>
       <p:sp>
         <p:nvSpPr>
-          <p:cNvPr id="108" name="af-zt-bottom-2-ellipse-01"/>
+          <p:cNvPr id="103" name="af-zt-bottom-2-ellipse-01" descr="{&quot;autofigure_element_id&quot;:&quot;zt-bottom-2&quot;}"/>
           <p:cNvSpPr/>
           <p:nvPr/>
         </p:nvSpPr>
@@ -8003,7 +7795,7 @@
       </p:sp>
       <p:sp>
         <p:nvSpPr>
-          <p:cNvPr id="109" name="af-zt-bottom-3-ellipse-01"/>
+          <p:cNvPr id="104" name="af-zt-bottom-3-ellipse-01" descr="{&quot;autofigure_element_id&quot;:&quot;zt-bottom-3&quot;}"/>
           <p:cNvSpPr/>
           <p:nvPr/>
         </p:nvSpPr>
@@ -8064,7 +7856,7 @@
       </p:sp>
       <p:sp>
         <p:nvSpPr>
-          <p:cNvPr id="110" name="af-task-conditioned-imagination-rect-01"/>
+          <p:cNvPr id="105" name="af-task-conditioned-imagination-rect-01" descr="{&quot;autofigure_element_id&quot;:&quot;task-conditioned-imagination&quot;}"/>
           <p:cNvSpPr/>
           <p:nvPr/>
         </p:nvSpPr>
@@ -8085,6 +7877,7 @@
             <a:solidFill>
               <a:srgbClr val="19365F"/>
             </a:solidFill>
+            <a:miter/>
           </a:ln>
           <a:effectLst/>
         </p:spPr>
@@ -8110,9 +7903,132 @@
           </a:p>
         </p:txBody>
       </p:sp>
-      <p:sp>
-        <p:nvSpPr>
-          <p:cNvPr id="111" name="af-imagination-title-text-01"/>
+      <p:cxnSp>
+        <p:nvCxnSpPr>
+          <p:cNvPr id="106" name="af-imagination-z0-to-r0-connector-01" descr="{&quot;arrow_spec_sha256&quot;:&quot;b710a3e44ce73e2e535d86b3e048149b0efe91fa911338748891c50a84f7d670&quot;,&quot;autofigure_element_id&quot;:&quot;imagination-z0-to-r0&quot;}"/>
+          <p:cNvCxnSpPr>
+            <a:stCxn id="110" idx="2"/>
+            <a:endCxn id="134" idx="0"/>
+          </p:cNvCxnSpPr>
+          <p:nvPr/>
+        </p:nvCxnSpPr>
+        <p:spPr>
+          <a:xfrm>
+            <a:off x="9839325" y="1914525"/>
+            <a:ext cx="0" cy="209550"/>
+          </a:xfrm>
+          <a:prstGeom prst="line">
+            <a:avLst/>
+          </a:prstGeom>
+          <a:ln w="19050">
+            <a:solidFill>
+              <a:srgbClr val="7E6000"/>
+            </a:solidFill>
+            <a:miter/>
+            <a:tailEnd type="triangle" w="med" len="med"/>
+          </a:ln>
+          <a:effectLst/>
+        </p:spPr>
+        <p:style>
+          <a:lnRef idx="2">
+            <a:schemeClr val="accent1"/>
+          </a:lnRef>
+          <a:fillRef idx="0">
+            <a:schemeClr val="accent1"/>
+          </a:fillRef>
+          <a:effectRef idx="1">
+            <a:schemeClr val="accent1"/>
+          </a:effectRef>
+          <a:fontRef idx="minor">
+            <a:schemeClr val="tx1"/>
+          </a:fontRef>
+        </p:style>
+      </p:cxnSp>
+      <p:cxnSp>
+        <p:nvCxnSpPr>
+          <p:cNvPr id="107" name="af-imagination-z1-to-r1-connector-01" descr="{&quot;arrow_spec_sha256&quot;:&quot;ad49b582533b015dc77663531ef5656428eb09c41ce001350fd93bfaf61d79e6&quot;,&quot;autofigure_element_id&quot;:&quot;imagination-z1-to-r1&quot;}"/>
+          <p:cNvCxnSpPr>
+            <a:stCxn id="111" idx="2"/>
+            <a:endCxn id="135" idx="0"/>
+          </p:cNvCxnSpPr>
+          <p:nvPr/>
+        </p:nvCxnSpPr>
+        <p:spPr>
+          <a:xfrm>
+            <a:off x="10753725" y="1914525"/>
+            <a:ext cx="0" cy="209550"/>
+          </a:xfrm>
+          <a:prstGeom prst="line">
+            <a:avLst/>
+          </a:prstGeom>
+          <a:ln w="19050">
+            <a:solidFill>
+              <a:srgbClr val="7E6000"/>
+            </a:solidFill>
+            <a:miter/>
+            <a:tailEnd type="triangle" w="med" len="med"/>
+          </a:ln>
+          <a:effectLst/>
+        </p:spPr>
+        <p:style>
+          <a:lnRef idx="2">
+            <a:schemeClr val="accent1"/>
+          </a:lnRef>
+          <a:fillRef idx="0">
+            <a:schemeClr val="accent1"/>
+          </a:fillRef>
+          <a:effectRef idx="1">
+            <a:schemeClr val="accent1"/>
+          </a:effectRef>
+          <a:fontRef idx="minor">
+            <a:schemeClr val="tx1"/>
+          </a:fontRef>
+        </p:style>
+      </p:cxnSp>
+      <p:cxnSp>
+        <p:nvCxnSpPr>
+          <p:cNvPr id="108" name="af-imagination-z2-to-r2-connector-01" descr="{&quot;arrow_spec_sha256&quot;:&quot;38fc40e9194a569ecf61954c16b0ca03224f7e03b69a84bddd9cec40a8c51ae8&quot;,&quot;autofigure_element_id&quot;:&quot;imagination-z2-to-r2&quot;}"/>
+          <p:cNvCxnSpPr>
+            <a:stCxn id="112" idx="2"/>
+            <a:endCxn id="136" idx="0"/>
+          </p:cNvCxnSpPr>
+          <p:nvPr/>
+        </p:nvCxnSpPr>
+        <p:spPr>
+          <a:xfrm>
+            <a:off x="11706225" y="1914525"/>
+            <a:ext cx="0" cy="209550"/>
+          </a:xfrm>
+          <a:prstGeom prst="line">
+            <a:avLst/>
+          </a:prstGeom>
+          <a:ln w="19050">
+            <a:solidFill>
+              <a:srgbClr val="7E6000"/>
+            </a:solidFill>
+            <a:miter/>
+            <a:tailEnd type="triangle" w="med" len="med"/>
+          </a:ln>
+          <a:effectLst/>
+        </p:spPr>
+        <p:style>
+          <a:lnRef idx="2">
+            <a:schemeClr val="accent1"/>
+          </a:lnRef>
+          <a:fillRef idx="0">
+            <a:schemeClr val="accent1"/>
+          </a:fillRef>
+          <a:effectRef idx="1">
+            <a:schemeClr val="accent1"/>
+          </a:effectRef>
+          <a:fontRef idx="minor">
+            <a:schemeClr val="tx1"/>
+          </a:fontRef>
+        </p:style>
+      </p:cxnSp>
+      <p:sp>
+        <p:nvSpPr>
+          <p:cNvPr id="109" name="af-imagination-title-text-01" descr="{&quot;autofigure_element_id&quot;:&quot;imagination-title&quot;}"/>
           <p:cNvSpPr txBox="1"/>
           <p:nvPr/>
         </p:nvSpPr>
@@ -8129,7 +8045,7 @@
         </p:spPr>
         <p:txBody>
           <a:bodyPr wrap="none" anchor="t" lIns="0" rIns="0" tIns="0" bIns="0">
-            <a:spAutoFit/>
+            <a:noAutofit/>
           </a:bodyPr>
           <a:lstStyle/>
           <a:p>
@@ -8148,7 +8064,7 @@
       </p:sp>
       <p:sp>
         <p:nvSpPr>
-          <p:cNvPr id="112" name="af-imag-z0-rect-01"/>
+          <p:cNvPr id="110" name="af-imag-z0-rect-01" descr="{&quot;autofigure_element_id&quot;:&quot;imag-z0&quot;}"/>
           <p:cNvSpPr/>
           <p:nvPr/>
         </p:nvSpPr>
@@ -8194,7 +8110,7 @@
       </p:sp>
       <p:sp>
         <p:nvSpPr>
-          <p:cNvPr id="113" name="af-imag-z1-rect-01"/>
+          <p:cNvPr id="111" name="af-imag-z1-rect-01" descr="{&quot;autofigure_element_id&quot;:&quot;imag-z1&quot;}"/>
           <p:cNvSpPr/>
           <p:nvPr/>
         </p:nvSpPr>
@@ -8240,7 +8156,7 @@
       </p:sp>
       <p:sp>
         <p:nvSpPr>
-          <p:cNvPr id="114" name="af-imag-z2-rect-01"/>
+          <p:cNvPr id="112" name="af-imag-z2-rect-01" descr="{&quot;autofigure_element_id&quot;:&quot;imag-z2&quot;}"/>
           <p:cNvSpPr/>
           <p:nvPr/>
         </p:nvSpPr>
@@ -8286,7 +8202,7 @@
       </p:sp>
       <p:sp>
         <p:nvSpPr>
-          <p:cNvPr id="115" name="af-imag-zh-rect-01"/>
+          <p:cNvPr id="113" name="af-imag-zh-rect-01" descr="{&quot;autofigure_element_id&quot;:&quot;imag-zh&quot;}"/>
           <p:cNvSpPr/>
           <p:nvPr/>
         </p:nvSpPr>
@@ -8334,7 +8250,7 @@
         <mc:Choice xmlns:a14="http://schemas.microsoft.com/office/drawing/2010/main" Requires="a14">
           <p:sp>
             <p:nvSpPr>
-              <p:cNvPr id="116" name="math:006" descr="AI_AUTOFIGURE_NATIVE_MATH_V1:eyJjb250ZW50X3J1bnMiOlt7ImNhbm9uaWNhbF9sYXRleCI6Inpee1xcdGF1fV97dH0iLCJmb3JtdWxhX2lkIjoiRVEwMDYiLCJraW5kIjoibWF0aCIsImxhdGV4X3NoYTI1NiI6IjgxMmI1YjFjOGFmZDdhYzI0Nzc5YTQxYzhmMmE0ZDNiNzZlODAyYzNlNDk5NDc3MjdlM2Q4OTZhYmI3MmQ3ZjEiLCJtb2RlIjoiaW5saW5lIiwib21tbF9zaGEyNTYiOiIwYjA5Y2ZlY2EzYmZiNzFlMzRjMGY1ZmI2ZTY2NDUzZTMwMWFlZGI1Nzc5YmE1MTFhMGZiZDc0MDljMWZlN2M1Iiwic2VtYW50aWNfb21tbF9wcm9maWxlIjoib2ZmaWNlLW1hdGgtc2VtYW50aWMtdjIiLCJzZW1hbnRpY19vbW1sX3NoYTI1NiI6IjdiMDU0ZTcxNjkxNGEwYjY5OGE4N2NmZWM0NTQ3ZWYwYjY2NTA0YzFhYTU3YmI0NDkwN2Q0NGE0YzQ3NDgxZWQifV0sImZvcm11bGFzIjpbeyJjYW5vbmljYWxfbGF0ZXgiOiJ6XntcXHRhdX1fe3R9IiwiZm9ybXVsYV9pZCI6IkVRMDA2IiwibGF0ZXhfc2hhMjU2IjoiODEyYjViMWM4YWZkN2FjMjQ3NzlhNDFjOGYyYTRkM2I3NmU4MDJjM2U0OTk0NzcyN2UzZDg5NmFiYjcyZDdmMSIsIm1vZGUiOiJpbmxpbmUiLCJvbW1sX3NoYTI1NiI6IjBiMDljZmVjYTNiZmI3MWUzNGMwZjVmYjZlNjY0NTNlMzAxYWVkYjU3NzliYTUxMWEwZmJkNzQwOWMxZmU3YzUiLCJzZW1hbnRpY19vbW1sX3Byb2ZpbGUiOiJvZmZpY2UtbWF0aC1zZW1hbnRpYy12MiIsInNlbWFudGljX29tbWxfc2hhMjU2IjoiN2IwNTRlNzE2OTE0YTBiNjk4YTg3Y2ZlYzQ1NDdlZjBiNjY1MDRjMWFhNTdiYjQ0OTA3ZDQ0YTRjNDc0ODFlZCJ9XSwia2luZCI6Im5hdGl2ZV9vZmZpY2VfbWF0aCIsInBsYWNlaG9sZGVyX25hbWUiOiJtYXRoOjAwNiIsInNjaGVtYV92ZXJzaW9uIjoiMS4wIn0="/>
+              <p:cNvPr id="114" name="math:006" descr="AI_AUTOFIGURE_NATIVE_MATH_V1:eyJjb250ZW50X3J1bnMiOlt7ImNhbm9uaWNhbF9sYXRleCI6Inpee1xcdGF1fV97dH0iLCJmb3JtdWxhX2lkIjoiRVEwMDYiLCJraW5kIjoibWF0aCIsImxhdGV4X3NoYTI1NiI6IjgxMmI1YjFjOGFmZDdhYzI0Nzc5YTQxYzhmMmE0ZDNiNzZlODAyYzNlNDk5NDc3MjdlM2Q4OTZhYmI3MmQ3ZjEiLCJtb2RlIjoiaW5saW5lIiwib21tbF9zaGEyNTYiOiIwYjA5Y2ZlY2EzYmZiNzFlMzRjMGY1ZmI2ZTY2NDUzZTMwMWFlZGI1Nzc5YmE1MTFhMGZiZDc0MDljMWZlN2M1Iiwic2VtYW50aWNfb21tbF9wcm9maWxlIjoib2ZmaWNlLW1hdGgtc2VtYW50aWMtdjIiLCJzZW1hbnRpY19vbW1sX3NoYTI1NiI6IjdiMDU0ZTcxNjkxNGEwYjY5OGE4N2NmZWM0NTQ3ZWYwYjY2NTA0YzFhYTU3YmI0NDkwN2Q0NGE0YzQ3NDgxZWQifV0sImZvcm11bGFzIjpbeyJjYW5vbmljYWxfbGF0ZXgiOiJ6XntcXHRhdX1fe3R9IiwiZm9ybXVsYV9pZCI6IkVRMDA2IiwibGF0ZXhfc2hhMjU2IjoiODEyYjViMWM4YWZkN2FjMjQ3NzlhNDFjOGYyYTRkM2I3NmU4MDJjM2U0OTk0NzcyN2UzZDg5NmFiYjcyZDdmMSIsIm1vZGUiOiJpbmxpbmUiLCJvbW1sX3NoYTI1NiI6IjBiMDljZmVjYTNiZmI3MWUzNGMwZjVmYjZlNjY0NTNlMzAxYWVkYjU3NzliYTUxMWEwZmJkNzQwOWMxZmU3YzUiLCJzZW1hbnRpY19vbW1sX3Byb2ZpbGUiOiJvZmZpY2UtbWF0aC1zZW1hbnRpYy12MiIsInNlbWFudGljX29tbWxfc2hhMjU2IjoiN2IwNTRlNzE2OTE0YTBiNjk4YTg3Y2ZlYzQ1NDdlZjBiNjY1MDRjMWFhNTdiYjQ0OTA3ZDQ0YTRjNDc0ODFlZCJ9XSwia2luZCI6Im5hdGl2ZV9vZmZpY2VfbWF0aCIsInBsYWNlaG9sZGVyX25hbWUiOiJtYXRoOjAwNiIsInNjaGVtYV92ZXJzaW9uIjoiMS4wIn0="/>
               <p:cNvSpPr txBox="1"/>
               <p:nvPr/>
             </p:nvSpPr>
@@ -8351,7 +8267,7 @@
             </p:spPr>
             <p:txBody>
               <a:bodyPr wrap="none" anchor="t" lIns="0" rIns="0" tIns="0" bIns="0">
-                <a:spAutoFit/>
+                <a:noAutofit/>
               </a:bodyPr>
               <a:lstStyle/>
               <a:p>
@@ -8408,7 +8324,7 @@
         <mc:Fallback>
           <p:sp>
             <p:nvSpPr>
-              <p:cNvPr id="116" name="math:006" descr="AI_AUTOFIGURE_MATH_FALLBACK_ONLY_V1:eyJjb250ZW50X3J1bnMiOlt7ImNhbm9uaWNhbF9sYXRleCI6Inpee1xcdGF1fV97dH0iLCJmb3JtdWxhX2lkIjoiRVEwMDYiLCJraW5kIjoibWF0aCIsImxhdGV4X3NoYTI1NiI6IjgxMmI1YjFjOGFmZDdhYzI0Nzc5YTQxYzhmMmE0ZDNiNzZlODAyYzNlNDk5NDc3MjdlM2Q4OTZhYmI3MmQ3ZjEiLCJtb2RlIjoiaW5saW5lIiwib21tbF9zaGEyNTYiOiIwYjA5Y2ZlY2EzYmZiNzFlMzRjMGY1ZmI2ZTY2NDUzZTMwMWFlZGI1Nzc5YmE1MTFhMGZiZDc0MDljMWZlN2M1Iiwic2VtYW50aWNfb21tbF9wcm9maWxlIjoib2ZmaWNlLW1hdGgtc2VtYW50aWMtdjIiLCJzZW1hbnRpY19vbW1sX3NoYTI1NiI6IjdiMDU0ZTcxNjkxNGEwYjY5OGE4N2NmZWM0NTQ3ZWYwYjY2NTA0YzFhYTU3YmI0NDkwN2Q0NGE0YzQ3NDgxZWQifV0sImZvcm11bGFzIjpbeyJjYW5vbmljYWxfbGF0ZXgiOiJ6XntcXHRhdX1fe3R9IiwiZm9ybXVsYV9pZCI6IkVRMDA2IiwibGF0ZXhfc2hhMjU2IjoiODEyYjViMWM4YWZkN2FjMjQ3NzlhNDFjOGYyYTRkM2I3NmU4MDJjM2U0OTk0NzcyN2UzZDg5NmFiYjcyZDdmMSIsIm1vZGUiOiJpbmxpbmUiLCJvbW1sX3NoYTI1NiI6IjBiMDljZmVjYTNiZmI3MWUzNGMwZjVmYjZlNjY0NTNlMzAxYWVkYjU3NzliYTUxMWEwZmJkNzQwOWMxZmU3YzUiLCJzZW1hbnRpY19vbW1sX3Byb2ZpbGUiOiJvZmZpY2UtbWF0aC1zZW1hbnRpYy12MiIsInNlbWFudGljX29tbWxfc2hhMjU2IjoiN2IwNTRlNzE2OTE0YTBiNjk4YTg3Y2ZlYzQ1NDdlZjBiNjY1MDRjMWFhNTdiYjQ0OTA3ZDQ0YTRjNDc0ODFlZCJ9XSwia2luZCI6Im5hdGl2ZV9vZmZpY2VfbWF0aCIsInBsYWNlaG9sZGVyX25hbWUiOiJtYXRoOjAwNiIsInNjaGVtYV92ZXJzaW9uIjoiMS4wIn0="/>
+              <p:cNvPr id="114" name="math:006" descr="AI_AUTOFIGURE_MATH_FALLBACK_ONLY_V1:eyJjb250ZW50X3J1bnMiOlt7ImNhbm9uaWNhbF9sYXRleCI6Inpee1xcdGF1fV97dH0iLCJmb3JtdWxhX2lkIjoiRVEwMDYiLCJraW5kIjoibWF0aCIsImxhdGV4X3NoYTI1NiI6IjgxMmI1YjFjOGFmZDdhYzI0Nzc5YTQxYzhmMmE0ZDNiNzZlODAyYzNlNDk5NDc3MjdlM2Q4OTZhYmI3MmQ3ZjEiLCJtb2RlIjoiaW5saW5lIiwib21tbF9zaGEyNTYiOiIwYjA5Y2ZlY2EzYmZiNzFlMzRjMGY1ZmI2ZTY2NDUzZTMwMWFlZGI1Nzc5YmE1MTFhMGZiZDc0MDljMWZlN2M1Iiwic2VtYW50aWNfb21tbF9wcm9maWxlIjoib2ZmaWNlLW1hdGgtc2VtYW50aWMtdjIiLCJzZW1hbnRpY19vbW1sX3NoYTI1NiI6IjdiMDU0ZTcxNjkxNGEwYjY5OGE4N2NmZWM0NTQ3ZWYwYjY2NTA0YzFhYTU3YmI0NDkwN2Q0NGE0YzQ3NDgxZWQifV0sImZvcm11bGFzIjpbeyJjYW5vbmljYWxfbGF0ZXgiOiJ6XntcXHRhdX1fe3R9IiwiZm9ybXVsYV9pZCI6IkVRMDA2IiwibGF0ZXhfc2hhMjU2IjoiODEyYjViMWM4YWZkN2FjMjQ3NzlhNDFjOGYyYTRkM2I3NmU4MDJjM2U0OTk0NzcyN2UzZDg5NmFiYjcyZDdmMSIsIm1vZGUiOiJpbmxpbmUiLCJvbW1sX3NoYTI1NiI6IjBiMDljZmVjYTNiZmI3MWUzNGMwZjVmYjZlNjY0NTNlMzAxYWVkYjU3NzliYTUxMWEwZmJkNzQwOWMxZmU3YzUiLCJzZW1hbnRpY19vbW1sX3Byb2ZpbGUiOiJvZmZpY2UtbWF0aC1zZW1hbnRpYy12MiIsInNlbWFudGljX29tbWxfc2hhMjU2IjoiN2IwNTRlNzE2OTE0YTBiNjk4YTg3Y2ZlYzQ1NDdlZjBiNjY1MDRjMWFhNTdiYjQ0OTA3ZDQ0YTRjNDc0ODFlZCJ9XSwia2luZCI6Im5hdGl2ZV9vZmZpY2VfbWF0aCIsInBsYWNlaG9sZGVyX25hbWUiOiJtYXRoOjAwNiIsInNjaGVtYV92ZXJzaW9uIjoiMS4wIn0="/>
               <p:cNvSpPr txBox="1"/>
               <p:nvPr/>
             </p:nvSpPr>
@@ -8425,7 +8341,7 @@
             </p:spPr>
             <p:txBody>
               <a:bodyPr wrap="none" anchor="t" lIns="0" rIns="0" tIns="0" bIns="0">
-                <a:spAutoFit/>
+                <a:noAutofit/>
               </a:bodyPr>
               <a:lstStyle/>
               <a:p>
@@ -8452,7 +8368,7 @@
         <mc:Choice xmlns:a14="http://schemas.microsoft.com/office/drawing/2010/main" Requires="a14">
           <p:sp>
             <p:nvSpPr>
-              <p:cNvPr id="117" name="math:007" descr="AI_AUTOFIGURE_NATIVE_MATH_V1:eyJjb250ZW50X3J1bnMiOlt7ImNhbm9uaWNhbF9sYXRleCI6Inpee1xcdGF1fV97dCsxfSIsImZvcm11bGFfaWQiOiJFUTAwNyIsImtpbmQiOiJtYXRoIiwibGF0ZXhfc2hhMjU2IjoiMmM1ZTJlMzU3Mzg2MTFkZDE4YzEwNzBlZTQ2YjQ1MGU5YjE0ZGViZDFmYmU3ZDJlYzI0OWQ4OWMxZThmODU5MSIsIm1vZGUiOiJpbmxpbmUiLCJvbW1sX3NoYTI1NiI6IjY2YmY1ZjM0M2NjY2YwNTI1M2NjZGI5ODYxM2Y4NTFjZTYzMmVkOWNmMjBhMjE3MDc5MDUyYWE2NjRlYWQ3ZTkiLCJzZW1hbnRpY19vbW1sX3Byb2ZpbGUiOiJvZmZpY2UtbWF0aC1zZW1hbnRpYy12MiIsInNlbWFudGljX29tbWxfc2hhMjU2IjoiMjMzM2NjYjhkM2RjMTg3N2JiNDFkYzBkMmJlM2NmY2MxMjJjMGZjNDQyMzk3Mzk4YmI0MzlkMWMwNzdhMjY5OCJ9XSwiZm9ybXVsYXMiOlt7ImNhbm9uaWNhbF9sYXRleCI6Inpee1xcdGF1fV97dCsxfSIsImZvcm11bGFfaWQiOiJFUTAwNyIsImxhdGV4X3NoYTI1NiI6IjJjNWUyZTM1NzM4NjExZGQxOGMxMDcwZWU0NmI0NTBlOWIxNGRlYmQxZmJlN2QyZWMyNDlkODljMWU4Zjg1OTEiLCJtb2RlIjoiaW5saW5lIiwib21tbF9zaGEyNTYiOiI2NmJmNWYzNDNjY2NmMDUyNTNjY2RiOTg2MTNmODUxY2U2MzJlZDljZjIwYTIxNzA3OTA1MmFhNjY0ZWFkN2U5Iiwic2VtYW50aWNfb21tbF9wcm9maWxlIjoib2ZmaWNlLW1hdGgtc2VtYW50aWMtdjIiLCJzZW1hbnRpY19vbW1sX3NoYTI1NiI6IjIzMzNjY2I4ZDNkYzE4NzdiYjQxZGMwZDJiZTNjZmNjMTIyYzBmYzQ0MjM5NzM5OGJiNDM5ZDFjMDc3YTI2OTgifV0sImtpbmQiOiJuYXRpdmVfb2ZmaWNlX21hdGgiLCJwbGFjZWhvbGRlcl9uYW1lIjoibWF0aDowMDciLCJzY2hlbWFfdmVyc2lvbiI6IjEuMCJ9"/>
+              <p:cNvPr id="115" name="math:007" descr="AI_AUTOFIGURE_NATIVE_MATH_V1:eyJjb250ZW50X3J1bnMiOlt7ImNhbm9uaWNhbF9sYXRleCI6Inpee1xcdGF1fV97dCsxfSIsImZvcm11bGFfaWQiOiJFUTAwNyIsImtpbmQiOiJtYXRoIiwibGF0ZXhfc2hhMjU2IjoiMmM1ZTJlMzU3Mzg2MTFkZDE4YzEwNzBlZTQ2YjQ1MGU5YjE0ZGViZDFmYmU3ZDJlYzI0OWQ4OWMxZThmODU5MSIsIm1vZGUiOiJpbmxpbmUiLCJvbW1sX3NoYTI1NiI6IjY2YmY1ZjM0M2NjY2YwNTI1M2NjZGI5ODYxM2Y4NTFjZTYzMmVkOWNmMjBhMjE3MDc5MDUyYWE2NjRlYWQ3ZTkiLCJzZW1hbnRpY19vbW1sX3Byb2ZpbGUiOiJvZmZpY2UtbWF0aC1zZW1hbnRpYy12MiIsInNlbWFudGljX29tbWxfc2hhMjU2IjoiMjMzM2NjYjhkM2RjMTg3N2JiNDFkYzBkMmJlM2NmY2MxMjJjMGZjNDQyMzk3Mzk4YmI0MzlkMWMwNzdhMjY5OCJ9XSwiZm9ybXVsYXMiOlt7ImNhbm9uaWNhbF9sYXRleCI6Inpee1xcdGF1fV97dCsxfSIsImZvcm11bGFfaWQiOiJFUTAwNyIsImxhdGV4X3NoYTI1NiI6IjJjNWUyZTM1NzM4NjExZGQxOGMxMDcwZWU0NmI0NTBlOWIxNGRlYmQxZmJlN2QyZWMyNDlkODljMWU4Zjg1OTEiLCJtb2RlIjoiaW5saW5lIiwib21tbF9zaGEyNTYiOiI2NmJmNWYzNDNjY2NmMDUyNTNjY2RiOTg2MTNmODUxY2U2MzJlZDljZjIwYTIxNzA3OTA1MmFhNjY0ZWFkN2U5Iiwic2VtYW50aWNfb21tbF9wcm9maWxlIjoib2ZmaWNlLW1hdGgtc2VtYW50aWMtdjIiLCJzZW1hbnRpY19vbW1sX3NoYTI1NiI6IjIzMzNjY2I4ZDNkYzE4NzdiYjQxZGMwZDJiZTNjZmNjMTIyYzBmYzQ0MjM5NzM5OGJiNDM5ZDFjMDc3YTI2OTgifV0sImtpbmQiOiJuYXRpdmVfb2ZmaWNlX21hdGgiLCJwbGFjZWhvbGRlcl9uYW1lIjoibWF0aDowMDciLCJzY2hlbWFfdmVyc2lvbiI6IjEuMCJ9"/>
               <p:cNvSpPr txBox="1"/>
               <p:nvPr/>
             </p:nvSpPr>
@@ -8469,7 +8385,7 @@
             </p:spPr>
             <p:txBody>
               <a:bodyPr wrap="none" anchor="t" lIns="0" rIns="0" tIns="0" bIns="0">
-                <a:spAutoFit/>
+                <a:noAutofit/>
               </a:bodyPr>
               <a:lstStyle/>
               <a:p>
@@ -8526,7 +8442,7 @@
         <mc:Fallback>
           <p:sp>
             <p:nvSpPr>
-              <p:cNvPr id="117" name="math:007" descr="AI_AUTOFIGURE_MATH_FALLBACK_ONLY_V1:eyJjb250ZW50X3J1bnMiOlt7ImNhbm9uaWNhbF9sYXRleCI6Inpee1xcdGF1fV97dCsxfSIsImZvcm11bGFfaWQiOiJFUTAwNyIsImtpbmQiOiJtYXRoIiwibGF0ZXhfc2hhMjU2IjoiMmM1ZTJlMzU3Mzg2MTFkZDE4YzEwNzBlZTQ2YjQ1MGU5YjE0ZGViZDFmYmU3ZDJlYzI0OWQ4OWMxZThmODU5MSIsIm1vZGUiOiJpbmxpbmUiLCJvbW1sX3NoYTI1NiI6IjY2YmY1ZjM0M2NjY2YwNTI1M2NjZGI5ODYxM2Y4NTFjZTYzMmVkOWNmMjBhMjE3MDc5MDUyYWE2NjRlYWQ3ZTkiLCJzZW1hbnRpY19vbW1sX3Byb2ZpbGUiOiJvZmZpY2UtbWF0aC1zZW1hbnRpYy12MiIsInNlbWFudGljX29tbWxfc2hhMjU2IjoiMjMzM2NjYjhkM2RjMTg3N2JiNDFkYzBkMmJlM2NmY2MxMjJjMGZjNDQyMzk3Mzk4YmI0MzlkMWMwNzdhMjY5OCJ9XSwiZm9ybXVsYXMiOlt7ImNhbm9uaWNhbF9sYXRleCI6Inpee1xcdGF1fV97dCsxfSIsImZvcm11bGFfaWQiOiJFUTAwNyIsImxhdGV4X3NoYTI1NiI6IjJjNWUyZTM1NzM4NjExZGQxOGMxMDcwZWU0NmI0NTBlOWIxNGRlYmQxZmJlN2QyZWMyNDlkODljMWU4Zjg1OTEiLCJtb2RlIjoiaW5saW5lIiwib21tbF9zaGEyNTYiOiI2NmJmNWYzNDNjY2NmMDUyNTNjY2RiOTg2MTNmODUxY2U2MzJlZDljZjIwYTIxNzA3OTA1MmFhNjY0ZWFkN2U5Iiwic2VtYW50aWNfb21tbF9wcm9maWxlIjoib2ZmaWNlLW1hdGgtc2VtYW50aWMtdjIiLCJzZW1hbnRpY19vbW1sX3NoYTI1NiI6IjIzMzNjY2I4ZDNkYzE4NzdiYjQxZGMwZDJiZTNjZmNjMTIyYzBmYzQ0MjM5NzM5OGJiNDM5ZDFjMDc3YTI2OTgifV0sImtpbmQiOiJuYXRpdmVfb2ZmaWNlX21hdGgiLCJwbGFjZWhvbGRlcl9uYW1lIjoibWF0aDowMDciLCJzY2hlbWFfdmVyc2lvbiI6IjEuMCJ9"/>
+              <p:cNvPr id="115" name="math:007" descr="AI_AUTOFIGURE_MATH_FALLBACK_ONLY_V1:eyJjb250ZW50X3J1bnMiOlt7ImNhbm9uaWNhbF9sYXRleCI6Inpee1xcdGF1fV97dCsxfSIsImZvcm11bGFfaWQiOiJFUTAwNyIsImtpbmQiOiJtYXRoIiwibGF0ZXhfc2hhMjU2IjoiMmM1ZTJlMzU3Mzg2MTFkZDE4YzEwNzBlZTQ2YjQ1MGU5YjE0ZGViZDFmYmU3ZDJlYzI0OWQ4OWMxZThmODU5MSIsIm1vZGUiOiJpbmxpbmUiLCJvbW1sX3NoYTI1NiI6IjY2YmY1ZjM0M2NjY2YwNTI1M2NjZGI5ODYxM2Y4NTFjZTYzMmVkOWNmMjBhMjE3MDc5MDUyYWE2NjRlYWQ3ZTkiLCJzZW1hbnRpY19vbW1sX3Byb2ZpbGUiOiJvZmZpY2UtbWF0aC1zZW1hbnRpYy12MiIsInNlbWFudGljX29tbWxfc2hhMjU2IjoiMjMzM2NjYjhkM2RjMTg3N2JiNDFkYzBkMmJlM2NmY2MxMjJjMGZjNDQyMzk3Mzk4YmI0MzlkMWMwNzdhMjY5OCJ9XSwiZm9ybXVsYXMiOlt7ImNhbm9uaWNhbF9sYXRleCI6Inpee1xcdGF1fV97dCsxfSIsImZvcm11bGFfaWQiOiJFUTAwNyIsImxhdGV4X3NoYTI1NiI6IjJjNWUyZTM1NzM4NjExZGQxOGMxMDcwZWU0NmI0NTBlOWIxNGRlYmQxZmJlN2QyZWMyNDlkODljMWU4Zjg1OTEiLCJtb2RlIjoiaW5saW5lIiwib21tbF9zaGEyNTYiOiI2NmJmNWYzNDNjY2NmMDUyNTNjY2RiOTg2MTNmODUxY2U2MzJlZDljZjIwYTIxNzA3OTA1MmFhNjY0ZWFkN2U5Iiwic2VtYW50aWNfb21tbF9wcm9maWxlIjoib2ZmaWNlLW1hdGgtc2VtYW50aWMtdjIiLCJzZW1hbnRpY19vbW1sX3NoYTI1NiI6IjIzMzNjY2I4ZDNkYzE4NzdiYjQxZGMwZDJiZTNjZmNjMTIyYzBmYzQ0MjM5NzM5OGJiNDM5ZDFjMDc3YTI2OTgifV0sImtpbmQiOiJuYXRpdmVfb2ZmaWNlX21hdGgiLCJwbGFjZWhvbGRlcl9uYW1lIjoibWF0aDowMDciLCJzY2hlbWFfdmVyc2lvbiI6IjEuMCJ9"/>
               <p:cNvSpPr txBox="1"/>
               <p:nvPr/>
             </p:nvSpPr>
@@ -8543,7 +8459,7 @@
             </p:spPr>
             <p:txBody>
               <a:bodyPr wrap="none" anchor="t" lIns="0" rIns="0" tIns="0" bIns="0">
-                <a:spAutoFit/>
+                <a:noAutofit/>
               </a:bodyPr>
               <a:lstStyle/>
               <a:p>
@@ -8570,7 +8486,7 @@
         <mc:Choice xmlns:a14="http://schemas.microsoft.com/office/drawing/2010/main" Requires="a14">
           <p:sp>
             <p:nvSpPr>
-              <p:cNvPr id="118" name="math:008" descr="AI_AUTOFIGURE_NATIVE_MATH_V1:eyJjb250ZW50X3J1bnMiOlt7ImNhbm9uaWNhbF9sYXRleCI6Inpee1xcdGF1fV97dCsyfSIsImZvcm11bGFfaWQiOiJFUTAwOCIsImtpbmQiOiJtYXRoIiwibGF0ZXhfc2hhMjU2IjoiZjE3MjkyMTZjNmIzNGI3ODc1N2JhN2I1NThmZTBlZjUzN2Q5YjM2ZTg1ZmY4NmE0ZTA0NjQ5ZmI5OTFmMWE0ZiIsIm1vZGUiOiJpbmxpbmUiLCJvbW1sX3NoYTI1NiI6IjU4YTU0YjQ2NDc2NGExYWVlOWMxNDQ1NTdjNjRhMjAxYjBjOGY5Zjk2MDE0ZjVlNDkwNmJhOTM4NDEzZjFmNDUiLCJzZW1hbnRpY19vbW1sX3Byb2ZpbGUiOiJvZmZpY2UtbWF0aC1zZW1hbnRpYy12MiIsInNlbWFudGljX29tbWxfc2hhMjU2IjoiMTc4YzVhMDM3MDY3NGFjYzc2NGI3OGYxNWExMGU0MmM5ZTNlZTRjZmZlY2Y5NjU5ZjgzMzViMjZlNzMyZmZmZSJ9XSwiZm9ybXVsYXMiOlt7ImNhbm9uaWNhbF9sYXRleCI6Inpee1xcdGF1fV97dCsyfSIsImZvcm11bGFfaWQiOiJFUTAwOCIsImxhdGV4X3NoYTI1NiI6ImYxNzI5MjE2YzZiMzRiNzg3NTdiYTdiNTU4ZmUwZWY1MzdkOWIzNmU4NWZmODZhNGUwNDY0OWZiOTkxZjFhNGYiLCJtb2RlIjoiaW5saW5lIiwib21tbF9zaGEyNTYiOiI1OGE1NGI0NjQ3NjRhMWFlZTljMTQ0NTU3YzY0YTIwMWIwYzhmOWY5NjAxNGY1ZTQ5MDZiYTkzODQxM2YxZjQ1Iiwic2VtYW50aWNfb21tbF9wcm9maWxlIjoib2ZmaWNlLW1hdGgtc2VtYW50aWMtdjIiLCJzZW1hbnRpY19vbW1sX3NoYTI1NiI6IjE3OGM1YTAzNzA2NzRhY2M3NjRiNzhmMTVhMTBlNDJjOWUzZWU0Y2ZmZWNmOTY1OWY4MzM1YjI2ZTczMmZmZmUifV0sImtpbmQiOiJuYXRpdmVfb2ZmaWNlX21hdGgiLCJwbGFjZWhvbGRlcl9uYW1lIjoibWF0aDowMDgiLCJzY2hlbWFfdmVyc2lvbiI6IjEuMCJ9"/>
+              <p:cNvPr id="116" name="math:008" descr="AI_AUTOFIGURE_NATIVE_MATH_V1:eyJjb250ZW50X3J1bnMiOlt7ImNhbm9uaWNhbF9sYXRleCI6Inpee1xcdGF1fV97dCsyfSIsImZvcm11bGFfaWQiOiJFUTAwOCIsImtpbmQiOiJtYXRoIiwibGF0ZXhfc2hhMjU2IjoiZjE3MjkyMTZjNmIzNGI3ODc1N2JhN2I1NThmZTBlZjUzN2Q5YjM2ZTg1ZmY4NmE0ZTA0NjQ5ZmI5OTFmMWE0ZiIsIm1vZGUiOiJpbmxpbmUiLCJvbW1sX3NoYTI1NiI6IjU4YTU0YjQ2NDc2NGExYWVlOWMxNDQ1NTdjNjRhMjAxYjBjOGY5Zjk2MDE0ZjVlNDkwNmJhOTM4NDEzZjFmNDUiLCJzZW1hbnRpY19vbW1sX3Byb2ZpbGUiOiJvZmZpY2UtbWF0aC1zZW1hbnRpYy12MiIsInNlbWFudGljX29tbWxfc2hhMjU2IjoiMTc4YzVhMDM3MDY3NGFjYzc2NGI3OGYxNWExMGU0MmM5ZTNlZTRjZmZlY2Y5NjU5ZjgzMzViMjZlNzMyZmZmZSJ9XSwiZm9ybXVsYXMiOlt7ImNhbm9uaWNhbF9sYXRleCI6Inpee1xcdGF1fV97dCsyfSIsImZvcm11bGFfaWQiOiJFUTAwOCIsImxhdGV4X3NoYTI1NiI6ImYxNzI5MjE2YzZiMzRiNzg3NTdiYTdiNTU4ZmUwZWY1MzdkOWIzNmU4NWZmODZhNGUwNDY0OWZiOTkxZjFhNGYiLCJtb2RlIjoiaW5saW5lIiwib21tbF9zaGEyNTYiOiI1OGE1NGI0NjQ3NjRhMWFlZTljMTQ0NTU3YzY0YTIwMWIwYzhmOWY5NjAxNGY1ZTQ5MDZiYTkzODQxM2YxZjQ1Iiwic2VtYW50aWNfb21tbF9wcm9maWxlIjoib2ZmaWNlLW1hdGgtc2VtYW50aWMtdjIiLCJzZW1hbnRpY19vbW1sX3NoYTI1NiI6IjE3OGM1YTAzNzA2NzRhY2M3NjRiNzhmMTVhMTBlNDJjOWUzZWU0Y2ZmZWNmOTY1OWY4MzM1YjI2ZTczMmZmZmUifV0sImtpbmQiOiJuYXRpdmVfb2ZmaWNlX21hdGgiLCJwbGFjZWhvbGRlcl9uYW1lIjoibWF0aDowMDgiLCJzY2hlbWFfdmVyc2lvbiI6IjEuMCJ9"/>
               <p:cNvSpPr txBox="1"/>
               <p:nvPr/>
             </p:nvSpPr>
@@ -8587,7 +8503,7 @@
             </p:spPr>
             <p:txBody>
               <a:bodyPr wrap="none" anchor="t" lIns="0" rIns="0" tIns="0" bIns="0">
-                <a:spAutoFit/>
+                <a:noAutofit/>
               </a:bodyPr>
               <a:lstStyle/>
               <a:p>
@@ -8644,7 +8560,7 @@
         <mc:Fallback>
           <p:sp>
             <p:nvSpPr>
-              <p:cNvPr id="118" name="math:008" descr="AI_AUTOFIGURE_MATH_FALLBACK_ONLY_V1:eyJjb250ZW50X3J1bnMiOlt7ImNhbm9uaWNhbF9sYXRleCI6Inpee1xcdGF1fV97dCsyfSIsImZvcm11bGFfaWQiOiJFUTAwOCIsImtpbmQiOiJtYXRoIiwibGF0ZXhfc2hhMjU2IjoiZjE3MjkyMTZjNmIzNGI3ODc1N2JhN2I1NThmZTBlZjUzN2Q5YjM2ZTg1ZmY4NmE0ZTA0NjQ5ZmI5OTFmMWE0ZiIsIm1vZGUiOiJpbmxpbmUiLCJvbW1sX3NoYTI1NiI6IjU4YTU0YjQ2NDc2NGExYWVlOWMxNDQ1NTdjNjRhMjAxYjBjOGY5Zjk2MDE0ZjVlNDkwNmJhOTM4NDEzZjFmNDUiLCJzZW1hbnRpY19vbW1sX3Byb2ZpbGUiOiJvZmZpY2UtbWF0aC1zZW1hbnRpYy12MiIsInNlbWFudGljX29tbWxfc2hhMjU2IjoiMTc4YzVhMDM3MDY3NGFjYzc2NGI3OGYxNWExMGU0MmM5ZTNlZTRjZmZlY2Y5NjU5ZjgzMzViMjZlNzMyZmZmZSJ9XSwiZm9ybXVsYXMiOlt7ImNhbm9uaWNhbF9sYXRleCI6Inpee1xcdGF1fV97dCsyfSIsImZvcm11bGFfaWQiOiJFUTAwOCIsImxhdGV4X3NoYTI1NiI6ImYxNzI5MjE2YzZiMzRiNzg3NTdiYTdiNTU4ZmUwZWY1MzdkOWIzNmU4NWZmODZhNGUwNDY0OWZiOTkxZjFhNGYiLCJtb2RlIjoiaW5saW5lIiwib21tbF9zaGEyNTYiOiI1OGE1NGI0NjQ3NjRhMWFlZTljMTQ0NTU3YzY0YTIwMWIwYzhmOWY5NjAxNGY1ZTQ5MDZiYTkzODQxM2YxZjQ1Iiwic2VtYW50aWNfb21tbF9wcm9maWxlIjoib2ZmaWNlLW1hdGgtc2VtYW50aWMtdjIiLCJzZW1hbnRpY19vbW1sX3NoYTI1NiI6IjE3OGM1YTAzNzA2NzRhY2M3NjRiNzhmMTVhMTBlNDJjOWUzZWU0Y2ZmZWNmOTY1OWY4MzM1YjI2ZTczMmZmZmUifV0sImtpbmQiOiJuYXRpdmVfb2ZmaWNlX21hdGgiLCJwbGFjZWhvbGRlcl9uYW1lIjoibWF0aDowMDgiLCJzY2hlbWFfdmVyc2lvbiI6IjEuMCJ9"/>
+              <p:cNvPr id="116" name="math:008" descr="AI_AUTOFIGURE_MATH_FALLBACK_ONLY_V1:eyJjb250ZW50X3J1bnMiOlt7ImNhbm9uaWNhbF9sYXRleCI6Inpee1xcdGF1fV97dCsyfSIsImZvcm11bGFfaWQiOiJFUTAwOCIsImtpbmQiOiJtYXRoIiwibGF0ZXhfc2hhMjU2IjoiZjE3MjkyMTZjNmIzNGI3ODc1N2JhN2I1NThmZTBlZjUzN2Q5YjM2ZTg1ZmY4NmE0ZTA0NjQ5ZmI5OTFmMWE0ZiIsIm1vZGUiOiJpbmxpbmUiLCJvbW1sX3NoYTI1NiI6IjU4YTU0YjQ2NDc2NGExYWVlOWMxNDQ1NTdjNjRhMjAxYjBjOGY5Zjk2MDE0ZjVlNDkwNmJhOTM4NDEzZjFmNDUiLCJzZW1hbnRpY19vbW1sX3Byb2ZpbGUiOiJvZmZpY2UtbWF0aC1zZW1hbnRpYy12MiIsInNlbWFudGljX29tbWxfc2hhMjU2IjoiMTc4YzVhMDM3MDY3NGFjYzc2NGI3OGYxNWExMGU0MmM5ZTNlZTRjZmZlY2Y5NjU5ZjgzMzViMjZlNzMyZmZmZSJ9XSwiZm9ybXVsYXMiOlt7ImNhbm9uaWNhbF9sYXRleCI6Inpee1xcdGF1fV97dCsyfSIsImZvcm11bGFfaWQiOiJFUTAwOCIsImxhdGV4X3NoYTI1NiI6ImYxNzI5MjE2YzZiMzRiNzg3NTdiYTdiNTU4ZmUwZWY1MzdkOWIzNmU4NWZmODZhNGUwNDY0OWZiOTkxZjFhNGYiLCJtb2RlIjoiaW5saW5lIiwib21tbF9zaGEyNTYiOiI1OGE1NGI0NjQ3NjRhMWFlZTljMTQ0NTU3YzY0YTIwMWIwYzhmOWY5NjAxNGY1ZTQ5MDZiYTkzODQxM2YxZjQ1Iiwic2VtYW50aWNfb21tbF9wcm9maWxlIjoib2ZmaWNlLW1hdGgtc2VtYW50aWMtdjIiLCJzZW1hbnRpY19vbW1sX3NoYTI1NiI6IjE3OGM1YTAzNzA2NzRhY2M3NjRiNzhmMTVhMTBlNDJjOWUzZWU0Y2ZmZWNmOTY1OWY4MzM1YjI2ZTczMmZmZmUifV0sImtpbmQiOiJuYXRpdmVfb2ZmaWNlX21hdGgiLCJwbGFjZWhvbGRlcl9uYW1lIjoibWF0aDowMDgiLCJzY2hlbWFfdmVyc2lvbiI6IjEuMCJ9"/>
               <p:cNvSpPr txBox="1"/>
               <p:nvPr/>
             </p:nvSpPr>
@@ -8661,7 +8577,7 @@
             </p:spPr>
             <p:txBody>
               <a:bodyPr wrap="none" anchor="t" lIns="0" rIns="0" tIns="0" bIns="0">
-                <a:spAutoFit/>
+                <a:noAutofit/>
               </a:bodyPr>
               <a:lstStyle/>
               <a:p>
@@ -8686,7 +8602,7 @@
       </mc:AlternateContent>
       <p:sp>
         <p:nvSpPr>
-          <p:cNvPr id="119" name="af-imag-dots-text-01"/>
+          <p:cNvPr id="117" name="af-imag-dots-text-01" descr="{&quot;autofigure_element_id&quot;:&quot;imag-dots&quot;}"/>
           <p:cNvSpPr txBox="1"/>
           <p:nvPr/>
         </p:nvSpPr>
@@ -8703,7 +8619,7 @@
         </p:spPr>
         <p:txBody>
           <a:bodyPr wrap="none" anchor="t" lIns="0" rIns="0" tIns="0" bIns="0">
-            <a:spAutoFit/>
+            <a:noAutofit/>
           </a:bodyPr>
           <a:lstStyle/>
           <a:p>
@@ -8724,7 +8640,7 @@
         <mc:Choice xmlns:a14="http://schemas.microsoft.com/office/drawing/2010/main" Requires="a14">
           <p:sp>
             <p:nvSpPr>
-              <p:cNvPr id="120" name="math:009" descr="AI_AUTOFIGURE_NATIVE_MATH_V1:eyJjb250ZW50X3J1bnMiOlt7ImNhbm9uaWNhbF9sYXRleCI6Inpee1xcdGF1fV97dCtofSIsImZvcm11bGFfaWQiOiJFUTAwOSIsImtpbmQiOiJtYXRoIiwibGF0ZXhfc2hhMjU2IjoiMTQ0MmExOTZjN2U5OWJhNTk2OTVjZTY3YzMyNTcyMjgzYjAyZmZlYjg4NDZhMDIxOTY0MDdiY2JiMjQzZjJkYSIsIm1vZGUiOiJpbmxpbmUiLCJvbW1sX3NoYTI1NiI6IjFkMGY2MzMyZDYwMTgwZTEwZTI4MDg1NDA1YmI5ZDc0Y2E2Mzg2NDllNmExOTBiOGE2Mjc1MzZmZmMxMjU4NzEiLCJzZW1hbnRpY19vbW1sX3Byb2ZpbGUiOiJvZmZpY2UtbWF0aC1zZW1hbnRpYy12MiIsInNlbWFudGljX29tbWxfc2hhMjU2IjoiMDM1YjgxMTU3MDY0NWY2YWY4ZGZhYTViMGM3Yzk4N2I2N2E3YmE0OWUxOGE4NWU5MDRjMzhiY2RjODViYWRlOCJ9XSwiZm9ybXVsYXMiOlt7ImNhbm9uaWNhbF9sYXRleCI6Inpee1xcdGF1fV97dCtofSIsImZvcm11bGFfaWQiOiJFUTAwOSIsImxhdGV4X3NoYTI1NiI6IjE0NDJhMTk2YzdlOTliYTU5Njk1Y2U2N2MzMjU3MjI4M2IwMmZmZWI4ODQ2YTAyMTk2NDA3YmNiYjI0M2YyZGEiLCJtb2RlIjoiaW5saW5lIiwib21tbF9zaGEyNTYiOiIxZDBmNjMzMmQ2MDE4MGUxMGUyODA4NTQwNWJiOWQ3NGNhNjM4NjQ5ZTZhMTkwYjhhNjI3NTM2ZmZjMTI1ODcxIiwic2VtYW50aWNfb21tbF9wcm9maWxlIjoib2ZmaWNlLW1hdGgtc2VtYW50aWMtdjIiLCJzZW1hbnRpY19vbW1sX3NoYTI1NiI6IjAzNWI4MTE1NzA2NDVmNmFmOGRmYWE1YjBjN2M5ODdiNjdhN2JhNDllMThhODVlOTA0YzM4YmNkYzg1YmFkZTgifV0sImtpbmQiOiJuYXRpdmVfb2ZmaWNlX21hdGgiLCJwbGFjZWhvbGRlcl9uYW1lIjoibWF0aDowMDkiLCJzY2hlbWFfdmVyc2lvbiI6IjEuMCJ9"/>
+              <p:cNvPr id="118" name="math:009" descr="AI_AUTOFIGURE_NATIVE_MATH_V1:eyJjb250ZW50X3J1bnMiOlt7ImNhbm9uaWNhbF9sYXRleCI6Inpee1xcdGF1fV97dCtofSIsImZvcm11bGFfaWQiOiJFUTAwOSIsImtpbmQiOiJtYXRoIiwibGF0ZXhfc2hhMjU2IjoiMTQ0MmExOTZjN2U5OWJhNTk2OTVjZTY3YzMyNTcyMjgzYjAyZmZlYjg4NDZhMDIxOTY0MDdiY2JiMjQzZjJkYSIsIm1vZGUiOiJpbmxpbmUiLCJvbW1sX3NoYTI1NiI6IjFkMGY2MzMyZDYwMTgwZTEwZTI4MDg1NDA1YmI5ZDc0Y2E2Mzg2NDllNmExOTBiOGE2Mjc1MzZmZmMxMjU4NzEiLCJzZW1hbnRpY19vbW1sX3Byb2ZpbGUiOiJvZmZpY2UtbWF0aC1zZW1hbnRpYy12MiIsInNlbWFudGljX29tbWxfc2hhMjU2IjoiMDM1YjgxMTU3MDY0NWY2YWY4ZGZhYTViMGM3Yzk4N2I2N2E3YmE0OWUxOGE4NWU5MDRjMzhiY2RjODViYWRlOCJ9XSwiZm9ybXVsYXMiOlt7ImNhbm9uaWNhbF9sYXRleCI6Inpee1xcdGF1fV97dCtofSIsImZvcm11bGFfaWQiOiJFUTAwOSIsImxhdGV4X3NoYTI1NiI6IjE0NDJhMTk2YzdlOTliYTU5Njk1Y2U2N2MzMjU3MjI4M2IwMmZmZWI4ODQ2YTAyMTk2NDA3YmNiYjI0M2YyZGEiLCJtb2RlIjoiaW5saW5lIiwib21tbF9zaGEyNTYiOiIxZDBmNjMzMmQ2MDE4MGUxMGUyODA4NTQwNWJiOWQ3NGNhNjM4NjQ5ZTZhMTkwYjhhNjI3NTM2ZmZjMTI1ODcxIiwic2VtYW50aWNfb21tbF9wcm9maWxlIjoib2ZmaWNlLW1hdGgtc2VtYW50aWMtdjIiLCJzZW1hbnRpY19vbW1sX3NoYTI1NiI6IjAzNWI4MTE1NzA2NDVmNmFmOGRmYWE1YjBjN2M5ODdiNjdhN2JhNDllMThhODVlOTA0YzM4YmNkYzg1YmFkZTgifV0sImtpbmQiOiJuYXRpdmVfb2ZmaWNlX21hdGgiLCJwbGFjZWhvbGRlcl9uYW1lIjoibWF0aDowMDkiLCJzY2hlbWFfdmVyc2lvbiI6IjEuMCJ9"/>
               <p:cNvSpPr txBox="1"/>
               <p:nvPr/>
             </p:nvSpPr>
@@ -8741,7 +8657,7 @@
             </p:spPr>
             <p:txBody>
               <a:bodyPr wrap="none" anchor="t" lIns="0" rIns="0" tIns="0" bIns="0">
-                <a:spAutoFit/>
+                <a:noAutofit/>
               </a:bodyPr>
               <a:lstStyle/>
               <a:p>
@@ -8798,7 +8714,7 @@
         <mc:Fallback>
           <p:sp>
             <p:nvSpPr>
-              <p:cNvPr id="120" name="math:009" descr="AI_AUTOFIGURE_MATH_FALLBACK_ONLY_V1:eyJjb250ZW50X3J1bnMiOlt7ImNhbm9uaWNhbF9sYXRleCI6Inpee1xcdGF1fV97dCtofSIsImZvcm11bGFfaWQiOiJFUTAwOSIsImtpbmQiOiJtYXRoIiwibGF0ZXhfc2hhMjU2IjoiMTQ0MmExOTZjN2U5OWJhNTk2OTVjZTY3YzMyNTcyMjgzYjAyZmZlYjg4NDZhMDIxOTY0MDdiY2JiMjQzZjJkYSIsIm1vZGUiOiJpbmxpbmUiLCJvbW1sX3NoYTI1NiI6IjFkMGY2MzMyZDYwMTgwZTEwZTI4MDg1NDA1YmI5ZDc0Y2E2Mzg2NDllNmExOTBiOGE2Mjc1MzZmZmMxMjU4NzEiLCJzZW1hbnRpY19vbW1sX3Byb2ZpbGUiOiJvZmZpY2UtbWF0aC1zZW1hbnRpYy12MiIsInNlbWFudGljX29tbWxfc2hhMjU2IjoiMDM1YjgxMTU3MDY0NWY2YWY4ZGZhYTViMGM3Yzk4N2I2N2E3YmE0OWUxOGE4NWU5MDRjMzhiY2RjODViYWRlOCJ9XSwiZm9ybXVsYXMiOlt7ImNhbm9uaWNhbF9sYXRleCI6Inpee1xcdGF1fV97dCtofSIsImZvcm11bGFfaWQiOiJFUTAwOSIsImxhdGV4X3NoYTI1NiI6IjE0NDJhMTk2YzdlOTliYTU5Njk1Y2U2N2MzMjU3MjI4M2IwMmZmZWI4ODQ2YTAyMTk2NDA3YmNiYjI0M2YyZGEiLCJtb2RlIjoiaW5saW5lIiwib21tbF9zaGEyNTYiOiIxZDBmNjMzMmQ2MDE4MGUxMGUyODA4NTQwNWJiOWQ3NGNhNjM4NjQ5ZTZhMTkwYjhhNjI3NTM2ZmZjMTI1ODcxIiwic2VtYW50aWNfb21tbF9wcm9maWxlIjoib2ZmaWNlLW1hdGgtc2VtYW50aWMtdjIiLCJzZW1hbnRpY19vbW1sX3NoYTI1NiI6IjAzNWI4MTE1NzA2NDVmNmFmOGRmYWE1YjBjN2M5ODdiNjdhN2JhNDllMThhODVlOTA0YzM4YmNkYzg1YmFkZTgifV0sImtpbmQiOiJuYXRpdmVfb2ZmaWNlX21hdGgiLCJwbGFjZWhvbGRlcl9uYW1lIjoibWF0aDowMDkiLCJzY2hlbWFfdmVyc2lvbiI6IjEuMCJ9"/>
+              <p:cNvPr id="118" name="math:009" descr="AI_AUTOFIGURE_MATH_FALLBACK_ONLY_V1:eyJjb250ZW50X3J1bnMiOlt7ImNhbm9uaWNhbF9sYXRleCI6Inpee1xcdGF1fV97dCtofSIsImZvcm11bGFfaWQiOiJFUTAwOSIsImtpbmQiOiJtYXRoIiwibGF0ZXhfc2hhMjU2IjoiMTQ0MmExOTZjN2U5OWJhNTk2OTVjZTY3YzMyNTcyMjgzYjAyZmZlYjg4NDZhMDIxOTY0MDdiY2JiMjQzZjJkYSIsIm1vZGUiOiJpbmxpbmUiLCJvbW1sX3NoYTI1NiI6IjFkMGY2MzMyZDYwMTgwZTEwZTI4MDg1NDA1YmI5ZDc0Y2E2Mzg2NDllNmExOTBiOGE2Mjc1MzZmZmMxMjU4NzEiLCJzZW1hbnRpY19vbW1sX3Byb2ZpbGUiOiJvZmZpY2UtbWF0aC1zZW1hbnRpYy12MiIsInNlbWFudGljX29tbWxfc2hhMjU2IjoiMDM1YjgxMTU3MDY0NWY2YWY4ZGZhYTViMGM3Yzk4N2I2N2E3YmE0OWUxOGE4NWU5MDRjMzhiY2RjODViYWRlOCJ9XSwiZm9ybXVsYXMiOlt7ImNhbm9uaWNhbF9sYXRleCI6Inpee1xcdGF1fV97dCtofSIsImZvcm11bGFfaWQiOiJFUTAwOSIsImxhdGV4X3NoYTI1NiI6IjE0NDJhMTk2YzdlOTliYTU5Njk1Y2U2N2MzMjU3MjI4M2IwMmZmZWI4ODQ2YTAyMTk2NDA3YmNiYjI0M2YyZGEiLCJtb2RlIjoiaW5saW5lIiwib21tbF9zaGEyNTYiOiIxZDBmNjMzMmQ2MDE4MGUxMGUyODA4NTQwNWJiOWQ3NGNhNjM4NjQ5ZTZhMTkwYjhhNjI3NTM2ZmZjMTI1ODcxIiwic2VtYW50aWNfb21tbF9wcm9maWxlIjoib2ZmaWNlLW1hdGgtc2VtYW50aWMtdjIiLCJzZW1hbnRpY19vbW1sX3NoYTI1NiI6IjAzNWI4MTE1NzA2NDVmNmFmOGRmYWE1YjBjN2M5ODdiNjdhN2JhNDllMThhODVlOTA0YzM4YmNkYzg1YmFkZTgifV0sImtpbmQiOiJuYXRpdmVfb2ZmaWNlX21hdGgiLCJwbGFjZWhvbGRlcl9uYW1lIjoibWF0aDowMDkiLCJzY2hlbWFfdmVyc2lvbiI6IjEuMCJ9"/>
               <p:cNvSpPr txBox="1"/>
               <p:nvPr/>
             </p:nvSpPr>
@@ -8815,7 +8731,7 @@
             </p:spPr>
             <p:txBody>
               <a:bodyPr wrap="none" anchor="t" lIns="0" rIns="0" tIns="0" bIns="0">
-                <a:spAutoFit/>
+                <a:noAutofit/>
               </a:bodyPr>
               <a:lstStyle/>
               <a:p>
@@ -8840,7 +8756,7 @@
       </mc:AlternateContent>
       <p:sp>
         <p:nvSpPr>
-          <p:cNvPr id="121" name="af-rollout-panel-rect-01"/>
+          <p:cNvPr id="119" name="af-rollout-panel-rect-01" descr="{&quot;autofigure_element_id&quot;:&quot;rollout-panel&quot;}"/>
           <p:cNvSpPr/>
           <p:nvPr/>
         </p:nvSpPr>
@@ -8861,6 +8777,7 @@
             <a:solidFill>
               <a:srgbClr val="19365F"/>
             </a:solidFill>
+            <a:miter/>
           </a:ln>
           <a:effectLst/>
         </p:spPr>
@@ -8886,9 +8803,214 @@
           </a:p>
         </p:txBody>
       </p:sp>
-      <p:sp>
-        <p:nvSpPr>
-          <p:cNvPr id="122" name="af-rollout-z0-rect-01"/>
+      <p:cxnSp>
+        <p:nvCxnSpPr>
+          <p:cNvPr id="120" name="af-rollout-z0-to-r0-connector-01" descr="{&quot;arrow_spec_sha256&quot;:&quot;94e973578aadc00531dbed3007f1ad265f363d9c390b7d9d992475ebe57ccaf1&quot;,&quot;autofigure_element_id&quot;:&quot;rollout-z0-to-r0&quot;}"/>
+          <p:cNvCxnSpPr>
+            <a:stCxn id="125" idx="0"/>
+            <a:endCxn id="134" idx="2"/>
+          </p:cNvCxnSpPr>
+          <p:nvPr/>
+        </p:nvCxnSpPr>
+        <p:spPr>
+          <a:xfrm flipV="1">
+            <a:off x="9839325" y="2562225"/>
+            <a:ext cx="0" cy="257175"/>
+          </a:xfrm>
+          <a:prstGeom prst="line">
+            <a:avLst/>
+          </a:prstGeom>
+          <a:ln w="19050">
+            <a:solidFill>
+              <a:srgbClr val="7E6000"/>
+            </a:solidFill>
+            <a:miter/>
+            <a:tailEnd type="triangle" w="med" len="med"/>
+          </a:ln>
+          <a:effectLst/>
+        </p:spPr>
+        <p:style>
+          <a:lnRef idx="2">
+            <a:schemeClr val="accent1"/>
+          </a:lnRef>
+          <a:fillRef idx="0">
+            <a:schemeClr val="accent1"/>
+          </a:fillRef>
+          <a:effectRef idx="1">
+            <a:schemeClr val="accent1"/>
+          </a:effectRef>
+          <a:fontRef idx="minor">
+            <a:schemeClr val="tx1"/>
+          </a:fontRef>
+        </p:style>
+      </p:cxnSp>
+      <p:cxnSp>
+        <p:nvCxnSpPr>
+          <p:cNvPr id="121" name="af-rollout-z1-to-r1-connector-01" descr="{&quot;arrow_spec_sha256&quot;:&quot;0a8c03b2edd5440e6980b8cd35a97c1694bce46df95ab111ffec56d67ed577e4&quot;,&quot;autofigure_element_id&quot;:&quot;rollout-z1-to-r1&quot;}"/>
+          <p:cNvCxnSpPr>
+            <a:stCxn id="126" idx="0"/>
+            <a:endCxn id="135" idx="2"/>
+          </p:cNvCxnSpPr>
+          <p:nvPr/>
+        </p:nvCxnSpPr>
+        <p:spPr>
+          <a:xfrm flipV="1">
+            <a:off x="10753725" y="2552700"/>
+            <a:ext cx="0" cy="266700"/>
+          </a:xfrm>
+          <a:prstGeom prst="line">
+            <a:avLst/>
+          </a:prstGeom>
+          <a:ln w="19050">
+            <a:solidFill>
+              <a:srgbClr val="7E6000"/>
+            </a:solidFill>
+            <a:miter/>
+            <a:tailEnd type="triangle" w="med" len="med"/>
+          </a:ln>
+          <a:effectLst/>
+        </p:spPr>
+        <p:style>
+          <a:lnRef idx="2">
+            <a:schemeClr val="accent1"/>
+          </a:lnRef>
+          <a:fillRef idx="0">
+            <a:schemeClr val="accent1"/>
+          </a:fillRef>
+          <a:effectRef idx="1">
+            <a:schemeClr val="accent1"/>
+          </a:effectRef>
+          <a:fontRef idx="minor">
+            <a:schemeClr val="tx1"/>
+          </a:fontRef>
+        </p:style>
+      </p:cxnSp>
+      <p:cxnSp>
+        <p:nvCxnSpPr>
+          <p:cNvPr id="122" name="af-rollout-z2-to-r2-connector-01" descr="{&quot;arrow_spec_sha256&quot;:&quot;65d2b5223168c18ecc6f49d53117072503fa0b4f64cf3167db67ec12fdc58930&quot;,&quot;autofigure_element_id&quot;:&quot;rollout-z2-to-r2&quot;}"/>
+          <p:cNvCxnSpPr>
+            <a:stCxn id="127" idx="0"/>
+            <a:endCxn id="136" idx="2"/>
+          </p:cNvCxnSpPr>
+          <p:nvPr/>
+        </p:nvCxnSpPr>
+        <p:spPr>
+          <a:xfrm flipV="1">
+            <a:off x="11706225" y="2552700"/>
+            <a:ext cx="0" cy="266700"/>
+          </a:xfrm>
+          <a:prstGeom prst="line">
+            <a:avLst/>
+          </a:prstGeom>
+          <a:ln w="19050">
+            <a:solidFill>
+              <a:srgbClr val="7E6000"/>
+            </a:solidFill>
+            <a:miter/>
+            <a:tailEnd type="triangle" w="med" len="med"/>
+          </a:ln>
+          <a:effectLst/>
+        </p:spPr>
+        <p:style>
+          <a:lnRef idx="2">
+            <a:schemeClr val="accent1"/>
+          </a:lnRef>
+          <a:fillRef idx="0">
+            <a:schemeClr val="accent1"/>
+          </a:fillRef>
+          <a:effectRef idx="1">
+            <a:schemeClr val="accent1"/>
+          </a:effectRef>
+          <a:fontRef idx="minor">
+            <a:schemeClr val="tx1"/>
+          </a:fontRef>
+        </p:style>
+      </p:cxnSp>
+      <p:cxnSp>
+        <p:nvCxnSpPr>
+          <p:cNvPr id="123" name="af-zt-top-to-imagination-connector-01" descr="{&quot;arrow_spec_sha256&quot;:&quot;92baa490b7e35be95ec0e5b41bcbaacac44577452dfb5fcd7c63dcfef2485503&quot;,&quot;autofigure_element_id&quot;:&quot;zt-top-to-imagination&quot;}"/>
+          <p:cNvCxnSpPr>
+            <a:stCxn id="96" idx="3"/>
+            <a:endCxn id="125" idx="1"/>
+          </p:cNvCxnSpPr>
+          <p:nvPr/>
+        </p:nvCxnSpPr>
+        <p:spPr>
+          <a:xfrm>
+            <a:off x="9010650" y="2590800"/>
+            <a:ext cx="561975" cy="381000"/>
+          </a:xfrm>
+          <a:prstGeom prst="line">
+            <a:avLst/>
+          </a:prstGeom>
+          <a:ln w="19050">
+            <a:solidFill>
+              <a:srgbClr val="7E6000"/>
+            </a:solidFill>
+            <a:miter/>
+            <a:tailEnd type="triangle" w="med" len="med"/>
+          </a:ln>
+          <a:effectLst/>
+        </p:spPr>
+        <p:style>
+          <a:lnRef idx="2">
+            <a:schemeClr val="accent1"/>
+          </a:lnRef>
+          <a:fillRef idx="0">
+            <a:schemeClr val="accent1"/>
+          </a:fillRef>
+          <a:effectRef idx="1">
+            <a:schemeClr val="accent1"/>
+          </a:effectRef>
+          <a:fontRef idx="minor">
+            <a:schemeClr val="tx1"/>
+          </a:fontRef>
+        </p:style>
+      </p:cxnSp>
+      <p:cxnSp>
+        <p:nvCxnSpPr>
+          <p:cNvPr id="124" name="af-zt-bottom-to-rollout-connector-01" descr="{&quot;arrow_spec_sha256&quot;:&quot;34e29b869a4e4167c361e387c10a862d8aa755a68c5dd317cee798142207a7e8&quot;,&quot;autofigure_element_id&quot;:&quot;zt-bottom-to-rollout&quot;}"/>
+          <p:cNvCxnSpPr>
+            <a:stCxn id="101" idx="3"/>
+            <a:endCxn id="125" idx="1"/>
+          </p:cNvCxnSpPr>
+          <p:nvPr/>
+        </p:nvCxnSpPr>
+        <p:spPr>
+          <a:xfrm flipV="1">
+            <a:off x="9010650" y="3105150"/>
+            <a:ext cx="561975" cy="857250"/>
+          </a:xfrm>
+          <a:prstGeom prst="line">
+            <a:avLst/>
+          </a:prstGeom>
+          <a:ln w="19050">
+            <a:solidFill>
+              <a:srgbClr val="7E6000"/>
+            </a:solidFill>
+            <a:miter/>
+            <a:tailEnd type="triangle" w="med" len="med"/>
+          </a:ln>
+          <a:effectLst/>
+        </p:spPr>
+        <p:style>
+          <a:lnRef idx="2">
+            <a:schemeClr val="accent1"/>
+          </a:lnRef>
+          <a:fillRef idx="0">
+            <a:schemeClr val="accent1"/>
+          </a:fillRef>
+          <a:effectRef idx="1">
+            <a:schemeClr val="accent1"/>
+          </a:effectRef>
+          <a:fontRef idx="minor">
+            <a:schemeClr val="tx1"/>
+          </a:fontRef>
+        </p:style>
+      </p:cxnSp>
+      <p:sp>
+        <p:nvSpPr>
+          <p:cNvPr id="125" name="af-rollout-z0-rect-01" descr="{&quot;autofigure_element_id&quot;:&quot;rollout-z0&quot;}"/>
           <p:cNvSpPr/>
           <p:nvPr/>
         </p:nvSpPr>
@@ -8934,7 +9056,7 @@
       </p:sp>
       <p:sp>
         <p:nvSpPr>
-          <p:cNvPr id="123" name="af-rollout-z1-rect-01"/>
+          <p:cNvPr id="126" name="af-rollout-z1-rect-01" descr="{&quot;autofigure_element_id&quot;:&quot;rollout-z1&quot;}"/>
           <p:cNvSpPr/>
           <p:nvPr/>
         </p:nvSpPr>
@@ -8980,7 +9102,7 @@
       </p:sp>
       <p:sp>
         <p:nvSpPr>
-          <p:cNvPr id="124" name="af-rollout-z2-rect-01"/>
+          <p:cNvPr id="127" name="af-rollout-z2-rect-01" descr="{&quot;autofigure_element_id&quot;:&quot;rollout-z2&quot;}"/>
           <p:cNvSpPr/>
           <p:nvPr/>
         </p:nvSpPr>
@@ -9026,7 +9148,7 @@
       </p:sp>
       <p:sp>
         <p:nvSpPr>
-          <p:cNvPr id="125" name="af-rollout-zh-rect-01"/>
+          <p:cNvPr id="128" name="af-rollout-zh-rect-01" descr="{&quot;autofigure_element_id&quot;:&quot;rollout-zh&quot;}"/>
           <p:cNvSpPr/>
           <p:nvPr/>
         </p:nvSpPr>
@@ -9074,7 +9196,7 @@
         <mc:Choice xmlns:a14="http://schemas.microsoft.com/office/drawing/2010/main" Requires="a14">
           <p:sp>
             <p:nvSpPr>
-              <p:cNvPr id="126" name="math:010" descr="AI_AUTOFIGURE_NATIVE_MATH_V1:eyJjb250ZW50X3J1bnMiOlt7ImNhbm9uaWNhbF9sYXRleCI6Inpfe3R9IiwiZm9ybXVsYV9pZCI6IkVRMDEwIiwia2luZCI6Im1hdGgiLCJsYXRleF9zaGEyNTYiOiI1MTFhZDkzYjNmYWU5ZDczZDU2MzY1NmZlYjNiZTY5M2Y0MjBjM2FkNDNmNjBkY2QzNWRiNjMxYWIwZTUwY2EzIiwibW9kZSI6ImlubGluZSIsIm9tbWxfc2hhMjU2IjoiOWNjMjA3NmY3N2U5ZDBlODdiOWE5Y2ZjYWFmZmRjNTBiNzU4ZDZiYmM1MTBjZWY4ZjNiYTU3NDhmODUyMmM1ZSIsInNlbWFudGljX29tbWxfcHJvZmlsZSI6Im9mZmljZS1tYXRoLXNlbWFudGljLXYyIiwic2VtYW50aWNfb21tbF9zaGEyNTYiOiI3MGQyYWI5NmM3NjkwMTQ0MjFhOGZjMTk5ZjQ0MzE0YjFhYWNlZjVkN2RhZGNiZjU2ZDI3MzJjMWJhMjU0MzI4In1dLCJmb3JtdWxhcyI6W3siY2Fub25pY2FsX2xhdGV4Ijoiel97dH0iLCJmb3JtdWxhX2lkIjoiRVEwMTAiLCJsYXRleF9zaGEyNTYiOiI1MTFhZDkzYjNmYWU5ZDczZDU2MzY1NmZlYjNiZTY5M2Y0MjBjM2FkNDNmNjBkY2QzNWRiNjMxYWIwZTUwY2EzIiwibW9kZSI6ImlubGluZSIsIm9tbWxfc2hhMjU2IjoiOWNjMjA3NmY3N2U5ZDBlODdiOWE5Y2ZjYWFmZmRjNTBiNzU4ZDZiYmM1MTBjZWY4ZjNiYTU3NDhmODUyMmM1ZSIsInNlbWFudGljX29tbWxfcHJvZmlsZSI6Im9mZmljZS1tYXRoLXNlbWFudGljLXYyIiwic2VtYW50aWNfb21tbF9zaGEyNTYiOiI3MGQyYWI5NmM3NjkwMTQ0MjFhOGZjMTk5ZjQ0MzE0YjFhYWNlZjVkN2RhZGNiZjU2ZDI3MzJjMWJhMjU0MzI4In1dLCJraW5kIjoibmF0aXZlX29mZmljZV9tYXRoIiwicGxhY2Vob2xkZXJfbmFtZSI6Im1hdGg6MDEwIiwic2NoZW1hX3ZlcnNpb24iOiIxLjAifQ=="/>
+              <p:cNvPr id="129" name="math:010" descr="AI_AUTOFIGURE_NATIVE_MATH_V1:eyJjb250ZW50X3J1bnMiOlt7ImNhbm9uaWNhbF9sYXRleCI6Inpfe3R9IiwiZm9ybXVsYV9pZCI6IkVRMDEwIiwia2luZCI6Im1hdGgiLCJsYXRleF9zaGEyNTYiOiI1MTFhZDkzYjNmYWU5ZDczZDU2MzY1NmZlYjNiZTY5M2Y0MjBjM2FkNDNmNjBkY2QzNWRiNjMxYWIwZTUwY2EzIiwibW9kZSI6ImlubGluZSIsIm9tbWxfc2hhMjU2IjoiOWNjMjA3NmY3N2U5ZDBlODdiOWE5Y2ZjYWFmZmRjNTBiNzU4ZDZiYmM1MTBjZWY4ZjNiYTU3NDhmODUyMmM1ZSIsInNlbWFudGljX29tbWxfcHJvZmlsZSI6Im9mZmljZS1tYXRoLXNlbWFudGljLXYyIiwic2VtYW50aWNfb21tbF9zaGEyNTYiOiI3MGQyYWI5NmM3NjkwMTQ0MjFhOGZjMTk5ZjQ0MzE0YjFhYWNlZjVkN2RhZGNiZjU2ZDI3MzJjMWJhMjU0MzI4In1dLCJmb3JtdWxhcyI6W3siY2Fub25pY2FsX2xhdGV4Ijoiel97dH0iLCJmb3JtdWxhX2lkIjoiRVEwMTAiLCJsYXRleF9zaGEyNTYiOiI1MTFhZDkzYjNmYWU5ZDczZDU2MzY1NmZlYjNiZTY5M2Y0MjBjM2FkNDNmNjBkY2QzNWRiNjMxYWIwZTUwY2EzIiwibW9kZSI6ImlubGluZSIsIm9tbWxfc2hhMjU2IjoiOWNjMjA3NmY3N2U5ZDBlODdiOWE5Y2ZjYWFmZmRjNTBiNzU4ZDZiYmM1MTBjZWY4ZjNiYTU3NDhmODUyMmM1ZSIsInNlbWFudGljX29tbWxfcHJvZmlsZSI6Im9mZmljZS1tYXRoLXNlbWFudGljLXYyIiwic2VtYW50aWNfb21tbF9zaGEyNTYiOiI3MGQyYWI5NmM3NjkwMTQ0MjFhOGZjMTk5ZjQ0MzE0YjFhYWNlZjVkN2RhZGNiZjU2ZDI3MzJjMWJhMjU0MzI4In1dLCJraW5kIjoibmF0aXZlX29mZmljZV9tYXRoIiwicGxhY2Vob2xkZXJfbmFtZSI6Im1hdGg6MDEwIiwic2NoZW1hX3ZlcnNpb24iOiIxLjAifQ=="/>
               <p:cNvSpPr txBox="1"/>
               <p:nvPr/>
             </p:nvSpPr>
@@ -9091,7 +9213,7 @@
             </p:spPr>
             <p:txBody>
               <a:bodyPr wrap="none" anchor="t" lIns="0" rIns="0" tIns="0" bIns="0">
-                <a:spAutoFit/>
+                <a:noAutofit/>
               </a:bodyPr>
               <a:lstStyle/>
               <a:p>
@@ -9137,7 +9259,7 @@
         <mc:Fallback>
           <p:sp>
             <p:nvSpPr>
-              <p:cNvPr id="126" name="math:010" descr="AI_AUTOFIGURE_MATH_FALLBACK_ONLY_V1:eyJjb250ZW50X3J1bnMiOlt7ImNhbm9uaWNhbF9sYXRleCI6Inpfe3R9IiwiZm9ybXVsYV9pZCI6IkVRMDEwIiwia2luZCI6Im1hdGgiLCJsYXRleF9zaGEyNTYiOiI1MTFhZDkzYjNmYWU5ZDczZDU2MzY1NmZlYjNiZTY5M2Y0MjBjM2FkNDNmNjBkY2QzNWRiNjMxYWIwZTUwY2EzIiwibW9kZSI6ImlubGluZSIsIm9tbWxfc2hhMjU2IjoiOWNjMjA3NmY3N2U5ZDBlODdiOWE5Y2ZjYWFmZmRjNTBiNzU4ZDZiYmM1MTBjZWY4ZjNiYTU3NDhmODUyMmM1ZSIsInNlbWFudGljX29tbWxfcHJvZmlsZSI6Im9mZmljZS1tYXRoLXNlbWFudGljLXYyIiwic2VtYW50aWNfb21tbF9zaGEyNTYiOiI3MGQyYWI5NmM3NjkwMTQ0MjFhOGZjMTk5ZjQ0MzE0YjFhYWNlZjVkN2RhZGNiZjU2ZDI3MzJjMWJhMjU0MzI4In1dLCJmb3JtdWxhcyI6W3siY2Fub25pY2FsX2xhdGV4Ijoiel97dH0iLCJmb3JtdWxhX2lkIjoiRVEwMTAiLCJsYXRleF9zaGEyNTYiOiI1MTFhZDkzYjNmYWU5ZDczZDU2MzY1NmZlYjNiZTY5M2Y0MjBjM2FkNDNmNjBkY2QzNWRiNjMxYWIwZTUwY2EzIiwibW9kZSI6ImlubGluZSIsIm9tbWxfc2hhMjU2IjoiOWNjMjA3NmY3N2U5ZDBlODdiOWE5Y2ZjYWFmZmRjNTBiNzU4ZDZiYmM1MTBjZWY4ZjNiYTU3NDhmODUyMmM1ZSIsInNlbWFudGljX29tbWxfcHJvZmlsZSI6Im9mZmljZS1tYXRoLXNlbWFudGljLXYyIiwic2VtYW50aWNfb21tbF9zaGEyNTYiOiI3MGQyYWI5NmM3NjkwMTQ0MjFhOGZjMTk5ZjQ0MzE0YjFhYWNlZjVkN2RhZGNiZjU2ZDI3MzJjMWJhMjU0MzI4In1dLCJraW5kIjoibmF0aXZlX29mZmljZV9tYXRoIiwicGxhY2Vob2xkZXJfbmFtZSI6Im1hdGg6MDEwIiwic2NoZW1hX3ZlcnNpb24iOiIxLjAifQ=="/>
+              <p:cNvPr id="129" name="math:010" descr="AI_AUTOFIGURE_MATH_FALLBACK_ONLY_V1:eyJjb250ZW50X3J1bnMiOlt7ImNhbm9uaWNhbF9sYXRleCI6Inpfe3R9IiwiZm9ybXVsYV9pZCI6IkVRMDEwIiwia2luZCI6Im1hdGgiLCJsYXRleF9zaGEyNTYiOiI1MTFhZDkzYjNmYWU5ZDczZDU2MzY1NmZlYjNiZTY5M2Y0MjBjM2FkNDNmNjBkY2QzNWRiNjMxYWIwZTUwY2EzIiwibW9kZSI6ImlubGluZSIsIm9tbWxfc2hhMjU2IjoiOWNjMjA3NmY3N2U5ZDBlODdiOWE5Y2ZjYWFmZmRjNTBiNzU4ZDZiYmM1MTBjZWY4ZjNiYTU3NDhmODUyMmM1ZSIsInNlbWFudGljX29tbWxfcHJvZmlsZSI6Im9mZmljZS1tYXRoLXNlbWFudGljLXYyIiwic2VtYW50aWNfb21tbF9zaGEyNTYiOiI3MGQyYWI5NmM3NjkwMTQ0MjFhOGZjMTk5ZjQ0MzE0YjFhYWNlZjVkN2RhZGNiZjU2ZDI3MzJjMWJhMjU0MzI4In1dLCJmb3JtdWxhcyI6W3siY2Fub25pY2FsX2xhdGV4Ijoiel97dH0iLCJmb3JtdWxhX2lkIjoiRVEwMTAiLCJsYXRleF9zaGEyNTYiOiI1MTFhZDkzYjNmYWU5ZDczZDU2MzY1NmZlYjNiZTY5M2Y0MjBjM2FkNDNmNjBkY2QzNWRiNjMxYWIwZTUwY2EzIiwibW9kZSI6ImlubGluZSIsIm9tbWxfc2hhMjU2IjoiOWNjMjA3NmY3N2U5ZDBlODdiOWE5Y2ZjYWFmZmRjNTBiNzU4ZDZiYmM1MTBjZWY4ZjNiYTU3NDhmODUyMmM1ZSIsInNlbWFudGljX29tbWxfcHJvZmlsZSI6Im9mZmljZS1tYXRoLXNlbWFudGljLXYyIiwic2VtYW50aWNfb21tbF9zaGEyNTYiOiI3MGQyYWI5NmM3NjkwMTQ0MjFhOGZjMTk5ZjQ0MzE0YjFhYWNlZjVkN2RhZGNiZjU2ZDI3MzJjMWJhMjU0MzI4In1dLCJraW5kIjoibmF0aXZlX29mZmljZV9tYXRoIiwicGxhY2Vob2xkZXJfbmFtZSI6Im1hdGg6MDEwIiwic2NoZW1hX3ZlcnNpb24iOiIxLjAifQ=="/>
               <p:cNvSpPr txBox="1"/>
               <p:nvPr/>
             </p:nvSpPr>
@@ -9154,7 +9276,7 @@
             </p:spPr>
             <p:txBody>
               <a:bodyPr wrap="none" anchor="t" lIns="0" rIns="0" tIns="0" bIns="0">
-                <a:spAutoFit/>
+                <a:noAutofit/>
               </a:bodyPr>
               <a:lstStyle/>
               <a:p>
@@ -9181,7 +9303,7 @@
         <mc:Choice xmlns:a14="http://schemas.microsoft.com/office/drawing/2010/main" Requires="a14">
           <p:sp>
             <p:nvSpPr>
-              <p:cNvPr id="127" name="math:011" descr="AI_AUTOFIGURE_NATIVE_MATH_V1:eyJjb250ZW50X3J1bnMiOlt7ImNhbm9uaWNhbF9sYXRleCI6Inpfe3QrMX0iLCJmb3JtdWxhX2lkIjoiRVEwMTEiLCJraW5kIjoibWF0aCIsImxhdGV4X3NoYTI1NiI6IjhlNWQwMDAwYWJiOWNmMDc3M2U3OGZiNTMwMjc1MjMwYjhlZGZiOGNkOTYyYjMyNjM1ZGRlN2NjMjg0NjkwOTEiLCJtb2RlIjoiaW5saW5lIiwib21tbF9zaGEyNTYiOiJhOTVmOTI4NDdlYzgwMmEyMzkyZDQ5YWYwYTZlMTU3NzMxZTdkYzdjMjM4YzEwMGI2ZTlhZDY2NDVhMjhmZTQyIiwic2VtYW50aWNfb21tbF9wcm9maWxlIjoib2ZmaWNlLW1hdGgtc2VtYW50aWMtdjIiLCJzZW1hbnRpY19vbW1sX3NoYTI1NiI6IjY5OTJiMGQ0ODlkYWEyM2Y3ZWViMjgxMjc3NjIyNGU5NDRhNjc1MjQxNGNjYmQ5ZTIzYjQ0OTMyODM3ZjMzZTYifV0sImZvcm11bGFzIjpbeyJjYW5vbmljYWxfbGF0ZXgiOiJ6X3t0KzF9IiwiZm9ybXVsYV9pZCI6IkVRMDExIiwibGF0ZXhfc2hhMjU2IjoiOGU1ZDAwMDBhYmI5Y2YwNzczZTc4ZmI1MzAyNzUyMzBiOGVkZmI4Y2Q5NjJiMzI2MzVkZGU3Y2MyODQ2OTA5MSIsIm1vZGUiOiJpbmxpbmUiLCJvbW1sX3NoYTI1NiI6ImE5NWY5Mjg0N2VjODAyYTIzOTJkNDlhZjBhNmUxNTc3MzFlN2RjN2MyMzhjMTAwYjZlOWFkNjY0NWEyOGZlNDIiLCJzZW1hbnRpY19vbW1sX3Byb2ZpbGUiOiJvZmZpY2UtbWF0aC1zZW1hbnRpYy12MiIsInNlbWFudGljX29tbWxfc2hhMjU2IjoiNjk5MmIwZDQ4OWRhYTIzZjdlZWIyODEyNzc2MjI0ZTk0NGE2NzUyNDE0Y2NiZDllMjNiNDQ5MzI4MzdmMzNlNiJ9XSwia2luZCI6Im5hdGl2ZV9vZmZpY2VfbWF0aCIsInBsYWNlaG9sZGVyX25hbWUiOiJtYXRoOjAxMSIsInNjaGVtYV92ZXJzaW9uIjoiMS4wIn0="/>
+              <p:cNvPr id="130" name="math:011" descr="AI_AUTOFIGURE_NATIVE_MATH_V1:eyJjb250ZW50X3J1bnMiOlt7ImNhbm9uaWNhbF9sYXRleCI6Inpfe3QrMX0iLCJmb3JtdWxhX2lkIjoiRVEwMTEiLCJraW5kIjoibWF0aCIsImxhdGV4X3NoYTI1NiI6IjhlNWQwMDAwYWJiOWNmMDc3M2U3OGZiNTMwMjc1MjMwYjhlZGZiOGNkOTYyYjMyNjM1ZGRlN2NjMjg0NjkwOTEiLCJtb2RlIjoiaW5saW5lIiwib21tbF9zaGEyNTYiOiJhOTVmOTI4NDdlYzgwMmEyMzkyZDQ5YWYwYTZlMTU3NzMxZTdkYzdjMjM4YzEwMGI2ZTlhZDY2NDVhMjhmZTQyIiwic2VtYW50aWNfb21tbF9wcm9maWxlIjoib2ZmaWNlLW1hdGgtc2VtYW50aWMtdjIiLCJzZW1hbnRpY19vbW1sX3NoYTI1NiI6IjY5OTJiMGQ0ODlkYWEyM2Y3ZWViMjgxMjc3NjIyNGU5NDRhNjc1MjQxNGNjYmQ5ZTIzYjQ0OTMyODM3ZjMzZTYifV0sImZvcm11bGFzIjpbeyJjYW5vbmljYWxfbGF0ZXgiOiJ6X3t0KzF9IiwiZm9ybXVsYV9pZCI6IkVRMDExIiwibGF0ZXhfc2hhMjU2IjoiOGU1ZDAwMDBhYmI5Y2YwNzczZTc4ZmI1MzAyNzUyMzBiOGVkZmI4Y2Q5NjJiMzI2MzVkZGU3Y2MyODQ2OTA5MSIsIm1vZGUiOiJpbmxpbmUiLCJvbW1sX3NoYTI1NiI6ImE5NWY5Mjg0N2VjODAyYTIzOTJkNDlhZjBhNmUxNTc3MzFlN2RjN2MyMzhjMTAwYjZlOWFkNjY0NWEyOGZlNDIiLCJzZW1hbnRpY19vbW1sX3Byb2ZpbGUiOiJvZmZpY2UtbWF0aC1zZW1hbnRpYy12MiIsInNlbWFudGljX29tbWxfc2hhMjU2IjoiNjk5MmIwZDQ4OWRhYTIzZjdlZWIyODEyNzc2MjI0ZTk0NGE2NzUyNDE0Y2NiZDllMjNiNDQ5MzI4MzdmMzNlNiJ9XSwia2luZCI6Im5hdGl2ZV9vZmZpY2VfbWF0aCIsInBsYWNlaG9sZGVyX25hbWUiOiJtYXRoOjAxMSIsInNjaGVtYV92ZXJzaW9uIjoiMS4wIn0="/>
               <p:cNvSpPr txBox="1"/>
               <p:nvPr/>
             </p:nvSpPr>
@@ -9198,7 +9320,7 @@
             </p:spPr>
             <p:txBody>
               <a:bodyPr wrap="none" anchor="t" lIns="0" rIns="0" tIns="0" bIns="0">
-                <a:spAutoFit/>
+                <a:noAutofit/>
               </a:bodyPr>
               <a:lstStyle/>
               <a:p>
@@ -9244,7 +9366,7 @@
         <mc:Fallback>
           <p:sp>
             <p:nvSpPr>
-              <p:cNvPr id="127" name="math:011" descr="AI_AUTOFIGURE_MATH_FALLBACK_ONLY_V1:eyJjb250ZW50X3J1bnMiOlt7ImNhbm9uaWNhbF9sYXRleCI6Inpfe3QrMX0iLCJmb3JtdWxhX2lkIjoiRVEwMTEiLCJraW5kIjoibWF0aCIsImxhdGV4X3NoYTI1NiI6IjhlNWQwMDAwYWJiOWNmMDc3M2U3OGZiNTMwMjc1MjMwYjhlZGZiOGNkOTYyYjMyNjM1ZGRlN2NjMjg0NjkwOTEiLCJtb2RlIjoiaW5saW5lIiwib21tbF9zaGEyNTYiOiJhOTVmOTI4NDdlYzgwMmEyMzkyZDQ5YWYwYTZlMTU3NzMxZTdkYzdjMjM4YzEwMGI2ZTlhZDY2NDVhMjhmZTQyIiwic2VtYW50aWNfb21tbF9wcm9maWxlIjoib2ZmaWNlLW1hdGgtc2VtYW50aWMtdjIiLCJzZW1hbnRpY19vbW1sX3NoYTI1NiI6IjY5OTJiMGQ0ODlkYWEyM2Y3ZWViMjgxMjc3NjIyNGU5NDRhNjc1MjQxNGNjYmQ5ZTIzYjQ0OTMyODM3ZjMzZTYifV0sImZvcm11bGFzIjpbeyJjYW5vbmljYWxfbGF0ZXgiOiJ6X3t0KzF9IiwiZm9ybXVsYV9pZCI6IkVRMDExIiwibGF0ZXhfc2hhMjU2IjoiOGU1ZDAwMDBhYmI5Y2YwNzczZTc4ZmI1MzAyNzUyMzBiOGVkZmI4Y2Q5NjJiMzI2MzVkZGU3Y2MyODQ2OTA5MSIsIm1vZGUiOiJpbmxpbmUiLCJvbW1sX3NoYTI1NiI6ImE5NWY5Mjg0N2VjODAyYTIzOTJkNDlhZjBhNmUxNTc3MzFlN2RjN2MyMzhjMTAwYjZlOWFkNjY0NWEyOGZlNDIiLCJzZW1hbnRpY19vbW1sX3Byb2ZpbGUiOiJvZmZpY2UtbWF0aC1zZW1hbnRpYy12MiIsInNlbWFudGljX29tbWxfc2hhMjU2IjoiNjk5MmIwZDQ4OWRhYTIzZjdlZWIyODEyNzc2MjI0ZTk0NGE2NzUyNDE0Y2NiZDllMjNiNDQ5MzI4MzdmMzNlNiJ9XSwia2luZCI6Im5hdGl2ZV9vZmZpY2VfbWF0aCIsInBsYWNlaG9sZGVyX25hbWUiOiJtYXRoOjAxMSIsInNjaGVtYV92ZXJzaW9uIjoiMS4wIn0="/>
+              <p:cNvPr id="130" name="math:011" descr="AI_AUTOFIGURE_MATH_FALLBACK_ONLY_V1:eyJjb250ZW50X3J1bnMiOlt7ImNhbm9uaWNhbF9sYXRleCI6Inpfe3QrMX0iLCJmb3JtdWxhX2lkIjoiRVEwMTEiLCJraW5kIjoibWF0aCIsImxhdGV4X3NoYTI1NiI6IjhlNWQwMDAwYWJiOWNmMDc3M2U3OGZiNTMwMjc1MjMwYjhlZGZiOGNkOTYyYjMyNjM1ZGRlN2NjMjg0NjkwOTEiLCJtb2RlIjoiaW5saW5lIiwib21tbF9zaGEyNTYiOiJhOTVmOTI4NDdlYzgwMmEyMzkyZDQ5YWYwYTZlMTU3NzMxZTdkYzdjMjM4YzEwMGI2ZTlhZDY2NDVhMjhmZTQyIiwic2VtYW50aWNfb21tbF9wcm9maWxlIjoib2ZmaWNlLW1hdGgtc2VtYW50aWMtdjIiLCJzZW1hbnRpY19vbW1sX3NoYTI1NiI6IjY5OTJiMGQ0ODlkYWEyM2Y3ZWViMjgxMjc3NjIyNGU5NDRhNjc1MjQxNGNjYmQ5ZTIzYjQ0OTMyODM3ZjMzZTYifV0sImZvcm11bGFzIjpbeyJjYW5vbmljYWxfbGF0ZXgiOiJ6X3t0KzF9IiwiZm9ybXVsYV9pZCI6IkVRMDExIiwibGF0ZXhfc2hhMjU2IjoiOGU1ZDAwMDBhYmI5Y2YwNzczZTc4ZmI1MzAyNzUyMzBiOGVkZmI4Y2Q5NjJiMzI2MzVkZGU3Y2MyODQ2OTA5MSIsIm1vZGUiOiJpbmxpbmUiLCJvbW1sX3NoYTI1NiI6ImE5NWY5Mjg0N2VjODAyYTIzOTJkNDlhZjBhNmUxNTc3MzFlN2RjN2MyMzhjMTAwYjZlOWFkNjY0NWEyOGZlNDIiLCJzZW1hbnRpY19vbW1sX3Byb2ZpbGUiOiJvZmZpY2UtbWF0aC1zZW1hbnRpYy12MiIsInNlbWFudGljX29tbWxfc2hhMjU2IjoiNjk5MmIwZDQ4OWRhYTIzZjdlZWIyODEyNzc2MjI0ZTk0NGE2NzUyNDE0Y2NiZDllMjNiNDQ5MzI4MzdmMzNlNiJ9XSwia2luZCI6Im5hdGl2ZV9vZmZpY2VfbWF0aCIsInBsYWNlaG9sZGVyX25hbWUiOiJtYXRoOjAxMSIsInNjaGVtYV92ZXJzaW9uIjoiMS4wIn0="/>
               <p:cNvSpPr txBox="1"/>
               <p:nvPr/>
             </p:nvSpPr>
@@ -9261,7 +9383,7 @@
             </p:spPr>
             <p:txBody>
               <a:bodyPr wrap="none" anchor="t" lIns="0" rIns="0" tIns="0" bIns="0">
-                <a:spAutoFit/>
+                <a:noAutofit/>
               </a:bodyPr>
               <a:lstStyle/>
               <a:p>
@@ -9288,7 +9410,7 @@
         <mc:Choice xmlns:a14="http://schemas.microsoft.com/office/drawing/2010/main" Requires="a14">
           <p:sp>
             <p:nvSpPr>
-              <p:cNvPr id="128" name="math:012" descr="AI_AUTOFIGURE_NATIVE_MATH_V1:eyJjb250ZW50X3J1bnMiOlt7ImNhbm9uaWNhbF9sYXRleCI6Inpfe3QrMn0iLCJmb3JtdWxhX2lkIjoiRVEwMTIiLCJraW5kIjoibWF0aCIsImxhdGV4X3NoYTI1NiI6ImVkN2EzM2FmMDZiOTY1M2Y4Mzk2MmMyN2IyMGRkOWI4NDZjYjJlZTBlMDAzMDY1MGNhMTQ0MzZiMzg5NzA5M2EiLCJtb2RlIjoiaW5saW5lIiwib21tbF9zaGEyNTYiOiI2NDc0MzYwMTY3NzVjMGViNTYwYWIzNjYzNDJjNjUxZTVkY2ZhMzBkZWE3ZjU3NTcyNDMxZDEzNjNlYmI3ZDBkIiwic2VtYW50aWNfb21tbF9wcm9maWxlIjoib2ZmaWNlLW1hdGgtc2VtYW50aWMtdjIiLCJzZW1hbnRpY19vbW1sX3NoYTI1NiI6ImE1ZTA0ZjFhNzZiNzc4MjQ5NzY0MzBlYzg4MmNmOGNjMWE4ZTk5YmYzN2FlYTFlMWVlNWI3ODA5MmM4ZTQ4MTMifV0sImZvcm11bGFzIjpbeyJjYW5vbmljYWxfbGF0ZXgiOiJ6X3t0KzJ9IiwiZm9ybXVsYV9pZCI6IkVRMDEyIiwibGF0ZXhfc2hhMjU2IjoiZWQ3YTMzYWYwNmI5NjUzZjgzOTYyYzI3YjIwZGQ5Yjg0NmNiMmVlMGUwMDMwNjUwY2ExNDQzNmIzODk3MDkzYSIsIm1vZGUiOiJpbmxpbmUiLCJvbW1sX3NoYTI1NiI6IjY0NzQzNjAxNjc3NWMwZWI1NjBhYjM2NjM0MmM2NTFlNWRjZmEzMGRlYTdmNTc1NzI0MzFkMTM2M2ViYjdkMGQiLCJzZW1hbnRpY19vbW1sX3Byb2ZpbGUiOiJvZmZpY2UtbWF0aC1zZW1hbnRpYy12MiIsInNlbWFudGljX29tbWxfc2hhMjU2IjoiYTVlMDRmMWE3NmI3NzgyNDk3NjQzMGVjODgyY2Y4Y2MxYThlOTliZjM3YWVhMWUxZWU1Yjc4MDkyYzhlNDgxMyJ9XSwia2luZCI6Im5hdGl2ZV9vZmZpY2VfbWF0aCIsInBsYWNlaG9sZGVyX25hbWUiOiJtYXRoOjAxMiIsInNjaGVtYV92ZXJzaW9uIjoiMS4wIn0="/>
+              <p:cNvPr id="131" name="math:012" descr="AI_AUTOFIGURE_NATIVE_MATH_V1:eyJjb250ZW50X3J1bnMiOlt7ImNhbm9uaWNhbF9sYXRleCI6Inpfe3QrMn0iLCJmb3JtdWxhX2lkIjoiRVEwMTIiLCJraW5kIjoibWF0aCIsImxhdGV4X3NoYTI1NiI6ImVkN2EzM2FmMDZiOTY1M2Y4Mzk2MmMyN2IyMGRkOWI4NDZjYjJlZTBlMDAzMDY1MGNhMTQ0MzZiMzg5NzA5M2EiLCJtb2RlIjoiaW5saW5lIiwib21tbF9zaGEyNTYiOiI2NDc0MzYwMTY3NzVjMGViNTYwYWIzNjYzNDJjNjUxZTVkY2ZhMzBkZWE3ZjU3NTcyNDMxZDEzNjNlYmI3ZDBkIiwic2VtYW50aWNfb21tbF9wcm9maWxlIjoib2ZmaWNlLW1hdGgtc2VtYW50aWMtdjIiLCJzZW1hbnRpY19vbW1sX3NoYTI1NiI6ImE1ZTA0ZjFhNzZiNzc4MjQ5NzY0MzBlYzg4MmNmOGNjMWE4ZTk5YmYzN2FlYTFlMWVlNWI3ODA5MmM4ZTQ4MTMifV0sImZvcm11bGFzIjpbeyJjYW5vbmljYWxfbGF0ZXgiOiJ6X3t0KzJ9IiwiZm9ybXVsYV9pZCI6IkVRMDEyIiwibGF0ZXhfc2hhMjU2IjoiZWQ3YTMzYWYwNmI5NjUzZjgzOTYyYzI3YjIwZGQ5Yjg0NmNiMmVlMGUwMDMwNjUwY2ExNDQzNmIzODk3MDkzYSIsIm1vZGUiOiJpbmxpbmUiLCJvbW1sX3NoYTI1NiI6IjY0NzQzNjAxNjc3NWMwZWI1NjBhYjM2NjM0MmM2NTFlNWRjZmEzMGRlYTdmNTc1NzI0MzFkMTM2M2ViYjdkMGQiLCJzZW1hbnRpY19vbW1sX3Byb2ZpbGUiOiJvZmZpY2UtbWF0aC1zZW1hbnRpYy12MiIsInNlbWFudGljX29tbWxfc2hhMjU2IjoiYTVlMDRmMWE3NmI3NzgyNDk3NjQzMGVjODgyY2Y4Y2MxYThlOTliZjM3YWVhMWUxZWU1Yjc4MDkyYzhlNDgxMyJ9XSwia2luZCI6Im5hdGl2ZV9vZmZpY2VfbWF0aCIsInBsYWNlaG9sZGVyX25hbWUiOiJtYXRoOjAxMiIsInNjaGVtYV92ZXJzaW9uIjoiMS4wIn0="/>
               <p:cNvSpPr txBox="1"/>
               <p:nvPr/>
             </p:nvSpPr>
@@ -9305,7 +9427,7 @@
             </p:spPr>
             <p:txBody>
               <a:bodyPr wrap="none" anchor="t" lIns="0" rIns="0" tIns="0" bIns="0">
-                <a:spAutoFit/>
+                <a:noAutofit/>
               </a:bodyPr>
               <a:lstStyle/>
               <a:p>
@@ -9351,7 +9473,7 @@
         <mc:Fallback>
           <p:sp>
             <p:nvSpPr>
-              <p:cNvPr id="128" name="math:012" descr="AI_AUTOFIGURE_MATH_FALLBACK_ONLY_V1:eyJjb250ZW50X3J1bnMiOlt7ImNhbm9uaWNhbF9sYXRleCI6Inpfe3QrMn0iLCJmb3JtdWxhX2lkIjoiRVEwMTIiLCJraW5kIjoibWF0aCIsImxhdGV4X3NoYTI1NiI6ImVkN2EzM2FmMDZiOTY1M2Y4Mzk2MmMyN2IyMGRkOWI4NDZjYjJlZTBlMDAzMDY1MGNhMTQ0MzZiMzg5NzA5M2EiLCJtb2RlIjoiaW5saW5lIiwib21tbF9zaGEyNTYiOiI2NDc0MzYwMTY3NzVjMGViNTYwYWIzNjYzNDJjNjUxZTVkY2ZhMzBkZWE3ZjU3NTcyNDMxZDEzNjNlYmI3ZDBkIiwic2VtYW50aWNfb21tbF9wcm9maWxlIjoib2ZmaWNlLW1hdGgtc2VtYW50aWMtdjIiLCJzZW1hbnRpY19vbW1sX3NoYTI1NiI6ImE1ZTA0ZjFhNzZiNzc4MjQ5NzY0MzBlYzg4MmNmOGNjMWE4ZTk5YmYzN2FlYTFlMWVlNWI3ODA5MmM4ZTQ4MTMifV0sImZvcm11bGFzIjpbeyJjYW5vbmljYWxfbGF0ZXgiOiJ6X3t0KzJ9IiwiZm9ybXVsYV9pZCI6IkVRMDEyIiwibGF0ZXhfc2hhMjU2IjoiZWQ3YTMzYWYwNmI5NjUzZjgzOTYyYzI3YjIwZGQ5Yjg0NmNiMmVlMGUwMDMwNjUwY2ExNDQzNmIzODk3MDkzYSIsIm1vZGUiOiJpbmxpbmUiLCJvbW1sX3NoYTI1NiI6IjY0NzQzNjAxNjc3NWMwZWI1NjBhYjM2NjM0MmM2NTFlNWRjZmEzMGRlYTdmNTc1NzI0MzFkMTM2M2ViYjdkMGQiLCJzZW1hbnRpY19vbW1sX3Byb2ZpbGUiOiJvZmZpY2UtbWF0aC1zZW1hbnRpYy12MiIsInNlbWFudGljX29tbWxfc2hhMjU2IjoiYTVlMDRmMWE3NmI3NzgyNDk3NjQzMGVjODgyY2Y4Y2MxYThlOTliZjM3YWVhMWUxZWU1Yjc4MDkyYzhlNDgxMyJ9XSwia2luZCI6Im5hdGl2ZV9vZmZpY2VfbWF0aCIsInBsYWNlaG9sZGVyX25hbWUiOiJtYXRoOjAxMiIsInNjaGVtYV92ZXJzaW9uIjoiMS4wIn0="/>
+              <p:cNvPr id="131" name="math:012" descr="AI_AUTOFIGURE_MATH_FALLBACK_ONLY_V1:eyJjb250ZW50X3J1bnMiOlt7ImNhbm9uaWNhbF9sYXRleCI6Inpfe3QrMn0iLCJmb3JtdWxhX2lkIjoiRVEwMTIiLCJraW5kIjoibWF0aCIsImxhdGV4X3NoYTI1NiI6ImVkN2EzM2FmMDZiOTY1M2Y4Mzk2MmMyN2IyMGRkOWI4NDZjYjJlZTBlMDAzMDY1MGNhMTQ0MzZiMzg5NzA5M2EiLCJtb2RlIjoiaW5saW5lIiwib21tbF9zaGEyNTYiOiI2NDc0MzYwMTY3NzVjMGViNTYwYWIzNjYzNDJjNjUxZTVkY2ZhMzBkZWE3ZjU3NTcyNDMxZDEzNjNlYmI3ZDBkIiwic2VtYW50aWNfb21tbF9wcm9maWxlIjoib2ZmaWNlLW1hdGgtc2VtYW50aWMtdjIiLCJzZW1hbnRpY19vbW1sX3NoYTI1NiI6ImE1ZTA0ZjFhNzZiNzc4MjQ5NzY0MzBlYzg4MmNmOGNjMWE4ZTk5YmYzN2FlYTFlMWVlNWI3ODA5MmM4ZTQ4MTMifV0sImZvcm11bGFzIjpbeyJjYW5vbmljYWxfbGF0ZXgiOiJ6X3t0KzJ9IiwiZm9ybXVsYV9pZCI6IkVRMDEyIiwibGF0ZXhfc2hhMjU2IjoiZWQ3YTMzYWYwNmI5NjUzZjgzOTYyYzI3YjIwZGQ5Yjg0NmNiMmVlMGUwMDMwNjUwY2ExNDQzNmIzODk3MDkzYSIsIm1vZGUiOiJpbmxpbmUiLCJvbW1sX3NoYTI1NiI6IjY0NzQzNjAxNjc3NWMwZWI1NjBhYjM2NjM0MmM2NTFlNWRjZmEzMGRlYTdmNTc1NzI0MzFkMTM2M2ViYjdkMGQiLCJzZW1hbnRpY19vbW1sX3Byb2ZpbGUiOiJvZmZpY2UtbWF0aC1zZW1hbnRpYy12MiIsInNlbWFudGljX29tbWxfc2hhMjU2IjoiYTVlMDRmMWE3NmI3NzgyNDk3NjQzMGVjODgyY2Y4Y2MxYThlOTliZjM3YWVhMWUxZWU1Yjc4MDkyYzhlNDgxMyJ9XSwia2luZCI6Im5hdGl2ZV9vZmZpY2VfbWF0aCIsInBsYWNlaG9sZGVyX25hbWUiOiJtYXRoOjAxMiIsInNjaGVtYV92ZXJzaW9uIjoiMS4wIn0="/>
               <p:cNvSpPr txBox="1"/>
               <p:nvPr/>
             </p:nvSpPr>
@@ -9368,7 +9490,7 @@
             </p:spPr>
             <p:txBody>
               <a:bodyPr wrap="none" anchor="t" lIns="0" rIns="0" tIns="0" bIns="0">
-                <a:spAutoFit/>
+                <a:noAutofit/>
               </a:bodyPr>
               <a:lstStyle/>
               <a:p>
@@ -9395,7 +9517,7 @@
         <mc:Choice xmlns:a14="http://schemas.microsoft.com/office/drawing/2010/main" Requires="a14">
           <p:sp>
             <p:nvSpPr>
-              <p:cNvPr id="129" name="math:013" descr="AI_AUTOFIGURE_NATIVE_MATH_V1:eyJjb250ZW50X3J1bnMiOlt7ImNhbm9uaWNhbF9sYXRleCI6Inpfe3QraH0iLCJmb3JtdWxhX2lkIjoiRVEwMTMiLCJraW5kIjoibWF0aCIsImxhdGV4X3NoYTI1NiI6IjA0ZWYyNTM3NWI3NzI4NDJjNzhlMjkxMGQwZWIyZTkzMTUwZTkzNmRlNGJlMjZiNDI4YTk5MGQwMWZiNDU2ZTAiLCJtb2RlIjoiaW5saW5lIiwib21tbF9zaGEyNTYiOiI2MTJkY2M3MzFjMWJmOWMzNDhmOWQxYmIwNWI5NDVjYzEwNzBlNDVkMzI0ZDJlODVlNDRiNTNkZTIwZjdmZjE0Iiwic2VtYW50aWNfb21tbF9wcm9maWxlIjoib2ZmaWNlLW1hdGgtc2VtYW50aWMtdjIiLCJzZW1hbnRpY19vbW1sX3NoYTI1NiI6IjgxYWM2YzQxYWZmNmFiZWM1NWJhOWFkMzRiNTdkM2U4MDZjYzY0YzUzMjEyYzRkODQ0ZDE5YzgyYjRiZjU0NDAifV0sImZvcm11bGFzIjpbeyJjYW5vbmljYWxfbGF0ZXgiOiJ6X3t0K2h9IiwiZm9ybXVsYV9pZCI6IkVRMDEzIiwibGF0ZXhfc2hhMjU2IjoiMDRlZjI1Mzc1Yjc3Mjg0MmM3OGUyOTEwZDBlYjJlOTMxNTBlOTM2ZGU0YmUyNmI0MjhhOTkwZDAxZmI0NTZlMCIsIm1vZGUiOiJpbmxpbmUiLCJvbW1sX3NoYTI1NiI6IjYxMmRjYzczMWMxYmY5YzM0OGY5ZDFiYjA1Yjk0NWNjMTA3MGU0NWQzMjRkMmU4NWU0NGI1M2RlMjBmN2ZmMTQiLCJzZW1hbnRpY19vbW1sX3Byb2ZpbGUiOiJvZmZpY2UtbWF0aC1zZW1hbnRpYy12MiIsInNlbWFudGljX29tbWxfc2hhMjU2IjoiODFhYzZjNDFhZmY2YWJlYzU1YmE5YWQzNGI1N2QzZTgwNmNjNjRjNTMyMTJjNGQ4NDRkMTljODJiNGJmNTQ0MCJ9XSwia2luZCI6Im5hdGl2ZV9vZmZpY2VfbWF0aCIsInBsYWNlaG9sZGVyX25hbWUiOiJtYXRoOjAxMyIsInNjaGVtYV92ZXJzaW9uIjoiMS4wIn0="/>
+              <p:cNvPr id="132" name="math:013" descr="AI_AUTOFIGURE_NATIVE_MATH_V1:eyJjb250ZW50X3J1bnMiOlt7ImNhbm9uaWNhbF9sYXRleCI6Inpfe3QraH0iLCJmb3JtdWxhX2lkIjoiRVEwMTMiLCJraW5kIjoibWF0aCIsImxhdGV4X3NoYTI1NiI6IjA0ZWYyNTM3NWI3NzI4NDJjNzhlMjkxMGQwZWIyZTkzMTUwZTkzNmRlNGJlMjZiNDI4YTk5MGQwMWZiNDU2ZTAiLCJtb2RlIjoiaW5saW5lIiwib21tbF9zaGEyNTYiOiI2MTJkY2M3MzFjMWJmOWMzNDhmOWQxYmIwNWI5NDVjYzEwNzBlNDVkMzI0ZDJlODVlNDRiNTNkZTIwZjdmZjE0Iiwic2VtYW50aWNfb21tbF9wcm9maWxlIjoib2ZmaWNlLW1hdGgtc2VtYW50aWMtdjIiLCJzZW1hbnRpY19vbW1sX3NoYTI1NiI6IjgxYWM2YzQxYWZmNmFiZWM1NWJhOWFkMzRiNTdkM2U4MDZjYzY0YzUzMjEyYzRkODQ0ZDE5YzgyYjRiZjU0NDAifV0sImZvcm11bGFzIjpbeyJjYW5vbmljYWxfbGF0ZXgiOiJ6X3t0K2h9IiwiZm9ybXVsYV9pZCI6IkVRMDEzIiwibGF0ZXhfc2hhMjU2IjoiMDRlZjI1Mzc1Yjc3Mjg0MmM3OGUyOTEwZDBlYjJlOTMxNTBlOTM2ZGU0YmUyNmI0MjhhOTkwZDAxZmI0NTZlMCIsIm1vZGUiOiJpbmxpbmUiLCJvbW1sX3NoYTI1NiI6IjYxMmRjYzczMWMxYmY5YzM0OGY5ZDFiYjA1Yjk0NWNjMTA3MGU0NWQzMjRkMmU4NWU0NGI1M2RlMjBmN2ZmMTQiLCJzZW1hbnRpY19vbW1sX3Byb2ZpbGUiOiJvZmZpY2UtbWF0aC1zZW1hbnRpYy12MiIsInNlbWFudGljX29tbWxfc2hhMjU2IjoiODFhYzZjNDFhZmY2YWJlYzU1YmE5YWQzNGI1N2QzZTgwNmNjNjRjNTMyMTJjNGQ4NDRkMTljODJiNGJmNTQ0MCJ9XSwia2luZCI6Im5hdGl2ZV9vZmZpY2VfbWF0aCIsInBsYWNlaG9sZGVyX25hbWUiOiJtYXRoOjAxMyIsInNjaGVtYV92ZXJzaW9uIjoiMS4wIn0="/>
               <p:cNvSpPr txBox="1"/>
               <p:nvPr/>
             </p:nvSpPr>
@@ -9412,7 +9534,7 @@
             </p:spPr>
             <p:txBody>
               <a:bodyPr wrap="none" anchor="t" lIns="0" rIns="0" tIns="0" bIns="0">
-                <a:spAutoFit/>
+                <a:noAutofit/>
               </a:bodyPr>
               <a:lstStyle/>
               <a:p>
@@ -9458,7 +9580,7 @@
         <mc:Fallback>
           <p:sp>
             <p:nvSpPr>
-              <p:cNvPr id="129" name="math:013" descr="AI_AUTOFIGURE_MATH_FALLBACK_ONLY_V1:eyJjb250ZW50X3J1bnMiOlt7ImNhbm9uaWNhbF9sYXRleCI6Inpfe3QraH0iLCJmb3JtdWxhX2lkIjoiRVEwMTMiLCJraW5kIjoibWF0aCIsImxhdGV4X3NoYTI1NiI6IjA0ZWYyNTM3NWI3NzI4NDJjNzhlMjkxMGQwZWIyZTkzMTUwZTkzNmRlNGJlMjZiNDI4YTk5MGQwMWZiNDU2ZTAiLCJtb2RlIjoiaW5saW5lIiwib21tbF9zaGEyNTYiOiI2MTJkY2M3MzFjMWJmOWMzNDhmOWQxYmIwNWI5NDVjYzEwNzBlNDVkMzI0ZDJlODVlNDRiNTNkZTIwZjdmZjE0Iiwic2VtYW50aWNfb21tbF9wcm9maWxlIjoib2ZmaWNlLW1hdGgtc2VtYW50aWMtdjIiLCJzZW1hbnRpY19vbW1sX3NoYTI1NiI6IjgxYWM2YzQxYWZmNmFiZWM1NWJhOWFkMzRiNTdkM2U4MDZjYzY0YzUzMjEyYzRkODQ0ZDE5YzgyYjRiZjU0NDAifV0sImZvcm11bGFzIjpbeyJjYW5vbmljYWxfbGF0ZXgiOiJ6X3t0K2h9IiwiZm9ybXVsYV9pZCI6IkVRMDEzIiwibGF0ZXhfc2hhMjU2IjoiMDRlZjI1Mzc1Yjc3Mjg0MmM3OGUyOTEwZDBlYjJlOTMxNTBlOTM2ZGU0YmUyNmI0MjhhOTkwZDAxZmI0NTZlMCIsIm1vZGUiOiJpbmxpbmUiLCJvbW1sX3NoYTI1NiI6IjYxMmRjYzczMWMxYmY5YzM0OGY5ZDFiYjA1Yjk0NWNjMTA3MGU0NWQzMjRkMmU4NWU0NGI1M2RlMjBmN2ZmMTQiLCJzZW1hbnRpY19vbW1sX3Byb2ZpbGUiOiJvZmZpY2UtbWF0aC1zZW1hbnRpYy12MiIsInNlbWFudGljX29tbWxfc2hhMjU2IjoiODFhYzZjNDFhZmY2YWJlYzU1YmE5YWQzNGI1N2QzZTgwNmNjNjRjNTMyMTJjNGQ4NDRkMTljODJiNGJmNTQ0MCJ9XSwia2luZCI6Im5hdGl2ZV9vZmZpY2VfbWF0aCIsInBsYWNlaG9sZGVyX25hbWUiOiJtYXRoOjAxMyIsInNjaGVtYV92ZXJzaW9uIjoiMS4wIn0="/>
+              <p:cNvPr id="132" name="math:013" descr="AI_AUTOFIGURE_MATH_FALLBACK_ONLY_V1:eyJjb250ZW50X3J1bnMiOlt7ImNhbm9uaWNhbF9sYXRleCI6Inpfe3QraH0iLCJmb3JtdWxhX2lkIjoiRVEwMTMiLCJraW5kIjoibWF0aCIsImxhdGV4X3NoYTI1NiI6IjA0ZWYyNTM3NWI3NzI4NDJjNzhlMjkxMGQwZWIyZTkzMTUwZTkzNmRlNGJlMjZiNDI4YTk5MGQwMWZiNDU2ZTAiLCJtb2RlIjoiaW5saW5lIiwib21tbF9zaGEyNTYiOiI2MTJkY2M3MzFjMWJmOWMzNDhmOWQxYmIwNWI5NDVjYzEwNzBlNDVkMzI0ZDJlODVlNDRiNTNkZTIwZjdmZjE0Iiwic2VtYW50aWNfb21tbF9wcm9maWxlIjoib2ZmaWNlLW1hdGgtc2VtYW50aWMtdjIiLCJzZW1hbnRpY19vbW1sX3NoYTI1NiI6IjgxYWM2YzQxYWZmNmFiZWM1NWJhOWFkMzRiNTdkM2U4MDZjYzY0YzUzMjEyYzRkODQ0ZDE5YzgyYjRiZjU0NDAifV0sImZvcm11bGFzIjpbeyJjYW5vbmljYWxfbGF0ZXgiOiJ6X3t0K2h9IiwiZm9ybXVsYV9pZCI6IkVRMDEzIiwibGF0ZXhfc2hhMjU2IjoiMDRlZjI1Mzc1Yjc3Mjg0MmM3OGUyOTEwZDBlYjJlOTMxNTBlOTM2ZGU0YmUyNmI0MjhhOTkwZDAxZmI0NTZlMCIsIm1vZGUiOiJpbmxpbmUiLCJvbW1sX3NoYTI1NiI6IjYxMmRjYzczMWMxYmY5YzM0OGY5ZDFiYjA1Yjk0NWNjMTA3MGU0NWQzMjRkMmU4NWU0NGI1M2RlMjBmN2ZmMTQiLCJzZW1hbnRpY19vbW1sX3Byb2ZpbGUiOiJvZmZpY2UtbWF0aC1zZW1hbnRpYy12MiIsInNlbWFudGljX29tbWxfc2hhMjU2IjoiODFhYzZjNDFhZmY2YWJlYzU1YmE5YWQzNGI1N2QzZTgwNmNjNjRjNTMyMTJjNGQ4NDRkMTljODJiNGJmNTQ0MCJ9XSwia2luZCI6Im5hdGl2ZV9vZmZpY2VfbWF0aCIsInBsYWNlaG9sZGVyX25hbWUiOiJtYXRoOjAxMyIsInNjaGVtYV92ZXJzaW9uIjoiMS4wIn0="/>
               <p:cNvSpPr txBox="1"/>
               <p:nvPr/>
             </p:nvSpPr>
@@ -9475,7 +9597,7 @@
             </p:spPr>
             <p:txBody>
               <a:bodyPr wrap="none" anchor="t" lIns="0" rIns="0" tIns="0" bIns="0">
-                <a:spAutoFit/>
+                <a:noAutofit/>
               </a:bodyPr>
               <a:lstStyle/>
               <a:p>
@@ -9500,7 +9622,7 @@
       </mc:AlternateContent>
       <p:sp>
         <p:nvSpPr>
-          <p:cNvPr id="130" name="af-rollout-label-text-01"/>
+          <p:cNvPr id="133" name="af-rollout-label-text-01" descr="{&quot;autofigure_element_id&quot;:&quot;rollout-label&quot;}"/>
           <p:cNvSpPr txBox="1"/>
           <p:nvPr/>
         </p:nvSpPr>
@@ -9517,7 +9639,7 @@
         </p:spPr>
         <p:txBody>
           <a:bodyPr wrap="none" anchor="t" lIns="0" rIns="0" tIns="0" bIns="0">
-            <a:spAutoFit/>
+            <a:noAutofit/>
           </a:bodyPr>
           <a:lstStyle/>
           <a:p>
@@ -9536,7 +9658,7 @@
       </p:sp>
       <p:sp>
         <p:nvSpPr>
-          <p:cNvPr id="131" name="af-reward-r0-ellipse-01"/>
+          <p:cNvPr id="134" name="af-reward-r0-ellipse-01" descr="{&quot;autofigure_element_id&quot;:&quot;reward-r0&quot;}"/>
           <p:cNvSpPr/>
           <p:nvPr/>
         </p:nvSpPr>
@@ -9580,7 +9702,7 @@
       </p:sp>
       <p:sp>
         <p:nvSpPr>
-          <p:cNvPr id="132" name="af-reward-r1-ellipse-01"/>
+          <p:cNvPr id="135" name="af-reward-r1-ellipse-01" descr="{&quot;autofigure_element_id&quot;:&quot;reward-r1&quot;}"/>
           <p:cNvSpPr/>
           <p:nvPr/>
         </p:nvSpPr>
@@ -9624,7 +9746,7 @@
       </p:sp>
       <p:sp>
         <p:nvSpPr>
-          <p:cNvPr id="133" name="af-reward-r2-ellipse-01"/>
+          <p:cNvPr id="136" name="af-reward-r2-ellipse-01" descr="{&quot;autofigure_element_id&quot;:&quot;reward-r2&quot;}"/>
           <p:cNvSpPr/>
           <p:nvPr/>
         </p:nvSpPr>
@@ -9670,7 +9792,7 @@
         <mc:Choice xmlns:a14="http://schemas.microsoft.com/office/drawing/2010/main" Requires="a14">
           <p:sp>
             <p:nvSpPr>
-              <p:cNvPr id="134" name="math:014" descr="AI_AUTOFIGURE_NATIVE_MATH_V1:eyJjb250ZW50X3J1bnMiOlt7ImNhbm9uaWNhbF9sYXRleCI6InLigLJfe3R9IiwiZm9ybXVsYV9pZCI6IkVRMDE0Iiwia2luZCI6Im1hdGgiLCJsYXRleF9zaGEyNTYiOiI3ZWRhZjhhYmNhZjYwZDliMGZkZDg5MDM3ZWFiODdiODQ4NDEyODA0ZTg2OTFiM2I0NzdjNzFlMTAyOWVlMjIxIiwibW9kZSI6ImlubGluZSIsIm9tbWxfc2hhMjU2IjoiMzY3NDc5MTgxYWIzZWQwNDRiODIzZTFlM2IxNjgxMjRjNjUyMzJmNDQ2YTZiODRkZTE2NTIyNjRlNWY3MzMxMiIsInNlbWFudGljX29tbWxfcHJvZmlsZSI6Im9mZmljZS1tYXRoLXNlbWFudGljLXYyIiwic2VtYW50aWNfb21tbF9zaGEyNTYiOiIwNGJiNGM4YWM3NGRlOGI4NmM0ZDJmYmM5ZDE2MDQ2NDBhNTcxYzg1MjY1MmVlNDNlNjk5YTAwOGJhMzRlMWQ0In1dLCJmb3JtdWxhcyI6W3siY2Fub25pY2FsX2xhdGV4IjoicuKAsl97dH0iLCJmb3JtdWxhX2lkIjoiRVEwMTQiLCJsYXRleF9zaGEyNTYiOiI3ZWRhZjhhYmNhZjYwZDliMGZkZDg5MDM3ZWFiODdiODQ4NDEyODA0ZTg2OTFiM2I0NzdjNzFlMTAyOWVlMjIxIiwibW9kZSI6ImlubGluZSIsIm9tbWxfc2hhMjU2IjoiMzY3NDc5MTgxYWIzZWQwNDRiODIzZTFlM2IxNjgxMjRjNjUyMzJmNDQ2YTZiODRkZTE2NTIyNjRlNWY3MzMxMiIsInNlbWFudGljX29tbWxfcHJvZmlsZSI6Im9mZmljZS1tYXRoLXNlbWFudGljLXYyIiwic2VtYW50aWNfb21tbF9zaGEyNTYiOiIwNGJiNGM4YWM3NGRlOGI4NmM0ZDJmYmM5ZDE2MDQ2NDBhNTcxYzg1MjY1MmVlNDNlNjk5YTAwOGJhMzRlMWQ0In1dLCJraW5kIjoibmF0aXZlX29mZmljZV9tYXRoIiwicGxhY2Vob2xkZXJfbmFtZSI6Im1hdGg6MDE0Iiwic2NoZW1hX3ZlcnNpb24iOiIxLjAifQ=="/>
+              <p:cNvPr id="137" name="math:014" descr="AI_AUTOFIGURE_NATIVE_MATH_V1:eyJjb250ZW50X3J1bnMiOlt7ImNhbm9uaWNhbF9sYXRleCI6InLigLJfe3R9IiwiZm9ybXVsYV9pZCI6IkVRMDE0Iiwia2luZCI6Im1hdGgiLCJsYXRleF9zaGEyNTYiOiI3ZWRhZjhhYmNhZjYwZDliMGZkZDg5MDM3ZWFiODdiODQ4NDEyODA0ZTg2OTFiM2I0NzdjNzFlMTAyOWVlMjIxIiwibW9kZSI6ImlubGluZSIsIm9tbWxfc2hhMjU2IjoiMzY3NDc5MTgxYWIzZWQwNDRiODIzZTFlM2IxNjgxMjRjNjUyMzJmNDQ2YTZiODRkZTE2NTIyNjRlNWY3MzMxMiIsInNlbWFudGljX29tbWxfcHJvZmlsZSI6Im9mZmljZS1tYXRoLXNlbWFudGljLXYyIiwic2VtYW50aWNfb21tbF9zaGEyNTYiOiIwNGJiNGM4YWM3NGRlOGI4NmM0ZDJmYmM5ZDE2MDQ2NDBhNTcxYzg1MjY1MmVlNDNlNjk5YTAwOGJhMzRlMWQ0In1dLCJmb3JtdWxhcyI6W3siY2Fub25pY2FsX2xhdGV4IjoicuKAsl97dH0iLCJmb3JtdWxhX2lkIjoiRVEwMTQiLCJsYXRleF9zaGEyNTYiOiI3ZWRhZjhhYmNhZjYwZDliMGZkZDg5MDM3ZWFiODdiODQ4NDEyODA0ZTg2OTFiM2I0NzdjNzFlMTAyOWVlMjIxIiwibW9kZSI6ImlubGluZSIsIm9tbWxfc2hhMjU2IjoiMzY3NDc5MTgxYWIzZWQwNDRiODIzZTFlM2IxNjgxMjRjNjUyMzJmNDQ2YTZiODRkZTE2NTIyNjRlNWY3MzMxMiIsInNlbWFudGljX29tbWxfcHJvZmlsZSI6Im9mZmljZS1tYXRoLXNlbWFudGljLXYyIiwic2VtYW50aWNfb21tbF9zaGEyNTYiOiIwNGJiNGM4YWM3NGRlOGI4NmM0ZDJmYmM5ZDE2MDQ2NDBhNTcxYzg1MjY1MmVlNDNlNjk5YTAwOGJhMzRlMWQ0In1dLCJraW5kIjoibmF0aXZlX29mZmljZV9tYXRoIiwicGxhY2Vob2xkZXJfbmFtZSI6Im1hdGg6MDE0Iiwic2NoZW1hX3ZlcnNpb24iOiIxLjAifQ=="/>
               <p:cNvSpPr txBox="1"/>
               <p:nvPr/>
             </p:nvSpPr>
@@ -9687,7 +9809,7 @@
             </p:spPr>
             <p:txBody>
               <a:bodyPr wrap="none" anchor="t" lIns="0" rIns="0" tIns="0" bIns="0">
-                <a:spAutoFit/>
+                <a:noAutofit/>
               </a:bodyPr>
               <a:lstStyle/>
               <a:p>
@@ -9742,7 +9864,7 @@
         <mc:Fallback>
           <p:sp>
             <p:nvSpPr>
-              <p:cNvPr id="134" name="math:014" descr="AI_AUTOFIGURE_MATH_FALLBACK_ONLY_V1:eyJjb250ZW50X3J1bnMiOlt7ImNhbm9uaWNhbF9sYXRleCI6InLigLJfe3R9IiwiZm9ybXVsYV9pZCI6IkVRMDE0Iiwia2luZCI6Im1hdGgiLCJsYXRleF9zaGEyNTYiOiI3ZWRhZjhhYmNhZjYwZDliMGZkZDg5MDM3ZWFiODdiODQ4NDEyODA0ZTg2OTFiM2I0NzdjNzFlMTAyOWVlMjIxIiwibW9kZSI6ImlubGluZSIsIm9tbWxfc2hhMjU2IjoiMzY3NDc5MTgxYWIzZWQwNDRiODIzZTFlM2IxNjgxMjRjNjUyMzJmNDQ2YTZiODRkZTE2NTIyNjRlNWY3MzMxMiIsInNlbWFudGljX29tbWxfcHJvZmlsZSI6Im9mZmljZS1tYXRoLXNlbWFudGljLXYyIiwic2VtYW50aWNfb21tbF9zaGEyNTYiOiIwNGJiNGM4YWM3NGRlOGI4NmM0ZDJmYmM5ZDE2MDQ2NDBhNTcxYzg1MjY1MmVlNDNlNjk5YTAwOGJhMzRlMWQ0In1dLCJmb3JtdWxhcyI6W3siY2Fub25pY2FsX2xhdGV4IjoicuKAsl97dH0iLCJmb3JtdWxhX2lkIjoiRVEwMTQiLCJsYXRleF9zaGEyNTYiOiI3ZWRhZjhhYmNhZjYwZDliMGZkZDg5MDM3ZWFiODdiODQ4NDEyODA0ZTg2OTFiM2I0NzdjNzFlMTAyOWVlMjIxIiwibW9kZSI6ImlubGluZSIsIm9tbWxfc2hhMjU2IjoiMzY3NDc5MTgxYWIzZWQwNDRiODIzZTFlM2IxNjgxMjRjNjUyMzJmNDQ2YTZiODRkZTE2NTIyNjRlNWY3MzMxMiIsInNlbWFudGljX29tbWxfcHJvZmlsZSI6Im9mZmljZS1tYXRoLXNlbWFudGljLXYyIiwic2VtYW50aWNfb21tbF9zaGEyNTYiOiIwNGJiNGM4YWM3NGRlOGI4NmM0ZDJmYmM5ZDE2MDQ2NDBhNTcxYzg1MjY1MmVlNDNlNjk5YTAwOGJhMzRlMWQ0In1dLCJraW5kIjoibmF0aXZlX29mZmljZV9tYXRoIiwicGxhY2Vob2xkZXJfbmFtZSI6Im1hdGg6MDE0Iiwic2NoZW1hX3ZlcnNpb24iOiIxLjAifQ=="/>
+              <p:cNvPr id="137" name="math:014" descr="AI_AUTOFIGURE_MATH_FALLBACK_ONLY_V1:eyJjb250ZW50X3J1bnMiOlt7ImNhbm9uaWNhbF9sYXRleCI6InLigLJfe3R9IiwiZm9ybXVsYV9pZCI6IkVRMDE0Iiwia2luZCI6Im1hdGgiLCJsYXRleF9zaGEyNTYiOiI3ZWRhZjhhYmNhZjYwZDliMGZkZDg5MDM3ZWFiODdiODQ4NDEyODA0ZTg2OTFiM2I0NzdjNzFlMTAyOWVlMjIxIiwibW9kZSI6ImlubGluZSIsIm9tbWxfc2hhMjU2IjoiMzY3NDc5MTgxYWIzZWQwNDRiODIzZTFlM2IxNjgxMjRjNjUyMzJmNDQ2YTZiODRkZTE2NTIyNjRlNWY3MzMxMiIsInNlbWFudGljX29tbWxfcHJvZmlsZSI6Im9mZmljZS1tYXRoLXNlbWFudGljLXYyIiwic2VtYW50aWNfb21tbF9zaGEyNTYiOiIwNGJiNGM4YWM3NGRlOGI4NmM0ZDJmYmM5ZDE2MDQ2NDBhNTcxYzg1MjY1MmVlNDNlNjk5YTAwOGJhMzRlMWQ0In1dLCJmb3JtdWxhcyI6W3siY2Fub25pY2FsX2xhdGV4IjoicuKAsl97dH0iLCJmb3JtdWxhX2lkIjoiRVEwMTQiLCJsYXRleF9zaGEyNTYiOiI3ZWRhZjhhYmNhZjYwZDliMGZkZDg5MDM3ZWFiODdiODQ4NDEyODA0ZTg2OTFiM2I0NzdjNzFlMTAyOWVlMjIxIiwibW9kZSI6ImlubGluZSIsIm9tbWxfc2hhMjU2IjoiMzY3NDc5MTgxYWIzZWQwNDRiODIzZTFlM2IxNjgxMjRjNjUyMzJmNDQ2YTZiODRkZTE2NTIyNjRlNWY3MzMxMiIsInNlbWFudGljX29tbWxfcHJvZmlsZSI6Im9mZmljZS1tYXRoLXNlbWFudGljLXYyIiwic2VtYW50aWNfb21tbF9zaGEyNTYiOiIwNGJiNGM4YWM3NGRlOGI4NmM0ZDJmYmM5ZDE2MDQ2NDBhNTcxYzg1MjY1MmVlNDNlNjk5YTAwOGJhMzRlMWQ0In1dLCJraW5kIjoibmF0aXZlX29mZmljZV9tYXRoIiwicGxhY2Vob2xkZXJfbmFtZSI6Im1hdGg6MDE0Iiwic2NoZW1hX3ZlcnNpb24iOiIxLjAifQ=="/>
               <p:cNvSpPr txBox="1"/>
               <p:nvPr/>
             </p:nvSpPr>
@@ -9759,7 +9881,7 @@
             </p:spPr>
             <p:txBody>
               <a:bodyPr wrap="none" anchor="t" lIns="0" rIns="0" tIns="0" bIns="0">
-                <a:spAutoFit/>
+                <a:noAutofit/>
               </a:bodyPr>
               <a:lstStyle/>
               <a:p>
@@ -9786,7 +9908,7 @@
         <mc:Choice xmlns:a14="http://schemas.microsoft.com/office/drawing/2010/main" Requires="a14">
           <p:sp>
             <p:nvSpPr>
-              <p:cNvPr id="135" name="math:015" descr="AI_AUTOFIGURE_NATIVE_MATH_V1:eyJjb250ZW50X3J1bnMiOlt7ImNhbm9uaWNhbF9sYXRleCI6InLigLJfe3QrMX0iLCJmb3JtdWxhX2lkIjoiRVEwMTUiLCJraW5kIjoibWF0aCIsImxhdGV4X3NoYTI1NiI6ImY3NTUxODY4NGIyOGY1YjZkYzI3MmYzOGNjZDZkMjk0MjllOTNhZmFkMWFhZGJmY2JiYzA0MTg5ODIzY2VhYTEiLCJtb2RlIjoiaW5saW5lIiwib21tbF9zaGEyNTYiOiIxMjYzY2JkZjUzY2VjYWQ5OTcwMTIyMzNmMzU0YmU3ZWQwNTMzNTVlNzc3YmVjYjU3NzMxMjhlY2Q4OTliNWYyIiwic2VtYW50aWNfb21tbF9wcm9maWxlIjoib2ZmaWNlLW1hdGgtc2VtYW50aWMtdjIiLCJzZW1hbnRpY19vbW1sX3NoYTI1NiI6ImNiNzhjMGM2ZDlmNjhmNjE5NTU2OTg2NTk0YjE3MzhhMWVlOTBiZWQ3NzdmY2E1MzE1MTkxNTMzNjBhN2Y0OTQifV0sImZvcm11bGFzIjpbeyJjYW5vbmljYWxfbGF0ZXgiOiJy4oCyX3t0KzF9IiwiZm9ybXVsYV9pZCI6IkVRMDE1IiwibGF0ZXhfc2hhMjU2IjoiZjc1NTE4Njg0YjI4ZjViNmRjMjcyZjM4Y2NkNmQyOTQyOWU5M2FmYWQxYWFkYmZjYmJjMDQxODk4MjNjZWFhMSIsIm1vZGUiOiJpbmxpbmUiLCJvbW1sX3NoYTI1NiI6IjEyNjNjYmRmNTNjZWNhZDk5NzAxMjIzM2YzNTRiZTdlZDA1MzM1NWU3NzdiZWNiNTc3MzEyOGVjZDg5OWI1ZjIiLCJzZW1hbnRpY19vbW1sX3Byb2ZpbGUiOiJvZmZpY2UtbWF0aC1zZW1hbnRpYy12MiIsInNlbWFudGljX29tbWxfc2hhMjU2IjoiY2I3OGMwYzZkOWY2OGY2MTk1NTY5ODY1OTRiMTczOGExZWU5MGJlZDc3N2ZjYTUzMTUxOTE1MzM2MGE3ZjQ5NCJ9XSwia2luZCI6Im5hdGl2ZV9vZmZpY2VfbWF0aCIsInBsYWNlaG9sZGVyX25hbWUiOiJtYXRoOjAxNSIsInNjaGVtYV92ZXJzaW9uIjoiMS4wIn0="/>
+              <p:cNvPr id="138" name="math:015" descr="AI_AUTOFIGURE_NATIVE_MATH_V1:eyJjb250ZW50X3J1bnMiOlt7ImNhbm9uaWNhbF9sYXRleCI6InLigLJfe3QrMX0iLCJmb3JtdWxhX2lkIjoiRVEwMTUiLCJraW5kIjoibWF0aCIsImxhdGV4X3NoYTI1NiI6ImY3NTUxODY4NGIyOGY1YjZkYzI3MmYzOGNjZDZkMjk0MjllOTNhZmFkMWFhZGJmY2JiYzA0MTg5ODIzY2VhYTEiLCJtb2RlIjoiaW5saW5lIiwib21tbF9zaGEyNTYiOiIxMjYzY2JkZjUzY2VjYWQ5OTcwMTIyMzNmMzU0YmU3ZWQwNTMzNTVlNzc3YmVjYjU3NzMxMjhlY2Q4OTliNWYyIiwic2VtYW50aWNfb21tbF9wcm9maWxlIjoib2ZmaWNlLW1hdGgtc2VtYW50aWMtdjIiLCJzZW1hbnRpY19vbW1sX3NoYTI1NiI6ImNiNzhjMGM2ZDlmNjhmNjE5NTU2OTg2NTk0YjE3MzhhMWVlOTBiZWQ3NzdmY2E1MzE1MTkxNTMzNjBhN2Y0OTQifV0sImZvcm11bGFzIjpbeyJjYW5vbmljYWxfbGF0ZXgiOiJy4oCyX3t0KzF9IiwiZm9ybXVsYV9pZCI6IkVRMDE1IiwibGF0ZXhfc2hhMjU2IjoiZjc1NTE4Njg0YjI4ZjViNmRjMjcyZjM4Y2NkNmQyOTQyOWU5M2FmYWQxYWFkYmZjYmJjMDQxODk4MjNjZWFhMSIsIm1vZGUiOiJpbmxpbmUiLCJvbW1sX3NoYTI1NiI6IjEyNjNjYmRmNTNjZWNhZDk5NzAxMjIzM2YzNTRiZTdlZDA1MzM1NWU3NzdiZWNiNTc3MzEyOGVjZDg5OWI1ZjIiLCJzZW1hbnRpY19vbW1sX3Byb2ZpbGUiOiJvZmZpY2UtbWF0aC1zZW1hbnRpYy12MiIsInNlbWFudGljX29tbWxfc2hhMjU2IjoiY2I3OGMwYzZkOWY2OGY2MTk1NTY5ODY1OTRiMTczOGExZWU5MGJlZDc3N2ZjYTUzMTUxOTE1MzM2MGE3ZjQ5NCJ9XSwia2luZCI6Im5hdGl2ZV9vZmZpY2VfbWF0aCIsInBsYWNlaG9sZGVyX25hbWUiOiJtYXRoOjAxNSIsInNjaGVtYV92ZXJzaW9uIjoiMS4wIn0="/>
               <p:cNvSpPr txBox="1"/>
               <p:nvPr/>
             </p:nvSpPr>
@@ -9803,7 +9925,7 @@
             </p:spPr>
             <p:txBody>
               <a:bodyPr wrap="none" anchor="t" lIns="0" rIns="0" tIns="0" bIns="0">
-                <a:spAutoFit/>
+                <a:noAutofit/>
               </a:bodyPr>
               <a:lstStyle/>
               <a:p>
@@ -9858,7 +9980,7 @@
         <mc:Fallback>
           <p:sp>
             <p:nvSpPr>
-              <p:cNvPr id="135" name="math:015" descr="AI_AUTOFIGURE_MATH_FALLBACK_ONLY_V1:eyJjb250ZW50X3J1bnMiOlt7ImNhbm9uaWNhbF9sYXRleCI6InLigLJfe3QrMX0iLCJmb3JtdWxhX2lkIjoiRVEwMTUiLCJraW5kIjoibWF0aCIsImxhdGV4X3NoYTI1NiI6ImY3NTUxODY4NGIyOGY1YjZkYzI3MmYzOGNjZDZkMjk0MjllOTNhZmFkMWFhZGJmY2JiYzA0MTg5ODIzY2VhYTEiLCJtb2RlIjoiaW5saW5lIiwib21tbF9zaGEyNTYiOiIxMjYzY2JkZjUzY2VjYWQ5OTcwMTIyMzNmMzU0YmU3ZWQwNTMzNTVlNzc3YmVjYjU3NzMxMjhlY2Q4OTliNWYyIiwic2VtYW50aWNfb21tbF9wcm9maWxlIjoib2ZmaWNlLW1hdGgtc2VtYW50aWMtdjIiLCJzZW1hbnRpY19vbW1sX3NoYTI1NiI6ImNiNzhjMGM2ZDlmNjhmNjE5NTU2OTg2NTk0YjE3MzhhMWVlOTBiZWQ3NzdmY2E1MzE1MTkxNTMzNjBhN2Y0OTQifV0sImZvcm11bGFzIjpbeyJjYW5vbmljYWxfbGF0ZXgiOiJy4oCyX3t0KzF9IiwiZm9ybXVsYV9pZCI6IkVRMDE1IiwibGF0ZXhfc2hhMjU2IjoiZjc1NTE4Njg0YjI4ZjViNmRjMjcyZjM4Y2NkNmQyOTQyOWU5M2FmYWQxYWFkYmZjYmJjMDQxODk4MjNjZWFhMSIsIm1vZGUiOiJpbmxpbmUiLCJvbW1sX3NoYTI1NiI6IjEyNjNjYmRmNTNjZWNhZDk5NzAxMjIzM2YzNTRiZTdlZDA1MzM1NWU3NzdiZWNiNTc3MzEyOGVjZDg5OWI1ZjIiLCJzZW1hbnRpY19vbW1sX3Byb2ZpbGUiOiJvZmZpY2UtbWF0aC1zZW1hbnRpYy12MiIsInNlbWFudGljX29tbWxfc2hhMjU2IjoiY2I3OGMwYzZkOWY2OGY2MTk1NTY5ODY1OTRiMTczOGExZWU5MGJlZDc3N2ZjYTUzMTUxOTE1MzM2MGE3ZjQ5NCJ9XSwia2luZCI6Im5hdGl2ZV9vZmZpY2VfbWF0aCIsInBsYWNlaG9sZGVyX25hbWUiOiJtYXRoOjAxNSIsInNjaGVtYV92ZXJzaW9uIjoiMS4wIn0="/>
+              <p:cNvPr id="138" name="math:015" descr="AI_AUTOFIGURE_MATH_FALLBACK_ONLY_V1:eyJjb250ZW50X3J1bnMiOlt7ImNhbm9uaWNhbF9sYXRleCI6InLigLJfe3QrMX0iLCJmb3JtdWxhX2lkIjoiRVEwMTUiLCJraW5kIjoibWF0aCIsImxhdGV4X3NoYTI1NiI6ImY3NTUxODY4NGIyOGY1YjZkYzI3MmYzOGNjZDZkMjk0MjllOTNhZmFkMWFhZGJmY2JiYzA0MTg5ODIzY2VhYTEiLCJtb2RlIjoiaW5saW5lIiwib21tbF9zaGEyNTYiOiIxMjYzY2JkZjUzY2VjYWQ5OTcwMTIyMzNmMzU0YmU3ZWQwNTMzNTVlNzc3YmVjYjU3NzMxMjhlY2Q4OTliNWYyIiwic2VtYW50aWNfb21tbF9wcm9maWxlIjoib2ZmaWNlLW1hdGgtc2VtYW50aWMtdjIiLCJzZW1hbnRpY19vbW1sX3NoYTI1NiI6ImNiNzhjMGM2ZDlmNjhmNjE5NTU2OTg2NTk0YjE3MzhhMWVlOTBiZWQ3NzdmY2E1MzE1MTkxNTMzNjBhN2Y0OTQifV0sImZvcm11bGFzIjpbeyJjYW5vbmljYWxfbGF0ZXgiOiJy4oCyX3t0KzF9IiwiZm9ybXVsYV9pZCI6IkVRMDE1IiwibGF0ZXhfc2hhMjU2IjoiZjc1NTE4Njg0YjI4ZjViNmRjMjcyZjM4Y2NkNmQyOTQyOWU5M2FmYWQxYWFkYmZjYmJjMDQxODk4MjNjZWFhMSIsIm1vZGUiOiJpbmxpbmUiLCJvbW1sX3NoYTI1NiI6IjEyNjNjYmRmNTNjZWNhZDk5NzAxMjIzM2YzNTRiZTdlZDA1MzM1NWU3NzdiZWNiNTc3MzEyOGVjZDg5OWI1ZjIiLCJzZW1hbnRpY19vbW1sX3Byb2ZpbGUiOiJvZmZpY2UtbWF0aC1zZW1hbnRpYy12MiIsInNlbWFudGljX29tbWxfc2hhMjU2IjoiY2I3OGMwYzZkOWY2OGY2MTk1NTY5ODY1OTRiMTczOGExZWU5MGJlZDc3N2ZjYTUzMTUxOTE1MzM2MGE3ZjQ5NCJ9XSwia2luZCI6Im5hdGl2ZV9vZmZpY2VfbWF0aCIsInBsYWNlaG9sZGVyX25hbWUiOiJtYXRoOjAxNSIsInNjaGVtYV92ZXJzaW9uIjoiMS4wIn0="/>
               <p:cNvSpPr txBox="1"/>
               <p:nvPr/>
             </p:nvSpPr>
@@ -9875,7 +9997,7 @@
             </p:spPr>
             <p:txBody>
               <a:bodyPr wrap="none" anchor="t" lIns="0" rIns="0" tIns="0" bIns="0">
-                <a:spAutoFit/>
+                <a:noAutofit/>
               </a:bodyPr>
               <a:lstStyle/>
               <a:p>
@@ -9902,7 +10024,7 @@
         <mc:Choice xmlns:a14="http://schemas.microsoft.com/office/drawing/2010/main" Requires="a14">
           <p:sp>
             <p:nvSpPr>
-              <p:cNvPr id="136" name="math:016" descr="AI_AUTOFIGURE_NATIVE_MATH_V1:eyJjb250ZW50X3J1bnMiOlt7ImNhbm9uaWNhbF9sYXRleCI6InLigLJfe3QrMn0iLCJmb3JtdWxhX2lkIjoiRVEwMTYiLCJraW5kIjoibWF0aCIsImxhdGV4X3NoYTI1NiI6Ijk1MDQxNmMyNjQ2YjVjMjA5MmQ3YTU4MTdkZmJiYjhiZTkzMDNhNzU5NjAwNmM1MWNlMWNlZDIxYmI3OTIxOGQiLCJtb2RlIjoiaW5saW5lIiwib21tbF9zaGEyNTYiOiJlYTg4ZTRmNjdiODhlNTZiNmVkNTQ5MDcwN2RkZTMyMWU5OTU4MjEyYWYzNDljNGQ1NmZlNDA4NmNiMzQxYzQ5Iiwic2VtYW50aWNfb21tbF9wcm9maWxlIjoib2ZmaWNlLW1hdGgtc2VtYW50aWMtdjIiLCJzZW1hbnRpY19vbW1sX3NoYTI1NiI6Ijk2NDEwZGI1MzdlNmZiNzhmMzliZGEyNDY3ZGNhZmE4MzE5ZDM2ZTA1ODkwNzI1YjA5MTIwNWVhOWRjNDU5NDgifV0sImZvcm11bGFzIjpbeyJjYW5vbmljYWxfbGF0ZXgiOiJy4oCyX3t0KzJ9IiwiZm9ybXVsYV9pZCI6IkVRMDE2IiwibGF0ZXhfc2hhMjU2IjoiOTUwNDE2YzI2NDZiNWMyMDkyZDdhNTgxN2RmYmJiOGJlOTMwM2E3NTk2MDA2YzUxY2UxY2VkMjFiYjc5MjE4ZCIsIm1vZGUiOiJpbmxpbmUiLCJvbW1sX3NoYTI1NiI6ImVhODhlNGY2N2I4OGU1NmI2ZWQ1NDkwNzA3ZGRlMzIxZTk5NTgyMTJhZjM0OWM0ZDU2ZmU0MDg2Y2IzNDFjNDkiLCJzZW1hbnRpY19vbW1sX3Byb2ZpbGUiOiJvZmZpY2UtbWF0aC1zZW1hbnRpYy12MiIsInNlbWFudGljX29tbWxfc2hhMjU2IjoiOTY0MTBkYjUzN2U2ZmI3OGYzOWJkYTI0NjdkY2FmYTgzMTlkMzZlMDU4OTA3MjViMDkxMjA1ZWE5ZGM0NTk0OCJ9XSwia2luZCI6Im5hdGl2ZV9vZmZpY2VfbWF0aCIsInBsYWNlaG9sZGVyX25hbWUiOiJtYXRoOjAxNiIsInNjaGVtYV92ZXJzaW9uIjoiMS4wIn0="/>
+              <p:cNvPr id="139" name="math:016" descr="AI_AUTOFIGURE_NATIVE_MATH_V1:eyJjb250ZW50X3J1bnMiOlt7ImNhbm9uaWNhbF9sYXRleCI6InLigLJfe3QrMn0iLCJmb3JtdWxhX2lkIjoiRVEwMTYiLCJraW5kIjoibWF0aCIsImxhdGV4X3NoYTI1NiI6Ijk1MDQxNmMyNjQ2YjVjMjA5MmQ3YTU4MTdkZmJiYjhiZTkzMDNhNzU5NjAwNmM1MWNlMWNlZDIxYmI3OTIxOGQiLCJtb2RlIjoiaW5saW5lIiwib21tbF9zaGEyNTYiOiJlYTg4ZTRmNjdiODhlNTZiNmVkNTQ5MDcwN2RkZTMyMWU5OTU4MjEyYWYzNDljNGQ1NmZlNDA4NmNiMzQxYzQ5Iiwic2VtYW50aWNfb21tbF9wcm9maWxlIjoib2ZmaWNlLW1hdGgtc2VtYW50aWMtdjIiLCJzZW1hbnRpY19vbW1sX3NoYTI1NiI6Ijk2NDEwZGI1MzdlNmZiNzhmMzliZGEyNDY3ZGNhZmE4MzE5ZDM2ZTA1ODkwNzI1YjA5MTIwNWVhOWRjNDU5NDgifV0sImZvcm11bGFzIjpbeyJjYW5vbmljYWxfbGF0ZXgiOiJy4oCyX3t0KzJ9IiwiZm9ybXVsYV9pZCI6IkVRMDE2IiwibGF0ZXhfc2hhMjU2IjoiOTUwNDE2YzI2NDZiNWMyMDkyZDdhNTgxN2RmYmJiOGJlOTMwM2E3NTk2MDA2YzUxY2UxY2VkMjFiYjc5MjE4ZCIsIm1vZGUiOiJpbmxpbmUiLCJvbW1sX3NoYTI1NiI6ImVhODhlNGY2N2I4OGU1NmI2ZWQ1NDkwNzA3ZGRlMzIxZTk5NTgyMTJhZjM0OWM0ZDU2ZmU0MDg2Y2IzNDFjNDkiLCJzZW1hbnRpY19vbW1sX3Byb2ZpbGUiOiJvZmZpY2UtbWF0aC1zZW1hbnRpYy12MiIsInNlbWFudGljX29tbWxfc2hhMjU2IjoiOTY0MTBkYjUzN2U2ZmI3OGYzOWJkYTI0NjdkY2FmYTgzMTlkMzZlMDU4OTA3MjViMDkxMjA1ZWE5ZGM0NTk0OCJ9XSwia2luZCI6Im5hdGl2ZV9vZmZpY2VfbWF0aCIsInBsYWNlaG9sZGVyX25hbWUiOiJtYXRoOjAxNiIsInNjaGVtYV92ZXJzaW9uIjoiMS4wIn0="/>
               <p:cNvSpPr txBox="1"/>
               <p:nvPr/>
             </p:nvSpPr>
@@ -9919,7 +10041,7 @@
             </p:spPr>
             <p:txBody>
               <a:bodyPr wrap="none" anchor="t" lIns="0" rIns="0" tIns="0" bIns="0">
-                <a:spAutoFit/>
+                <a:noAutofit/>
               </a:bodyPr>
               <a:lstStyle/>
               <a:p>
@@ -9974,7 +10096,7 @@
         <mc:Fallback>
           <p:sp>
             <p:nvSpPr>
-              <p:cNvPr id="136" name="math:016" descr="AI_AUTOFIGURE_MATH_FALLBACK_ONLY_V1:eyJjb250ZW50X3J1bnMiOlt7ImNhbm9uaWNhbF9sYXRleCI6InLigLJfe3QrMn0iLCJmb3JtdWxhX2lkIjoiRVEwMTYiLCJraW5kIjoibWF0aCIsImxhdGV4X3NoYTI1NiI6Ijk1MDQxNmMyNjQ2YjVjMjA5MmQ3YTU4MTdkZmJiYjhiZTkzMDNhNzU5NjAwNmM1MWNlMWNlZDIxYmI3OTIxOGQiLCJtb2RlIjoiaW5saW5lIiwib21tbF9zaGEyNTYiOiJlYTg4ZTRmNjdiODhlNTZiNmVkNTQ5MDcwN2RkZTMyMWU5OTU4MjEyYWYzNDljNGQ1NmZlNDA4NmNiMzQxYzQ5Iiwic2VtYW50aWNfb21tbF9wcm9maWxlIjoib2ZmaWNlLW1hdGgtc2VtYW50aWMtdjIiLCJzZW1hbnRpY19vbW1sX3NoYTI1NiI6Ijk2NDEwZGI1MzdlNmZiNzhmMzliZGEyNDY3ZGNhZmE4MzE5ZDM2ZTA1ODkwNzI1YjA5MTIwNWVhOWRjNDU5NDgifV0sImZvcm11bGFzIjpbeyJjYW5vbmljYWxfbGF0ZXgiOiJy4oCyX3t0KzJ9IiwiZm9ybXVsYV9pZCI6IkVRMDE2IiwibGF0ZXhfc2hhMjU2IjoiOTUwNDE2YzI2NDZiNWMyMDkyZDdhNTgxN2RmYmJiOGJlOTMwM2E3NTk2MDA2YzUxY2UxY2VkMjFiYjc5MjE4ZCIsIm1vZGUiOiJpbmxpbmUiLCJvbW1sX3NoYTI1NiI6ImVhODhlNGY2N2I4OGU1NmI2ZWQ1NDkwNzA3ZGRlMzIxZTk5NTgyMTJhZjM0OWM0ZDU2ZmU0MDg2Y2IzNDFjNDkiLCJzZW1hbnRpY19vbW1sX3Byb2ZpbGUiOiJvZmZpY2UtbWF0aC1zZW1hbnRpYy12MiIsInNlbWFudGljX29tbWxfc2hhMjU2IjoiOTY0MTBkYjUzN2U2ZmI3OGYzOWJkYTI0NjdkY2FmYTgzMTlkMzZlMDU4OTA3MjViMDkxMjA1ZWE5ZGM0NTk0OCJ9XSwia2luZCI6Im5hdGl2ZV9vZmZpY2VfbWF0aCIsInBsYWNlaG9sZGVyX25hbWUiOiJtYXRoOjAxNiIsInNjaGVtYV92ZXJzaW9uIjoiMS4wIn0="/>
+              <p:cNvPr id="139" name="math:016" descr="AI_AUTOFIGURE_MATH_FALLBACK_ONLY_V1:eyJjb250ZW50X3J1bnMiOlt7ImNhbm9uaWNhbF9sYXRleCI6InLigLJfe3QrMn0iLCJmb3JtdWxhX2lkIjoiRVEwMTYiLCJraW5kIjoibWF0aCIsImxhdGV4X3NoYTI1NiI6Ijk1MDQxNmMyNjQ2YjVjMjA5MmQ3YTU4MTdkZmJiYjhiZTkzMDNhNzU5NjAwNmM1MWNlMWNlZDIxYmI3OTIxOGQiLCJtb2RlIjoiaW5saW5lIiwib21tbF9zaGEyNTYiOiJlYTg4ZTRmNjdiODhlNTZiNmVkNTQ5MDcwN2RkZTMyMWU5OTU4MjEyYWYzNDljNGQ1NmZlNDA4NmNiMzQxYzQ5Iiwic2VtYW50aWNfb21tbF9wcm9maWxlIjoib2ZmaWNlLW1hdGgtc2VtYW50aWMtdjIiLCJzZW1hbnRpY19vbW1sX3NoYTI1NiI6Ijk2NDEwZGI1MzdlNmZiNzhmMzliZGEyNDY3ZGNhZmE4MzE5ZDM2ZTA1ODkwNzI1YjA5MTIwNWVhOWRjNDU5NDgifV0sImZvcm11bGFzIjpbeyJjYW5vbmljYWxfbGF0ZXgiOiJy4oCyX3t0KzJ9IiwiZm9ybXVsYV9pZCI6IkVRMDE2IiwibGF0ZXhfc2hhMjU2IjoiOTUwNDE2YzI2NDZiNWMyMDkyZDdhNTgxN2RmYmJiOGJlOTMwM2E3NTk2MDA2YzUxY2UxY2VkMjFiYjc5MjE4ZCIsIm1vZGUiOiJpbmxpbmUiLCJvbW1sX3NoYTI1NiI6ImVhODhlNGY2N2I4OGU1NmI2ZWQ1NDkwNzA3ZGRlMzIxZTk5NTgyMTJhZjM0OWM0ZDU2ZmU0MDg2Y2IzNDFjNDkiLCJzZW1hbnRpY19vbW1sX3Byb2ZpbGUiOiJvZmZpY2UtbWF0aC1zZW1hbnRpYy12MiIsInNlbWFudGljX29tbWxfc2hhMjU2IjoiOTY0MTBkYjUzN2U2ZmI3OGYzOWJkYTI0NjdkY2FmYTgzMTlkMzZlMDU4OTA3MjViMDkxMjA1ZWE5ZGM0NTk0OCJ9XSwia2luZCI6Im5hdGl2ZV9vZmZpY2VfbWF0aCIsInBsYWNlaG9sZGVyX25hbWUiOiJtYXRoOjAxNiIsInNjaGVtYV92ZXJzaW9uIjoiMS4wIn0="/>
               <p:cNvSpPr txBox="1"/>
               <p:nvPr/>
             </p:nvSpPr>
@@ -9991,7 +10113,7 @@
             </p:spPr>
             <p:txBody>
               <a:bodyPr wrap="none" anchor="t" lIns="0" rIns="0" tIns="0" bIns="0">
-                <a:spAutoFit/>
+                <a:noAutofit/>
               </a:bodyPr>
               <a:lstStyle/>
               <a:p>
@@ -10016,7 +10138,7 @@
       </mc:AlternateContent>
       <p:sp>
         <p:nvSpPr>
-          <p:cNvPr id="137" name="af-policy-pi0-ellipse-01"/>
+          <p:cNvPr id="140" name="af-policy-pi0-ellipse-01" descr="{&quot;autofigure_element_id&quot;:&quot;policy-pi0&quot;}"/>
           <p:cNvSpPr/>
           <p:nvPr/>
         </p:nvSpPr>
@@ -10060,7 +10182,7 @@
       </p:sp>
       <p:sp>
         <p:nvSpPr>
-          <p:cNvPr id="138" name="af-policy-pi1-ellipse-01"/>
+          <p:cNvPr id="141" name="af-policy-pi1-ellipse-01" descr="{&quot;autofigure_element_id&quot;:&quot;policy-pi1&quot;}"/>
           <p:cNvSpPr/>
           <p:nvPr/>
         </p:nvSpPr>
@@ -10104,7 +10226,7 @@
       </p:sp>
       <p:sp>
         <p:nvSpPr>
-          <p:cNvPr id="139" name="af-policy-pi2-ellipse-01"/>
+          <p:cNvPr id="142" name="af-policy-pi2-ellipse-01" descr="{&quot;autofigure_element_id&quot;:&quot;policy-pi2&quot;}"/>
           <p:cNvSpPr/>
           <p:nvPr/>
         </p:nvSpPr>
@@ -10150,7 +10272,7 @@
         <mc:Choice xmlns:a14="http://schemas.microsoft.com/office/drawing/2010/main" Requires="a14">
           <p:sp>
             <p:nvSpPr>
-              <p:cNvPr id="140" name="math:017" descr="AI_AUTOFIGURE_NATIVE_MATH_V1:eyJjb250ZW50X3J1bnMiOlt7ImNhbm9uaWNhbF9sYXRleCI6IlxccGkiLCJmb3JtdWxhX2lkIjoiRVEwMTciLCJraW5kIjoibWF0aCIsImxhdGV4X3NoYTI1NiI6ImYxY2YwNDA5M2QwOGI2ZGMwZDU4YTg3Mzk2NDA1Y2I5MDkzYTIyZTllZDYyYTk1YmI5NWVkNDZlNWRhOTcwOTciLCJtb2RlIjoiaW5saW5lIiwib21tbF9zaGEyNTYiOiI4MGIzNzkwZWVkMDMxOWQ1MWJmZDZkZDA4MmQ2YTU3YTNjOTllNjU4Njc3MTA3ZDQyMTYyN2MxZjc0OGY3NjU5Iiwic2VtYW50aWNfb21tbF9wcm9maWxlIjoib2ZmaWNlLW1hdGgtc2VtYW50aWMtdjIiLCJzZW1hbnRpY19vbW1sX3NoYTI1NiI6ImU4OWQxNDFjNDBjNmI1MjM0M2IwNjM4ZWY3ZjUyODE2ZTg0ODU4NWY2MjU1MWFhYzMwNThjZWQwNGY3NjllYjYifV0sImZvcm11bGFzIjpbeyJjYW5vbmljYWxfbGF0ZXgiOiJcXHBpIiwiZm9ybXVsYV9pZCI6IkVRMDE3IiwibGF0ZXhfc2hhMjU2IjoiZjFjZjA0MDkzZDA4YjZkYzBkNThhODczOTY0MDVjYjkwOTNhMjJlOWVkNjJhOTViYjk1ZWQ0NmU1ZGE5NzA5NyIsIm1vZGUiOiJpbmxpbmUiLCJvbW1sX3NoYTI1NiI6IjgwYjM3OTBlZWQwMzE5ZDUxYmZkNmRkMDgyZDZhNTdhM2M5OWU2NTg2NzcxMDdkNDIxNjI3YzFmNzQ4Zjc2NTkiLCJzZW1hbnRpY19vbW1sX3Byb2ZpbGUiOiJvZmZpY2UtbWF0aC1zZW1hbnRpYy12MiIsInNlbWFudGljX29tbWxfc2hhMjU2IjoiZTg5ZDE0MWM0MGM2YjUyMzQzYjA2MzhlZjdmNTI4MTZlODQ4NTg1ZjYyNTUxYWFjMzA1OGNlZDA0Zjc2OWViNiJ9XSwia2luZCI6Im5hdGl2ZV9vZmZpY2VfbWF0aCIsInBsYWNlaG9sZGVyX25hbWUiOiJtYXRoOjAxNyIsInNjaGVtYV92ZXJzaW9uIjoiMS4wIn0="/>
+              <p:cNvPr id="143" name="math:017" descr="AI_AUTOFIGURE_NATIVE_MATH_V1:eyJjb250ZW50X3J1bnMiOlt7ImNhbm9uaWNhbF9sYXRleCI6IlxccGkiLCJmb3JtdWxhX2lkIjoiRVEwMTciLCJraW5kIjoibWF0aCIsImxhdGV4X3NoYTI1NiI6ImYxY2YwNDA5M2QwOGI2ZGMwZDU4YTg3Mzk2NDA1Y2I5MDkzYTIyZTllZDYyYTk1YmI5NWVkNDZlNWRhOTcwOTciLCJtb2RlIjoiaW5saW5lIiwib21tbF9zaGEyNTYiOiI4MGIzNzkwZWVkMDMxOWQ1MWJmZDZkZDA4MmQ2YTU3YTNjOTllNjU4Njc3MTA3ZDQyMTYyN2MxZjc0OGY3NjU5Iiwic2VtYW50aWNfb21tbF9wcm9maWxlIjoib2ZmaWNlLW1hdGgtc2VtYW50aWMtdjIiLCJzZW1hbnRpY19vbW1sX3NoYTI1NiI6ImU4OWQxNDFjNDBjNmI1MjM0M2IwNjM4ZWY3ZjUyODE2ZTg0ODU4NWY2MjU1MWFhYzMwNThjZWQwNGY3NjllYjYifV0sImZvcm11bGFzIjpbeyJjYW5vbmljYWxfbGF0ZXgiOiJcXHBpIiwiZm9ybXVsYV9pZCI6IkVRMDE3IiwibGF0ZXhfc2hhMjU2IjoiZjFjZjA0MDkzZDA4YjZkYzBkNThhODczOTY0MDVjYjkwOTNhMjJlOWVkNjJhOTViYjk1ZWQ0NmU1ZGE5NzA5NyIsIm1vZGUiOiJpbmxpbmUiLCJvbW1sX3NoYTI1NiI6IjgwYjM3OTBlZWQwMzE5ZDUxYmZkNmRkMDgyZDZhNTdhM2M5OWU2NTg2NzcxMDdkNDIxNjI3YzFmNzQ4Zjc2NTkiLCJzZW1hbnRpY19vbW1sX3Byb2ZpbGUiOiJvZmZpY2UtbWF0aC1zZW1hbnRpYy12MiIsInNlbWFudGljX29tbWxfc2hhMjU2IjoiZTg5ZDE0MWM0MGM2YjUyMzQzYjA2MzhlZjdmNTI4MTZlODQ4NTg1ZjYyNTUxYWFjMzA1OGNlZDA0Zjc2OWViNiJ9XSwia2luZCI6Im5hdGl2ZV9vZmZpY2VfbWF0aCIsInBsYWNlaG9sZGVyX25hbWUiOiJtYXRoOjAxNyIsInNjaGVtYV92ZXJzaW9uIjoiMS4wIn0="/>
               <p:cNvSpPr txBox="1"/>
               <p:nvPr/>
             </p:nvSpPr>
@@ -10167,7 +10289,7 @@
             </p:spPr>
             <p:txBody>
               <a:bodyPr wrap="none" anchor="t" lIns="0" rIns="0" tIns="0" bIns="0">
-                <a:spAutoFit/>
+                <a:noAutofit/>
               </a:bodyPr>
               <a:lstStyle/>
               <a:p>
@@ -10198,7 +10320,7 @@
         <mc:Fallback>
           <p:sp>
             <p:nvSpPr>
-              <p:cNvPr id="140" name="math:017" descr="AI_AUTOFIGURE_MATH_FALLBACK_ONLY_V1:eyJjb250ZW50X3J1bnMiOlt7ImNhbm9uaWNhbF9sYXRleCI6IlxccGkiLCJmb3JtdWxhX2lkIjoiRVEwMTciLCJraW5kIjoibWF0aCIsImxhdGV4X3NoYTI1NiI6ImYxY2YwNDA5M2QwOGI2ZGMwZDU4YTg3Mzk2NDA1Y2I5MDkzYTIyZTllZDYyYTk1YmI5NWVkNDZlNWRhOTcwOTciLCJtb2RlIjoiaW5saW5lIiwib21tbF9zaGEyNTYiOiI4MGIzNzkwZWVkMDMxOWQ1MWJmZDZkZDA4MmQ2YTU3YTNjOTllNjU4Njc3MTA3ZDQyMTYyN2MxZjc0OGY3NjU5Iiwic2VtYW50aWNfb21tbF9wcm9maWxlIjoib2ZmaWNlLW1hdGgtc2VtYW50aWMtdjIiLCJzZW1hbnRpY19vbW1sX3NoYTI1NiI6ImU4OWQxNDFjNDBjNmI1MjM0M2IwNjM4ZWY3ZjUyODE2ZTg0ODU4NWY2MjU1MWFhYzMwNThjZWQwNGY3NjllYjYifV0sImZvcm11bGFzIjpbeyJjYW5vbmljYWxfbGF0ZXgiOiJcXHBpIiwiZm9ybXVsYV9pZCI6IkVRMDE3IiwibGF0ZXhfc2hhMjU2IjoiZjFjZjA0MDkzZDA4YjZkYzBkNThhODczOTY0MDVjYjkwOTNhMjJlOWVkNjJhOTViYjk1ZWQ0NmU1ZGE5NzA5NyIsIm1vZGUiOiJpbmxpbmUiLCJvbW1sX3NoYTI1NiI6IjgwYjM3OTBlZWQwMzE5ZDUxYmZkNmRkMDgyZDZhNTdhM2M5OWU2NTg2NzcxMDdkNDIxNjI3YzFmNzQ4Zjc2NTkiLCJzZW1hbnRpY19vbW1sX3Byb2ZpbGUiOiJvZmZpY2UtbWF0aC1zZW1hbnRpYy12MiIsInNlbWFudGljX29tbWxfc2hhMjU2IjoiZTg5ZDE0MWM0MGM2YjUyMzQzYjA2MzhlZjdmNTI4MTZlODQ4NTg1ZjYyNTUxYWFjMzA1OGNlZDA0Zjc2OWViNiJ9XSwia2luZCI6Im5hdGl2ZV9vZmZpY2VfbWF0aCIsInBsYWNlaG9sZGVyX25hbWUiOiJtYXRoOjAxNyIsInNjaGVtYV92ZXJzaW9uIjoiMS4wIn0="/>
+              <p:cNvPr id="143" name="math:017" descr="AI_AUTOFIGURE_MATH_FALLBACK_ONLY_V1:eyJjb250ZW50X3J1bnMiOlt7ImNhbm9uaWNhbF9sYXRleCI6IlxccGkiLCJmb3JtdWxhX2lkIjoiRVEwMTciLCJraW5kIjoibWF0aCIsImxhdGV4X3NoYTI1NiI6ImYxY2YwNDA5M2QwOGI2ZGMwZDU4YTg3Mzk2NDA1Y2I5MDkzYTIyZTllZDYyYTk1YmI5NWVkNDZlNWRhOTcwOTciLCJtb2RlIjoiaW5saW5lIiwib21tbF9zaGEyNTYiOiI4MGIzNzkwZWVkMDMxOWQ1MWJmZDZkZDA4MmQ2YTU3YTNjOTllNjU4Njc3MTA3ZDQyMTYyN2MxZjc0OGY3NjU5Iiwic2VtYW50aWNfb21tbF9wcm9maWxlIjoib2ZmaWNlLW1hdGgtc2VtYW50aWMtdjIiLCJzZW1hbnRpY19vbW1sX3NoYTI1NiI6ImU4OWQxNDFjNDBjNmI1MjM0M2IwNjM4ZWY3ZjUyODE2ZTg0ODU4NWY2MjU1MWFhYzMwNThjZWQwNGY3NjllYjYifV0sImZvcm11bGFzIjpbeyJjYW5vbmljYWxfbGF0ZXgiOiJcXHBpIiwiZm9ybXVsYV9pZCI6IkVRMDE3IiwibGF0ZXhfc2hhMjU2IjoiZjFjZjA0MDkzZDA4YjZkYzBkNThhODczOTY0MDVjYjkwOTNhMjJlOWVkNjJhOTViYjk1ZWQ0NmU1ZGE5NzA5NyIsIm1vZGUiOiJpbmxpbmUiLCJvbW1sX3NoYTI1NiI6IjgwYjM3OTBlZWQwMzE5ZDUxYmZkNmRkMDgyZDZhNTdhM2M5OWU2NTg2NzcxMDdkNDIxNjI3YzFmNzQ4Zjc2NTkiLCJzZW1hbnRpY19vbW1sX3Byb2ZpbGUiOiJvZmZpY2UtbWF0aC1zZW1hbnRpYy12MiIsInNlbWFudGljX29tbWxfc2hhMjU2IjoiZTg5ZDE0MWM0MGM2YjUyMzQzYjA2MzhlZjdmNTI4MTZlODQ4NTg1ZjYyNTUxYWFjMzA1OGNlZDA0Zjc2OWViNiJ9XSwia2luZCI6Im5hdGl2ZV9vZmZpY2VfbWF0aCIsInBsYWNlaG9sZGVyX25hbWUiOiJtYXRoOjAxNyIsInNjaGVtYV92ZXJzaW9uIjoiMS4wIn0="/>
               <p:cNvSpPr txBox="1"/>
               <p:nvPr/>
             </p:nvSpPr>
@@ -10215,7 +10337,7 @@
             </p:spPr>
             <p:txBody>
               <a:bodyPr wrap="none" anchor="t" lIns="0" rIns="0" tIns="0" bIns="0">
-                <a:spAutoFit/>
+                <a:noAutofit/>
               </a:bodyPr>
               <a:lstStyle/>
               <a:p>
@@ -10242,7 +10364,7 @@
         <mc:Choice xmlns:a14="http://schemas.microsoft.com/office/drawing/2010/main" Requires="a14">
           <p:sp>
             <p:nvSpPr>
-              <p:cNvPr id="141" name="math:018" descr="AI_AUTOFIGURE_NATIVE_MATH_V1:eyJjb250ZW50X3J1bnMiOlt7ImNhbm9uaWNhbF9sYXRleCI6IlxccGkiLCJmb3JtdWxhX2lkIjoiRVEwMTgiLCJraW5kIjoibWF0aCIsImxhdGV4X3NoYTI1NiI6ImYxY2YwNDA5M2QwOGI2ZGMwZDU4YTg3Mzk2NDA1Y2I5MDkzYTIyZTllZDYyYTk1YmI5NWVkNDZlNWRhOTcwOTciLCJtb2RlIjoiaW5saW5lIiwib21tbF9zaGEyNTYiOiI4MGIzNzkwZWVkMDMxOWQ1MWJmZDZkZDA4MmQ2YTU3YTNjOTllNjU4Njc3MTA3ZDQyMTYyN2MxZjc0OGY3NjU5Iiwic2VtYW50aWNfb21tbF9wcm9maWxlIjoib2ZmaWNlLW1hdGgtc2VtYW50aWMtdjIiLCJzZW1hbnRpY19vbW1sX3NoYTI1NiI6ImU4OWQxNDFjNDBjNmI1MjM0M2IwNjM4ZWY3ZjUyODE2ZTg0ODU4NWY2MjU1MWFhYzMwNThjZWQwNGY3NjllYjYifV0sImZvcm11bGFzIjpbeyJjYW5vbmljYWxfbGF0ZXgiOiJcXHBpIiwiZm9ybXVsYV9pZCI6IkVRMDE4IiwibGF0ZXhfc2hhMjU2IjoiZjFjZjA0MDkzZDA4YjZkYzBkNThhODczOTY0MDVjYjkwOTNhMjJlOWVkNjJhOTViYjk1ZWQ0NmU1ZGE5NzA5NyIsIm1vZGUiOiJpbmxpbmUiLCJvbW1sX3NoYTI1NiI6IjgwYjM3OTBlZWQwMzE5ZDUxYmZkNmRkMDgyZDZhNTdhM2M5OWU2NTg2NzcxMDdkNDIxNjI3YzFmNzQ4Zjc2NTkiLCJzZW1hbnRpY19vbW1sX3Byb2ZpbGUiOiJvZmZpY2UtbWF0aC1zZW1hbnRpYy12MiIsInNlbWFudGljX29tbWxfc2hhMjU2IjoiZTg5ZDE0MWM0MGM2YjUyMzQzYjA2MzhlZjdmNTI4MTZlODQ4NTg1ZjYyNTUxYWFjMzA1OGNlZDA0Zjc2OWViNiJ9XSwia2luZCI6Im5hdGl2ZV9vZmZpY2VfbWF0aCIsInBsYWNlaG9sZGVyX25hbWUiOiJtYXRoOjAxOCIsInNjaGVtYV92ZXJzaW9uIjoiMS4wIn0="/>
+              <p:cNvPr id="144" name="math:018" descr="AI_AUTOFIGURE_NATIVE_MATH_V1:eyJjb250ZW50X3J1bnMiOlt7ImNhbm9uaWNhbF9sYXRleCI6IlxccGkiLCJmb3JtdWxhX2lkIjoiRVEwMTgiLCJraW5kIjoibWF0aCIsImxhdGV4X3NoYTI1NiI6ImYxY2YwNDA5M2QwOGI2ZGMwZDU4YTg3Mzk2NDA1Y2I5MDkzYTIyZTllZDYyYTk1YmI5NWVkNDZlNWRhOTcwOTciLCJtb2RlIjoiaW5saW5lIiwib21tbF9zaGEyNTYiOiI4MGIzNzkwZWVkMDMxOWQ1MWJmZDZkZDA4MmQ2YTU3YTNjOTllNjU4Njc3MTA3ZDQyMTYyN2MxZjc0OGY3NjU5Iiwic2VtYW50aWNfb21tbF9wcm9maWxlIjoib2ZmaWNlLW1hdGgtc2VtYW50aWMtdjIiLCJzZW1hbnRpY19vbW1sX3NoYTI1NiI6ImU4OWQxNDFjNDBjNmI1MjM0M2IwNjM4ZWY3ZjUyODE2ZTg0ODU4NWY2MjU1MWFhYzMwNThjZWQwNGY3NjllYjYifV0sImZvcm11bGFzIjpbeyJjYW5vbmljYWxfbGF0ZXgiOiJcXHBpIiwiZm9ybXVsYV9pZCI6IkVRMDE4IiwibGF0ZXhfc2hhMjU2IjoiZjFjZjA0MDkzZDA4YjZkYzBkNThhODczOTY0MDVjYjkwOTNhMjJlOWVkNjJhOTViYjk1ZWQ0NmU1ZGE5NzA5NyIsIm1vZGUiOiJpbmxpbmUiLCJvbW1sX3NoYTI1NiI6IjgwYjM3OTBlZWQwMzE5ZDUxYmZkNmRkMDgyZDZhNTdhM2M5OWU2NTg2NzcxMDdkNDIxNjI3YzFmNzQ4Zjc2NTkiLCJzZW1hbnRpY19vbW1sX3Byb2ZpbGUiOiJvZmZpY2UtbWF0aC1zZW1hbnRpYy12MiIsInNlbWFudGljX29tbWxfc2hhMjU2IjoiZTg5ZDE0MWM0MGM2YjUyMzQzYjA2MzhlZjdmNTI4MTZlODQ4NTg1ZjYyNTUxYWFjMzA1OGNlZDA0Zjc2OWViNiJ9XSwia2luZCI6Im5hdGl2ZV9vZmZpY2VfbWF0aCIsInBsYWNlaG9sZGVyX25hbWUiOiJtYXRoOjAxOCIsInNjaGVtYV92ZXJzaW9uIjoiMS4wIn0="/>
               <p:cNvSpPr txBox="1"/>
               <p:nvPr/>
             </p:nvSpPr>
@@ -10259,7 +10381,7 @@
             </p:spPr>
             <p:txBody>
               <a:bodyPr wrap="none" anchor="t" lIns="0" rIns="0" tIns="0" bIns="0">
-                <a:spAutoFit/>
+                <a:noAutofit/>
               </a:bodyPr>
               <a:lstStyle/>
               <a:p>
@@ -10290,7 +10412,7 @@
         <mc:Fallback>
           <p:sp>
             <p:nvSpPr>
-              <p:cNvPr id="141" name="math:018" descr="AI_AUTOFIGURE_MATH_FALLBACK_ONLY_V1:eyJjb250ZW50X3J1bnMiOlt7ImNhbm9uaWNhbF9sYXRleCI6IlxccGkiLCJmb3JtdWxhX2lkIjoiRVEwMTgiLCJraW5kIjoibWF0aCIsImxhdGV4X3NoYTI1NiI6ImYxY2YwNDA5M2QwOGI2ZGMwZDU4YTg3Mzk2NDA1Y2I5MDkzYTIyZTllZDYyYTk1YmI5NWVkNDZlNWRhOTcwOTciLCJtb2RlIjoiaW5saW5lIiwib21tbF9zaGEyNTYiOiI4MGIzNzkwZWVkMDMxOWQ1MWJmZDZkZDA4MmQ2YTU3YTNjOTllNjU4Njc3MTA3ZDQyMTYyN2MxZjc0OGY3NjU5Iiwic2VtYW50aWNfb21tbF9wcm9maWxlIjoib2ZmaWNlLW1hdGgtc2VtYW50aWMtdjIiLCJzZW1hbnRpY19vbW1sX3NoYTI1NiI6ImU4OWQxNDFjNDBjNmI1MjM0M2IwNjM4ZWY3ZjUyODE2ZTg0ODU4NWY2MjU1MWFhYzMwNThjZWQwNGY3NjllYjYifV0sImZvcm11bGFzIjpbeyJjYW5vbmljYWxfbGF0ZXgiOiJcXHBpIiwiZm9ybXVsYV9pZCI6IkVRMDE4IiwibGF0ZXhfc2hhMjU2IjoiZjFjZjA0MDkzZDA4YjZkYzBkNThhODczOTY0MDVjYjkwOTNhMjJlOWVkNjJhOTViYjk1ZWQ0NmU1ZGE5NzA5NyIsIm1vZGUiOiJpbmxpbmUiLCJvbW1sX3NoYTI1NiI6IjgwYjM3OTBlZWQwMzE5ZDUxYmZkNmRkMDgyZDZhNTdhM2M5OWU2NTg2NzcxMDdkNDIxNjI3YzFmNzQ4Zjc2NTkiLCJzZW1hbnRpY19vbW1sX3Byb2ZpbGUiOiJvZmZpY2UtbWF0aC1zZW1hbnRpYy12MiIsInNlbWFudGljX29tbWxfc2hhMjU2IjoiZTg5ZDE0MWM0MGM2YjUyMzQzYjA2MzhlZjdmNTI4MTZlODQ4NTg1ZjYyNTUxYWFjMzA1OGNlZDA0Zjc2OWViNiJ9XSwia2luZCI6Im5hdGl2ZV9vZmZpY2VfbWF0aCIsInBsYWNlaG9sZGVyX25hbWUiOiJtYXRoOjAxOCIsInNjaGVtYV92ZXJzaW9uIjoiMS4wIn0="/>
+              <p:cNvPr id="144" name="math:018" descr="AI_AUTOFIGURE_MATH_FALLBACK_ONLY_V1:eyJjb250ZW50X3J1bnMiOlt7ImNhbm9uaWNhbF9sYXRleCI6IlxccGkiLCJmb3JtdWxhX2lkIjoiRVEwMTgiLCJraW5kIjoibWF0aCIsImxhdGV4X3NoYTI1NiI6ImYxY2YwNDA5M2QwOGI2ZGMwZDU4YTg3Mzk2NDA1Y2I5MDkzYTIyZTllZDYyYTk1YmI5NWVkNDZlNWRhOTcwOTciLCJtb2RlIjoiaW5saW5lIiwib21tbF9zaGEyNTYiOiI4MGIzNzkwZWVkMDMxOWQ1MWJmZDZkZDA4MmQ2YTU3YTNjOTllNjU4Njc3MTA3ZDQyMTYyN2MxZjc0OGY3NjU5Iiwic2VtYW50aWNfb21tbF9wcm9maWxlIjoib2ZmaWNlLW1hdGgtc2VtYW50aWMtdjIiLCJzZW1hbnRpY19vbW1sX3NoYTI1NiI6ImU4OWQxNDFjNDBjNmI1MjM0M2IwNjM4ZWY3ZjUyODE2ZTg0ODU4NWY2MjU1MWFhYzMwNThjZWQwNGY3NjllYjYifV0sImZvcm11bGFzIjpbeyJjYW5vbmljYWxfbGF0ZXgiOiJcXHBpIiwiZm9ybXVsYV9pZCI6IkVRMDE4IiwibGF0ZXhfc2hhMjU2IjoiZjFjZjA0MDkzZDA4YjZkYzBkNThhODczOTY0MDVjYjkwOTNhMjJlOWVkNjJhOTViYjk1ZWQ0NmU1ZGE5NzA5NyIsIm1vZGUiOiJpbmxpbmUiLCJvbW1sX3NoYTI1NiI6IjgwYjM3OTBlZWQwMzE5ZDUxYmZkNmRkMDgyZDZhNTdhM2M5OWU2NTg2NzcxMDdkNDIxNjI3YzFmNzQ4Zjc2NTkiLCJzZW1hbnRpY19vbW1sX3Byb2ZpbGUiOiJvZmZpY2UtbWF0aC1zZW1hbnRpYy12MiIsInNlbWFudGljX29tbWxfc2hhMjU2IjoiZTg5ZDE0MWM0MGM2YjUyMzQzYjA2MzhlZjdmNTI4MTZlODQ4NTg1ZjYyNTUxYWFjMzA1OGNlZDA0Zjc2OWViNiJ9XSwia2luZCI6Im5hdGl2ZV9vZmZpY2VfbWF0aCIsInBsYWNlaG9sZGVyX25hbWUiOiJtYXRoOjAxOCIsInNjaGVtYV92ZXJzaW9uIjoiMS4wIn0="/>
               <p:cNvSpPr txBox="1"/>
               <p:nvPr/>
             </p:nvSpPr>
@@ -10307,7 +10429,7 @@
             </p:spPr>
             <p:txBody>
               <a:bodyPr wrap="none" anchor="t" lIns="0" rIns="0" tIns="0" bIns="0">
-                <a:spAutoFit/>
+                <a:noAutofit/>
               </a:bodyPr>
               <a:lstStyle/>
               <a:p>
@@ -10334,7 +10456,7 @@
         <mc:Choice xmlns:a14="http://schemas.microsoft.com/office/drawing/2010/main" Requires="a14">
           <p:sp>
             <p:nvSpPr>
-              <p:cNvPr id="142" name="math:019" descr="AI_AUTOFIGURE_NATIVE_MATH_V1:eyJjb250ZW50X3J1bnMiOlt7ImNhbm9uaWNhbF9sYXRleCI6IlxccGkiLCJmb3JtdWxhX2lkIjoiRVEwMTkiLCJraW5kIjoibWF0aCIsImxhdGV4X3NoYTI1NiI6ImYxY2YwNDA5M2QwOGI2ZGMwZDU4YTg3Mzk2NDA1Y2I5MDkzYTIyZTllZDYyYTk1YmI5NWVkNDZlNWRhOTcwOTciLCJtb2RlIjoiaW5saW5lIiwib21tbF9zaGEyNTYiOiI4MGIzNzkwZWVkMDMxOWQ1MWJmZDZkZDA4MmQ2YTU3YTNjOTllNjU4Njc3MTA3ZDQyMTYyN2MxZjc0OGY3NjU5Iiwic2VtYW50aWNfb21tbF9wcm9maWxlIjoib2ZmaWNlLW1hdGgtc2VtYW50aWMtdjIiLCJzZW1hbnRpY19vbW1sX3NoYTI1NiI6ImU4OWQxNDFjNDBjNmI1MjM0M2IwNjM4ZWY3ZjUyODE2ZTg0ODU4NWY2MjU1MWFhYzMwNThjZWQwNGY3NjllYjYifV0sImZvcm11bGFzIjpbeyJjYW5vbmljYWxfbGF0ZXgiOiJcXHBpIiwiZm9ybXVsYV9pZCI6IkVRMDE5IiwibGF0ZXhfc2hhMjU2IjoiZjFjZjA0MDkzZDA4YjZkYzBkNThhODczOTY0MDVjYjkwOTNhMjJlOWVkNjJhOTViYjk1ZWQ0NmU1ZGE5NzA5NyIsIm1vZGUiOiJpbmxpbmUiLCJvbW1sX3NoYTI1NiI6IjgwYjM3OTBlZWQwMzE5ZDUxYmZkNmRkMDgyZDZhNTdhM2M5OWU2NTg2NzcxMDdkNDIxNjI3YzFmNzQ4Zjc2NTkiLCJzZW1hbnRpY19vbW1sX3Byb2ZpbGUiOiJvZmZpY2UtbWF0aC1zZW1hbnRpYy12MiIsInNlbWFudGljX29tbWxfc2hhMjU2IjoiZTg5ZDE0MWM0MGM2YjUyMzQzYjA2MzhlZjdmNTI4MTZlODQ4NTg1ZjYyNTUxYWFjMzA1OGNlZDA0Zjc2OWViNiJ9XSwia2luZCI6Im5hdGl2ZV9vZmZpY2VfbWF0aCIsInBsYWNlaG9sZGVyX25hbWUiOiJtYXRoOjAxOSIsInNjaGVtYV92ZXJzaW9uIjoiMS4wIn0="/>
+              <p:cNvPr id="145" name="math:019" descr="AI_AUTOFIGURE_NATIVE_MATH_V1:eyJjb250ZW50X3J1bnMiOlt7ImNhbm9uaWNhbF9sYXRleCI6IlxccGkiLCJmb3JtdWxhX2lkIjoiRVEwMTkiLCJraW5kIjoibWF0aCIsImxhdGV4X3NoYTI1NiI6ImYxY2YwNDA5M2QwOGI2ZGMwZDU4YTg3Mzk2NDA1Y2I5MDkzYTIyZTllZDYyYTk1YmI5NWVkNDZlNWRhOTcwOTciLCJtb2RlIjoiaW5saW5lIiwib21tbF9zaGEyNTYiOiI4MGIzNzkwZWVkMDMxOWQ1MWJmZDZkZDA4MmQ2YTU3YTNjOTllNjU4Njc3MTA3ZDQyMTYyN2MxZjc0OGY3NjU5Iiwic2VtYW50aWNfb21tbF9wcm9maWxlIjoib2ZmaWNlLW1hdGgtc2VtYW50aWMtdjIiLCJzZW1hbnRpY19vbW1sX3NoYTI1NiI6ImU4OWQxNDFjNDBjNmI1MjM0M2IwNjM4ZWY3ZjUyODE2ZTg0ODU4NWY2MjU1MWFhYzMwNThjZWQwNGY3NjllYjYifV0sImZvcm11bGFzIjpbeyJjYW5vbmljYWxfbGF0ZXgiOiJcXHBpIiwiZm9ybXVsYV9pZCI6IkVRMDE5IiwibGF0ZXhfc2hhMjU2IjoiZjFjZjA0MDkzZDA4YjZkYzBkNThhODczOTY0MDVjYjkwOTNhMjJlOWVkNjJhOTViYjk1ZWQ0NmU1ZGE5NzA5NyIsIm1vZGUiOiJpbmxpbmUiLCJvbW1sX3NoYTI1NiI6IjgwYjM3OTBlZWQwMzE5ZDUxYmZkNmRkMDgyZDZhNTdhM2M5OWU2NTg2NzcxMDdkNDIxNjI3YzFmNzQ4Zjc2NTkiLCJzZW1hbnRpY19vbW1sX3Byb2ZpbGUiOiJvZmZpY2UtbWF0aC1zZW1hbnRpYy12MiIsInNlbWFudGljX29tbWxfc2hhMjU2IjoiZTg5ZDE0MWM0MGM2YjUyMzQzYjA2MzhlZjdmNTI4MTZlODQ4NTg1ZjYyNTUxYWFjMzA1OGNlZDA0Zjc2OWViNiJ9XSwia2luZCI6Im5hdGl2ZV9vZmZpY2VfbWF0aCIsInBsYWNlaG9sZGVyX25hbWUiOiJtYXRoOjAxOSIsInNjaGVtYV92ZXJzaW9uIjoiMS4wIn0="/>
               <p:cNvSpPr txBox="1"/>
               <p:nvPr/>
             </p:nvSpPr>
@@ -10351,7 +10473,7 @@
             </p:spPr>
             <p:txBody>
               <a:bodyPr wrap="none" anchor="t" lIns="0" rIns="0" tIns="0" bIns="0">
-                <a:spAutoFit/>
+                <a:noAutofit/>
               </a:bodyPr>
               <a:lstStyle/>
               <a:p>
@@ -10382,7 +10504,7 @@
         <mc:Fallback>
           <p:sp>
             <p:nvSpPr>
-              <p:cNvPr id="142" name="math:019" descr="AI_AUTOFIGURE_MATH_FALLBACK_ONLY_V1:eyJjb250ZW50X3J1bnMiOlt7ImNhbm9uaWNhbF9sYXRleCI6IlxccGkiLCJmb3JtdWxhX2lkIjoiRVEwMTkiLCJraW5kIjoibWF0aCIsImxhdGV4X3NoYTI1NiI6ImYxY2YwNDA5M2QwOGI2ZGMwZDU4YTg3Mzk2NDA1Y2I5MDkzYTIyZTllZDYyYTk1YmI5NWVkNDZlNWRhOTcwOTciLCJtb2RlIjoiaW5saW5lIiwib21tbF9zaGEyNTYiOiI4MGIzNzkwZWVkMDMxOWQ1MWJmZDZkZDA4MmQ2YTU3YTNjOTllNjU4Njc3MTA3ZDQyMTYyN2MxZjc0OGY3NjU5Iiwic2VtYW50aWNfb21tbF9wcm9maWxlIjoib2ZmaWNlLW1hdGgtc2VtYW50aWMtdjIiLCJzZW1hbnRpY19vbW1sX3NoYTI1NiI6ImU4OWQxNDFjNDBjNmI1MjM0M2IwNjM4ZWY3ZjUyODE2ZTg0ODU4NWY2MjU1MWFhYzMwNThjZWQwNGY3NjllYjYifV0sImZvcm11bGFzIjpbeyJjYW5vbmljYWxfbGF0ZXgiOiJcXHBpIiwiZm9ybXVsYV9pZCI6IkVRMDE5IiwibGF0ZXhfc2hhMjU2IjoiZjFjZjA0MDkzZDA4YjZkYzBkNThhODczOTY0MDVjYjkwOTNhMjJlOWVkNjJhOTViYjk1ZWQ0NmU1ZGE5NzA5NyIsIm1vZGUiOiJpbmxpbmUiLCJvbW1sX3NoYTI1NiI6IjgwYjM3OTBlZWQwMzE5ZDUxYmZkNmRkMDgyZDZhNTdhM2M5OWU2NTg2NzcxMDdkNDIxNjI3YzFmNzQ4Zjc2NTkiLCJzZW1hbnRpY19vbW1sX3Byb2ZpbGUiOiJvZmZpY2UtbWF0aC1zZW1hbnRpYy12MiIsInNlbWFudGljX29tbWxfc2hhMjU2IjoiZTg5ZDE0MWM0MGM2YjUyMzQzYjA2MzhlZjdmNTI4MTZlODQ4NTg1ZjYyNTUxYWFjMzA1OGNlZDA0Zjc2OWViNiJ9XSwia2luZCI6Im5hdGl2ZV9vZmZpY2VfbWF0aCIsInBsYWNlaG9sZGVyX25hbWUiOiJtYXRoOjAxOSIsInNjaGVtYV92ZXJzaW9uIjoiMS4wIn0="/>
+              <p:cNvPr id="145" name="math:019" descr="AI_AUTOFIGURE_MATH_FALLBACK_ONLY_V1:eyJjb250ZW50X3J1bnMiOlt7ImNhbm9uaWNhbF9sYXRleCI6IlxccGkiLCJmb3JtdWxhX2lkIjoiRVEwMTkiLCJraW5kIjoibWF0aCIsImxhdGV4X3NoYTI1NiI6ImYxY2YwNDA5M2QwOGI2ZGMwZDU4YTg3Mzk2NDA1Y2I5MDkzYTIyZTllZDYyYTk1YmI5NWVkNDZlNWRhOTcwOTciLCJtb2RlIjoiaW5saW5lIiwib21tbF9zaGEyNTYiOiI4MGIzNzkwZWVkMDMxOWQ1MWJmZDZkZDA4MmQ2YTU3YTNjOTllNjU4Njc3MTA3ZDQyMTYyN2MxZjc0OGY3NjU5Iiwic2VtYW50aWNfb21tbF9wcm9maWxlIjoib2ZmaWNlLW1hdGgtc2VtYW50aWMtdjIiLCJzZW1hbnRpY19vbW1sX3NoYTI1NiI6ImU4OWQxNDFjNDBjNmI1MjM0M2IwNjM4ZWY3ZjUyODE2ZTg0ODU4NWY2MjU1MWFhYzMwNThjZWQwNGY3NjllYjYifV0sImZvcm11bGFzIjpbeyJjYW5vbmljYWxfbGF0ZXgiOiJcXHBpIiwiZm9ybXVsYV9pZCI6IkVRMDE5IiwibGF0ZXhfc2hhMjU2IjoiZjFjZjA0MDkzZDA4YjZkYzBkNThhODczOTY0MDVjYjkwOTNhMjJlOWVkNjJhOTViYjk1ZWQ0NmU1ZGE5NzA5NyIsIm1vZGUiOiJpbmxpbmUiLCJvbW1sX3NoYTI1NiI6IjgwYjM3OTBlZWQwMzE5ZDUxYmZkNmRkMDgyZDZhNTdhM2M5OWU2NTg2NzcxMDdkNDIxNjI3YzFmNzQ4Zjc2NTkiLCJzZW1hbnRpY19vbW1sX3Byb2ZpbGUiOiJvZmZpY2UtbWF0aC1zZW1hbnRpYy12MiIsInNlbWFudGljX29tbWxfc2hhMjU2IjoiZTg5ZDE0MWM0MGM2YjUyMzQzYjA2MzhlZjdmNTI4MTZlODQ4NTg1ZjYyNTUxYWFjMzA1OGNlZDA0Zjc2OWViNiJ9XSwia2luZCI6Im5hdGl2ZV9vZmZpY2VfbWF0aCIsInBsYWNlaG9sZGVyX25hbWUiOiJtYXRoOjAxOSIsInNjaGVtYV92ZXJzaW9uIjoiMS4wIn0="/>
               <p:cNvSpPr txBox="1"/>
               <p:nvPr/>
             </p:nvSpPr>
@@ -10399,7 +10521,7 @@
             </p:spPr>
             <p:txBody>
               <a:bodyPr wrap="none" anchor="t" lIns="0" rIns="0" tIns="0" bIns="0">
-                <a:spAutoFit/>
+                <a:noAutofit/>
               </a:bodyPr>
               <a:lstStyle/>
               <a:p>
@@ -10424,7 +10546,7 @@
       </mc:AlternateContent>
       <p:sp>
         <p:nvSpPr>
-          <p:cNvPr id="143" name="af-action-a0-ellipse-01"/>
+          <p:cNvPr id="146" name="af-action-a0-ellipse-01" descr="{&quot;autofigure_element_id&quot;:&quot;action-a0&quot;}"/>
           <p:cNvSpPr/>
           <p:nvPr/>
         </p:nvSpPr>
@@ -10468,7 +10590,7 @@
       </p:sp>
       <p:sp>
         <p:nvSpPr>
-          <p:cNvPr id="144" name="af-action-a1-ellipse-01"/>
+          <p:cNvPr id="147" name="af-action-a1-ellipse-01" descr="{&quot;autofigure_element_id&quot;:&quot;action-a1&quot;}"/>
           <p:cNvSpPr/>
           <p:nvPr/>
         </p:nvSpPr>
@@ -10512,7 +10634,7 @@
       </p:sp>
       <p:sp>
         <p:nvSpPr>
-          <p:cNvPr id="145" name="af-action-a2-ellipse-01"/>
+          <p:cNvPr id="148" name="af-action-a2-ellipse-01" descr="{&quot;autofigure_element_id&quot;:&quot;action-a2&quot;}"/>
           <p:cNvSpPr/>
           <p:nvPr/>
         </p:nvSpPr>
@@ -10558,7 +10680,7 @@
         <mc:Choice xmlns:a14="http://schemas.microsoft.com/office/drawing/2010/main" Requires="a14">
           <p:sp>
             <p:nvSpPr>
-              <p:cNvPr id="146" name="math:020" descr="AI_AUTOFIGURE_NATIVE_MATH_V1:eyJjb250ZW50X3J1bnMiOlt7ImNhbm9uaWNhbF9sYXRleCI6ImFfe3R9IiwiZm9ybXVsYV9pZCI6IkVRMDIwIiwia2luZCI6Im1hdGgiLCJsYXRleF9zaGEyNTYiOiJiMjM2YTRmNjc5MDRhMDkzYjk2N2E2NTYxMjY2OTM2Yjc1MDczMTAwMjc5YjZjZGRkYzhlMTc3Nzc2ZDVmZDdlIiwibW9kZSI6ImlubGluZSIsIm9tbWxfc2hhMjU2IjoiOTRjNWE5YzNlOGZiOWY5NmRhOWFiZDJkYTJiMTA4ZDdlNzUyNDU2YzJkYzZlNDJiNzlmZDZmYTAwNGRmNmMzYyIsInNlbWFudGljX29tbWxfcHJvZmlsZSI6Im9mZmljZS1tYXRoLXNlbWFudGljLXYyIiwic2VtYW50aWNfb21tbF9zaGEyNTYiOiI1OGYyMTBlMTVmNzM4YjY1YTk3MmYyODI4MTFjYTllMjBkODE0MWU4ZTk2N2JjYWE4NGRkN2VlZTBlZmU4MzFhIn1dLCJmb3JtdWxhcyI6W3siY2Fub25pY2FsX2xhdGV4IjoiYV97dH0iLCJmb3JtdWxhX2lkIjoiRVEwMjAiLCJsYXRleF9zaGEyNTYiOiJiMjM2YTRmNjc5MDRhMDkzYjk2N2E2NTYxMjY2OTM2Yjc1MDczMTAwMjc5YjZjZGRkYzhlMTc3Nzc2ZDVmZDdlIiwibW9kZSI6ImlubGluZSIsIm9tbWxfc2hhMjU2IjoiOTRjNWE5YzNlOGZiOWY5NmRhOWFiZDJkYTJiMTA4ZDdlNzUyNDU2YzJkYzZlNDJiNzlmZDZmYTAwNGRmNmMzYyIsInNlbWFudGljX29tbWxfcHJvZmlsZSI6Im9mZmljZS1tYXRoLXNlbWFudGljLXYyIiwic2VtYW50aWNfb21tbF9zaGEyNTYiOiI1OGYyMTBlMTVmNzM4YjY1YTk3MmYyODI4MTFjYTllMjBkODE0MWU4ZTk2N2JjYWE4NGRkN2VlZTBlZmU4MzFhIn1dLCJraW5kIjoibmF0aXZlX29mZmljZV9tYXRoIiwicGxhY2Vob2xkZXJfbmFtZSI6Im1hdGg6MDIwIiwic2NoZW1hX3ZlcnNpb24iOiIxLjAifQ=="/>
+              <p:cNvPr id="149" name="math:020" descr="AI_AUTOFIGURE_NATIVE_MATH_V1:eyJjb250ZW50X3J1bnMiOlt7ImNhbm9uaWNhbF9sYXRleCI6ImFfe3R9IiwiZm9ybXVsYV9pZCI6IkVRMDIwIiwia2luZCI6Im1hdGgiLCJsYXRleF9zaGEyNTYiOiJiMjM2YTRmNjc5MDRhMDkzYjk2N2E2NTYxMjY2OTM2Yjc1MDczMTAwMjc5YjZjZGRkYzhlMTc3Nzc2ZDVmZDdlIiwibW9kZSI6ImlubGluZSIsIm9tbWxfc2hhMjU2IjoiOTRjNWE5YzNlOGZiOWY5NmRhOWFiZDJkYTJiMTA4ZDdlNzUyNDU2YzJkYzZlNDJiNzlmZDZmYTAwNGRmNmMzYyIsInNlbWFudGljX29tbWxfcHJvZmlsZSI6Im9mZmljZS1tYXRoLXNlbWFudGljLXYyIiwic2VtYW50aWNfb21tbF9zaGEyNTYiOiI1OGYyMTBlMTVmNzM4YjY1YTk3MmYyODI4MTFjYTllMjBkODE0MWU4ZTk2N2JjYWE4NGRkN2VlZTBlZmU4MzFhIn1dLCJmb3JtdWxhcyI6W3siY2Fub25pY2FsX2xhdGV4IjoiYV97dH0iLCJmb3JtdWxhX2lkIjoiRVEwMjAiLCJsYXRleF9zaGEyNTYiOiJiMjM2YTRmNjc5MDRhMDkzYjk2N2E2NTYxMjY2OTM2Yjc1MDczMTAwMjc5YjZjZGRkYzhlMTc3Nzc2ZDVmZDdlIiwibW9kZSI6ImlubGluZSIsIm9tbWxfc2hhMjU2IjoiOTRjNWE5YzNlOGZiOWY5NmRhOWFiZDJkYTJiMTA4ZDdlNzUyNDU2YzJkYzZlNDJiNzlmZDZmYTAwNGRmNmMzYyIsInNlbWFudGljX29tbWxfcHJvZmlsZSI6Im9mZmljZS1tYXRoLXNlbWFudGljLXYyIiwic2VtYW50aWNfb21tbF9zaGEyNTYiOiI1OGYyMTBlMTVmNzM4YjY1YTk3MmYyODI4MTFjYTllMjBkODE0MWU4ZTk2N2JjYWE4NGRkN2VlZTBlZmU4MzFhIn1dLCJraW5kIjoibmF0aXZlX29mZmljZV9tYXRoIiwicGxhY2Vob2xkZXJfbmFtZSI6Im1hdGg6MDIwIiwic2NoZW1hX3ZlcnNpb24iOiIxLjAifQ=="/>
               <p:cNvSpPr txBox="1"/>
               <p:nvPr/>
             </p:nvSpPr>
@@ -10575,7 +10697,7 @@
             </p:spPr>
             <p:txBody>
               <a:bodyPr wrap="none" anchor="t" lIns="0" rIns="0" tIns="0" bIns="0">
-                <a:spAutoFit/>
+                <a:noAutofit/>
               </a:bodyPr>
               <a:lstStyle/>
               <a:p>
@@ -10621,7 +10743,7 @@
         <mc:Fallback>
           <p:sp>
             <p:nvSpPr>
-              <p:cNvPr id="146" name="math:020" descr="AI_AUTOFIGURE_MATH_FALLBACK_ONLY_V1:eyJjb250ZW50X3J1bnMiOlt7ImNhbm9uaWNhbF9sYXRleCI6ImFfe3R9IiwiZm9ybXVsYV9pZCI6IkVRMDIwIiwia2luZCI6Im1hdGgiLCJsYXRleF9zaGEyNTYiOiJiMjM2YTRmNjc5MDRhMDkzYjk2N2E2NTYxMjY2OTM2Yjc1MDczMTAwMjc5YjZjZGRkYzhlMTc3Nzc2ZDVmZDdlIiwibW9kZSI6ImlubGluZSIsIm9tbWxfc2hhMjU2IjoiOTRjNWE5YzNlOGZiOWY5NmRhOWFiZDJkYTJiMTA4ZDdlNzUyNDU2YzJkYzZlNDJiNzlmZDZmYTAwNGRmNmMzYyIsInNlbWFudGljX29tbWxfcHJvZmlsZSI6Im9mZmljZS1tYXRoLXNlbWFudGljLXYyIiwic2VtYW50aWNfb21tbF9zaGEyNTYiOiI1OGYyMTBlMTVmNzM4YjY1YTk3MmYyODI4MTFjYTllMjBkODE0MWU4ZTk2N2JjYWE4NGRkN2VlZTBlZmU4MzFhIn1dLCJmb3JtdWxhcyI6W3siY2Fub25pY2FsX2xhdGV4IjoiYV97dH0iLCJmb3JtdWxhX2lkIjoiRVEwMjAiLCJsYXRleF9zaGEyNTYiOiJiMjM2YTRmNjc5MDRhMDkzYjk2N2E2NTYxMjY2OTM2Yjc1MDczMTAwMjc5YjZjZGRkYzhlMTc3Nzc2ZDVmZDdlIiwibW9kZSI6ImlubGluZSIsIm9tbWxfc2hhMjU2IjoiOTRjNWE5YzNlOGZiOWY5NmRhOWFiZDJkYTJiMTA4ZDdlNzUyNDU2YzJkYzZlNDJiNzlmZDZmYTAwNGRmNmMzYyIsInNlbWFudGljX29tbWxfcHJvZmlsZSI6Im9mZmljZS1tYXRoLXNlbWFudGljLXYyIiwic2VtYW50aWNfb21tbF9zaGEyNTYiOiI1OGYyMTBlMTVmNzM4YjY1YTk3MmYyODI4MTFjYTllMjBkODE0MWU4ZTk2N2JjYWE4NGRkN2VlZTBlZmU4MzFhIn1dLCJraW5kIjoibmF0aXZlX29mZmljZV9tYXRoIiwicGxhY2Vob2xkZXJfbmFtZSI6Im1hdGg6MDIwIiwic2NoZW1hX3ZlcnNpb24iOiIxLjAifQ=="/>
+              <p:cNvPr id="149" name="math:020" descr="AI_AUTOFIGURE_MATH_FALLBACK_ONLY_V1:eyJjb250ZW50X3J1bnMiOlt7ImNhbm9uaWNhbF9sYXRleCI6ImFfe3R9IiwiZm9ybXVsYV9pZCI6IkVRMDIwIiwia2luZCI6Im1hdGgiLCJsYXRleF9zaGEyNTYiOiJiMjM2YTRmNjc5MDRhMDkzYjk2N2E2NTYxMjY2OTM2Yjc1MDczMTAwMjc5YjZjZGRkYzhlMTc3Nzc2ZDVmZDdlIiwibW9kZSI6ImlubGluZSIsIm9tbWxfc2hhMjU2IjoiOTRjNWE5YzNlOGZiOWY5NmRhOWFiZDJkYTJiMTA4ZDdlNzUyNDU2YzJkYzZlNDJiNzlmZDZmYTAwNGRmNmMzYyIsInNlbWFudGljX29tbWxfcHJvZmlsZSI6Im9mZmljZS1tYXRoLXNlbWFudGljLXYyIiwic2VtYW50aWNfb21tbF9zaGEyNTYiOiI1OGYyMTBlMTVmNzM4YjY1YTk3MmYyODI4MTFjYTllMjBkODE0MWU4ZTk2N2JjYWE4NGRkN2VlZTBlZmU4MzFhIn1dLCJmb3JtdWxhcyI6W3siY2Fub25pY2FsX2xhdGV4IjoiYV97dH0iLCJmb3JtdWxhX2lkIjoiRVEwMjAiLCJsYXRleF9zaGEyNTYiOiJiMjM2YTRmNjc5MDRhMDkzYjk2N2E2NTYxMjY2OTM2Yjc1MDczMTAwMjc5YjZjZGRkYzhlMTc3Nzc2ZDVmZDdlIiwibW9kZSI6ImlubGluZSIsIm9tbWxfc2hhMjU2IjoiOTRjNWE5YzNlOGZiOWY5NmRhOWFiZDJkYTJiMTA4ZDdlNzUyNDU2YzJkYzZlNDJiNzlmZDZmYTAwNGRmNmMzYyIsInNlbWFudGljX29tbWxfcHJvZmlsZSI6Im9mZmljZS1tYXRoLXNlbWFudGljLXYyIiwic2VtYW50aWNfb21tbF9zaGEyNTYiOiI1OGYyMTBlMTVmNzM4YjY1YTk3MmYyODI4MTFjYTllMjBkODE0MWU4ZTk2N2JjYWE4NGRkN2VlZTBlZmU4MzFhIn1dLCJraW5kIjoibmF0aXZlX29mZmljZV9tYXRoIiwicGxhY2Vob2xkZXJfbmFtZSI6Im1hdGg6MDIwIiwic2NoZW1hX3ZlcnNpb24iOiIxLjAifQ=="/>
               <p:cNvSpPr txBox="1"/>
               <p:nvPr/>
             </p:nvSpPr>
@@ -10638,7 +10760,7 @@
             </p:spPr>
             <p:txBody>
               <a:bodyPr wrap="none" anchor="t" lIns="0" rIns="0" tIns="0" bIns="0">
-                <a:spAutoFit/>
+                <a:noAutofit/>
               </a:bodyPr>
               <a:lstStyle/>
               <a:p>
@@ -10665,7 +10787,7 @@
         <mc:Choice xmlns:a14="http://schemas.microsoft.com/office/drawing/2010/main" Requires="a14">
           <p:sp>
             <p:nvSpPr>
-              <p:cNvPr id="147" name="math:021" descr="AI_AUTOFIGURE_NATIVE_MATH_V1:eyJjb250ZW50X3J1bnMiOlt7ImNhbm9uaWNhbF9sYXRleCI6ImFfe3QrMX0iLCJmb3JtdWxhX2lkIjoiRVEwMjEiLCJraW5kIjoibWF0aCIsImxhdGV4X3NoYTI1NiI6ImNkNTFlODVhMWRhMGJkNjU2MGEzOGU0NTVmNWIzMDNkYjcxNzUzMzc3NmRhZTFjZjU0NGM0ZTEwOGJmM2VhZWEiLCJtb2RlIjoiaW5saW5lIiwib21tbF9zaGEyNTYiOiJiYzc2NzNhNjFlZDE1OTBkYmJjNzQzYzMzNjI2NWU0Zjk4ZTYzOGZhMGE3NzMxZjRlMzk2MmE3NDdmNmY1MmYwIiwic2VtYW50aWNfb21tbF9wcm9maWxlIjoib2ZmaWNlLW1hdGgtc2VtYW50aWMtdjIiLCJzZW1hbnRpY19vbW1sX3NoYTI1NiI6IjM1ZmU0NTJiNDQ4ZWY4MTUxMWJlOTA3ZjVlZWRjOWM1YjYwMWMzN2U2NTVmY2ZmNDY3ZmQ5NzFiYWM4ZTllZTEifV0sImZvcm11bGFzIjpbeyJjYW5vbmljYWxfbGF0ZXgiOiJhX3t0KzF9IiwiZm9ybXVsYV9pZCI6IkVRMDIxIiwibGF0ZXhfc2hhMjU2IjoiY2Q1MWU4NWExZGEwYmQ2NTYwYTM4ZTQ1NWY1YjMwM2RiNzE3NTMzNzc2ZGFlMWNmNTQ0YzRlMTA4YmYzZWFlYSIsIm1vZGUiOiJpbmxpbmUiLCJvbW1sX3NoYTI1NiI6ImJjNzY3M2E2MWVkMTU5MGRiYmM3NDNjMzM2MjY1ZTRmOThlNjM4ZmEwYTc3MzFmNGUzOTYyYTc0N2Y2ZjUyZjAiLCJzZW1hbnRpY19vbW1sX3Byb2ZpbGUiOiJvZmZpY2UtbWF0aC1zZW1hbnRpYy12MiIsInNlbWFudGljX29tbWxfc2hhMjU2IjoiMzVmZTQ1MmI0NDhlZjgxNTExYmU5MDdmNWVlZGM5YzViNjAxYzM3ZTY1NWZjZmY0NjdmZDk3MWJhYzhlOWVlMSJ9XSwia2luZCI6Im5hdGl2ZV9vZmZpY2VfbWF0aCIsInBsYWNlaG9sZGVyX25hbWUiOiJtYXRoOjAyMSIsInNjaGVtYV92ZXJzaW9uIjoiMS4wIn0="/>
+              <p:cNvPr id="150" name="math:021" descr="AI_AUTOFIGURE_NATIVE_MATH_V1:eyJjb250ZW50X3J1bnMiOlt7ImNhbm9uaWNhbF9sYXRleCI6ImFfe3QrMX0iLCJmb3JtdWxhX2lkIjoiRVEwMjEiLCJraW5kIjoibWF0aCIsImxhdGV4X3NoYTI1NiI6ImNkNTFlODVhMWRhMGJkNjU2MGEzOGU0NTVmNWIzMDNkYjcxNzUzMzc3NmRhZTFjZjU0NGM0ZTEwOGJmM2VhZWEiLCJtb2RlIjoiaW5saW5lIiwib21tbF9zaGEyNTYiOiJiYzc2NzNhNjFlZDE1OTBkYmJjNzQzYzMzNjI2NWU0Zjk4ZTYzOGZhMGE3NzMxZjRlMzk2MmE3NDdmNmY1MmYwIiwic2VtYW50aWNfb21tbF9wcm9maWxlIjoib2ZmaWNlLW1hdGgtc2VtYW50aWMtdjIiLCJzZW1hbnRpY19vbW1sX3NoYTI1NiI6IjM1ZmU0NTJiNDQ4ZWY4MTUxMWJlOTA3ZjVlZWRjOWM1YjYwMWMzN2U2NTVmY2ZmNDY3ZmQ5NzFiYWM4ZTllZTEifV0sImZvcm11bGFzIjpbeyJjYW5vbmljYWxfbGF0ZXgiOiJhX3t0KzF9IiwiZm9ybXVsYV9pZCI6IkVRMDIxIiwibGF0ZXhfc2hhMjU2IjoiY2Q1MWU4NWExZGEwYmQ2NTYwYTM4ZTQ1NWY1YjMwM2RiNzE3NTMzNzc2ZGFlMWNmNTQ0YzRlMTA4YmYzZWFlYSIsIm1vZGUiOiJpbmxpbmUiLCJvbW1sX3NoYTI1NiI6ImJjNzY3M2E2MWVkMTU5MGRiYmM3NDNjMzM2MjY1ZTRmOThlNjM4ZmEwYTc3MzFmNGUzOTYyYTc0N2Y2ZjUyZjAiLCJzZW1hbnRpY19vbW1sX3Byb2ZpbGUiOiJvZmZpY2UtbWF0aC1zZW1hbnRpYy12MiIsInNlbWFudGljX29tbWxfc2hhMjU2IjoiMzVmZTQ1MmI0NDhlZjgxNTExYmU5MDdmNWVlZGM5YzViNjAxYzM3ZTY1NWZjZmY0NjdmZDk3MWJhYzhlOWVlMSJ9XSwia2luZCI6Im5hdGl2ZV9vZmZpY2VfbWF0aCIsInBsYWNlaG9sZGVyX25hbWUiOiJtYXRoOjAyMSIsInNjaGVtYV92ZXJzaW9uIjoiMS4wIn0="/>
               <p:cNvSpPr txBox="1"/>
               <p:nvPr/>
             </p:nvSpPr>
@@ -10682,7 +10804,7 @@
             </p:spPr>
             <p:txBody>
               <a:bodyPr wrap="none" anchor="t" lIns="0" rIns="0" tIns="0" bIns="0">
-                <a:spAutoFit/>
+                <a:noAutofit/>
               </a:bodyPr>
               <a:lstStyle/>
               <a:p>
@@ -10728,7 +10850,7 @@
         <mc:Fallback>
           <p:sp>
             <p:nvSpPr>
-              <p:cNvPr id="147" name="math:021" descr="AI_AUTOFIGURE_MATH_FALLBACK_ONLY_V1:eyJjb250ZW50X3J1bnMiOlt7ImNhbm9uaWNhbF9sYXRleCI6ImFfe3QrMX0iLCJmb3JtdWxhX2lkIjoiRVEwMjEiLCJraW5kIjoibWF0aCIsImxhdGV4X3NoYTI1NiI6ImNkNTFlODVhMWRhMGJkNjU2MGEzOGU0NTVmNWIzMDNkYjcxNzUzMzc3NmRhZTFjZjU0NGM0ZTEwOGJmM2VhZWEiLCJtb2RlIjoiaW5saW5lIiwib21tbF9zaGEyNTYiOiJiYzc2NzNhNjFlZDE1OTBkYmJjNzQzYzMzNjI2NWU0Zjk4ZTYzOGZhMGE3NzMxZjRlMzk2MmE3NDdmNmY1MmYwIiwic2VtYW50aWNfb21tbF9wcm9maWxlIjoib2ZmaWNlLW1hdGgtc2VtYW50aWMtdjIiLCJzZW1hbnRpY19vbW1sX3NoYTI1NiI6IjM1ZmU0NTJiNDQ4ZWY4MTUxMWJlOTA3ZjVlZWRjOWM1YjYwMWMzN2U2NTVmY2ZmNDY3ZmQ5NzFiYWM4ZTllZTEifV0sImZvcm11bGFzIjpbeyJjYW5vbmljYWxfbGF0ZXgiOiJhX3t0KzF9IiwiZm9ybXVsYV9pZCI6IkVRMDIxIiwibGF0ZXhfc2hhMjU2IjoiY2Q1MWU4NWExZGEwYmQ2NTYwYTM4ZTQ1NWY1YjMwM2RiNzE3NTMzNzc2ZGFlMWNmNTQ0YzRlMTA4YmYzZWFlYSIsIm1vZGUiOiJpbmxpbmUiLCJvbW1sX3NoYTI1NiI6ImJjNzY3M2E2MWVkMTU5MGRiYmM3NDNjMzM2MjY1ZTRmOThlNjM4ZmEwYTc3MzFmNGUzOTYyYTc0N2Y2ZjUyZjAiLCJzZW1hbnRpY19vbW1sX3Byb2ZpbGUiOiJvZmZpY2UtbWF0aC1zZW1hbnRpYy12MiIsInNlbWFudGljX29tbWxfc2hhMjU2IjoiMzVmZTQ1MmI0NDhlZjgxNTExYmU5MDdmNWVlZGM5YzViNjAxYzM3ZTY1NWZjZmY0NjdmZDk3MWJhYzhlOWVlMSJ9XSwia2luZCI6Im5hdGl2ZV9vZmZpY2VfbWF0aCIsInBsYWNlaG9sZGVyX25hbWUiOiJtYXRoOjAyMSIsInNjaGVtYV92ZXJzaW9uIjoiMS4wIn0="/>
+              <p:cNvPr id="150" name="math:021" descr="AI_AUTOFIGURE_MATH_FALLBACK_ONLY_V1:eyJjb250ZW50X3J1bnMiOlt7ImNhbm9uaWNhbF9sYXRleCI6ImFfe3QrMX0iLCJmb3JtdWxhX2lkIjoiRVEwMjEiLCJraW5kIjoibWF0aCIsImxhdGV4X3NoYTI1NiI6ImNkNTFlODVhMWRhMGJkNjU2MGEzOGU0NTVmNWIzMDNkYjcxNzUzMzc3NmRhZTFjZjU0NGM0ZTEwOGJmM2VhZWEiLCJtb2RlIjoiaW5saW5lIiwib21tbF9zaGEyNTYiOiJiYzc2NzNhNjFlZDE1OTBkYmJjNzQzYzMzNjI2NWU0Zjk4ZTYzOGZhMGE3NzMxZjRlMzk2MmE3NDdmNmY1MmYwIiwic2VtYW50aWNfb21tbF9wcm9maWxlIjoib2ZmaWNlLW1hdGgtc2VtYW50aWMtdjIiLCJzZW1hbnRpY19vbW1sX3NoYTI1NiI6IjM1ZmU0NTJiNDQ4ZWY4MTUxMWJlOTA3ZjVlZWRjOWM1YjYwMWMzN2U2NTVmY2ZmNDY3ZmQ5NzFiYWM4ZTllZTEifV0sImZvcm11bGFzIjpbeyJjYW5vbmljYWxfbGF0ZXgiOiJhX3t0KzF9IiwiZm9ybXVsYV9pZCI6IkVRMDIxIiwibGF0ZXhfc2hhMjU2IjoiY2Q1MWU4NWExZGEwYmQ2NTYwYTM4ZTQ1NWY1YjMwM2RiNzE3NTMzNzc2ZGFlMWNmNTQ0YzRlMTA4YmYzZWFlYSIsIm1vZGUiOiJpbmxpbmUiLCJvbW1sX3NoYTI1NiI6ImJjNzY3M2E2MWVkMTU5MGRiYmM3NDNjMzM2MjY1ZTRmOThlNjM4ZmEwYTc3MzFmNGUzOTYyYTc0N2Y2ZjUyZjAiLCJzZW1hbnRpY19vbW1sX3Byb2ZpbGUiOiJvZmZpY2UtbWF0aC1zZW1hbnRpYy12MiIsInNlbWFudGljX29tbWxfc2hhMjU2IjoiMzVmZTQ1MmI0NDhlZjgxNTExYmU5MDdmNWVlZGM5YzViNjAxYzM3ZTY1NWZjZmY0NjdmZDk3MWJhYzhlOWVlMSJ9XSwia2luZCI6Im5hdGl2ZV9vZmZpY2VfbWF0aCIsInBsYWNlaG9sZGVyX25hbWUiOiJtYXRoOjAyMSIsInNjaGVtYV92ZXJzaW9uIjoiMS4wIn0="/>
               <p:cNvSpPr txBox="1"/>
               <p:nvPr/>
             </p:nvSpPr>
@@ -10745,7 +10867,7 @@
             </p:spPr>
             <p:txBody>
               <a:bodyPr wrap="none" anchor="t" lIns="0" rIns="0" tIns="0" bIns="0">
-                <a:spAutoFit/>
+                <a:noAutofit/>
               </a:bodyPr>
               <a:lstStyle/>
               <a:p>
@@ -10772,7 +10894,7 @@
         <mc:Choice xmlns:a14="http://schemas.microsoft.com/office/drawing/2010/main" Requires="a14">
           <p:sp>
             <p:nvSpPr>
-              <p:cNvPr id="148" name="math:022" descr="AI_AUTOFIGURE_NATIVE_MATH_V1:eyJjb250ZW50X3J1bnMiOlt7ImNhbm9uaWNhbF9sYXRleCI6ImFfe3QrMn0iLCJmb3JtdWxhX2lkIjoiRVEwMjIiLCJraW5kIjoibWF0aCIsImxhdGV4X3NoYTI1NiI6ImZkYWYzMzQzZjgxNjEyYjY0OWZlNDcyZDc0Mzk4M2U2YTBmMTI4MzdiOGZmY2M4NjUwMTVhNjZkYWU0Zjc2YjQiLCJtb2RlIjoiaW5saW5lIiwib21tbF9zaGEyNTYiOiI4MWRjMWE4MmFlNGVmY2JmMDYxYmYzM2E2NmNjZmE4OGNkOTg5NzQzZjM2NjExMzhmZWRiYmU1OTNlZjJjOTVlIiwic2VtYW50aWNfb21tbF9wcm9maWxlIjoib2ZmaWNlLW1hdGgtc2VtYW50aWMtdjIiLCJzZW1hbnRpY19vbW1sX3NoYTI1NiI6ImYzNmQyNDY3MzZjNjAyNjZkODBmMWI0MGY3ODU1MTk0NDgzNjE4ZjcyYWM1ZjlmMWJhZTg5YTQwZGZjYmM3MWIifV0sImZvcm11bGFzIjpbeyJjYW5vbmljYWxfbGF0ZXgiOiJhX3t0KzJ9IiwiZm9ybXVsYV9pZCI6IkVRMDIyIiwibGF0ZXhfc2hhMjU2IjoiZmRhZjMzNDNmODE2MTJiNjQ5ZmU0NzJkNzQzOTgzZTZhMGYxMjgzN2I4ZmZjYzg2NTAxNWE2NmRhZTRmNzZiNCIsIm1vZGUiOiJpbmxpbmUiLCJvbW1sX3NoYTI1NiI6IjgxZGMxYTgyYWU0ZWZjYmYwNjFiZjMzYTY2Y2NmYTg4Y2Q5ODk3NDNmMzY2MTEzOGZlZGJiZTU5M2VmMmM5NWUiLCJzZW1hbnRpY19vbW1sX3Byb2ZpbGUiOiJvZmZpY2UtbWF0aC1zZW1hbnRpYy12MiIsInNlbWFudGljX29tbWxfc2hhMjU2IjoiZjM2ZDI0NjczNmM2MDI2NmQ4MGYxYjQwZjc4NTUxOTQ0ODM2MThmNzJhYzVmOWYxYmFlODlhNDBkZmNiYzcxYiJ9XSwia2luZCI6Im5hdGl2ZV9vZmZpY2VfbWF0aCIsInBsYWNlaG9sZGVyX25hbWUiOiJtYXRoOjAyMiIsInNjaGVtYV92ZXJzaW9uIjoiMS4wIn0="/>
+              <p:cNvPr id="151" name="math:022" descr="AI_AUTOFIGURE_NATIVE_MATH_V1:eyJjb250ZW50X3J1bnMiOlt7ImNhbm9uaWNhbF9sYXRleCI6ImFfe3QrMn0iLCJmb3JtdWxhX2lkIjoiRVEwMjIiLCJraW5kIjoibWF0aCIsImxhdGV4X3NoYTI1NiI6ImZkYWYzMzQzZjgxNjEyYjY0OWZlNDcyZDc0Mzk4M2U2YTBmMTI4MzdiOGZmY2M4NjUwMTVhNjZkYWU0Zjc2YjQiLCJtb2RlIjoiaW5saW5lIiwib21tbF9zaGEyNTYiOiI4MWRjMWE4MmFlNGVmY2JmMDYxYmYzM2E2NmNjZmE4OGNkOTg5NzQzZjM2NjExMzhmZWRiYmU1OTNlZjJjOTVlIiwic2VtYW50aWNfb21tbF9wcm9maWxlIjoib2ZmaWNlLW1hdGgtc2VtYW50aWMtdjIiLCJzZW1hbnRpY19vbW1sX3NoYTI1NiI6ImYzNmQyNDY3MzZjNjAyNjZkODBmMWI0MGY3ODU1MTk0NDgzNjE4ZjcyYWM1ZjlmMWJhZTg5YTQwZGZjYmM3MWIifV0sImZvcm11bGFzIjpbeyJjYW5vbmljYWxfbGF0ZXgiOiJhX3t0KzJ9IiwiZm9ybXVsYV9pZCI6IkVRMDIyIiwibGF0ZXhfc2hhMjU2IjoiZmRhZjMzNDNmODE2MTJiNjQ5ZmU0NzJkNzQzOTgzZTZhMGYxMjgzN2I4ZmZjYzg2NTAxNWE2NmRhZTRmNzZiNCIsIm1vZGUiOiJpbmxpbmUiLCJvbW1sX3NoYTI1NiI6IjgxZGMxYTgyYWU0ZWZjYmYwNjFiZjMzYTY2Y2NmYTg4Y2Q5ODk3NDNmMzY2MTEzOGZlZGJiZTU5M2VmMmM5NWUiLCJzZW1hbnRpY19vbW1sX3Byb2ZpbGUiOiJvZmZpY2UtbWF0aC1zZW1hbnRpYy12MiIsInNlbWFudGljX29tbWxfc2hhMjU2IjoiZjM2ZDI0NjczNmM2MDI2NmQ4MGYxYjQwZjc4NTUxOTQ0ODM2MThmNzJhYzVmOWYxYmFlODlhNDBkZmNiYzcxYiJ9XSwia2luZCI6Im5hdGl2ZV9vZmZpY2VfbWF0aCIsInBsYWNlaG9sZGVyX25hbWUiOiJtYXRoOjAyMiIsInNjaGVtYV92ZXJzaW9uIjoiMS4wIn0="/>
               <p:cNvSpPr txBox="1"/>
               <p:nvPr/>
             </p:nvSpPr>
@@ -10789,7 +10911,7 @@
             </p:spPr>
             <p:txBody>
               <a:bodyPr wrap="none" anchor="t" lIns="0" rIns="0" tIns="0" bIns="0">
-                <a:spAutoFit/>
+                <a:noAutofit/>
               </a:bodyPr>
               <a:lstStyle/>
               <a:p>
@@ -10835,7 +10957,7 @@
         <mc:Fallback>
           <p:sp>
             <p:nvSpPr>
-              <p:cNvPr id="148" name="math:022" descr="AI_AUTOFIGURE_MATH_FALLBACK_ONLY_V1:eyJjb250ZW50X3J1bnMiOlt7ImNhbm9uaWNhbF9sYXRleCI6ImFfe3QrMn0iLCJmb3JtdWxhX2lkIjoiRVEwMjIiLCJraW5kIjoibWF0aCIsImxhdGV4X3NoYTI1NiI6ImZkYWYzMzQzZjgxNjEyYjY0OWZlNDcyZDc0Mzk4M2U2YTBmMTI4MzdiOGZmY2M4NjUwMTVhNjZkYWU0Zjc2YjQiLCJtb2RlIjoiaW5saW5lIiwib21tbF9zaGEyNTYiOiI4MWRjMWE4MmFlNGVmY2JmMDYxYmYzM2E2NmNjZmE4OGNkOTg5NzQzZjM2NjExMzhmZWRiYmU1OTNlZjJjOTVlIiwic2VtYW50aWNfb21tbF9wcm9maWxlIjoib2ZmaWNlLW1hdGgtc2VtYW50aWMtdjIiLCJzZW1hbnRpY19vbW1sX3NoYTI1NiI6ImYzNmQyNDY3MzZjNjAyNjZkODBmMWI0MGY3ODU1MTk0NDgzNjE4ZjcyYWM1ZjlmMWJhZTg5YTQwZGZjYmM3MWIifV0sImZvcm11bGFzIjpbeyJjYW5vbmljYWxfbGF0ZXgiOiJhX3t0KzJ9IiwiZm9ybXVsYV9pZCI6IkVRMDIyIiwibGF0ZXhfc2hhMjU2IjoiZmRhZjMzNDNmODE2MTJiNjQ5ZmU0NzJkNzQzOTgzZTZhMGYxMjgzN2I4ZmZjYzg2NTAxNWE2NmRhZTRmNzZiNCIsIm1vZGUiOiJpbmxpbmUiLCJvbW1sX3NoYTI1NiI6IjgxZGMxYTgyYWU0ZWZjYmYwNjFiZjMzYTY2Y2NmYTg4Y2Q5ODk3NDNmMzY2MTEzOGZlZGJiZTU5M2VmMmM5NWUiLCJzZW1hbnRpY19vbW1sX3Byb2ZpbGUiOiJvZmZpY2UtbWF0aC1zZW1hbnRpYy12MiIsInNlbWFudGljX29tbWxfc2hhMjU2IjoiZjM2ZDI0NjczNmM2MDI2NmQ4MGYxYjQwZjc4NTUxOTQ0ODM2MThmNzJhYzVmOWYxYmFlODlhNDBkZmNiYzcxYiJ9XSwia2luZCI6Im5hdGl2ZV9vZmZpY2VfbWF0aCIsInBsYWNlaG9sZGVyX25hbWUiOiJtYXRoOjAyMiIsInNjaGVtYV92ZXJzaW9uIjoiMS4wIn0="/>
+              <p:cNvPr id="151" name="math:022" descr="AI_AUTOFIGURE_MATH_FALLBACK_ONLY_V1:eyJjb250ZW50X3J1bnMiOlt7ImNhbm9uaWNhbF9sYXRleCI6ImFfe3QrMn0iLCJmb3JtdWxhX2lkIjoiRVEwMjIiLCJraW5kIjoibWF0aCIsImxhdGV4X3NoYTI1NiI6ImZkYWYzMzQzZjgxNjEyYjY0OWZlNDcyZDc0Mzk4M2U2YTBmMTI4MzdiOGZmY2M4NjUwMTVhNjZkYWU0Zjc2YjQiLCJtb2RlIjoiaW5saW5lIiwib21tbF9zaGEyNTYiOiI4MWRjMWE4MmFlNGVmY2JmMDYxYmYzM2E2NmNjZmE4OGNkOTg5NzQzZjM2NjExMzhmZWRiYmU1OTNlZjJjOTVlIiwic2VtYW50aWNfb21tbF9wcm9maWxlIjoib2ZmaWNlLW1hdGgtc2VtYW50aWMtdjIiLCJzZW1hbnRpY19vbW1sX3NoYTI1NiI6ImYzNmQyNDY3MzZjNjAyNjZkODBmMWI0MGY3ODU1MTk0NDgzNjE4ZjcyYWM1ZjlmMWJhZTg5YTQwZGZjYmM3MWIifV0sImZvcm11bGFzIjpbeyJjYW5vbmljYWxfbGF0ZXgiOiJhX3t0KzJ9IiwiZm9ybXVsYV9pZCI6IkVRMDIyIiwibGF0ZXhfc2hhMjU2IjoiZmRhZjMzNDNmODE2MTJiNjQ5ZmU0NzJkNzQzOTgzZTZhMGYxMjgzN2I4ZmZjYzg2NTAxNWE2NmRhZTRmNzZiNCIsIm1vZGUiOiJpbmxpbmUiLCJvbW1sX3NoYTI1NiI6IjgxZGMxYTgyYWU0ZWZjYmYwNjFiZjMzYTY2Y2NmYTg4Y2Q5ODk3NDNmMzY2MTEzOGZlZGJiZTU5M2VmMmM5NWUiLCJzZW1hbnRpY19vbW1sX3Byb2ZpbGUiOiJvZmZpY2UtbWF0aC1zZW1hbnRpYy12MiIsInNlbWFudGljX29tbWxfc2hhMjU2IjoiZjM2ZDI0NjczNmM2MDI2NmQ4MGYxYjQwZjc4NTUxOTQ0ODM2MThmNzJhYzVmOWYxYmFlODlhNDBkZmNiYzcxYiJ9XSwia2luZCI6Im5hdGl2ZV9vZmZpY2VfbWF0aCIsInBsYWNlaG9sZGVyX25hbWUiOiJtYXRoOjAyMiIsInNjaGVtYV92ZXJzaW9uIjoiMS4wIn0="/>
               <p:cNvSpPr txBox="1"/>
               <p:nvPr/>
             </p:nvSpPr>
@@ -10852,7 +10974,7 @@
             </p:spPr>
             <p:txBody>
               <a:bodyPr wrap="none" anchor="t" lIns="0" rIns="0" tIns="0" bIns="0">
-                <a:spAutoFit/>
+                <a:noAutofit/>
               </a:bodyPr>
               <a:lstStyle/>
               <a:p>
@@ -10877,10 +10999,10 @@
       </mc:AlternateContent>
       <p:cxnSp>
         <p:nvCxnSpPr>
-          <p:cNvPr id="149" name="af-imagination-z0-to-z1-connector-01"/>
+          <p:cNvPr id="152" name="af-imagination-z0-to-z1-connector-01" descr="{&quot;arrow_spec_sha256&quot;:&quot;162c70926207ff1c2d0241b318e7855c96602fe2f53126846b7e286712304bbc&quot;,&quot;autofigure_element_id&quot;:&quot;imagination-z0-to-z1&quot;}"/>
           <p:cNvCxnSpPr>
-            <a:stCxn id="112" idx="0"/>
-            <a:endCxn id="113" idx="0"/>
+            <a:stCxn id="110" idx="3"/>
+            <a:endCxn id="111" idx="1"/>
           </p:cNvCxnSpPr>
           <p:nvPr/>
         </p:nvCxnSpPr>
@@ -10894,9 +11016,10 @@
           </a:prstGeom>
           <a:ln w="19050">
             <a:solidFill>
-              <a:srgbClr val="9A7600"/>
+              <a:srgbClr val="7E6000"/>
             </a:solidFill>
-            <a:tailEnd type="triangle" w="lg" len="med"/>
+            <a:miter/>
+            <a:tailEnd type="triangle" w="med" len="med"/>
           </a:ln>
           <a:effectLst/>
         </p:spPr>
@@ -10917,10 +11040,10 @@
       </p:cxnSp>
       <p:cxnSp>
         <p:nvCxnSpPr>
-          <p:cNvPr id="150" name="af-imagination-z1-to-z2-connector-01"/>
+          <p:cNvPr id="153" name="af-imagination-z1-to-z2-connector-01" descr="{&quot;arrow_spec_sha256&quot;:&quot;88fbbf5aff693f06bb03b61a8851bc248ab7dd1e04675ec5ebe524e1674a9b9c&quot;,&quot;autofigure_element_id&quot;:&quot;imagination-z1-to-z2&quot;}"/>
           <p:cNvCxnSpPr>
-            <a:stCxn id="113" idx="0"/>
-            <a:endCxn id="114" idx="0"/>
+            <a:stCxn id="111" idx="3"/>
+            <a:endCxn id="112" idx="1"/>
           </p:cNvCxnSpPr>
           <p:nvPr/>
         </p:nvCxnSpPr>
@@ -10934,9 +11057,10 @@
           </a:prstGeom>
           <a:ln w="19050">
             <a:solidFill>
-              <a:srgbClr val="9A7600"/>
+              <a:srgbClr val="7E6000"/>
             </a:solidFill>
-            <a:tailEnd type="triangle" w="lg" len="med"/>
+            <a:miter/>
+            <a:tailEnd type="triangle" w="med" len="med"/>
           </a:ln>
           <a:effectLst/>
         </p:spPr>
@@ -10957,10 +11081,10 @@
       </p:cxnSp>
       <p:cxnSp>
         <p:nvCxnSpPr>
-          <p:cNvPr id="151" name="af-imagination-z2-to-zh-connector-01"/>
+          <p:cNvPr id="154" name="af-imagination-z2-to-zh-connector-01" descr="{&quot;arrow_spec_sha256&quot;:&quot;5a73e0e78b4259011c9231b3b1473fc80cb9044560062b702452cf84473f039b&quot;,&quot;autofigure_element_id&quot;:&quot;imagination-z2-to-zh&quot;}"/>
           <p:cNvCxnSpPr>
-            <a:stCxn id="114" idx="0"/>
-            <a:endCxn id="115" idx="0"/>
+            <a:stCxn id="112" idx="3"/>
+            <a:endCxn id="113" idx="1"/>
           </p:cNvCxnSpPr>
           <p:nvPr/>
         </p:nvCxnSpPr>
@@ -10974,9 +11098,10 @@
           </a:prstGeom>
           <a:ln w="19050">
             <a:solidFill>
-              <a:srgbClr val="9A7600"/>
+              <a:srgbClr val="7E6000"/>
             </a:solidFill>
-            <a:tailEnd type="triangle" w="lg" len="med"/>
+            <a:miter/>
+            <a:tailEnd type="triangle" w="med" len="med"/>
           </a:ln>
           <a:effectLst/>
         </p:spPr>
@@ -10997,26 +11122,27 @@
       </p:cxnSp>
       <p:cxnSp>
         <p:nvCxnSpPr>
-          <p:cNvPr id="152" name="af-imagination-z0-to-r0-connector-01"/>
+          <p:cNvPr id="155" name="af-rollout-z0-to-z1-connector-01" descr="{&quot;arrow_spec_sha256&quot;:&quot;59a636ef104730e3561865e9d8495723f944d4a0d43c97bae9c3dfa2d71d39dd&quot;,&quot;autofigure_element_id&quot;:&quot;rollout-z0-to-z1&quot;}"/>
           <p:cNvCxnSpPr>
-            <a:stCxn id="112" idx="0"/>
-            <a:endCxn id="131" idx="0"/>
+            <a:stCxn id="125" idx="3"/>
+            <a:endCxn id="126" idx="1"/>
           </p:cNvCxnSpPr>
           <p:nvPr/>
         </p:nvCxnSpPr>
         <p:spPr>
           <a:xfrm>
-            <a:off x="9839325" y="1914525"/>
-            <a:ext cx="0" cy="209550"/>
+            <a:off x="10067925" y="2990850"/>
+            <a:ext cx="428625" cy="0"/>
           </a:xfrm>
           <a:prstGeom prst="line">
             <a:avLst/>
           </a:prstGeom>
           <a:ln w="19050">
             <a:solidFill>
-              <a:srgbClr val="9A7600"/>
+              <a:srgbClr val="7E6000"/>
             </a:solidFill>
-            <a:tailEnd type="triangle" w="lg" len="med"/>
+            <a:miter/>
+            <a:tailEnd type="triangle" w="med" len="med"/>
           </a:ln>
           <a:effectLst/>
         </p:spPr>
@@ -11037,26 +11163,27 @@
       </p:cxnSp>
       <p:cxnSp>
         <p:nvCxnSpPr>
-          <p:cNvPr id="153" name="af-imagination-z1-to-r1-connector-01"/>
+          <p:cNvPr id="156" name="af-rollout-z1-to-z2-connector-01" descr="{&quot;arrow_spec_sha256&quot;:&quot;37d17d470c3cc157b89ce6b88cb0dd0564135bca99139b757464e8b22e3bfacb&quot;,&quot;autofigure_element_id&quot;:&quot;rollout-z1-to-z2&quot;}"/>
           <p:cNvCxnSpPr>
-            <a:stCxn id="113" idx="0"/>
-            <a:endCxn id="132" idx="0"/>
+            <a:stCxn id="126" idx="3"/>
+            <a:endCxn id="127" idx="1"/>
           </p:cNvCxnSpPr>
           <p:nvPr/>
         </p:nvCxnSpPr>
         <p:spPr>
           <a:xfrm>
-            <a:off x="10753725" y="1914525"/>
-            <a:ext cx="0" cy="209550"/>
+            <a:off x="10982325" y="2990850"/>
+            <a:ext cx="466725" cy="0"/>
           </a:xfrm>
           <a:prstGeom prst="line">
             <a:avLst/>
           </a:prstGeom>
           <a:ln w="19050">
             <a:solidFill>
-              <a:srgbClr val="9A7600"/>
+              <a:srgbClr val="7E6000"/>
             </a:solidFill>
-            <a:tailEnd type="triangle" w="lg" len="med"/>
+            <a:miter/>
+            <a:tailEnd type="triangle" w="med" len="med"/>
           </a:ln>
           <a:effectLst/>
         </p:spPr>
@@ -11077,26 +11204,27 @@
       </p:cxnSp>
       <p:cxnSp>
         <p:nvCxnSpPr>
-          <p:cNvPr id="154" name="af-imagination-z2-to-r2-connector-01"/>
+          <p:cNvPr id="157" name="af-rollout-z2-to-zh-connector-01" descr="{&quot;arrow_spec_sha256&quot;:&quot;efaf7995767a87968ee2b34c153a950065ed5f60e7fd8673221a46030fb0d77a&quot;,&quot;autofigure_element_id&quot;:&quot;rollout-z2-to-zh&quot;}"/>
           <p:cNvCxnSpPr>
-            <a:stCxn id="114" idx="0"/>
-            <a:endCxn id="133" idx="0"/>
+            <a:stCxn id="127" idx="3"/>
+            <a:endCxn id="128" idx="1"/>
           </p:cNvCxnSpPr>
           <p:nvPr/>
         </p:nvCxnSpPr>
         <p:spPr>
           <a:xfrm>
-            <a:off x="11706225" y="1914525"/>
-            <a:ext cx="0" cy="209550"/>
+            <a:off x="11934825" y="2990850"/>
+            <a:ext cx="733425" cy="0"/>
           </a:xfrm>
           <a:prstGeom prst="line">
             <a:avLst/>
           </a:prstGeom>
           <a:ln w="19050">
             <a:solidFill>
-              <a:srgbClr val="9A7600"/>
+              <a:srgbClr val="7E6000"/>
             </a:solidFill>
-            <a:tailEnd type="triangle" w="lg" len="med"/>
+            <a:miter/>
+            <a:tailEnd type="triangle" w="med" len="med"/>
           </a:ln>
           <a:effectLst/>
         </p:spPr>
@@ -11117,26 +11245,27 @@
       </p:cxnSp>
       <p:cxnSp>
         <p:nvCxnSpPr>
-          <p:cNvPr id="155" name="af-rollout-z0-to-z1-connector-01"/>
+          <p:cNvPr id="158" name="af-rollout-z0-to-pi0-connector-01" descr="{&quot;arrow_spec_sha256&quot;:&quot;62aa437f811c2704d0562268e73cafe4a11401ae568e957b1c264eff18363999&quot;,&quot;autofigure_element_id&quot;:&quot;rollout-z0-to-pi0&quot;}"/>
           <p:cNvCxnSpPr>
-            <a:stCxn id="122" idx="0"/>
-            <a:endCxn id="123" idx="0"/>
+            <a:stCxn id="125" idx="2"/>
+            <a:endCxn id="140" idx="0"/>
           </p:cNvCxnSpPr>
           <p:nvPr/>
         </p:nvCxnSpPr>
         <p:spPr>
           <a:xfrm>
-            <a:off x="10067925" y="2990850"/>
-            <a:ext cx="428625" cy="0"/>
+            <a:off x="9839325" y="3171825"/>
+            <a:ext cx="0" cy="676275"/>
           </a:xfrm>
           <a:prstGeom prst="line">
             <a:avLst/>
           </a:prstGeom>
           <a:ln w="19050">
             <a:solidFill>
-              <a:srgbClr val="9A7600"/>
+              <a:srgbClr val="7E6000"/>
             </a:solidFill>
-            <a:tailEnd type="triangle" w="lg" len="med"/>
+            <a:miter/>
+            <a:tailEnd type="triangle" w="med" len="med"/>
           </a:ln>
           <a:effectLst/>
         </p:spPr>
@@ -11157,26 +11286,27 @@
       </p:cxnSp>
       <p:cxnSp>
         <p:nvCxnSpPr>
-          <p:cNvPr id="156" name="af-rollout-z1-to-z2-connector-01"/>
+          <p:cNvPr id="159" name="af-rollout-z1-to-pi1-connector-01" descr="{&quot;arrow_spec_sha256&quot;:&quot;fd7e896f11c0e894c5605cd0a55f0966385c41476cf5f14f91679a9734a1e188&quot;,&quot;autofigure_element_id&quot;:&quot;rollout-z1-to-pi1&quot;}"/>
           <p:cNvCxnSpPr>
-            <a:stCxn id="123" idx="0"/>
-            <a:endCxn id="124" idx="0"/>
+            <a:stCxn id="126" idx="2"/>
+            <a:endCxn id="141" idx="0"/>
           </p:cNvCxnSpPr>
           <p:nvPr/>
         </p:nvCxnSpPr>
         <p:spPr>
           <a:xfrm>
-            <a:off x="10982325" y="2990850"/>
-            <a:ext cx="466725" cy="0"/>
+            <a:off x="10763250" y="3171825"/>
+            <a:ext cx="0" cy="676275"/>
           </a:xfrm>
           <a:prstGeom prst="line">
             <a:avLst/>
           </a:prstGeom>
           <a:ln w="19050">
             <a:solidFill>
-              <a:srgbClr val="9A7600"/>
+              <a:srgbClr val="7E6000"/>
             </a:solidFill>
-            <a:tailEnd type="triangle" w="lg" len="med"/>
+            <a:miter/>
+            <a:tailEnd type="triangle" w="med" len="med"/>
           </a:ln>
           <a:effectLst/>
         </p:spPr>
@@ -11197,26 +11327,27 @@
       </p:cxnSp>
       <p:cxnSp>
         <p:nvCxnSpPr>
-          <p:cNvPr id="157" name="af-rollout-z2-to-zh-connector-01"/>
+          <p:cNvPr id="160" name="af-rollout-z2-to-pi2-connector-01" descr="{&quot;arrow_spec_sha256&quot;:&quot;23aa9ddcc23ed34705ea14831614a9f92be4ee2d89408f173fdd223b5b20ff21&quot;,&quot;autofigure_element_id&quot;:&quot;rollout-z2-to-pi2&quot;}"/>
           <p:cNvCxnSpPr>
-            <a:stCxn id="124" idx="0"/>
-            <a:endCxn id="125" idx="0"/>
+            <a:stCxn id="127" idx="2"/>
+            <a:endCxn id="142" idx="0"/>
           </p:cNvCxnSpPr>
           <p:nvPr/>
         </p:nvCxnSpPr>
         <p:spPr>
           <a:xfrm>
-            <a:off x="11934825" y="2990850"/>
-            <a:ext cx="733425" cy="0"/>
+            <a:off x="11715750" y="3171825"/>
+            <a:ext cx="0" cy="676275"/>
           </a:xfrm>
           <a:prstGeom prst="line">
             <a:avLst/>
           </a:prstGeom>
           <a:ln w="19050">
             <a:solidFill>
-              <a:srgbClr val="9A7600"/>
+              <a:srgbClr val="7E6000"/>
             </a:solidFill>
-            <a:tailEnd type="triangle" w="lg" len="med"/>
+            <a:miter/>
+            <a:tailEnd type="triangle" w="med" len="med"/>
           </a:ln>
           <a:effectLst/>
         </p:spPr>
@@ -11235,129 +11366,9 @@
           </a:fontRef>
         </p:style>
       </p:cxnSp>
-      <p:cxnSp>
-        <p:nvCxnSpPr>
-          <p:cNvPr id="158" name="af-rollout-z0-to-pi0-connector-01"/>
-          <p:cNvCxnSpPr>
-            <a:stCxn id="122" idx="0"/>
-            <a:endCxn id="137" idx="0"/>
-          </p:cNvCxnSpPr>
-          <p:nvPr/>
-        </p:nvCxnSpPr>
-        <p:spPr>
-          <a:xfrm>
-            <a:off x="9839325" y="3171825"/>
-            <a:ext cx="0" cy="676275"/>
-          </a:xfrm>
-          <a:prstGeom prst="line">
-            <a:avLst/>
-          </a:prstGeom>
-          <a:ln w="19050">
-            <a:solidFill>
-              <a:srgbClr val="9A7600"/>
-            </a:solidFill>
-            <a:tailEnd type="triangle" w="lg" len="med"/>
-          </a:ln>
-          <a:effectLst/>
-        </p:spPr>
-        <p:style>
-          <a:lnRef idx="2">
-            <a:schemeClr val="accent1"/>
-          </a:lnRef>
-          <a:fillRef idx="0">
-            <a:schemeClr val="accent1"/>
-          </a:fillRef>
-          <a:effectRef idx="1">
-            <a:schemeClr val="accent1"/>
-          </a:effectRef>
-          <a:fontRef idx="minor">
-            <a:schemeClr val="tx1"/>
-          </a:fontRef>
-        </p:style>
-      </p:cxnSp>
-      <p:cxnSp>
-        <p:nvCxnSpPr>
-          <p:cNvPr id="159" name="af-rollout-z1-to-pi1-connector-01"/>
-          <p:cNvCxnSpPr>
-            <a:stCxn id="123" idx="0"/>
-            <a:endCxn id="138" idx="0"/>
-          </p:cNvCxnSpPr>
-          <p:nvPr/>
-        </p:nvCxnSpPr>
-        <p:spPr>
-          <a:xfrm>
-            <a:off x="10763250" y="3171825"/>
-            <a:ext cx="0" cy="676275"/>
-          </a:xfrm>
-          <a:prstGeom prst="line">
-            <a:avLst/>
-          </a:prstGeom>
-          <a:ln w="19050">
-            <a:solidFill>
-              <a:srgbClr val="9A7600"/>
-            </a:solidFill>
-            <a:tailEnd type="triangle" w="lg" len="med"/>
-          </a:ln>
-          <a:effectLst/>
-        </p:spPr>
-        <p:style>
-          <a:lnRef idx="2">
-            <a:schemeClr val="accent1"/>
-          </a:lnRef>
-          <a:fillRef idx="0">
-            <a:schemeClr val="accent1"/>
-          </a:fillRef>
-          <a:effectRef idx="1">
-            <a:schemeClr val="accent1"/>
-          </a:effectRef>
-          <a:fontRef idx="minor">
-            <a:schemeClr val="tx1"/>
-          </a:fontRef>
-        </p:style>
-      </p:cxnSp>
-      <p:cxnSp>
-        <p:nvCxnSpPr>
-          <p:cNvPr id="160" name="af-rollout-z2-to-pi2-connector-01"/>
-          <p:cNvCxnSpPr>
-            <a:stCxn id="124" idx="0"/>
-            <a:endCxn id="139" idx="0"/>
-          </p:cNvCxnSpPr>
-          <p:nvPr/>
-        </p:nvCxnSpPr>
-        <p:spPr>
-          <a:xfrm>
-            <a:off x="11715750" y="3171825"/>
-            <a:ext cx="0" cy="676275"/>
-          </a:xfrm>
-          <a:prstGeom prst="line">
-            <a:avLst/>
-          </a:prstGeom>
-          <a:ln w="19050">
-            <a:solidFill>
-              <a:srgbClr val="9A7600"/>
-            </a:solidFill>
-            <a:tailEnd type="triangle" w="lg" len="med"/>
-          </a:ln>
-          <a:effectLst/>
-        </p:spPr>
-        <p:style>
-          <a:lnRef idx="2">
-            <a:schemeClr val="accent1"/>
-          </a:lnRef>
-          <a:fillRef idx="0">
-            <a:schemeClr val="accent1"/>
-          </a:fillRef>
-          <a:effectRef idx="1">
-            <a:schemeClr val="accent1"/>
-          </a:effectRef>
-          <a:fontRef idx="minor">
-            <a:schemeClr val="tx1"/>
-          </a:fontRef>
-        </p:style>
-      </p:cxnSp>
-      <p:sp>
-        <p:nvSpPr>
-          <p:cNvPr id="161" name="af-rollout-pi0-to-a0-freeform-arrow-01"/>
+      <p:sp>
+        <p:nvSpPr>
+          <p:cNvPr id="161" name="af-rollout-pi0-to-a0-freeform-arrow-01" descr="{&quot;arrow_spec_sha256&quot;:&quot;f297f4212bbaf79bc81e1538525275bb95d78d5c3fbc5076f932f3f4a9202497&quot;,&quot;autofigure_element_id&quot;:&quot;rollout-pi0-to-a0&quot;}"/>
           <p:cNvSpPr/>
           <p:nvPr/>
         </p:nvSpPr>
@@ -11388,9 +11399,10 @@
           <a:noFill/>
           <a:ln w="19050">
             <a:solidFill>
-              <a:srgbClr val="9A7600"/>
+              <a:srgbClr val="7E6000"/>
             </a:solidFill>
-            <a:tailEnd type="triangle" w="lg" len="med"/>
+            <a:miter/>
+            <a:tailEnd type="triangle" w="med" len="med"/>
           </a:ln>
         </p:spPr>
         <p:txBody>
@@ -11400,7 +11412,7 @@
       </p:sp>
       <p:sp>
         <p:nvSpPr>
-          <p:cNvPr id="162" name="af-rollout-pi1-to-a1-freeform-arrow-01"/>
+          <p:cNvPr id="162" name="af-rollout-pi1-to-a1-freeform-arrow-01" descr="{&quot;arrow_spec_sha256&quot;:&quot;80bc16fd8946a61a1d0c7178dbdbd8ac4d85d34bca79e1c966fdef806a265611&quot;,&quot;autofigure_element_id&quot;:&quot;rollout-pi1-to-a1&quot;}"/>
           <p:cNvSpPr/>
           <p:nvPr/>
         </p:nvSpPr>
@@ -11431,9 +11443,10 @@
           <a:noFill/>
           <a:ln w="19050">
             <a:solidFill>
-              <a:srgbClr val="9A7600"/>
+              <a:srgbClr val="7E6000"/>
             </a:solidFill>
-            <a:tailEnd type="triangle" w="lg" len="med"/>
+            <a:miter/>
+            <a:tailEnd type="triangle" w="med" len="med"/>
           </a:ln>
         </p:spPr>
         <p:txBody>
@@ -11443,7 +11456,7 @@
       </p:sp>
       <p:sp>
         <p:nvSpPr>
-          <p:cNvPr id="163" name="af-rollout-pi2-to-a2-freeform-arrow-01"/>
+          <p:cNvPr id="163" name="af-rollout-pi2-to-a2-freeform-arrow-01" descr="{&quot;arrow_spec_sha256&quot;:&quot;8c3a2ec0b5993063f2cabd8879419baaa0352aca827503318c5bf4022d70485a&quot;,&quot;autofigure_element_id&quot;:&quot;rollout-pi2-to-a2&quot;}"/>
           <p:cNvSpPr/>
           <p:nvPr/>
         </p:nvSpPr>
@@ -11474,9 +11487,10 @@
           <a:noFill/>
           <a:ln w="19050">
             <a:solidFill>
-              <a:srgbClr val="9A7600"/>
+              <a:srgbClr val="7E6000"/>
             </a:solidFill>
-            <a:tailEnd type="triangle" w="lg" len="med"/>
+            <a:miter/>
+            <a:tailEnd type="triangle" w="med" len="med"/>
           </a:ln>
         </p:spPr>
         <p:txBody>
@@ -11486,7 +11500,7 @@
       </p:sp>
       <p:sp>
         <p:nvSpPr>
-          <p:cNvPr id="164" name="af-rollout-a0-to-z1-freeform-arrow-01"/>
+          <p:cNvPr id="164" name="af-rollout-a0-to-z1-freeform-arrow-01" descr="{&quot;arrow_spec_sha256&quot;:&quot;6e58ece868c5939e8982211c105139d70af47a839ac6b30cdf58eb58392049d2&quot;,&quot;autofigure_element_id&quot;:&quot;rollout-a0-to-z1&quot;}"/>
           <p:cNvSpPr/>
           <p:nvPr/>
         </p:nvSpPr>
@@ -11517,9 +11531,10 @@
           <a:noFill/>
           <a:ln w="19050">
             <a:solidFill>
-              <a:srgbClr val="9A7600"/>
+              <a:srgbClr val="7E6000"/>
             </a:solidFill>
-            <a:tailEnd type="triangle" w="lg" len="med"/>
+            <a:miter/>
+            <a:tailEnd type="triangle" w="med" len="med"/>
           </a:ln>
         </p:spPr>
         <p:txBody>
@@ -11529,7 +11544,7 @@
       </p:sp>
       <p:sp>
         <p:nvSpPr>
-          <p:cNvPr id="165" name="af-rollout-a1-to-z2-freeform-arrow-01"/>
+          <p:cNvPr id="165" name="af-rollout-a1-to-z2-freeform-arrow-01" descr="{&quot;arrow_spec_sha256&quot;:&quot;29ae1ddb54088f6d2443b556aa6e4b20807f349a89f04edec077ef1d4775891b&quot;,&quot;autofigure_element_id&quot;:&quot;rollout-a1-to-z2&quot;}"/>
           <p:cNvSpPr/>
           <p:nvPr/>
         </p:nvSpPr>
@@ -11560,9 +11575,10 @@
           <a:noFill/>
           <a:ln w="19050">
             <a:solidFill>
-              <a:srgbClr val="9A7600"/>
+              <a:srgbClr val="7E6000"/>
             </a:solidFill>
-            <a:tailEnd type="triangle" w="lg" len="med"/>
+            <a:miter/>
+            <a:tailEnd type="triangle" w="med" len="med"/>
           </a:ln>
         </p:spPr>
         <p:txBody>
@@ -11572,7 +11588,7 @@
       </p:sp>
       <p:sp>
         <p:nvSpPr>
-          <p:cNvPr id="166" name="af-rollout-a2-to-next-freeform-arrow-01"/>
+          <p:cNvPr id="166" name="af-rollout-a2-to-next-freeform-arrow-01" descr="{&quot;arrow_spec_sha256&quot;:&quot;8e92be1f44bce5d76e810cc5db05054e1886b2e383ea77c31d539340fc4f4573&quot;,&quot;autofigure_element_id&quot;:&quot;rollout-a2-to-next&quot;}"/>
           <p:cNvSpPr/>
           <p:nvPr/>
         </p:nvSpPr>
@@ -11603,9 +11619,10 @@
           <a:noFill/>
           <a:ln w="19050">
             <a:solidFill>
-              <a:srgbClr val="9A7600"/>
+              <a:srgbClr val="7E6000"/>
             </a:solidFill>
-            <a:tailEnd type="triangle" w="lg" len="med"/>
+            <a:miter/>
+            <a:tailEnd type="triangle" w="med" len="med"/>
           </a:ln>
         </p:spPr>
         <p:txBody>
@@ -11613,89 +11630,9 @@
           <a:p/>
         </p:txBody>
       </p:sp>
-      <p:cxnSp>
-        <p:nvCxnSpPr>
-          <p:cNvPr id="167" name="af-zt-top-to-imagination-connector-01"/>
-          <p:cNvCxnSpPr>
-            <a:stCxn id="101" idx="0"/>
-            <a:endCxn id="122" idx="0"/>
-          </p:cNvCxnSpPr>
-          <p:nvPr/>
-        </p:nvCxnSpPr>
-        <p:spPr>
-          <a:xfrm>
-            <a:off x="9010650" y="2590800"/>
-            <a:ext cx="561975" cy="381000"/>
-          </a:xfrm>
-          <a:prstGeom prst="line">
-            <a:avLst/>
-          </a:prstGeom>
-          <a:ln w="19050">
-            <a:solidFill>
-              <a:srgbClr val="9A7600"/>
-            </a:solidFill>
-            <a:tailEnd type="triangle" w="lg" len="med"/>
-          </a:ln>
-          <a:effectLst/>
-        </p:spPr>
-        <p:style>
-          <a:lnRef idx="2">
-            <a:schemeClr val="accent1"/>
-          </a:lnRef>
-          <a:fillRef idx="0">
-            <a:schemeClr val="accent1"/>
-          </a:fillRef>
-          <a:effectRef idx="1">
-            <a:schemeClr val="accent1"/>
-          </a:effectRef>
-          <a:fontRef idx="minor">
-            <a:schemeClr val="tx1"/>
-          </a:fontRef>
-        </p:style>
-      </p:cxnSp>
-      <p:cxnSp>
-        <p:nvCxnSpPr>
-          <p:cNvPr id="168" name="af-zt-bottom-to-rollout-connector-01"/>
-          <p:cNvCxnSpPr>
-            <a:stCxn id="106" idx="0"/>
-            <a:endCxn id="122" idx="0"/>
-          </p:cNvCxnSpPr>
-          <p:nvPr/>
-        </p:nvCxnSpPr>
-        <p:spPr>
-          <a:xfrm flipV="1">
-            <a:off x="9010650" y="3105150"/>
-            <a:ext cx="561975" cy="857250"/>
-          </a:xfrm>
-          <a:prstGeom prst="line">
-            <a:avLst/>
-          </a:prstGeom>
-          <a:ln w="19050">
-            <a:solidFill>
-              <a:srgbClr val="9A7600"/>
-            </a:solidFill>
-            <a:tailEnd type="triangle" w="lg" len="med"/>
-          </a:ln>
-          <a:effectLst/>
-        </p:spPr>
-        <p:style>
-          <a:lnRef idx="2">
-            <a:schemeClr val="accent1"/>
-          </a:lnRef>
-          <a:fillRef idx="0">
-            <a:schemeClr val="accent1"/>
-          </a:fillRef>
-          <a:effectRef idx="1">
-            <a:schemeClr val="accent1"/>
-          </a:effectRef>
-          <a:fontRef idx="minor">
-            <a:schemeClr val="tx1"/>
-          </a:fontRef>
-        </p:style>
-      </p:cxnSp>
-      <p:sp>
-        <p:nvSpPr>
-          <p:cNvPr id="169" name="af-dense-trophy-text-01"/>
+      <p:sp>
+        <p:nvSpPr>
+          <p:cNvPr id="167" name="af-dense-trophy-text-01" descr="{&quot;autofigure_element_id&quot;:&quot;dense-trophy&quot;}"/>
           <p:cNvSpPr txBox="1"/>
           <p:nvPr/>
         </p:nvSpPr>
@@ -11712,7 +11649,7 @@
         </p:spPr>
         <p:txBody>
           <a:bodyPr wrap="none" anchor="t" lIns="0" rIns="0" tIns="0" bIns="0">
-            <a:spAutoFit/>
+            <a:noAutofit/>
           </a:bodyPr>
           <a:lstStyle/>
           <a:p>
@@ -11731,7 +11668,7 @@
       </p:sp>
       <p:sp>
         <p:nvSpPr>
-          <p:cNvPr id="170" name="af-dense-reward-label-text-01"/>
+          <p:cNvPr id="168" name="af-dense-reward-label-text-01" descr="{&quot;autofigure_element_id&quot;:&quot;dense-reward-label&quot;}"/>
           <p:cNvSpPr txBox="1"/>
           <p:nvPr/>
         </p:nvSpPr>
@@ -11748,7 +11685,7 @@
         </p:spPr>
         <p:txBody>
           <a:bodyPr wrap="none" anchor="t" lIns="0" rIns="0" tIns="0" bIns="0">
-            <a:spAutoFit/>
+            <a:noAutofit/>
           </a:bodyPr>
           <a:lstStyle/>
           <a:p>
@@ -11767,7 +11704,7 @@
       </p:sp>
       <p:sp>
         <p:nvSpPr>
-          <p:cNvPr id="171" name="af-dense-reward-label-2-text-01"/>
+          <p:cNvPr id="169" name="af-dense-reward-label-2-text-01" descr="{&quot;autofigure_element_id&quot;:&quot;dense-reward-label-2&quot;}"/>
           <p:cNvSpPr txBox="1"/>
           <p:nvPr/>
         </p:nvSpPr>
@@ -11784,7 +11721,7 @@
         </p:spPr>
         <p:txBody>
           <a:bodyPr wrap="none" anchor="t" lIns="0" rIns="0" tIns="0" bIns="0">
-            <a:spAutoFit/>
+            <a:noAutofit/>
           </a:bodyPr>
           <a:lstStyle/>
           <a:p>
@@ -11803,7 +11740,7 @@
       </p:sp>
       <p:sp>
         <p:nvSpPr>
-          <p:cNvPr id="172" name="af-behavior-title-text-01"/>
+          <p:cNvPr id="170" name="af-behavior-title-text-01" descr="{&quot;autofigure_element_id&quot;:&quot;behavior-title&quot;}"/>
           <p:cNvSpPr txBox="1"/>
           <p:nvPr/>
         </p:nvSpPr>
@@ -11820,7 +11757,7 @@
         </p:spPr>
         <p:txBody>
           <a:bodyPr wrap="none" anchor="t" lIns="0" rIns="0" tIns="0" bIns="0">
-            <a:spAutoFit/>
+            <a:noAutofit/>
           </a:bodyPr>
           <a:lstStyle/>
           <a:p>
@@ -11839,10 +11776,10 @@
       </p:sp>
       <p:cxnSp>
         <p:nvCxnSpPr>
-          <p:cNvPr id="173" name="af-mapping-to-imagination-connector-01"/>
+          <p:cNvPr id="171" name="af-mapping-to-imagination-connector-01" descr="{&quot;arrow_spec_sha256&quot;:&quot;35f5c5b14f7d55da1c3f80440453112a0bcf6f7d260e07f8da121d0d3ef86385&quot;,&quot;autofigure_element_id&quot;:&quot;mapping-to-imagination&quot;}"/>
           <p:cNvCxnSpPr>
             <a:stCxn id="19" idx="0"/>
-            <a:endCxn id="110" idx="0"/>
+            <a:endCxn id="105" idx="0"/>
           </p:cNvCxnSpPr>
           <p:nvPr/>
         </p:nvCxnSpPr>
@@ -11858,6 +11795,7 @@
             <a:solidFill>
               <a:srgbClr val="7F7F7F"/>
             </a:solidFill>
+            <a:miter/>
             <a:tailEnd type="triangle" w="sm" len="sm"/>
           </a:ln>
           <a:effectLst/>
@@ -11879,7 +11817,7 @@
       </p:cxnSp>
       <p:sp>
         <p:nvSpPr>
-          <p:cNvPr id="174" name="af-joint-optimization-box-rect-01"/>
+          <p:cNvPr id="172" name="af-joint-optimization-box-rect-01" descr="{&quot;autofigure_element_id&quot;:&quot;joint-optimization-box&quot;}"/>
           <p:cNvSpPr/>
           <p:nvPr/>
         </p:nvSpPr>
@@ -11899,6 +11837,7 @@
               <a:srgbClr val="17355F"/>
             </a:solidFill>
             <a:prstDash val="sysDot"/>
+            <a:miter/>
           </a:ln>
           <a:effectLst/>
         </p:spPr>
@@ -11926,7 +11865,7 @@
       </p:sp>
       <p:sp>
         <p:nvSpPr>
-          <p:cNvPr id="175" name="af-joint-optimization-label-text-01"/>
+          <p:cNvPr id="173" name="af-joint-optimization-label-text-01" descr="{&quot;autofigure_element_id&quot;:&quot;joint-optimization-label&quot;}"/>
           <p:cNvSpPr txBox="1"/>
           <p:nvPr/>
         </p:nvSpPr>
@@ -11943,7 +11882,7 @@
         </p:spPr>
         <p:txBody>
           <a:bodyPr wrap="none" anchor="t" lIns="0" rIns="0" tIns="0" bIns="0">
-            <a:spAutoFit/>
+            <a:noAutofit/>
           </a:bodyPr>
           <a:lstStyle/>
           <a:p>
@@ -11962,14 +11901,14 @@
       </p:sp>
       <p:sp>
         <p:nvSpPr>
-          <p:cNvPr id="176" name="af-joint-loop-arrow-freeform-01"/>
+          <p:cNvPr id="174" name="af-joint-loop-arrow-freeform-arrow-01" descr="{&quot;arrow_spec_sha256&quot;:&quot;11e8f198de3aa2ea64a78181ee4a87985cbb2a5d072f3d8e47093c566e3c29ad&quot;,&quot;autofigure_element_id&quot;:&quot;joint-loop-arrow&quot;}"/>
           <p:cNvSpPr/>
           <p:nvPr/>
         </p:nvSpPr>
         <p:spPr>
           <a:xfrm>
-            <a:off x="1009650" y="4953000"/>
-            <a:ext cx="771525" cy="514350"/>
+            <a:off x="1114425" y="4943475"/>
+            <a:ext cx="600075" cy="514350"/>
           </a:xfrm>
           <a:custGeom>
             <a:avLst/>
@@ -11978,53 +11917,31 @@
             <a:cxnLst/>
             <a:rect l="0" t="0" r="0" b="0"/>
             <a:pathLst>
-              <a:path w="771525" h="514350">
+              <a:path w="600075" h="514350">
                 <a:moveTo>
-                  <a:pt x="771525" y="514350"/>
+                  <a:pt x="600075" y="514350"/>
                 </a:moveTo>
                 <a:lnTo>
-                  <a:pt x="314325" y="514350"/>
+                  <a:pt x="209550" y="514350"/>
                 </a:lnTo>
                 <a:cubicBezTo>
-                  <a:pt x="152400" y="514350"/>
-                  <a:pt x="95250" y="438150"/>
-                  <a:pt x="95250" y="285750"/>
+                  <a:pt x="69850" y="514350"/>
+                  <a:pt x="0" y="441325"/>
+                  <a:pt x="0" y="295275"/>
                 </a:cubicBezTo>
                 <a:lnTo>
-                  <a:pt x="95250" y="28575"/>
+                  <a:pt x="0" y="0"/>
                 </a:lnTo>
-                <a:lnTo>
-                  <a:pt x="0" y="142875"/>
-                </a:lnTo>
-                <a:lnTo>
-                  <a:pt x="95250" y="0"/>
-                </a:lnTo>
-                <a:lnTo>
-                  <a:pt x="200025" y="142875"/>
-                </a:lnTo>
-                <a:lnTo>
-                  <a:pt x="133350" y="57150"/>
-                </a:lnTo>
-                <a:lnTo>
-                  <a:pt x="133350" y="285750"/>
-                </a:lnTo>
-                <a:cubicBezTo>
-                  <a:pt x="133350" y="419100"/>
-                  <a:pt x="200025" y="466725"/>
-                  <a:pt x="323850" y="466725"/>
-                </a:cubicBezTo>
-                <a:lnTo>
-                  <a:pt x="771525" y="466725"/>
-                </a:lnTo>
-                <a:close/>
               </a:path>
             </a:pathLst>
           </a:custGeom>
-          <a:solidFill>
-            <a:srgbClr val="D8747D"/>
-          </a:solidFill>
-          <a:ln>
-            <a:noFill/>
+          <a:noFill/>
+          <a:ln w="95250" cap="rnd">
+            <a:solidFill>
+              <a:srgbClr val="D77E84"/>
+            </a:solidFill>
+            <a:round/>
+            <a:tailEnd type="triangle" w="sm" len="sm"/>
           </a:ln>
         </p:spPr>
         <p:txBody>
@@ -12034,7 +11951,7 @@
       </p:sp>
       <p:sp>
         <p:nvSpPr>
-          <p:cNvPr id="177" name="af-optimization-to-reward-freeform-01"/>
+          <p:cNvPr id="175" name="af-optimization-to-reward-freeform-01" descr="{&quot;autofigure_element_id&quot;:&quot;optimization-to-reward&quot;}"/>
           <p:cNvSpPr/>
           <p:nvPr/>
         </p:nvSpPr>
@@ -12090,7 +12007,7 @@
       </p:sp>
       <p:sp>
         <p:nvSpPr>
-          <p:cNvPr id="178" name="af-reward-action-box-rect-01"/>
+          <p:cNvPr id="176" name="af-reward-action-box-rect-01" descr="{&quot;autofigure_element_id&quot;:&quot;reward-action-box&quot;}"/>
           <p:cNvSpPr/>
           <p:nvPr/>
         </p:nvSpPr>
@@ -12111,6 +12028,7 @@
             <a:solidFill>
               <a:srgbClr val="19365F"/>
             </a:solidFill>
+            <a:miter/>
           </a:ln>
           <a:effectLst/>
         </p:spPr>
@@ -12138,7 +12056,7 @@
       </p:sp>
       <p:sp>
         <p:nvSpPr>
-          <p:cNvPr id="179" name="af-reward-icon-text-01"/>
+          <p:cNvPr id="177" name="af-reward-icon-text-01" descr="{&quot;autofigure_element_id&quot;:&quot;reward-icon&quot;}"/>
           <p:cNvSpPr txBox="1"/>
           <p:nvPr/>
         </p:nvSpPr>
@@ -12155,7 +12073,7 @@
         </p:spPr>
         <p:txBody>
           <a:bodyPr wrap="none" anchor="t" lIns="0" rIns="0" tIns="0" bIns="0">
-            <a:spAutoFit/>
+            <a:noAutofit/>
           </a:bodyPr>
           <a:lstStyle/>
           <a:p>
@@ -12174,7 +12092,7 @@
       </p:sp>
       <p:sp>
         <p:nvSpPr>
-          <p:cNvPr id="180" name="af-reward-text-text-01"/>
+          <p:cNvPr id="178" name="af-reward-text-text-01" descr="{&quot;autofigure_element_id&quot;:&quot;reward-text&quot;}"/>
           <p:cNvSpPr txBox="1"/>
           <p:nvPr/>
         </p:nvSpPr>
@@ -12191,7 +12109,7 @@
         </p:spPr>
         <p:txBody>
           <a:bodyPr wrap="none" anchor="t" lIns="0" rIns="0" tIns="0" bIns="0">
-            <a:spAutoFit/>
+            <a:noAutofit/>
           </a:bodyPr>
           <a:lstStyle/>
           <a:p>
@@ -12210,7 +12128,7 @@
       </p:sp>
       <p:sp>
         <p:nvSpPr>
-          <p:cNvPr id="181" name="af-action-icon-ellipse-01"/>
+          <p:cNvPr id="179" name="af-action-icon-ellipse-01" descr="{&quot;autofigure_element_id&quot;:&quot;action-icon&quot;}"/>
           <p:cNvSpPr/>
           <p:nvPr/>
         </p:nvSpPr>
@@ -12229,6 +12147,7 @@
             <a:solidFill>
               <a:srgbClr val="5B9734"/>
             </a:solidFill>
+            <a:miter/>
           </a:ln>
           <a:effectLst/>
         </p:spPr>
@@ -12256,7 +12175,7 @@
       </p:sp>
       <p:sp>
         <p:nvSpPr>
-          <p:cNvPr id="182" name="af-action-icon-path-freeform-01"/>
+          <p:cNvPr id="180" name="af-action-icon-path-freeform-01" descr="{&quot;autofigure_element_id&quot;:&quot;action-icon-path&quot;}"/>
           <p:cNvSpPr/>
           <p:nvPr/>
         </p:nvSpPr>
@@ -12311,6 +12230,7 @@
             <a:solidFill>
               <a:srgbClr val="5B9734"/>
             </a:solidFill>
+            <a:miter/>
           </a:ln>
         </p:spPr>
         <p:txBody>
@@ -12320,7 +12240,7 @@
       </p:sp>
       <p:sp>
         <p:nvSpPr>
-          <p:cNvPr id="183" name="af-action-text-text-01"/>
+          <p:cNvPr id="181" name="af-action-text-text-01" descr="{&quot;autofigure_element_id&quot;:&quot;action-text&quot;}"/>
           <p:cNvSpPr txBox="1"/>
           <p:nvPr/>
         </p:nvSpPr>
@@ -12337,7 +12257,7 @@
         </p:spPr>
         <p:txBody>
           <a:bodyPr wrap="none" anchor="t" lIns="0" rIns="0" tIns="0" bIns="0">
-            <a:spAutoFit/>
+            <a:noAutofit/>
           </a:bodyPr>
           <a:lstStyle/>
           <a:p>
@@ -12356,7 +12276,7 @@
       </p:sp>
       <p:sp>
         <p:nvSpPr>
-          <p:cNvPr id="184" name="af-behavior-to-reward-freeform-01"/>
+          <p:cNvPr id="182" name="af-behavior-to-reward-freeform-01" descr="{&quot;autofigure_element_id&quot;:&quot;behavior-to-reward&quot;}"/>
           <p:cNvSpPr/>
           <p:nvPr/>
         </p:nvSpPr>
@@ -12412,7 +12332,7 @@
       </p:sp>
       <p:sp>
         <p:nvSpPr>
-          <p:cNvPr id="185" name="af-interaction-label-text-01"/>
+          <p:cNvPr id="183" name="af-interaction-label-text-01" descr="{&quot;autofigure_element_id&quot;:&quot;interaction-label&quot;}"/>
           <p:cNvSpPr txBox="1"/>
           <p:nvPr/>
         </p:nvSpPr>
@@ -12429,7 +12349,7 @@
         </p:spPr>
         <p:txBody>
           <a:bodyPr wrap="none" anchor="t" lIns="0" rIns="0" tIns="0" bIns="0">
-            <a:spAutoFit/>
+            <a:noAutofit/>
           </a:bodyPr>
           <a:lstStyle/>
           <a:p>
@@ -12446,89 +12366,56 @@
           </a:p>
         </p:txBody>
       </p:sp>
-      <p:cxnSp>
-        <p:nvCxnSpPr>
-          <p:cNvPr id="186" name="af-interaction-left-connector-01"/>
-          <p:cNvCxnSpPr>
-            <a:stCxn id="188" idx="0"/>
-            <a:endCxn id="178" idx="0"/>
-          </p:cNvCxnSpPr>
-          <p:nvPr/>
-        </p:nvCxnSpPr>
-        <p:spPr>
-          <a:xfrm flipH="1">
-            <a:off x="9667875" y="5457825"/>
-            <a:ext cx="1457325" cy="0"/>
-          </a:xfrm>
-          <a:prstGeom prst="line">
-            <a:avLst/>
-          </a:prstGeom>
-          <a:ln w="66675">
-            <a:solidFill>
-              <a:srgbClr val="7F7F7F"/>
-            </a:solidFill>
-            <a:tailEnd type="triangle" w="sm" len="sm"/>
+      <p:sp>
+        <p:nvSpPr>
+          <p:cNvPr id="184" name="af-interaction-exchange-block-arrow-autoshape-01" descr="{&quot;arrow_semantic_centerline&quot;:{&quot;coordinate_space&quot;:&quot;canvas&quot;,&quot;kind&quot;:&quot;straight&quot;,&quot;points&quot;:[{&quot;x&quot;:1014.0,&quot;y&quot;:572.0},{&quot;x&quot;:1174.0,&quot;y&quot;:572.0}]},&quot;arrow_spec_sha256&quot;:&quot;c81c2d12be45956611bfd35a779c39c8e3144f198070787cdc5d34249a579e15&quot;,&quot;autofigure_element_id&quot;:&quot;interaction-exchange&quot;}"/>
+          <p:cNvSpPr/>
+          <p:nvPr/>
+        </p:nvSpPr>
+        <p:spPr>
+          <a:xfrm>
+            <a:off x="9658350" y="5367338"/>
+            <a:ext cx="1524000" cy="161925"/>
+          </a:xfrm>
+          <a:prstGeom prst="leftRightArrow">
+            <a:avLst>
+              <a:gd name="adj1" fmla="val 52941"/>
+              <a:gd name="adj2" fmla="val 47058"/>
+            </a:avLst>
+          </a:prstGeom>
+          <a:solidFill>
+            <a:srgbClr val="767171"/>
+          </a:solidFill>
+          <a:ln>
+            <a:noFill/>
           </a:ln>
           <a:effectLst/>
         </p:spPr>
         <p:style>
-          <a:lnRef idx="2">
+          <a:lnRef idx="1">
             <a:schemeClr val="accent1"/>
           </a:lnRef>
-          <a:fillRef idx="0">
+          <a:fillRef idx="3">
             <a:schemeClr val="accent1"/>
           </a:fillRef>
-          <a:effectRef idx="1">
+          <a:effectRef idx="2">
             <a:schemeClr val="accent1"/>
           </a:effectRef>
           <a:fontRef idx="minor">
-            <a:schemeClr val="tx1"/>
+            <a:schemeClr val="lt1"/>
           </a:fontRef>
         </p:style>
-      </p:cxnSp>
-      <p:cxnSp>
-        <p:nvCxnSpPr>
-          <p:cNvPr id="187" name="af-interaction-right-connector-01"/>
-          <p:cNvCxnSpPr>
-            <a:stCxn id="178" idx="0"/>
-            <a:endCxn id="188" idx="0"/>
-          </p:cNvCxnSpPr>
-          <p:nvPr/>
-        </p:nvCxnSpPr>
-        <p:spPr>
-          <a:xfrm>
-            <a:off x="9667875" y="5457825"/>
-            <a:ext cx="1543050" cy="0"/>
-          </a:xfrm>
-          <a:prstGeom prst="line">
-            <a:avLst/>
-          </a:prstGeom>
-          <a:ln w="66675">
-            <a:solidFill>
-              <a:srgbClr val="7F7F7F"/>
-            </a:solidFill>
-            <a:tailEnd type="triangle" w="sm" len="sm"/>
-          </a:ln>
-          <a:effectLst/>
-        </p:spPr>
-        <p:style>
-          <a:lnRef idx="2">
-            <a:schemeClr val="accent1"/>
-          </a:lnRef>
-          <a:fillRef idx="0">
-            <a:schemeClr val="accent1"/>
-          </a:fillRef>
-          <a:effectRef idx="1">
-            <a:schemeClr val="accent1"/>
-          </a:effectRef>
-          <a:fontRef idx="minor">
-            <a:schemeClr val="tx1"/>
-          </a:fontRef>
-        </p:style>
-      </p:cxnSp>
+        <p:txBody>
+          <a:bodyPr rtlCol="0" anchor="ctr"/>
+          <a:lstStyle/>
+          <a:p>
+            <a:pPr algn="ctr"/>
+          </a:p>
+        </p:txBody>
+      </p:sp>
       <p:pic>
         <p:nvPicPr>
-          <p:cNvPr id="188" name="af-atomic-environment-globe-atomic-raster-01" descr="image.png"/>
+          <p:cNvPr id="185" name="af-atomic-environment-globe-atomic-raster-01" descr="{&quot;autofigure_element_id&quot;:&quot;atomic:environment-globe&quot;}"/>
           <p:cNvPicPr>
             <a:picLocks noChangeAspect="1"/>
           </p:cNvPicPr>
@@ -12556,7 +12443,7 @@
       </p:pic>
       <p:sp>
         <p:nvSpPr>
-          <p:cNvPr id="189" name="af-environment-label-text-01"/>
+          <p:cNvPr id="186" name="af-environment-label-text-01" descr="{&quot;autofigure_element_id&quot;:&quot;environment-label&quot;}"/>
           <p:cNvSpPr txBox="1"/>
           <p:nvPr/>
         </p:nvSpPr>
@@ -12573,7 +12460,7 @@
         </p:spPr>
         <p:txBody>
           <a:bodyPr wrap="none" anchor="t" lIns="0" rIns="0" tIns="0" bIns="0">
-            <a:spAutoFit/>
+            <a:noAutofit/>
           </a:bodyPr>
           <a:lstStyle/>
           <a:p>

--- a/examples/reference-only/01-modular-agent-reference-only/redraw.pptx
+++ b/examples/reference-only/01-modular-agent-reference-only/redraw.pptx
@@ -12413,37 +12413,5883 @@
           </a:p>
         </p:txBody>
       </p:sp>
-      <p:pic>
-        <p:nvPicPr>
-          <p:cNvPr id="185" name="af-atomic-environment-globe-atomic-raster-01" descr="{&quot;autofigure_element_id&quot;:&quot;atomic:environment-globe&quot;}"/>
-          <p:cNvPicPr>
-            <a:picLocks noChangeAspect="1"/>
-          </p:cNvPicPr>
+      <p:grpSp>
+        <p:nvGrpSpPr>
+          <p:cNvPr id="185" name="af-atomic-environment-globe-atomic-vector-01" descr="{&quot;autofigure_element_id&quot;:&quot;atomic:environment-globe&quot;}"/>
+          <p:cNvGrpSpPr/>
           <p:nvPr>
             <p:custDataLst>
-              <p:tags r:id="rId5"/>
+              <p:tags r:id="rId4"/>
             </p:custDataLst>
           </p:nvPr>
-        </p:nvPicPr>
-        <p:blipFill>
-          <a:blip r:embed="rId4"/>
-          <a:stretch>
-            <a:fillRect/>
-          </a:stretch>
-        </p:blipFill>
-        <p:spPr>
+        </p:nvGrpSpPr>
+        <p:grpSpPr>
           <a:xfrm>
-            <a:off x="11315700" y="5076825"/>
-            <a:ext cx="762000" cy="771525"/>
+            <a:off x="11310737" y="5055965"/>
+            <a:ext cx="766963" cy="794681"/>
+            <a:chOff x="11310737" y="5055965"/>
+            <a:chExt cx="766963" cy="794681"/>
           </a:xfrm>
-          <a:prstGeom prst="rect">
-            <a:avLst/>
-          </a:prstGeom>
-        </p:spPr>
-      </p:pic>
-      <p:sp>
-        <p:nvSpPr>
-          <p:cNvPr id="186" name="af-environment-label-text-01" descr="{&quot;autofigure_element_id&quot;:&quot;environment-label&quot;}"/>
+        </p:grpSpPr>
+        <p:sp>
+          <p:nvSpPr>
+            <p:cNvPr id="186" name="freeform-186"/>
+            <p:cNvSpPr/>
+            <p:nvPr/>
+          </p:nvSpPr>
+          <p:spPr>
+            <a:xfrm>
+              <a:off x="11315700" y="5076825"/>
+              <a:ext cx="762000" cy="771525"/>
+            </a:xfrm>
+            <a:custGeom>
+              <a:avLst/>
+              <a:gdLst/>
+              <a:ahLst/>
+              <a:cxnLst/>
+              <a:rect l="0" t="0" r="0" b="0"/>
+              <a:pathLst>
+                <a:path w="762000" h="771525">
+                  <a:moveTo>
+                    <a:pt x="0" y="0"/>
+                  </a:moveTo>
+                  <a:cubicBezTo>
+                    <a:pt x="251460" y="0"/>
+                    <a:pt x="502920" y="0"/>
+                    <a:pt x="762000" y="0"/>
+                  </a:cubicBezTo>
+                  <a:cubicBezTo>
+                    <a:pt x="762000" y="254603"/>
+                    <a:pt x="762000" y="509207"/>
+                    <a:pt x="762000" y="771525"/>
+                  </a:cubicBezTo>
+                  <a:cubicBezTo>
+                    <a:pt x="510540" y="771525"/>
+                    <a:pt x="259080" y="771525"/>
+                    <a:pt x="0" y="771525"/>
+                  </a:cubicBezTo>
+                  <a:cubicBezTo>
+                    <a:pt x="0" y="516922"/>
+                    <a:pt x="0" y="262318"/>
+                    <a:pt x="0" y="0"/>
+                  </a:cubicBezTo>
+                  <a:close/>
+                </a:path>
+              </a:pathLst>
+            </a:custGeom>
+            <a:solidFill>
+              <a:srgbClr val="152A11"/>
+            </a:solidFill>
+            <a:ln>
+              <a:noFill/>
+            </a:ln>
+          </p:spPr>
+        </p:sp>
+        <p:sp>
+          <p:nvSpPr>
+            <p:cNvPr id="187" name="freeform-187"/>
+            <p:cNvSpPr/>
+            <p:nvPr/>
+          </p:nvSpPr>
+          <p:spPr>
+            <a:xfrm>
+              <a:off x="11315700" y="5055965"/>
+              <a:ext cx="762000" cy="792385"/>
+            </a:xfrm>
+            <a:custGeom>
+              <a:avLst/>
+              <a:gdLst/>
+              <a:ahLst/>
+              <a:cxnLst/>
+              <a:rect l="0" t="0" r="0" b="0"/>
+              <a:pathLst>
+                <a:path w="762000" h="792385">
+                  <a:moveTo>
+                    <a:pt x="0" y="20860"/>
+                  </a:moveTo>
+                  <a:cubicBezTo>
+                    <a:pt x="251460" y="20860"/>
+                    <a:pt x="502920" y="20860"/>
+                    <a:pt x="762000" y="20860"/>
+                  </a:cubicBezTo>
+                  <a:cubicBezTo>
+                    <a:pt x="762000" y="275463"/>
+                    <a:pt x="762000" y="530066"/>
+                    <a:pt x="762000" y="792385"/>
+                  </a:cubicBezTo>
+                  <a:cubicBezTo>
+                    <a:pt x="510540" y="792385"/>
+                    <a:pt x="259080" y="792385"/>
+                    <a:pt x="0" y="792385"/>
+                  </a:cubicBezTo>
+                  <a:cubicBezTo>
+                    <a:pt x="0" y="537782"/>
+                    <a:pt x="0" y="283178"/>
+                    <a:pt x="0" y="20860"/>
+                  </a:cubicBezTo>
+                  <a:close/>
+                  <a:moveTo>
+                    <a:pt x="111919" y="167307"/>
+                  </a:moveTo>
+                  <a:cubicBezTo>
+                    <a:pt x="43377" y="251355"/>
+                    <a:pt x="31937" y="333575"/>
+                    <a:pt x="38100" y="439960"/>
+                  </a:cubicBezTo>
+                  <a:cubicBezTo>
+                    <a:pt x="53683" y="535543"/>
+                    <a:pt x="105375" y="612629"/>
+                    <a:pt x="179822" y="673284"/>
+                  </a:cubicBezTo>
+                  <a:cubicBezTo>
+                    <a:pt x="260537" y="730510"/>
+                    <a:pt x="351568" y="745169"/>
+                    <a:pt x="448866" y="729282"/>
+                  </a:cubicBezTo>
+                  <a:cubicBezTo>
+                    <a:pt x="544620" y="706079"/>
+                    <a:pt x="620154" y="659511"/>
+                    <a:pt x="673675" y="576320"/>
+                  </a:cubicBezTo>
+                  <a:cubicBezTo>
+                    <a:pt x="727310" y="482641"/>
+                    <a:pt x="740674" y="382019"/>
+                    <a:pt x="713784" y="276244"/>
+                  </a:cubicBezTo>
+                  <a:cubicBezTo>
+                    <a:pt x="682104" y="184328"/>
+                    <a:pt x="608619" y="113748"/>
+                    <a:pt x="524323" y="67894"/>
+                  </a:cubicBezTo>
+                  <a:cubicBezTo>
+                    <a:pt x="374180" y="0"/>
+                    <a:pt x="219227" y="49835"/>
+                    <a:pt x="111919" y="167307"/>
+                  </a:cubicBezTo>
+                  <a:close/>
+                </a:path>
+              </a:pathLst>
+            </a:custGeom>
+            <a:solidFill>
+              <a:srgbClr val="FAFAFA"/>
+            </a:solidFill>
+            <a:ln>
+              <a:noFill/>
+            </a:ln>
+          </p:spPr>
+        </p:sp>
+        <p:sp>
+          <p:nvSpPr>
+            <p:cNvPr id="188" name="freeform-188"/>
+            <p:cNvSpPr/>
+            <p:nvPr/>
+          </p:nvSpPr>
+          <p:spPr>
+            <a:xfrm>
+              <a:off x="11382375" y="5110772"/>
+              <a:ext cx="652596" cy="662454"/>
+            </a:xfrm>
+            <a:custGeom>
+              <a:avLst/>
+              <a:gdLst/>
+              <a:ahLst/>
+              <a:cxnLst/>
+              <a:rect l="0" t="0" r="0" b="0"/>
+              <a:pathLst>
+                <a:path w="652596" h="662454">
+                  <a:moveTo>
+                    <a:pt x="295275" y="4153"/>
+                  </a:moveTo>
+                  <a:cubicBezTo>
+                    <a:pt x="345157" y="0"/>
+                    <a:pt x="381657" y="4420"/>
+                    <a:pt x="428625" y="23203"/>
+                  </a:cubicBezTo>
+                  <a:cubicBezTo>
+                    <a:pt x="425482" y="45206"/>
+                    <a:pt x="422338" y="67208"/>
+                    <a:pt x="419100" y="89878"/>
+                  </a:cubicBezTo>
+                  <a:cubicBezTo>
+                    <a:pt x="401841" y="95831"/>
+                    <a:pt x="401841" y="95831"/>
+                    <a:pt x="381000" y="99403"/>
+                  </a:cubicBezTo>
+                  <a:cubicBezTo>
+                    <a:pt x="371570" y="93116"/>
+                    <a:pt x="362140" y="86830"/>
+                    <a:pt x="352425" y="80353"/>
+                  </a:cubicBezTo>
+                  <a:cubicBezTo>
+                    <a:pt x="326822" y="79162"/>
+                    <a:pt x="326822" y="79162"/>
+                    <a:pt x="304800" y="80353"/>
+                  </a:cubicBezTo>
+                  <a:cubicBezTo>
+                    <a:pt x="304800" y="99212"/>
+                    <a:pt x="304800" y="118072"/>
+                    <a:pt x="304800" y="137503"/>
+                  </a:cubicBezTo>
+                  <a:cubicBezTo>
+                    <a:pt x="312268" y="137112"/>
+                    <a:pt x="319735" y="136722"/>
+                    <a:pt x="327422" y="136312"/>
+                  </a:cubicBezTo>
+                  <a:cubicBezTo>
+                    <a:pt x="352425" y="137503"/>
+                    <a:pt x="352425" y="137503"/>
+                    <a:pt x="371475" y="156553"/>
+                  </a:cubicBezTo>
+                  <a:cubicBezTo>
+                    <a:pt x="401241" y="152981"/>
+                    <a:pt x="401241" y="152981"/>
+                    <a:pt x="428625" y="147028"/>
+                  </a:cubicBezTo>
+                  <a:cubicBezTo>
+                    <a:pt x="425482" y="156458"/>
+                    <a:pt x="422338" y="165887"/>
+                    <a:pt x="419100" y="175603"/>
+                  </a:cubicBezTo>
+                  <a:cubicBezTo>
+                    <a:pt x="355997" y="186319"/>
+                    <a:pt x="355997" y="186319"/>
+                    <a:pt x="323850" y="175603"/>
+                  </a:cubicBezTo>
+                  <a:cubicBezTo>
+                    <a:pt x="256689" y="171079"/>
+                    <a:pt x="256689" y="171079"/>
+                    <a:pt x="228600" y="185128"/>
+                  </a:cubicBezTo>
+                  <a:cubicBezTo>
+                    <a:pt x="225457" y="194558"/>
+                    <a:pt x="222313" y="203987"/>
+                    <a:pt x="219075" y="213703"/>
+                  </a:cubicBezTo>
+                  <a:cubicBezTo>
+                    <a:pt x="244221" y="216846"/>
+                    <a:pt x="269367" y="219989"/>
+                    <a:pt x="295275" y="223228"/>
+                  </a:cubicBezTo>
+                  <a:cubicBezTo>
+                    <a:pt x="295275" y="229514"/>
+                    <a:pt x="295275" y="235801"/>
+                    <a:pt x="295275" y="242278"/>
+                  </a:cubicBezTo>
+                  <a:cubicBezTo>
+                    <a:pt x="303914" y="240706"/>
+                    <a:pt x="312563" y="239135"/>
+                    <a:pt x="321469" y="237515"/>
+                  </a:cubicBezTo>
+                  <a:cubicBezTo>
+                    <a:pt x="351253" y="232934"/>
+                    <a:pt x="379514" y="232753"/>
+                    <a:pt x="409575" y="232753"/>
+                  </a:cubicBezTo>
+                  <a:cubicBezTo>
+                    <a:pt x="408003" y="237468"/>
+                    <a:pt x="408003" y="237468"/>
+                    <a:pt x="400050" y="261328"/>
+                  </a:cubicBezTo>
+                  <a:cubicBezTo>
+                    <a:pt x="368618" y="261328"/>
+                    <a:pt x="337185" y="261328"/>
+                    <a:pt x="304800" y="261328"/>
+                  </a:cubicBezTo>
+                  <a:cubicBezTo>
+                    <a:pt x="304800" y="270758"/>
+                    <a:pt x="304800" y="280187"/>
+                    <a:pt x="304800" y="289903"/>
+                  </a:cubicBezTo>
+                  <a:cubicBezTo>
+                    <a:pt x="333089" y="289903"/>
+                    <a:pt x="361379" y="289903"/>
+                    <a:pt x="390525" y="289903"/>
+                  </a:cubicBezTo>
+                  <a:cubicBezTo>
+                    <a:pt x="387382" y="296189"/>
+                    <a:pt x="384238" y="302476"/>
+                    <a:pt x="381000" y="308953"/>
+                  </a:cubicBezTo>
+                  <a:cubicBezTo>
+                    <a:pt x="349568" y="308953"/>
+                    <a:pt x="318135" y="308953"/>
+                    <a:pt x="285750" y="308953"/>
+                  </a:cubicBezTo>
+                  <a:cubicBezTo>
+                    <a:pt x="285750" y="299523"/>
+                    <a:pt x="285750" y="290093"/>
+                    <a:pt x="285750" y="280378"/>
+                  </a:cubicBezTo>
+                  <a:cubicBezTo>
+                    <a:pt x="279463" y="280378"/>
+                    <a:pt x="273177" y="280378"/>
+                    <a:pt x="266700" y="280378"/>
+                  </a:cubicBezTo>
+                  <a:cubicBezTo>
+                    <a:pt x="266700" y="267805"/>
+                    <a:pt x="266700" y="255232"/>
+                    <a:pt x="266700" y="242278"/>
+                  </a:cubicBezTo>
+                  <a:cubicBezTo>
+                    <a:pt x="247840" y="251708"/>
+                    <a:pt x="228981" y="261137"/>
+                    <a:pt x="209550" y="270853"/>
+                  </a:cubicBezTo>
+                  <a:cubicBezTo>
+                    <a:pt x="212693" y="283426"/>
+                    <a:pt x="215837" y="295999"/>
+                    <a:pt x="219075" y="308953"/>
+                  </a:cubicBezTo>
+                  <a:cubicBezTo>
+                    <a:pt x="237935" y="312096"/>
+                    <a:pt x="256794" y="315239"/>
+                    <a:pt x="276225" y="318478"/>
+                  </a:cubicBezTo>
+                  <a:cubicBezTo>
+                    <a:pt x="275911" y="338014"/>
+                    <a:pt x="275606" y="357549"/>
+                    <a:pt x="275292" y="377076"/>
+                  </a:cubicBezTo>
+                  <a:cubicBezTo>
+                    <a:pt x="276225" y="394678"/>
+                    <a:pt x="276225" y="394678"/>
+                    <a:pt x="285750" y="404203"/>
+                  </a:cubicBezTo>
+                  <a:cubicBezTo>
+                    <a:pt x="287960" y="418633"/>
+                    <a:pt x="289674" y="433140"/>
+                    <a:pt x="291103" y="447656"/>
+                  </a:cubicBezTo>
+                  <a:cubicBezTo>
+                    <a:pt x="291903" y="455533"/>
+                    <a:pt x="292703" y="463401"/>
+                    <a:pt x="293522" y="471507"/>
+                  </a:cubicBezTo>
+                  <a:cubicBezTo>
+                    <a:pt x="294103" y="477583"/>
+                    <a:pt x="294684" y="483670"/>
+                    <a:pt x="295275" y="489928"/>
+                  </a:cubicBezTo>
+                  <a:cubicBezTo>
+                    <a:pt x="314135" y="489928"/>
+                    <a:pt x="332994" y="489928"/>
+                    <a:pt x="352425" y="489928"/>
+                  </a:cubicBezTo>
+                  <a:cubicBezTo>
+                    <a:pt x="354263" y="495319"/>
+                    <a:pt x="356111" y="500710"/>
+                    <a:pt x="358007" y="506263"/>
+                  </a:cubicBezTo>
+                  <a:cubicBezTo>
+                    <a:pt x="359245" y="509759"/>
+                    <a:pt x="359245" y="509759"/>
+                    <a:pt x="365522" y="527437"/>
+                  </a:cubicBezTo>
+                  <a:cubicBezTo>
+                    <a:pt x="366741" y="530914"/>
+                    <a:pt x="366741" y="530914"/>
+                    <a:pt x="372885" y="548526"/>
+                  </a:cubicBezTo>
+                  <a:cubicBezTo>
+                    <a:pt x="381000" y="566128"/>
+                    <a:pt x="381000" y="566128"/>
+                    <a:pt x="400050" y="575653"/>
+                  </a:cubicBezTo>
+                  <a:cubicBezTo>
+                    <a:pt x="400441" y="563870"/>
+                    <a:pt x="400841" y="552079"/>
+                    <a:pt x="401241" y="539934"/>
+                  </a:cubicBezTo>
+                  <a:cubicBezTo>
+                    <a:pt x="403660" y="518465"/>
+                    <a:pt x="403660" y="518465"/>
+                    <a:pt x="409575" y="499453"/>
+                  </a:cubicBezTo>
+                  <a:cubicBezTo>
+                    <a:pt x="419205" y="494147"/>
+                    <a:pt x="428825" y="488842"/>
+                    <a:pt x="438741" y="483375"/>
+                  </a:cubicBezTo>
+                  <a:cubicBezTo>
+                    <a:pt x="447980" y="476107"/>
+                    <a:pt x="457210" y="468840"/>
+                    <a:pt x="466725" y="461353"/>
+                  </a:cubicBezTo>
+                  <a:cubicBezTo>
+                    <a:pt x="469821" y="428615"/>
+                    <a:pt x="468487" y="397897"/>
+                    <a:pt x="465944" y="365131"/>
+                  </a:cubicBezTo>
+                  <a:cubicBezTo>
+                    <a:pt x="466077" y="360578"/>
+                    <a:pt x="466077" y="360578"/>
+                    <a:pt x="466725" y="337528"/>
+                  </a:cubicBezTo>
+                  <a:cubicBezTo>
+                    <a:pt x="476155" y="331241"/>
+                    <a:pt x="485585" y="324955"/>
+                    <a:pt x="495300" y="318478"/>
+                  </a:cubicBezTo>
+                  <a:cubicBezTo>
+                    <a:pt x="495300" y="349910"/>
+                    <a:pt x="495300" y="381343"/>
+                    <a:pt x="495300" y="413728"/>
+                  </a:cubicBezTo>
+                  <a:cubicBezTo>
+                    <a:pt x="514160" y="413728"/>
+                    <a:pt x="533019" y="413728"/>
+                    <a:pt x="552450" y="413728"/>
+                  </a:cubicBezTo>
+                  <a:cubicBezTo>
+                    <a:pt x="552450" y="385439"/>
+                    <a:pt x="552450" y="357149"/>
+                    <a:pt x="552450" y="328003"/>
+                  </a:cubicBezTo>
+                  <a:cubicBezTo>
+                    <a:pt x="558737" y="324860"/>
+                    <a:pt x="565023" y="321716"/>
+                    <a:pt x="571500" y="318478"/>
+                  </a:cubicBezTo>
+                  <a:cubicBezTo>
+                    <a:pt x="570128" y="313172"/>
+                    <a:pt x="568747" y="307867"/>
+                    <a:pt x="567328" y="302400"/>
+                  </a:cubicBezTo>
+                  <a:cubicBezTo>
+                    <a:pt x="565566" y="295132"/>
+                    <a:pt x="563794" y="287865"/>
+                    <a:pt x="561975" y="280378"/>
+                  </a:cubicBezTo>
+                  <a:cubicBezTo>
+                    <a:pt x="559613" y="272320"/>
+                    <a:pt x="557260" y="264271"/>
+                    <a:pt x="554831" y="255975"/>
+                  </a:cubicBezTo>
+                  <a:cubicBezTo>
+                    <a:pt x="552450" y="232753"/>
+                    <a:pt x="552450" y="232753"/>
+                    <a:pt x="566147" y="215494"/>
+                  </a:cubicBezTo>
+                  <a:cubicBezTo>
+                    <a:pt x="571052" y="211760"/>
+                    <a:pt x="575967" y="208026"/>
+                    <a:pt x="581025" y="204178"/>
+                  </a:cubicBezTo>
+                  <a:cubicBezTo>
+                    <a:pt x="590455" y="213608"/>
+                    <a:pt x="599885" y="223037"/>
+                    <a:pt x="609600" y="232753"/>
+                  </a:cubicBezTo>
+                  <a:cubicBezTo>
+                    <a:pt x="611172" y="228038"/>
+                    <a:pt x="611172" y="228038"/>
+                    <a:pt x="619125" y="204178"/>
+                  </a:cubicBezTo>
+                  <a:cubicBezTo>
+                    <a:pt x="651310" y="271034"/>
+                    <a:pt x="652596" y="361721"/>
+                    <a:pt x="632774" y="433197"/>
+                  </a:cubicBezTo>
+                  <a:cubicBezTo>
+                    <a:pt x="597922" y="527142"/>
+                    <a:pt x="541449" y="593388"/>
+                    <a:pt x="451247" y="636375"/>
+                  </a:cubicBezTo>
+                  <a:cubicBezTo>
+                    <a:pt x="392468" y="659892"/>
+                    <a:pt x="338785" y="662454"/>
+                    <a:pt x="276225" y="661378"/>
+                  </a:cubicBezTo>
+                  <a:cubicBezTo>
+                    <a:pt x="279368" y="639375"/>
+                    <a:pt x="282512" y="617372"/>
+                    <a:pt x="285750" y="594703"/>
+                  </a:cubicBezTo>
+                  <a:cubicBezTo>
+                    <a:pt x="280111" y="594350"/>
+                    <a:pt x="274482" y="593989"/>
+                    <a:pt x="268672" y="593627"/>
+                  </a:cubicBezTo>
+                  <a:cubicBezTo>
+                    <a:pt x="205159" y="588340"/>
+                    <a:pt x="205159" y="588340"/>
+                    <a:pt x="176803" y="570890"/>
+                  </a:cubicBezTo>
+                  <a:cubicBezTo>
+                    <a:pt x="149514" y="554917"/>
+                    <a:pt x="134731" y="554555"/>
+                    <a:pt x="103584" y="553031"/>
+                  </a:cubicBezTo>
+                  <a:cubicBezTo>
+                    <a:pt x="59712" y="549640"/>
+                    <a:pt x="59712" y="549640"/>
+                    <a:pt x="36909" y="526837"/>
+                  </a:cubicBezTo>
+                  <a:cubicBezTo>
+                    <a:pt x="27013" y="494319"/>
+                    <a:pt x="26584" y="466592"/>
+                    <a:pt x="28575" y="432778"/>
+                  </a:cubicBezTo>
+                  <a:cubicBezTo>
+                    <a:pt x="38005" y="432778"/>
+                    <a:pt x="47435" y="432778"/>
+                    <a:pt x="57150" y="432778"/>
+                  </a:cubicBezTo>
+                  <a:cubicBezTo>
+                    <a:pt x="52635" y="426882"/>
+                    <a:pt x="48111" y="420995"/>
+                    <a:pt x="43453" y="414919"/>
+                  </a:cubicBezTo>
+                  <a:cubicBezTo>
+                    <a:pt x="25651" y="379305"/>
+                    <a:pt x="23936" y="350253"/>
+                    <a:pt x="21993" y="310925"/>
+                  </a:cubicBezTo>
+                  <a:cubicBezTo>
+                    <a:pt x="19050" y="289903"/>
+                    <a:pt x="19050" y="289903"/>
+                    <a:pt x="0" y="270853"/>
+                  </a:cubicBezTo>
+                  <a:cubicBezTo>
+                    <a:pt x="0" y="258280"/>
+                    <a:pt x="0" y="245707"/>
+                    <a:pt x="0" y="232753"/>
+                  </a:cubicBezTo>
+                  <a:cubicBezTo>
+                    <a:pt x="15716" y="226466"/>
+                    <a:pt x="31432" y="220180"/>
+                    <a:pt x="47625" y="213703"/>
+                  </a:cubicBezTo>
+                  <a:cubicBezTo>
+                    <a:pt x="53912" y="226276"/>
+                    <a:pt x="60198" y="238849"/>
+                    <a:pt x="66675" y="251803"/>
+                  </a:cubicBezTo>
+                  <a:cubicBezTo>
+                    <a:pt x="74143" y="249841"/>
+                    <a:pt x="81610" y="247869"/>
+                    <a:pt x="89297" y="245850"/>
+                  </a:cubicBezTo>
+                  <a:cubicBezTo>
+                    <a:pt x="93421" y="245259"/>
+                    <a:pt x="93421" y="245259"/>
+                    <a:pt x="114300" y="242278"/>
+                  </a:cubicBezTo>
+                  <a:cubicBezTo>
+                    <a:pt x="120587" y="248564"/>
+                    <a:pt x="126873" y="254851"/>
+                    <a:pt x="133350" y="261328"/>
+                  </a:cubicBezTo>
+                  <a:cubicBezTo>
+                    <a:pt x="158353" y="267281"/>
+                    <a:pt x="158353" y="267281"/>
+                    <a:pt x="180975" y="270853"/>
+                  </a:cubicBezTo>
+                  <a:cubicBezTo>
+                    <a:pt x="163792" y="239754"/>
+                    <a:pt x="153981" y="224285"/>
+                    <a:pt x="123825" y="204178"/>
+                  </a:cubicBezTo>
+                  <a:cubicBezTo>
+                    <a:pt x="120882" y="196520"/>
+                    <a:pt x="117929" y="188852"/>
+                    <a:pt x="114891" y="180956"/>
+                  </a:cubicBezTo>
+                  <a:cubicBezTo>
+                    <a:pt x="103365" y="153143"/>
+                    <a:pt x="91726" y="143847"/>
+                    <a:pt x="66675" y="127978"/>
+                  </a:cubicBezTo>
+                  <a:cubicBezTo>
+                    <a:pt x="80867" y="91840"/>
+                    <a:pt x="101832" y="73847"/>
+                    <a:pt x="133350" y="51778"/>
+                  </a:cubicBezTo>
+                  <a:cubicBezTo>
+                    <a:pt x="139637" y="51778"/>
+                    <a:pt x="145923" y="51778"/>
+                    <a:pt x="152400" y="51778"/>
+                  </a:cubicBezTo>
+                  <a:cubicBezTo>
+                    <a:pt x="149257" y="70637"/>
+                    <a:pt x="146113" y="89497"/>
+                    <a:pt x="142875" y="108928"/>
+                  </a:cubicBezTo>
+                  <a:cubicBezTo>
+                    <a:pt x="166545" y="98784"/>
+                    <a:pt x="181042" y="89811"/>
+                    <a:pt x="198834" y="70828"/>
+                  </a:cubicBezTo>
+                  <a:cubicBezTo>
+                    <a:pt x="223047" y="48044"/>
+                    <a:pt x="244964" y="42920"/>
+                    <a:pt x="276225" y="32728"/>
+                  </a:cubicBezTo>
+                  <a:cubicBezTo>
+                    <a:pt x="282512" y="23298"/>
+                    <a:pt x="288798" y="13868"/>
+                    <a:pt x="295275" y="4153"/>
+                  </a:cubicBezTo>
+                  <a:close/>
+                </a:path>
+              </a:pathLst>
+            </a:custGeom>
+            <a:solidFill>
+              <a:srgbClr val="0493F6"/>
+            </a:solidFill>
+            <a:ln>
+              <a:noFill/>
+            </a:ln>
+          </p:spPr>
+        </p:sp>
+        <p:sp>
+          <p:nvSpPr>
+            <p:cNvPr id="189" name="freeform-189"/>
+            <p:cNvSpPr/>
+            <p:nvPr/>
+          </p:nvSpPr>
+          <p:spPr>
+            <a:xfrm>
+              <a:off x="11311357" y="5162550"/>
+              <a:ext cx="747293" cy="688096"/>
+            </a:xfrm>
+            <a:custGeom>
+              <a:avLst/>
+              <a:gdLst/>
+              <a:ahLst/>
+              <a:cxnLst/>
+              <a:rect l="0" t="0" r="0" b="0"/>
+              <a:pathLst>
+                <a:path w="747293" h="688096">
+                  <a:moveTo>
+                    <a:pt x="109118" y="0"/>
+                  </a:moveTo>
+                  <a:cubicBezTo>
+                    <a:pt x="115405" y="0"/>
+                    <a:pt x="121691" y="0"/>
+                    <a:pt x="128168" y="0"/>
+                  </a:cubicBezTo>
+                  <a:cubicBezTo>
+                    <a:pt x="114671" y="28680"/>
+                    <a:pt x="98736" y="53854"/>
+                    <a:pt x="80543" y="79772"/>
+                  </a:cubicBezTo>
+                  <a:cubicBezTo>
+                    <a:pt x="48416" y="127568"/>
+                    <a:pt x="27870" y="169745"/>
+                    <a:pt x="32918" y="228600"/>
+                  </a:cubicBezTo>
+                  <a:cubicBezTo>
+                    <a:pt x="36062" y="231743"/>
+                    <a:pt x="39205" y="234886"/>
+                    <a:pt x="42443" y="238125"/>
+                  </a:cubicBezTo>
+                  <a:cubicBezTo>
+                    <a:pt x="44815" y="259737"/>
+                    <a:pt x="46949" y="281368"/>
+                    <a:pt x="48997" y="303009"/>
+                  </a:cubicBezTo>
+                  <a:cubicBezTo>
+                    <a:pt x="61351" y="406660"/>
+                    <a:pt x="99203" y="489652"/>
+                    <a:pt x="182042" y="556060"/>
+                  </a:cubicBezTo>
+                  <a:cubicBezTo>
+                    <a:pt x="264585" y="613153"/>
+                    <a:pt x="353911" y="629383"/>
+                    <a:pt x="453209" y="613172"/>
+                  </a:cubicBezTo>
+                  <a:cubicBezTo>
+                    <a:pt x="568642" y="584873"/>
+                    <a:pt x="630679" y="521665"/>
+                    <a:pt x="699668" y="428625"/>
+                  </a:cubicBezTo>
+                  <a:cubicBezTo>
+                    <a:pt x="704383" y="430197"/>
+                    <a:pt x="704383" y="430197"/>
+                    <a:pt x="728243" y="438150"/>
+                  </a:cubicBezTo>
+                  <a:cubicBezTo>
+                    <a:pt x="728243" y="431864"/>
+                    <a:pt x="728243" y="425577"/>
+                    <a:pt x="728243" y="419100"/>
+                  </a:cubicBezTo>
+                  <a:cubicBezTo>
+                    <a:pt x="734530" y="419100"/>
+                    <a:pt x="740816" y="419100"/>
+                    <a:pt x="747293" y="419100"/>
+                  </a:cubicBezTo>
+                  <a:cubicBezTo>
+                    <a:pt x="719766" y="513455"/>
+                    <a:pt x="657387" y="575405"/>
+                    <a:pt x="574167" y="624859"/>
+                  </a:cubicBezTo>
+                  <a:cubicBezTo>
+                    <a:pt x="540620" y="641471"/>
+                    <a:pt x="507387" y="652310"/>
+                    <a:pt x="471030" y="660987"/>
+                  </a:cubicBezTo>
+                  <a:cubicBezTo>
+                    <a:pt x="452018" y="666750"/>
+                    <a:pt x="452018" y="666750"/>
+                    <a:pt x="432968" y="685800"/>
+                  </a:cubicBezTo>
+                  <a:cubicBezTo>
+                    <a:pt x="414404" y="688096"/>
+                    <a:pt x="414404" y="688096"/>
+                    <a:pt x="391458" y="687962"/>
+                  </a:cubicBezTo>
+                  <a:cubicBezTo>
+                    <a:pt x="382876" y="687962"/>
+                    <a:pt x="374304" y="687962"/>
+                    <a:pt x="365455" y="687962"/>
+                  </a:cubicBezTo>
+                  <a:cubicBezTo>
+                    <a:pt x="356178" y="687857"/>
+                    <a:pt x="346900" y="687762"/>
+                    <a:pt x="337347" y="687657"/>
+                  </a:cubicBezTo>
+                  <a:cubicBezTo>
+                    <a:pt x="327860" y="687629"/>
+                    <a:pt x="318373" y="687610"/>
+                    <a:pt x="308600" y="687581"/>
+                  </a:cubicBezTo>
+                  <a:cubicBezTo>
+                    <a:pt x="278216" y="687476"/>
+                    <a:pt x="247840" y="687229"/>
+                    <a:pt x="217465" y="686991"/>
+                  </a:cubicBezTo>
+                  <a:cubicBezTo>
+                    <a:pt x="196901" y="686895"/>
+                    <a:pt x="176336" y="686810"/>
+                    <a:pt x="155772" y="686733"/>
+                  </a:cubicBezTo>
+                  <a:cubicBezTo>
+                    <a:pt x="105299" y="686524"/>
+                    <a:pt x="54816" y="686200"/>
+                    <a:pt x="4343" y="685800"/>
+                  </a:cubicBezTo>
+                  <a:cubicBezTo>
+                    <a:pt x="3372" y="615648"/>
+                    <a:pt x="2705" y="545506"/>
+                    <a:pt x="2248" y="475345"/>
+                  </a:cubicBezTo>
+                  <a:cubicBezTo>
+                    <a:pt x="2057" y="451514"/>
+                    <a:pt x="1800" y="427682"/>
+                    <a:pt x="1467" y="403841"/>
+                  </a:cubicBezTo>
+                  <a:cubicBezTo>
+                    <a:pt x="1000" y="369465"/>
+                    <a:pt x="791" y="335089"/>
+                    <a:pt x="619" y="300704"/>
+                  </a:cubicBezTo>
+                  <a:cubicBezTo>
+                    <a:pt x="429" y="290160"/>
+                    <a:pt x="229" y="279606"/>
+                    <a:pt x="29" y="268738"/>
+                  </a:cubicBezTo>
+                  <a:cubicBezTo>
+                    <a:pt x="0" y="183709"/>
+                    <a:pt x="18240" y="109452"/>
+                    <a:pt x="72809" y="42272"/>
+                  </a:cubicBezTo>
+                  <a:cubicBezTo>
+                    <a:pt x="77657" y="36166"/>
+                    <a:pt x="82506" y="30061"/>
+                    <a:pt x="87497" y="23774"/>
+                  </a:cubicBezTo>
+                  <a:cubicBezTo>
+                    <a:pt x="99593" y="9525"/>
+                    <a:pt x="99593" y="9525"/>
+                    <a:pt x="109118" y="0"/>
+                  </a:cubicBezTo>
+                  <a:close/>
+                </a:path>
+              </a:pathLst>
+            </a:custGeom>
+            <a:solidFill>
+              <a:srgbClr val="F8F8F8"/>
+            </a:solidFill>
+            <a:ln>
+              <a:noFill/>
+            </a:ln>
+          </p:spPr>
+        </p:sp>
+        <p:sp>
+          <p:nvSpPr>
+            <p:cNvPr id="190" name="freeform-190"/>
+            <p:cNvSpPr/>
+            <p:nvPr/>
+          </p:nvSpPr>
+          <p:spPr>
+            <a:xfrm>
+              <a:off x="11664782" y="5153025"/>
+              <a:ext cx="308143" cy="504825"/>
+            </a:xfrm>
+            <a:custGeom>
+              <a:avLst/>
+              <a:gdLst/>
+              <a:ahLst/>
+              <a:cxnLst/>
+              <a:rect l="0" t="0" r="0" b="0"/>
+              <a:pathLst>
+                <a:path w="308143" h="504825">
+                  <a:moveTo>
+                    <a:pt x="165268" y="0"/>
+                  </a:moveTo>
+                  <a:cubicBezTo>
+                    <a:pt x="204016" y="5001"/>
+                    <a:pt x="224095" y="15373"/>
+                    <a:pt x="252784" y="41672"/>
+                  </a:cubicBezTo>
+                  <a:cubicBezTo>
+                    <a:pt x="259204" y="47444"/>
+                    <a:pt x="265624" y="53216"/>
+                    <a:pt x="272234" y="59160"/>
+                  </a:cubicBezTo>
+                  <a:cubicBezTo>
+                    <a:pt x="301247" y="88487"/>
+                    <a:pt x="308143" y="100698"/>
+                    <a:pt x="308143" y="142875"/>
+                  </a:cubicBezTo>
+                  <a:cubicBezTo>
+                    <a:pt x="298714" y="146018"/>
+                    <a:pt x="289284" y="149161"/>
+                    <a:pt x="279568" y="152400"/>
+                  </a:cubicBezTo>
+                  <a:cubicBezTo>
+                    <a:pt x="265328" y="180880"/>
+                    <a:pt x="268938" y="206693"/>
+                    <a:pt x="270043" y="238125"/>
+                  </a:cubicBezTo>
+                  <a:cubicBezTo>
+                    <a:pt x="273187" y="247555"/>
+                    <a:pt x="276330" y="256985"/>
+                    <a:pt x="279568" y="266700"/>
+                  </a:cubicBezTo>
+                  <a:cubicBezTo>
+                    <a:pt x="273282" y="269843"/>
+                    <a:pt x="266995" y="272986"/>
+                    <a:pt x="260518" y="276225"/>
+                  </a:cubicBezTo>
+                  <a:cubicBezTo>
+                    <a:pt x="260518" y="301371"/>
+                    <a:pt x="260518" y="326517"/>
+                    <a:pt x="260518" y="352425"/>
+                  </a:cubicBezTo>
+                  <a:cubicBezTo>
+                    <a:pt x="254232" y="353997"/>
+                    <a:pt x="254232" y="353997"/>
+                    <a:pt x="222418" y="361950"/>
+                  </a:cubicBezTo>
+                  <a:cubicBezTo>
+                    <a:pt x="222418" y="333661"/>
+                    <a:pt x="222418" y="305371"/>
+                    <a:pt x="222418" y="276225"/>
+                  </a:cubicBezTo>
+                  <a:cubicBezTo>
+                    <a:pt x="209845" y="269939"/>
+                    <a:pt x="197272" y="263652"/>
+                    <a:pt x="184318" y="257175"/>
+                  </a:cubicBezTo>
+                  <a:cubicBezTo>
+                    <a:pt x="178737" y="300238"/>
+                    <a:pt x="174269" y="341147"/>
+                    <a:pt x="177175" y="384572"/>
+                  </a:cubicBezTo>
+                  <a:cubicBezTo>
+                    <a:pt x="176393" y="395964"/>
+                    <a:pt x="175603" y="407356"/>
+                    <a:pt x="174793" y="419100"/>
+                  </a:cubicBezTo>
+                  <a:cubicBezTo>
+                    <a:pt x="152171" y="434578"/>
+                    <a:pt x="152171" y="434578"/>
+                    <a:pt x="127168" y="447675"/>
+                  </a:cubicBezTo>
+                  <a:cubicBezTo>
+                    <a:pt x="114671" y="478041"/>
+                    <a:pt x="114671" y="478041"/>
+                    <a:pt x="108118" y="504825"/>
+                  </a:cubicBezTo>
+                  <a:cubicBezTo>
+                    <a:pt x="85639" y="482346"/>
+                    <a:pt x="84392" y="468830"/>
+                    <a:pt x="79543" y="438150"/>
+                  </a:cubicBezTo>
+                  <a:cubicBezTo>
+                    <a:pt x="60684" y="438150"/>
+                    <a:pt x="41824" y="438150"/>
+                    <a:pt x="22393" y="438150"/>
+                  </a:cubicBezTo>
+                  <a:cubicBezTo>
+                    <a:pt x="9249" y="386391"/>
+                    <a:pt x="0" y="339261"/>
+                    <a:pt x="3343" y="285750"/>
+                  </a:cubicBezTo>
+                  <a:cubicBezTo>
+                    <a:pt x="19183" y="269910"/>
+                    <a:pt x="39376" y="272796"/>
+                    <a:pt x="61084" y="270872"/>
+                  </a:cubicBezTo>
+                  <a:cubicBezTo>
+                    <a:pt x="65465" y="270472"/>
+                    <a:pt x="65465" y="270472"/>
+                    <a:pt x="87620" y="268453"/>
+                  </a:cubicBezTo>
+                  <a:cubicBezTo>
+                    <a:pt x="94383" y="267872"/>
+                    <a:pt x="101146" y="267291"/>
+                    <a:pt x="108118" y="266700"/>
+                  </a:cubicBezTo>
+                  <a:cubicBezTo>
+                    <a:pt x="122387" y="234591"/>
+                    <a:pt x="127168" y="217132"/>
+                    <a:pt x="127168" y="180975"/>
+                  </a:cubicBezTo>
+                  <a:cubicBezTo>
+                    <a:pt x="111452" y="184118"/>
+                    <a:pt x="95736" y="187261"/>
+                    <a:pt x="79543" y="190500"/>
+                  </a:cubicBezTo>
+                  <a:cubicBezTo>
+                    <a:pt x="79543" y="184214"/>
+                    <a:pt x="79543" y="177927"/>
+                    <a:pt x="79543" y="171450"/>
+                  </a:cubicBezTo>
+                  <a:cubicBezTo>
+                    <a:pt x="63827" y="174593"/>
+                    <a:pt x="48111" y="177736"/>
+                    <a:pt x="31918" y="180975"/>
+                  </a:cubicBezTo>
+                  <a:cubicBezTo>
+                    <a:pt x="31918" y="171545"/>
+                    <a:pt x="31918" y="162115"/>
+                    <a:pt x="31918" y="152400"/>
+                  </a:cubicBezTo>
+                  <a:cubicBezTo>
+                    <a:pt x="38462" y="151933"/>
+                    <a:pt x="45006" y="151467"/>
+                    <a:pt x="51749" y="150990"/>
+                  </a:cubicBezTo>
+                  <a:cubicBezTo>
+                    <a:pt x="60331" y="150276"/>
+                    <a:pt x="68913" y="149562"/>
+                    <a:pt x="77753" y="148828"/>
+                  </a:cubicBezTo>
+                  <a:cubicBezTo>
+                    <a:pt x="86268" y="148161"/>
+                    <a:pt x="94774" y="147504"/>
+                    <a:pt x="103546" y="146818"/>
+                  </a:cubicBezTo>
+                  <a:cubicBezTo>
+                    <a:pt x="127168" y="142875"/>
+                    <a:pt x="127168" y="142875"/>
+                    <a:pt x="155743" y="123825"/>
+                  </a:cubicBezTo>
+                  <a:cubicBezTo>
+                    <a:pt x="155743" y="117539"/>
+                    <a:pt x="155743" y="111252"/>
+                    <a:pt x="155743" y="104775"/>
+                  </a:cubicBezTo>
+                  <a:cubicBezTo>
+                    <a:pt x="151324" y="105851"/>
+                    <a:pt x="151324" y="105851"/>
+                    <a:pt x="128959" y="111328"/>
+                  </a:cubicBezTo>
+                  <a:cubicBezTo>
+                    <a:pt x="118939" y="112309"/>
+                    <a:pt x="108918" y="113290"/>
+                    <a:pt x="98593" y="114300"/>
+                  </a:cubicBezTo>
+                  <a:cubicBezTo>
+                    <a:pt x="83115" y="101203"/>
+                    <a:pt x="83115" y="101203"/>
+                    <a:pt x="70018" y="85725"/>
+                  </a:cubicBezTo>
+                  <a:cubicBezTo>
+                    <a:pt x="49178" y="79172"/>
+                    <a:pt x="49178" y="79172"/>
+                    <a:pt x="31918" y="76200"/>
+                  </a:cubicBezTo>
+                  <a:cubicBezTo>
+                    <a:pt x="31918" y="63627"/>
+                    <a:pt x="31918" y="51054"/>
+                    <a:pt x="31918" y="38100"/>
+                  </a:cubicBezTo>
+                  <a:cubicBezTo>
+                    <a:pt x="77162" y="45244"/>
+                    <a:pt x="77162" y="45244"/>
+                    <a:pt x="98593" y="66675"/>
+                  </a:cubicBezTo>
+                  <a:cubicBezTo>
+                    <a:pt x="111166" y="66675"/>
+                    <a:pt x="123739" y="66675"/>
+                    <a:pt x="136693" y="66675"/>
+                  </a:cubicBezTo>
+                  <a:cubicBezTo>
+                    <a:pt x="146123" y="44672"/>
+                    <a:pt x="155553" y="22669"/>
+                    <a:pt x="165268" y="0"/>
+                  </a:cubicBezTo>
+                  <a:close/>
+                </a:path>
+              </a:pathLst>
+            </a:custGeom>
+            <a:solidFill>
+              <a:srgbClr val="55A402"/>
+            </a:solidFill>
+            <a:ln>
+              <a:noFill/>
+            </a:ln>
+          </p:spPr>
+        </p:sp>
+        <p:sp>
+          <p:nvSpPr>
+            <p:cNvPr id="191" name="freeform-191"/>
+            <p:cNvSpPr/>
+            <p:nvPr/>
+          </p:nvSpPr>
+          <p:spPr>
+            <a:xfrm>
+              <a:off x="11350000" y="5083607"/>
+              <a:ext cx="461000" cy="695925"/>
+            </a:xfrm>
+            <a:custGeom>
+              <a:avLst/>
+              <a:gdLst/>
+              <a:ahLst/>
+              <a:cxnLst/>
+              <a:rect l="0" t="0" r="0" b="0"/>
+              <a:pathLst>
+                <a:path w="461000" h="695925">
+                  <a:moveTo>
+                    <a:pt x="461000" y="31318"/>
+                  </a:moveTo>
+                  <a:cubicBezTo>
+                    <a:pt x="457857" y="37605"/>
+                    <a:pt x="454714" y="43891"/>
+                    <a:pt x="451475" y="50368"/>
+                  </a:cubicBezTo>
+                  <a:cubicBezTo>
+                    <a:pt x="445189" y="48797"/>
+                    <a:pt x="438902" y="47225"/>
+                    <a:pt x="432425" y="45606"/>
+                  </a:cubicBezTo>
+                  <a:cubicBezTo>
+                    <a:pt x="395621" y="39472"/>
+                    <a:pt x="365046" y="37824"/>
+                    <a:pt x="327650" y="40843"/>
+                  </a:cubicBezTo>
+                  <a:cubicBezTo>
+                    <a:pt x="312172" y="58703"/>
+                    <a:pt x="312172" y="58703"/>
+                    <a:pt x="299075" y="78943"/>
+                  </a:cubicBezTo>
+                  <a:cubicBezTo>
+                    <a:pt x="290036" y="81886"/>
+                    <a:pt x="280997" y="84839"/>
+                    <a:pt x="271691" y="87878"/>
+                  </a:cubicBezTo>
+                  <a:cubicBezTo>
+                    <a:pt x="236001" y="100003"/>
+                    <a:pt x="219151" y="117843"/>
+                    <a:pt x="194300" y="145618"/>
+                  </a:cubicBezTo>
+                  <a:cubicBezTo>
+                    <a:pt x="184871" y="142475"/>
+                    <a:pt x="175441" y="139332"/>
+                    <a:pt x="165725" y="136093"/>
+                  </a:cubicBezTo>
+                  <a:cubicBezTo>
+                    <a:pt x="172012" y="117234"/>
+                    <a:pt x="178298" y="98374"/>
+                    <a:pt x="184775" y="78943"/>
+                  </a:cubicBezTo>
+                  <a:cubicBezTo>
+                    <a:pt x="159629" y="97803"/>
+                    <a:pt x="134483" y="116662"/>
+                    <a:pt x="108575" y="136093"/>
+                  </a:cubicBezTo>
+                  <a:cubicBezTo>
+                    <a:pt x="118100" y="164668"/>
+                    <a:pt x="118100" y="164668"/>
+                    <a:pt x="137150" y="178365"/>
+                  </a:cubicBezTo>
+                  <a:cubicBezTo>
+                    <a:pt x="156200" y="193243"/>
+                    <a:pt x="156200" y="193243"/>
+                    <a:pt x="160372" y="211703"/>
+                  </a:cubicBezTo>
+                  <a:cubicBezTo>
+                    <a:pt x="168354" y="240973"/>
+                    <a:pt x="190157" y="251003"/>
+                    <a:pt x="213350" y="269443"/>
+                  </a:cubicBezTo>
+                  <a:cubicBezTo>
+                    <a:pt x="213350" y="278873"/>
+                    <a:pt x="213350" y="288303"/>
+                    <a:pt x="213350" y="298018"/>
+                  </a:cubicBezTo>
+                  <a:cubicBezTo>
+                    <a:pt x="177984" y="299980"/>
+                    <a:pt x="158686" y="294999"/>
+                    <a:pt x="127625" y="278968"/>
+                  </a:cubicBezTo>
+                  <a:cubicBezTo>
+                    <a:pt x="115052" y="278968"/>
+                    <a:pt x="102479" y="278968"/>
+                    <a:pt x="89525" y="278968"/>
+                  </a:cubicBezTo>
+                  <a:cubicBezTo>
+                    <a:pt x="83239" y="269538"/>
+                    <a:pt x="76952" y="260109"/>
+                    <a:pt x="70475" y="250393"/>
+                  </a:cubicBezTo>
+                  <a:cubicBezTo>
+                    <a:pt x="57902" y="253536"/>
+                    <a:pt x="45329" y="256680"/>
+                    <a:pt x="32375" y="259918"/>
+                  </a:cubicBezTo>
+                  <a:cubicBezTo>
+                    <a:pt x="50235" y="306353"/>
+                    <a:pt x="50235" y="306353"/>
+                    <a:pt x="60950" y="317068"/>
+                  </a:cubicBezTo>
+                  <a:cubicBezTo>
+                    <a:pt x="63646" y="341338"/>
+                    <a:pt x="65218" y="365598"/>
+                    <a:pt x="66865" y="389954"/>
+                  </a:cubicBezTo>
+                  <a:cubicBezTo>
+                    <a:pt x="70475" y="412318"/>
+                    <a:pt x="70475" y="412318"/>
+                    <a:pt x="89525" y="431368"/>
+                  </a:cubicBezTo>
+                  <a:cubicBezTo>
+                    <a:pt x="89525" y="440798"/>
+                    <a:pt x="89525" y="450228"/>
+                    <a:pt x="89525" y="459943"/>
+                  </a:cubicBezTo>
+                  <a:cubicBezTo>
+                    <a:pt x="80096" y="459943"/>
+                    <a:pt x="70666" y="459943"/>
+                    <a:pt x="60950" y="459943"/>
+                  </a:cubicBezTo>
+                  <a:cubicBezTo>
+                    <a:pt x="63903" y="473640"/>
+                    <a:pt x="66885" y="487328"/>
+                    <a:pt x="69885" y="501015"/>
+                  </a:cubicBezTo>
+                  <a:cubicBezTo>
+                    <a:pt x="70714" y="504835"/>
+                    <a:pt x="70714" y="504835"/>
+                    <a:pt x="74905" y="524123"/>
+                  </a:cubicBezTo>
+                  <a:cubicBezTo>
+                    <a:pt x="80000" y="545668"/>
+                    <a:pt x="80000" y="545668"/>
+                    <a:pt x="89525" y="574243"/>
+                  </a:cubicBezTo>
+                  <a:cubicBezTo>
+                    <a:pt x="95850" y="573910"/>
+                    <a:pt x="102175" y="573576"/>
+                    <a:pt x="108690" y="573243"/>
+                  </a:cubicBezTo>
+                  <a:cubicBezTo>
+                    <a:pt x="160439" y="571652"/>
+                    <a:pt x="188643" y="573643"/>
+                    <a:pt x="232400" y="602818"/>
+                  </a:cubicBezTo>
+                  <a:cubicBezTo>
+                    <a:pt x="260680" y="610753"/>
+                    <a:pt x="289246" y="616525"/>
+                    <a:pt x="318125" y="621868"/>
+                  </a:cubicBezTo>
+                  <a:cubicBezTo>
+                    <a:pt x="314982" y="643871"/>
+                    <a:pt x="311839" y="665874"/>
+                    <a:pt x="308600" y="688543"/>
+                  </a:cubicBezTo>
+                  <a:cubicBezTo>
+                    <a:pt x="232353" y="695925"/>
+                    <a:pt x="187795" y="678485"/>
+                    <a:pt x="127625" y="631393"/>
+                  </a:cubicBezTo>
+                  <a:cubicBezTo>
+                    <a:pt x="52073" y="561956"/>
+                    <a:pt x="9096" y="484222"/>
+                    <a:pt x="1534" y="381514"/>
+                  </a:cubicBezTo>
+                  <a:cubicBezTo>
+                    <a:pt x="0" y="309086"/>
+                    <a:pt x="4572" y="255803"/>
+                    <a:pt x="41900" y="193243"/>
+                  </a:cubicBezTo>
+                  <a:cubicBezTo>
+                    <a:pt x="47206" y="183613"/>
+                    <a:pt x="52511" y="173993"/>
+                    <a:pt x="57979" y="164078"/>
+                  </a:cubicBezTo>
+                  <a:cubicBezTo>
+                    <a:pt x="114243" y="92593"/>
+                    <a:pt x="174508" y="49416"/>
+                    <a:pt x="260975" y="21793"/>
+                  </a:cubicBezTo>
+                  <a:cubicBezTo>
+                    <a:pt x="326355" y="0"/>
+                    <a:pt x="397021" y="8572"/>
+                    <a:pt x="461000" y="31318"/>
+                  </a:cubicBezTo>
+                  <a:close/>
+                </a:path>
+              </a:pathLst>
+            </a:custGeom>
+            <a:solidFill>
+              <a:srgbClr val="0F211D"/>
+            </a:solidFill>
+            <a:ln>
+              <a:noFill/>
+            </a:ln>
+          </p:spPr>
+        </p:sp>
+        <p:sp>
+          <p:nvSpPr>
+            <p:cNvPr id="192" name="freeform-192"/>
+            <p:cNvSpPr/>
+            <p:nvPr/>
+          </p:nvSpPr>
+          <p:spPr>
+            <a:xfrm>
+              <a:off x="11753850" y="5314950"/>
+              <a:ext cx="281121" cy="448637"/>
+            </a:xfrm>
+            <a:custGeom>
+              <a:avLst/>
+              <a:gdLst/>
+              <a:ahLst/>
+              <a:cxnLst/>
+              <a:rect l="0" t="0" r="0" b="0"/>
+              <a:pathLst>
+                <a:path w="281121" h="448637">
+                  <a:moveTo>
+                    <a:pt x="200025" y="0"/>
+                  </a:moveTo>
+                  <a:cubicBezTo>
+                    <a:pt x="212598" y="9430"/>
+                    <a:pt x="225171" y="18860"/>
+                    <a:pt x="238125" y="28575"/>
+                  </a:cubicBezTo>
+                  <a:cubicBezTo>
+                    <a:pt x="241268" y="19145"/>
+                    <a:pt x="244412" y="9715"/>
+                    <a:pt x="247650" y="0"/>
+                  </a:cubicBezTo>
+                  <a:cubicBezTo>
+                    <a:pt x="279835" y="66856"/>
+                    <a:pt x="281121" y="157543"/>
+                    <a:pt x="261299" y="229019"/>
+                  </a:cubicBezTo>
+                  <a:cubicBezTo>
+                    <a:pt x="226114" y="323860"/>
+                    <a:pt x="168983" y="389220"/>
+                    <a:pt x="78581" y="433388"/>
+                  </a:cubicBezTo>
+                  <a:cubicBezTo>
+                    <a:pt x="44396" y="448637"/>
+                    <a:pt x="39119" y="447932"/>
+                    <a:pt x="0" y="438150"/>
+                  </a:cubicBezTo>
+                  <a:cubicBezTo>
+                    <a:pt x="28289" y="419290"/>
+                    <a:pt x="56579" y="400431"/>
+                    <a:pt x="85725" y="381000"/>
+                  </a:cubicBezTo>
+                  <a:cubicBezTo>
+                    <a:pt x="82582" y="377857"/>
+                    <a:pt x="79438" y="374714"/>
+                    <a:pt x="76200" y="371475"/>
+                  </a:cubicBezTo>
+                  <a:cubicBezTo>
+                    <a:pt x="66770" y="371475"/>
+                    <a:pt x="57340" y="371475"/>
+                    <a:pt x="47625" y="371475"/>
+                  </a:cubicBezTo>
+                  <a:cubicBezTo>
+                    <a:pt x="55131" y="316421"/>
+                    <a:pt x="81829" y="282959"/>
+                    <a:pt x="123825" y="247650"/>
+                  </a:cubicBezTo>
+                  <a:cubicBezTo>
+                    <a:pt x="148028" y="238849"/>
+                    <a:pt x="164354" y="238125"/>
+                    <a:pt x="190500" y="238125"/>
+                  </a:cubicBezTo>
+                  <a:cubicBezTo>
+                    <a:pt x="207245" y="195215"/>
+                    <a:pt x="213731" y="160344"/>
+                    <a:pt x="209550" y="114300"/>
+                  </a:cubicBezTo>
+                  <a:cubicBezTo>
+                    <a:pt x="204635" y="106242"/>
+                    <a:pt x="199730" y="98193"/>
+                    <a:pt x="194672" y="89897"/>
+                  </a:cubicBezTo>
+                  <a:cubicBezTo>
+                    <a:pt x="180975" y="66675"/>
+                    <a:pt x="180975" y="66675"/>
+                    <a:pt x="183356" y="35719"/>
+                  </a:cubicBezTo>
+                  <a:cubicBezTo>
+                    <a:pt x="190500" y="9525"/>
+                    <a:pt x="190500" y="9525"/>
+                    <a:pt x="200025" y="0"/>
+                  </a:cubicBezTo>
+                  <a:close/>
+                </a:path>
+              </a:pathLst>
+            </a:custGeom>
+            <a:solidFill>
+              <a:srgbClr val="0278C9"/>
+            </a:solidFill>
+            <a:ln>
+              <a:noFill/>
+            </a:ln>
+          </p:spPr>
+        </p:sp>
+        <p:sp>
+          <p:nvSpPr>
+            <p:cNvPr id="193" name="freeform-193"/>
+            <p:cNvSpPr/>
+            <p:nvPr/>
+          </p:nvSpPr>
+          <p:spPr>
+            <a:xfrm>
+              <a:off x="11350742" y="5372100"/>
+              <a:ext cx="317383" cy="407432"/>
+            </a:xfrm>
+            <a:custGeom>
+              <a:avLst/>
+              <a:gdLst/>
+              <a:ahLst/>
+              <a:cxnLst/>
+              <a:rect l="0" t="0" r="0" b="0"/>
+              <a:pathLst>
+                <a:path w="317383" h="407432">
+                  <a:moveTo>
+                    <a:pt x="12583" y="0"/>
+                  </a:moveTo>
+                  <a:cubicBezTo>
+                    <a:pt x="35795" y="8334"/>
+                    <a:pt x="35795" y="8334"/>
+                    <a:pt x="60208" y="28575"/>
+                  </a:cubicBezTo>
+                  <a:cubicBezTo>
+                    <a:pt x="65303" y="53369"/>
+                    <a:pt x="66761" y="76848"/>
+                    <a:pt x="67466" y="102137"/>
+                  </a:cubicBezTo>
+                  <a:cubicBezTo>
+                    <a:pt x="69733" y="123825"/>
+                    <a:pt x="69733" y="123825"/>
+                    <a:pt x="88783" y="142875"/>
+                  </a:cubicBezTo>
+                  <a:cubicBezTo>
+                    <a:pt x="88783" y="152305"/>
+                    <a:pt x="88783" y="161735"/>
+                    <a:pt x="88783" y="171450"/>
+                  </a:cubicBezTo>
+                  <a:cubicBezTo>
+                    <a:pt x="79353" y="171450"/>
+                    <a:pt x="69923" y="171450"/>
+                    <a:pt x="60208" y="171450"/>
+                  </a:cubicBezTo>
+                  <a:cubicBezTo>
+                    <a:pt x="63160" y="185147"/>
+                    <a:pt x="66142" y="198834"/>
+                    <a:pt x="69142" y="212522"/>
+                  </a:cubicBezTo>
+                  <a:cubicBezTo>
+                    <a:pt x="70799" y="220151"/>
+                    <a:pt x="72457" y="227781"/>
+                    <a:pt x="74162" y="235629"/>
+                  </a:cubicBezTo>
+                  <a:cubicBezTo>
+                    <a:pt x="79258" y="257175"/>
+                    <a:pt x="79258" y="257175"/>
+                    <a:pt x="88783" y="285750"/>
+                  </a:cubicBezTo>
+                  <a:cubicBezTo>
+                    <a:pt x="95107" y="285417"/>
+                    <a:pt x="101432" y="285083"/>
+                    <a:pt x="107947" y="284750"/>
+                  </a:cubicBezTo>
+                  <a:cubicBezTo>
+                    <a:pt x="159696" y="283159"/>
+                    <a:pt x="187900" y="285150"/>
+                    <a:pt x="231658" y="314325"/>
+                  </a:cubicBezTo>
+                  <a:cubicBezTo>
+                    <a:pt x="259937" y="322259"/>
+                    <a:pt x="288503" y="328031"/>
+                    <a:pt x="317383" y="333375"/>
+                  </a:cubicBezTo>
+                  <a:cubicBezTo>
+                    <a:pt x="314239" y="355378"/>
+                    <a:pt x="311096" y="377381"/>
+                    <a:pt x="307858" y="400050"/>
+                  </a:cubicBezTo>
+                  <a:cubicBezTo>
+                    <a:pt x="231610" y="407432"/>
+                    <a:pt x="187052" y="389992"/>
+                    <a:pt x="126883" y="342900"/>
+                  </a:cubicBezTo>
+                  <a:cubicBezTo>
+                    <a:pt x="63351" y="284512"/>
+                    <a:pt x="11659" y="211941"/>
+                    <a:pt x="3058" y="123825"/>
+                  </a:cubicBezTo>
+                  <a:cubicBezTo>
+                    <a:pt x="0" y="37757"/>
+                    <a:pt x="0" y="37757"/>
+                    <a:pt x="12583" y="0"/>
+                  </a:cubicBezTo>
+                  <a:close/>
+                </a:path>
+              </a:pathLst>
+            </a:custGeom>
+            <a:solidFill>
+              <a:srgbClr val="0B2012"/>
+            </a:solidFill>
+            <a:ln>
+              <a:noFill/>
+            </a:ln>
+          </p:spPr>
+        </p:sp>
+        <p:sp>
+          <p:nvSpPr>
+            <p:cNvPr id="194" name="freeform-194"/>
+            <p:cNvSpPr/>
+            <p:nvPr/>
+          </p:nvSpPr>
+          <p:spPr>
+            <a:xfrm>
+              <a:off x="11601450" y="5286375"/>
+              <a:ext cx="456648" cy="511064"/>
+            </a:xfrm>
+            <a:custGeom>
+              <a:avLst/>
+              <a:gdLst/>
+              <a:ahLst/>
+              <a:cxnLst/>
+              <a:rect l="0" t="0" r="0" b="0"/>
+              <a:pathLst>
+                <a:path w="456648" h="511064">
+                  <a:moveTo>
+                    <a:pt x="381000" y="0"/>
+                  </a:moveTo>
+                  <a:cubicBezTo>
+                    <a:pt x="390430" y="0"/>
+                    <a:pt x="399860" y="0"/>
+                    <a:pt x="409575" y="0"/>
+                  </a:cubicBezTo>
+                  <a:cubicBezTo>
+                    <a:pt x="443484" y="91221"/>
+                    <a:pt x="456648" y="193234"/>
+                    <a:pt x="419100" y="285750"/>
+                  </a:cubicBezTo>
+                  <a:cubicBezTo>
+                    <a:pt x="378085" y="372227"/>
+                    <a:pt x="318821" y="440817"/>
+                    <a:pt x="230391" y="480422"/>
+                  </a:cubicBezTo>
+                  <a:cubicBezTo>
+                    <a:pt x="155991" y="506606"/>
+                    <a:pt x="77048" y="511064"/>
+                    <a:pt x="0" y="495300"/>
+                  </a:cubicBezTo>
+                  <a:cubicBezTo>
+                    <a:pt x="0" y="492157"/>
+                    <a:pt x="0" y="489014"/>
+                    <a:pt x="0" y="485775"/>
+                  </a:cubicBezTo>
+                  <a:cubicBezTo>
+                    <a:pt x="6210" y="485423"/>
+                    <a:pt x="6210" y="485423"/>
+                    <a:pt x="37652" y="483613"/>
+                  </a:cubicBezTo>
+                  <a:cubicBezTo>
+                    <a:pt x="150076" y="475755"/>
+                    <a:pt x="255156" y="465115"/>
+                    <a:pt x="337547" y="379209"/>
+                  </a:cubicBezTo>
+                  <a:cubicBezTo>
+                    <a:pt x="350082" y="362064"/>
+                    <a:pt x="350082" y="362064"/>
+                    <a:pt x="361950" y="342900"/>
+                  </a:cubicBezTo>
+                  <a:cubicBezTo>
+                    <a:pt x="366551" y="335690"/>
+                    <a:pt x="371161" y="328489"/>
+                    <a:pt x="375904" y="321059"/>
+                  </a:cubicBezTo>
+                  <a:cubicBezTo>
+                    <a:pt x="418852" y="242411"/>
+                    <a:pt x="416147" y="163278"/>
+                    <a:pt x="409575" y="76200"/>
+                  </a:cubicBezTo>
+                  <a:cubicBezTo>
+                    <a:pt x="408003" y="71485"/>
+                    <a:pt x="408003" y="71485"/>
+                    <a:pt x="400050" y="47625"/>
+                  </a:cubicBezTo>
+                  <a:cubicBezTo>
+                    <a:pt x="387477" y="47625"/>
+                    <a:pt x="374904" y="47625"/>
+                    <a:pt x="361950" y="47625"/>
+                  </a:cubicBezTo>
+                  <a:cubicBezTo>
+                    <a:pt x="360378" y="46053"/>
+                    <a:pt x="360378" y="46053"/>
+                    <a:pt x="352425" y="38100"/>
+                  </a:cubicBezTo>
+                  <a:cubicBezTo>
+                    <a:pt x="346472" y="65484"/>
+                    <a:pt x="346472" y="65484"/>
+                    <a:pt x="342900" y="95250"/>
+                  </a:cubicBezTo>
+                  <a:cubicBezTo>
+                    <a:pt x="349187" y="101536"/>
+                    <a:pt x="355473" y="107823"/>
+                    <a:pt x="361950" y="114300"/>
+                  </a:cubicBezTo>
+                  <a:cubicBezTo>
+                    <a:pt x="358378" y="134541"/>
+                    <a:pt x="358378" y="134541"/>
+                    <a:pt x="352425" y="152400"/>
+                  </a:cubicBezTo>
+                  <a:cubicBezTo>
+                    <a:pt x="346138" y="152400"/>
+                    <a:pt x="339852" y="152400"/>
+                    <a:pt x="333375" y="152400"/>
+                  </a:cubicBezTo>
+                  <a:cubicBezTo>
+                    <a:pt x="333375" y="180689"/>
+                    <a:pt x="333375" y="208979"/>
+                    <a:pt x="333375" y="238125"/>
+                  </a:cubicBezTo>
+                  <a:cubicBezTo>
+                    <a:pt x="314411" y="241754"/>
+                    <a:pt x="295342" y="244916"/>
+                    <a:pt x="276225" y="247650"/>
+                  </a:cubicBezTo>
+                  <a:cubicBezTo>
+                    <a:pt x="266700" y="238125"/>
+                    <a:pt x="266700" y="238125"/>
+                    <a:pt x="265767" y="218446"/>
+                  </a:cubicBezTo>
+                  <a:cubicBezTo>
+                    <a:pt x="265881" y="210598"/>
+                    <a:pt x="265995" y="202749"/>
+                    <a:pt x="266109" y="194672"/>
+                  </a:cubicBezTo>
+                  <a:cubicBezTo>
+                    <a:pt x="266195" y="186795"/>
+                    <a:pt x="266281" y="178927"/>
+                    <a:pt x="266367" y="170821"/>
+                  </a:cubicBezTo>
+                  <a:cubicBezTo>
+                    <a:pt x="266471" y="164744"/>
+                    <a:pt x="266586" y="158658"/>
+                    <a:pt x="266700" y="152400"/>
+                  </a:cubicBezTo>
+                  <a:cubicBezTo>
+                    <a:pt x="263557" y="155543"/>
+                    <a:pt x="260413" y="158686"/>
+                    <a:pt x="257175" y="161925"/>
+                  </a:cubicBezTo>
+                  <a:cubicBezTo>
+                    <a:pt x="257985" y="181975"/>
+                    <a:pt x="259013" y="202016"/>
+                    <a:pt x="260147" y="222047"/>
+                  </a:cubicBezTo>
+                  <a:cubicBezTo>
+                    <a:pt x="260594" y="256203"/>
+                    <a:pt x="260594" y="256203"/>
+                    <a:pt x="257175" y="285750"/>
+                  </a:cubicBezTo>
+                  <a:cubicBezTo>
+                    <a:pt x="229191" y="308972"/>
+                    <a:pt x="229191" y="308972"/>
+                    <a:pt x="200025" y="323850"/>
+                  </a:cubicBezTo>
+                  <a:cubicBezTo>
+                    <a:pt x="191691" y="354806"/>
+                    <a:pt x="191691" y="354806"/>
+                    <a:pt x="190500" y="381000"/>
+                  </a:cubicBezTo>
+                  <a:cubicBezTo>
+                    <a:pt x="185785" y="379428"/>
+                    <a:pt x="185785" y="379428"/>
+                    <a:pt x="161925" y="371475"/>
+                  </a:cubicBezTo>
+                  <a:cubicBezTo>
+                    <a:pt x="179594" y="321250"/>
+                    <a:pt x="179594" y="321250"/>
+                    <a:pt x="190500" y="304800"/>
+                  </a:cubicBezTo>
+                  <a:cubicBezTo>
+                    <a:pt x="215389" y="293113"/>
+                    <a:pt x="215389" y="293113"/>
+                    <a:pt x="238125" y="285750"/>
+                  </a:cubicBezTo>
+                  <a:cubicBezTo>
+                    <a:pt x="237220" y="277254"/>
+                    <a:pt x="236306" y="268757"/>
+                    <a:pt x="235372" y="260004"/>
+                  </a:cubicBezTo>
+                  <a:cubicBezTo>
+                    <a:pt x="234315" y="248850"/>
+                    <a:pt x="233258" y="237706"/>
+                    <a:pt x="232172" y="226219"/>
+                  </a:cubicBezTo>
+                  <a:cubicBezTo>
+                    <a:pt x="231619" y="220694"/>
+                    <a:pt x="231619" y="220694"/>
+                    <a:pt x="228819" y="192729"/>
+                  </a:cubicBezTo>
+                  <a:cubicBezTo>
+                    <a:pt x="228600" y="162506"/>
+                    <a:pt x="231486" y="148752"/>
+                    <a:pt x="247650" y="123825"/>
+                  </a:cubicBezTo>
+                  <a:cubicBezTo>
+                    <a:pt x="260223" y="126968"/>
+                    <a:pt x="272796" y="130111"/>
+                    <a:pt x="285750" y="133350"/>
+                  </a:cubicBezTo>
+                  <a:cubicBezTo>
+                    <a:pt x="294799" y="168545"/>
+                    <a:pt x="294799" y="193405"/>
+                    <a:pt x="285750" y="228600"/>
+                  </a:cubicBezTo>
+                  <a:cubicBezTo>
+                    <a:pt x="295180" y="225457"/>
+                    <a:pt x="304610" y="222314"/>
+                    <a:pt x="314325" y="219075"/>
+                  </a:cubicBezTo>
+                  <a:cubicBezTo>
+                    <a:pt x="314325" y="193929"/>
+                    <a:pt x="314325" y="168783"/>
+                    <a:pt x="314325" y="142875"/>
+                  </a:cubicBezTo>
+                  <a:cubicBezTo>
+                    <a:pt x="323755" y="139732"/>
+                    <a:pt x="333185" y="136589"/>
+                    <a:pt x="342900" y="133350"/>
+                  </a:cubicBezTo>
+                  <a:cubicBezTo>
+                    <a:pt x="336613" y="123920"/>
+                    <a:pt x="330327" y="114490"/>
+                    <a:pt x="323850" y="104775"/>
+                  </a:cubicBezTo>
+                  <a:cubicBezTo>
+                    <a:pt x="320678" y="44453"/>
+                    <a:pt x="320678" y="44453"/>
+                    <a:pt x="333375" y="19050"/>
+                  </a:cubicBezTo>
+                  <a:cubicBezTo>
+                    <a:pt x="345948" y="19050"/>
+                    <a:pt x="358521" y="19050"/>
+                    <a:pt x="371475" y="19050"/>
+                  </a:cubicBezTo>
+                  <a:cubicBezTo>
+                    <a:pt x="374618" y="12764"/>
+                    <a:pt x="377762" y="6477"/>
+                    <a:pt x="381000" y="0"/>
+                  </a:cubicBezTo>
+                  <a:close/>
+                </a:path>
+              </a:pathLst>
+            </a:custGeom>
+            <a:solidFill>
+              <a:srgbClr val="071F1D"/>
+            </a:solidFill>
+            <a:ln>
+              <a:noFill/>
+            </a:ln>
+          </p:spPr>
+        </p:sp>
+        <p:sp>
+          <p:nvSpPr>
+            <p:cNvPr id="195" name="freeform-195"/>
+            <p:cNvSpPr/>
+            <p:nvPr/>
+          </p:nvSpPr>
+          <p:spPr>
+            <a:xfrm>
+              <a:off x="11601450" y="5286375"/>
+              <a:ext cx="440531" cy="504825"/>
+            </a:xfrm>
+            <a:custGeom>
+              <a:avLst/>
+              <a:gdLst/>
+              <a:ahLst/>
+              <a:cxnLst/>
+              <a:rect l="0" t="0" r="0" b="0"/>
+              <a:pathLst>
+                <a:path w="440531" h="504825">
+                  <a:moveTo>
+                    <a:pt x="400050" y="0"/>
+                  </a:moveTo>
+                  <a:cubicBezTo>
+                    <a:pt x="439722" y="39672"/>
+                    <a:pt x="439588" y="98965"/>
+                    <a:pt x="440531" y="152400"/>
+                  </a:cubicBezTo>
+                  <a:cubicBezTo>
+                    <a:pt x="438283" y="251889"/>
+                    <a:pt x="410023" y="327498"/>
+                    <a:pt x="342490" y="402650"/>
+                  </a:cubicBezTo>
+                  <a:cubicBezTo>
+                    <a:pt x="261957" y="479346"/>
+                    <a:pt x="176670" y="504206"/>
+                    <a:pt x="66675" y="504825"/>
+                  </a:cubicBezTo>
+                  <a:cubicBezTo>
+                    <a:pt x="43682" y="503120"/>
+                    <a:pt x="22631" y="499929"/>
+                    <a:pt x="0" y="495300"/>
+                  </a:cubicBezTo>
+                  <a:cubicBezTo>
+                    <a:pt x="0" y="492157"/>
+                    <a:pt x="0" y="489014"/>
+                    <a:pt x="0" y="485775"/>
+                  </a:cubicBezTo>
+                  <a:cubicBezTo>
+                    <a:pt x="6210" y="485423"/>
+                    <a:pt x="6210" y="485423"/>
+                    <a:pt x="37652" y="483613"/>
+                  </a:cubicBezTo>
+                  <a:cubicBezTo>
+                    <a:pt x="150076" y="475755"/>
+                    <a:pt x="255156" y="465115"/>
+                    <a:pt x="337547" y="379209"/>
+                  </a:cubicBezTo>
+                  <a:cubicBezTo>
+                    <a:pt x="350082" y="362064"/>
+                    <a:pt x="350082" y="362064"/>
+                    <a:pt x="361950" y="342900"/>
+                  </a:cubicBezTo>
+                  <a:cubicBezTo>
+                    <a:pt x="366551" y="335690"/>
+                    <a:pt x="371161" y="328489"/>
+                    <a:pt x="375904" y="321059"/>
+                  </a:cubicBezTo>
+                  <a:cubicBezTo>
+                    <a:pt x="418614" y="242859"/>
+                    <a:pt x="417786" y="162887"/>
+                    <a:pt x="409575" y="76200"/>
+                  </a:cubicBezTo>
+                  <a:cubicBezTo>
+                    <a:pt x="403422" y="57083"/>
+                    <a:pt x="397126" y="38014"/>
+                    <a:pt x="390525" y="19050"/>
+                  </a:cubicBezTo>
+                  <a:cubicBezTo>
+                    <a:pt x="393668" y="12764"/>
+                    <a:pt x="396812" y="6477"/>
+                    <a:pt x="400050" y="0"/>
+                  </a:cubicBezTo>
+                  <a:close/>
+                </a:path>
+              </a:pathLst>
+            </a:custGeom>
+            <a:solidFill>
+              <a:srgbClr val="1B2831"/>
+            </a:solidFill>
+            <a:ln>
+              <a:noFill/>
+            </a:ln>
+          </p:spPr>
+        </p:sp>
+        <p:sp>
+          <p:nvSpPr>
+            <p:cNvPr id="196" name="freeform-196"/>
+            <p:cNvSpPr/>
+            <p:nvPr/>
+          </p:nvSpPr>
+          <p:spPr>
+            <a:xfrm>
+              <a:off x="11858625" y="5200650"/>
+              <a:ext cx="114300" cy="314325"/>
+            </a:xfrm>
+            <a:custGeom>
+              <a:avLst/>
+              <a:gdLst/>
+              <a:ahLst/>
+              <a:cxnLst/>
+              <a:rect l="0" t="0" r="0" b="0"/>
+              <a:pathLst>
+                <a:path w="114300" h="314325">
+                  <a:moveTo>
+                    <a:pt x="57150" y="0"/>
+                  </a:moveTo>
+                  <a:cubicBezTo>
+                    <a:pt x="110471" y="50597"/>
+                    <a:pt x="110471" y="50597"/>
+                    <a:pt x="114300" y="95250"/>
+                  </a:cubicBezTo>
+                  <a:cubicBezTo>
+                    <a:pt x="104870" y="98393"/>
+                    <a:pt x="95440" y="101536"/>
+                    <a:pt x="85725" y="104775"/>
+                  </a:cubicBezTo>
+                  <a:cubicBezTo>
+                    <a:pt x="71485" y="133255"/>
+                    <a:pt x="75095" y="159068"/>
+                    <a:pt x="76200" y="190500"/>
+                  </a:cubicBezTo>
+                  <a:cubicBezTo>
+                    <a:pt x="79343" y="199930"/>
+                    <a:pt x="82487" y="209360"/>
+                    <a:pt x="85725" y="219075"/>
+                  </a:cubicBezTo>
+                  <a:cubicBezTo>
+                    <a:pt x="79438" y="222218"/>
+                    <a:pt x="73152" y="225361"/>
+                    <a:pt x="66675" y="228600"/>
+                  </a:cubicBezTo>
+                  <a:cubicBezTo>
+                    <a:pt x="66675" y="253746"/>
+                    <a:pt x="66675" y="278892"/>
+                    <a:pt x="66675" y="304800"/>
+                  </a:cubicBezTo>
+                  <a:cubicBezTo>
+                    <a:pt x="60388" y="306372"/>
+                    <a:pt x="60388" y="306372"/>
+                    <a:pt x="28575" y="314325"/>
+                  </a:cubicBezTo>
+                  <a:cubicBezTo>
+                    <a:pt x="28908" y="308467"/>
+                    <a:pt x="29242" y="302609"/>
+                    <a:pt x="29575" y="296580"/>
+                  </a:cubicBezTo>
+                  <a:cubicBezTo>
+                    <a:pt x="29842" y="288874"/>
+                    <a:pt x="30099" y="281178"/>
+                    <a:pt x="30366" y="273253"/>
+                  </a:cubicBezTo>
+                  <a:cubicBezTo>
+                    <a:pt x="30690" y="265624"/>
+                    <a:pt x="31023" y="257994"/>
+                    <a:pt x="31366" y="250146"/>
+                  </a:cubicBezTo>
+                  <a:cubicBezTo>
+                    <a:pt x="27984" y="224038"/>
+                    <a:pt x="20060" y="216294"/>
+                    <a:pt x="0" y="200025"/>
+                  </a:cubicBezTo>
+                  <a:cubicBezTo>
+                    <a:pt x="6287" y="196882"/>
+                    <a:pt x="12573" y="193739"/>
+                    <a:pt x="19050" y="190500"/>
+                  </a:cubicBezTo>
+                  <a:cubicBezTo>
+                    <a:pt x="38843" y="151581"/>
+                    <a:pt x="43815" y="111300"/>
+                    <a:pt x="48816" y="68466"/>
+                  </a:cubicBezTo>
+                  <a:cubicBezTo>
+                    <a:pt x="49635" y="61865"/>
+                    <a:pt x="50463" y="55264"/>
+                    <a:pt x="51311" y="48463"/>
+                  </a:cubicBezTo>
+                  <a:cubicBezTo>
+                    <a:pt x="53311" y="32318"/>
+                    <a:pt x="55235" y="16154"/>
+                    <a:pt x="57150" y="0"/>
+                  </a:cubicBezTo>
+                  <a:close/>
+                </a:path>
+              </a:pathLst>
+            </a:custGeom>
+            <a:solidFill>
+              <a:srgbClr val="468901"/>
+            </a:solidFill>
+            <a:ln>
+              <a:noFill/>
+            </a:ln>
+          </p:spPr>
+        </p:sp>
+        <p:sp>
+          <p:nvSpPr>
+            <p:cNvPr id="197" name="freeform-197"/>
+            <p:cNvSpPr/>
+            <p:nvPr/>
+          </p:nvSpPr>
+          <p:spPr>
+            <a:xfrm>
+              <a:off x="11506200" y="5581650"/>
+              <a:ext cx="552450" cy="264652"/>
+            </a:xfrm>
+            <a:custGeom>
+              <a:avLst/>
+              <a:gdLst/>
+              <a:ahLst/>
+              <a:cxnLst/>
+              <a:rect l="0" t="0" r="0" b="0"/>
+              <a:pathLst>
+                <a:path w="552450" h="264652">
+                  <a:moveTo>
+                    <a:pt x="533400" y="0"/>
+                  </a:moveTo>
+                  <a:cubicBezTo>
+                    <a:pt x="539687" y="0"/>
+                    <a:pt x="545973" y="0"/>
+                    <a:pt x="552450" y="0"/>
+                  </a:cubicBezTo>
+                  <a:cubicBezTo>
+                    <a:pt x="524970" y="94202"/>
+                    <a:pt x="462553" y="157058"/>
+                    <a:pt x="378838" y="205683"/>
+                  </a:cubicBezTo>
+                  <a:cubicBezTo>
+                    <a:pt x="284959" y="253279"/>
+                    <a:pt x="182690" y="264652"/>
+                    <a:pt x="79734" y="239058"/>
+                  </a:cubicBezTo>
+                  <a:cubicBezTo>
+                    <a:pt x="52692" y="230086"/>
+                    <a:pt x="26289" y="220513"/>
+                    <a:pt x="0" y="209550"/>
+                  </a:cubicBezTo>
+                  <a:cubicBezTo>
+                    <a:pt x="0" y="203264"/>
+                    <a:pt x="0" y="196977"/>
+                    <a:pt x="0" y="190500"/>
+                  </a:cubicBezTo>
+                  <a:cubicBezTo>
+                    <a:pt x="25508" y="195005"/>
+                    <a:pt x="48530" y="200368"/>
+                    <a:pt x="72781" y="209664"/>
+                  </a:cubicBezTo>
+                  <a:cubicBezTo>
+                    <a:pt x="166526" y="237239"/>
+                    <a:pt x="278349" y="229838"/>
+                    <a:pt x="365636" y="186738"/>
+                  </a:cubicBezTo>
+                  <a:cubicBezTo>
+                    <a:pt x="437283" y="142723"/>
+                    <a:pt x="482822" y="92373"/>
+                    <a:pt x="522056" y="18155"/>
+                  </a:cubicBezTo>
+                  <a:cubicBezTo>
+                    <a:pt x="525799" y="12163"/>
+                    <a:pt x="529542" y="6172"/>
+                    <a:pt x="533400" y="0"/>
+                  </a:cubicBezTo>
+                  <a:close/>
+                </a:path>
+              </a:pathLst>
+            </a:custGeom>
+            <a:solidFill>
+              <a:srgbClr val="3B3B3B"/>
+            </a:solidFill>
+            <a:ln>
+              <a:noFill/>
+            </a:ln>
+          </p:spPr>
+        </p:sp>
+        <p:sp>
+          <p:nvSpPr>
+            <p:cNvPr id="198" name="freeform-198"/>
+            <p:cNvSpPr/>
+            <p:nvPr/>
+          </p:nvSpPr>
+          <p:spPr>
+            <a:xfrm>
+              <a:off x="11782425" y="5429250"/>
+              <a:ext cx="193777" cy="257175"/>
+            </a:xfrm>
+            <a:custGeom>
+              <a:avLst/>
+              <a:gdLst/>
+              <a:ahLst/>
+              <a:cxnLst/>
+              <a:rect l="0" t="0" r="0" b="0"/>
+              <a:pathLst>
+                <a:path w="193777" h="257175">
+                  <a:moveTo>
+                    <a:pt x="85725" y="0"/>
+                  </a:moveTo>
+                  <a:cubicBezTo>
+                    <a:pt x="95631" y="32194"/>
+                    <a:pt x="96012" y="61703"/>
+                    <a:pt x="95250" y="95250"/>
+                  </a:cubicBezTo>
+                  <a:cubicBezTo>
+                    <a:pt x="114110" y="95250"/>
+                    <a:pt x="132969" y="95250"/>
+                    <a:pt x="152400" y="95250"/>
+                  </a:cubicBezTo>
+                  <a:cubicBezTo>
+                    <a:pt x="152400" y="66961"/>
+                    <a:pt x="152400" y="38671"/>
+                    <a:pt x="152400" y="9525"/>
+                  </a:cubicBezTo>
+                  <a:cubicBezTo>
+                    <a:pt x="164973" y="6382"/>
+                    <a:pt x="177546" y="3239"/>
+                    <a:pt x="190500" y="0"/>
+                  </a:cubicBezTo>
+                  <a:cubicBezTo>
+                    <a:pt x="193777" y="53521"/>
+                    <a:pt x="189948" y="88154"/>
+                    <a:pt x="161925" y="133350"/>
+                  </a:cubicBezTo>
+                  <a:cubicBezTo>
+                    <a:pt x="151705" y="134531"/>
+                    <a:pt x="141494" y="135712"/>
+                    <a:pt x="130969" y="136922"/>
+                  </a:cubicBezTo>
+                  <a:cubicBezTo>
+                    <a:pt x="88687" y="143970"/>
+                    <a:pt x="84172" y="151676"/>
+                    <a:pt x="58941" y="184547"/>
+                  </a:cubicBezTo>
+                  <a:cubicBezTo>
+                    <a:pt x="48597" y="199072"/>
+                    <a:pt x="38452" y="213751"/>
+                    <a:pt x="28575" y="228600"/>
+                  </a:cubicBezTo>
+                  <a:cubicBezTo>
+                    <a:pt x="22288" y="238030"/>
+                    <a:pt x="16002" y="247460"/>
+                    <a:pt x="9525" y="257175"/>
+                  </a:cubicBezTo>
+                  <a:cubicBezTo>
+                    <a:pt x="0" y="238125"/>
+                    <a:pt x="0" y="238125"/>
+                    <a:pt x="5953" y="205378"/>
+                  </a:cubicBezTo>
+                  <a:cubicBezTo>
+                    <a:pt x="19050" y="171450"/>
+                    <a:pt x="19050" y="171450"/>
+                    <a:pt x="43567" y="158953"/>
+                  </a:cubicBezTo>
+                  <a:cubicBezTo>
+                    <a:pt x="51197" y="153648"/>
+                    <a:pt x="58817" y="148342"/>
+                    <a:pt x="66675" y="142875"/>
+                  </a:cubicBezTo>
+                  <a:cubicBezTo>
+                    <a:pt x="70656" y="113671"/>
+                    <a:pt x="70656" y="113671"/>
+                    <a:pt x="68466" y="80372"/>
+                  </a:cubicBezTo>
+                  <a:cubicBezTo>
+                    <a:pt x="67256" y="59950"/>
+                    <a:pt x="66542" y="39500"/>
+                    <a:pt x="66675" y="19050"/>
+                  </a:cubicBezTo>
+                  <a:cubicBezTo>
+                    <a:pt x="72962" y="12764"/>
+                    <a:pt x="79248" y="6477"/>
+                    <a:pt x="85725" y="0"/>
+                  </a:cubicBezTo>
+                  <a:close/>
+                </a:path>
+              </a:pathLst>
+            </a:custGeom>
+            <a:solidFill>
+              <a:srgbClr val="037ED3"/>
+            </a:solidFill>
+            <a:ln>
+              <a:noFill/>
+            </a:ln>
+          </p:spPr>
+        </p:sp>
+        <p:sp>
+          <p:nvSpPr>
+            <p:cNvPr id="199" name="freeform-199"/>
+            <p:cNvSpPr/>
+            <p:nvPr/>
+          </p:nvSpPr>
+          <p:spPr>
+            <a:xfrm>
+              <a:off x="11582400" y="5353050"/>
+              <a:ext cx="200025" cy="333375"/>
+            </a:xfrm>
+            <a:custGeom>
+              <a:avLst/>
+              <a:gdLst/>
+              <a:ahLst/>
+              <a:cxnLst/>
+              <a:rect l="0" t="0" r="0" b="0"/>
+              <a:pathLst>
+                <a:path w="200025" h="333375">
+                  <a:moveTo>
+                    <a:pt x="66675" y="0"/>
+                  </a:moveTo>
+                  <a:cubicBezTo>
+                    <a:pt x="66675" y="12573"/>
+                    <a:pt x="66675" y="25146"/>
+                    <a:pt x="66675" y="38100"/>
+                  </a:cubicBezTo>
+                  <a:cubicBezTo>
+                    <a:pt x="72962" y="38100"/>
+                    <a:pt x="79248" y="38100"/>
+                    <a:pt x="85725" y="38100"/>
+                  </a:cubicBezTo>
+                  <a:cubicBezTo>
+                    <a:pt x="95098" y="76771"/>
+                    <a:pt x="95250" y="112738"/>
+                    <a:pt x="95250" y="152400"/>
+                  </a:cubicBezTo>
+                  <a:cubicBezTo>
+                    <a:pt x="98393" y="158686"/>
+                    <a:pt x="101537" y="164973"/>
+                    <a:pt x="104775" y="171450"/>
+                  </a:cubicBezTo>
+                  <a:cubicBezTo>
+                    <a:pt x="105156" y="193672"/>
+                    <a:pt x="105185" y="215903"/>
+                    <a:pt x="104775" y="238125"/>
+                  </a:cubicBezTo>
+                  <a:cubicBezTo>
+                    <a:pt x="123635" y="234982"/>
+                    <a:pt x="142494" y="231839"/>
+                    <a:pt x="161925" y="228600"/>
+                  </a:cubicBezTo>
+                  <a:cubicBezTo>
+                    <a:pt x="180975" y="282178"/>
+                    <a:pt x="180975" y="282178"/>
+                    <a:pt x="180975" y="314325"/>
+                  </a:cubicBezTo>
+                  <a:cubicBezTo>
+                    <a:pt x="187262" y="314325"/>
+                    <a:pt x="193548" y="314325"/>
+                    <a:pt x="200025" y="314325"/>
+                  </a:cubicBezTo>
+                  <a:cubicBezTo>
+                    <a:pt x="200025" y="320611"/>
+                    <a:pt x="200025" y="326898"/>
+                    <a:pt x="200025" y="333375"/>
+                  </a:cubicBezTo>
+                  <a:cubicBezTo>
+                    <a:pt x="195310" y="331803"/>
+                    <a:pt x="195310" y="331803"/>
+                    <a:pt x="171450" y="323850"/>
+                  </a:cubicBezTo>
+                  <a:cubicBezTo>
+                    <a:pt x="160134" y="289912"/>
+                    <a:pt x="160134" y="289912"/>
+                    <a:pt x="152400" y="257175"/>
+                  </a:cubicBezTo>
+                  <a:cubicBezTo>
+                    <a:pt x="143170" y="257375"/>
+                    <a:pt x="133931" y="257566"/>
+                    <a:pt x="124416" y="257766"/>
+                  </a:cubicBezTo>
+                  <a:cubicBezTo>
+                    <a:pt x="95250" y="257175"/>
+                    <a:pt x="95250" y="257175"/>
+                    <a:pt x="85725" y="247650"/>
+                  </a:cubicBezTo>
+                  <a:cubicBezTo>
+                    <a:pt x="82667" y="225571"/>
+                    <a:pt x="80848" y="203473"/>
+                    <a:pt x="78877" y="181270"/>
+                  </a:cubicBezTo>
+                  <a:cubicBezTo>
+                    <a:pt x="76200" y="161925"/>
+                    <a:pt x="76200" y="161925"/>
+                    <a:pt x="66675" y="152400"/>
+                  </a:cubicBezTo>
+                  <a:cubicBezTo>
+                    <a:pt x="66284" y="130178"/>
+                    <a:pt x="66275" y="107947"/>
+                    <a:pt x="66675" y="85725"/>
+                  </a:cubicBezTo>
+                  <a:cubicBezTo>
+                    <a:pt x="62055" y="84544"/>
+                    <a:pt x="62055" y="84544"/>
+                    <a:pt x="38691" y="78581"/>
+                  </a:cubicBezTo>
+                  <a:cubicBezTo>
+                    <a:pt x="29070" y="74647"/>
+                    <a:pt x="19441" y="70723"/>
+                    <a:pt x="9525" y="66675"/>
+                  </a:cubicBezTo>
+                  <a:cubicBezTo>
+                    <a:pt x="1191" y="46434"/>
+                    <a:pt x="1191" y="46434"/>
+                    <a:pt x="0" y="28575"/>
+                  </a:cubicBezTo>
+                  <a:cubicBezTo>
+                    <a:pt x="45244" y="0"/>
+                    <a:pt x="45244" y="0"/>
+                    <a:pt x="66675" y="0"/>
+                  </a:cubicBezTo>
+                  <a:close/>
+                </a:path>
+              </a:pathLst>
+            </a:custGeom>
+            <a:solidFill>
+              <a:srgbClr val="0C2B22"/>
+            </a:solidFill>
+            <a:ln>
+              <a:noFill/>
+            </a:ln>
+          </p:spPr>
+        </p:sp>
+        <p:sp>
+          <p:nvSpPr>
+            <p:cNvPr id="200" name="freeform-200"/>
+            <p:cNvSpPr/>
+            <p:nvPr/>
+          </p:nvSpPr>
+          <p:spPr>
+            <a:xfrm>
+              <a:off x="11715750" y="5591175"/>
+              <a:ext cx="314325" cy="219075"/>
+            </a:xfrm>
+            <a:custGeom>
+              <a:avLst/>
+              <a:gdLst/>
+              <a:ahLst/>
+              <a:cxnLst/>
+              <a:rect l="0" t="0" r="0" b="0"/>
+              <a:pathLst>
+                <a:path w="314325" h="219075">
+                  <a:moveTo>
+                    <a:pt x="285750" y="0"/>
+                  </a:moveTo>
+                  <a:cubicBezTo>
+                    <a:pt x="295180" y="3143"/>
+                    <a:pt x="304610" y="6286"/>
+                    <a:pt x="314325" y="9525"/>
+                  </a:cubicBezTo>
+                  <a:cubicBezTo>
+                    <a:pt x="286226" y="90773"/>
+                    <a:pt x="225457" y="147780"/>
+                    <a:pt x="150019" y="186328"/>
+                  </a:cubicBezTo>
+                  <a:cubicBezTo>
+                    <a:pt x="115957" y="202235"/>
+                    <a:pt x="84734" y="213046"/>
+                    <a:pt x="47625" y="219075"/>
+                  </a:cubicBezTo>
+                  <a:cubicBezTo>
+                    <a:pt x="47625" y="212789"/>
+                    <a:pt x="47625" y="206502"/>
+                    <a:pt x="47625" y="200025"/>
+                  </a:cubicBezTo>
+                  <a:cubicBezTo>
+                    <a:pt x="31909" y="200025"/>
+                    <a:pt x="16193" y="200025"/>
+                    <a:pt x="0" y="200025"/>
+                  </a:cubicBezTo>
+                  <a:cubicBezTo>
+                    <a:pt x="0" y="196882"/>
+                    <a:pt x="0" y="193739"/>
+                    <a:pt x="0" y="190500"/>
+                  </a:cubicBezTo>
+                  <a:cubicBezTo>
+                    <a:pt x="5772" y="189681"/>
+                    <a:pt x="11544" y="188852"/>
+                    <a:pt x="17488" y="188004"/>
+                  </a:cubicBezTo>
+                  <a:cubicBezTo>
+                    <a:pt x="126530" y="169726"/>
+                    <a:pt x="200949" y="128187"/>
+                    <a:pt x="266700" y="38100"/>
+                  </a:cubicBezTo>
+                  <a:cubicBezTo>
+                    <a:pt x="273396" y="25584"/>
+                    <a:pt x="279883" y="12935"/>
+                    <a:pt x="285750" y="0"/>
+                  </a:cubicBezTo>
+                  <a:close/>
+                </a:path>
+              </a:pathLst>
+            </a:custGeom>
+            <a:solidFill>
+              <a:srgbClr val="E9E9E9"/>
+            </a:solidFill>
+            <a:ln>
+              <a:noFill/>
+            </a:ln>
+          </p:spPr>
+        </p:sp>
+        <p:sp>
+          <p:nvSpPr>
+            <p:cNvPr id="201" name="freeform-201"/>
+            <p:cNvSpPr/>
+            <p:nvPr/>
+          </p:nvSpPr>
+          <p:spPr>
+            <a:xfrm>
+              <a:off x="11801470" y="5562600"/>
+              <a:ext cx="142875" cy="123825"/>
+            </a:xfrm>
+            <a:custGeom>
+              <a:avLst/>
+              <a:gdLst/>
+              <a:ahLst/>
+              <a:cxnLst/>
+              <a:rect l="0" t="0" r="0" b="0"/>
+              <a:pathLst>
+                <a:path w="142875" h="123825">
+                  <a:moveTo>
+                    <a:pt x="113709" y="0"/>
+                  </a:moveTo>
+                  <a:cubicBezTo>
+                    <a:pt x="123339" y="3143"/>
+                    <a:pt x="132959" y="6286"/>
+                    <a:pt x="142875" y="9525"/>
+                  </a:cubicBezTo>
+                  <a:cubicBezTo>
+                    <a:pt x="142875" y="22098"/>
+                    <a:pt x="142875" y="34671"/>
+                    <a:pt x="142875" y="47625"/>
+                  </a:cubicBezTo>
+                  <a:cubicBezTo>
+                    <a:pt x="136598" y="47625"/>
+                    <a:pt x="130312" y="47625"/>
+                    <a:pt x="123825" y="47625"/>
+                  </a:cubicBezTo>
+                  <a:cubicBezTo>
+                    <a:pt x="123825" y="60198"/>
+                    <a:pt x="123825" y="72771"/>
+                    <a:pt x="123825" y="85725"/>
+                  </a:cubicBezTo>
+                  <a:cubicBezTo>
+                    <a:pt x="108118" y="82582"/>
+                    <a:pt x="92402" y="79439"/>
+                    <a:pt x="76200" y="76200"/>
+                  </a:cubicBezTo>
+                  <a:cubicBezTo>
+                    <a:pt x="73066" y="85630"/>
+                    <a:pt x="69923" y="95060"/>
+                    <a:pt x="66675" y="104775"/>
+                  </a:cubicBezTo>
+                  <a:cubicBezTo>
+                    <a:pt x="41891" y="120472"/>
+                    <a:pt x="29889" y="123825"/>
+                    <a:pt x="0" y="123825"/>
+                  </a:cubicBezTo>
+                  <a:cubicBezTo>
+                    <a:pt x="8801" y="59569"/>
+                    <a:pt x="45072" y="0"/>
+                    <a:pt x="113709" y="0"/>
+                  </a:cubicBezTo>
+                  <a:close/>
+                </a:path>
+              </a:pathLst>
+            </a:custGeom>
+            <a:solidFill>
+              <a:srgbClr val="071C17"/>
+            </a:solidFill>
+            <a:ln>
+              <a:noFill/>
+            </a:ln>
+          </p:spPr>
+        </p:sp>
+        <p:sp>
+          <p:nvSpPr>
+            <p:cNvPr id="202" name="freeform-202"/>
+            <p:cNvSpPr/>
+            <p:nvPr/>
+          </p:nvSpPr>
+          <p:spPr>
+            <a:xfrm>
+              <a:off x="11534775" y="5082969"/>
+              <a:ext cx="276225" cy="127206"/>
+            </a:xfrm>
+            <a:custGeom>
+              <a:avLst/>
+              <a:gdLst/>
+              <a:ahLst/>
+              <a:cxnLst/>
+              <a:rect l="0" t="0" r="0" b="0"/>
+              <a:pathLst>
+                <a:path w="276225" h="127206">
+                  <a:moveTo>
+                    <a:pt x="276225" y="31956"/>
+                  </a:moveTo>
+                  <a:cubicBezTo>
+                    <a:pt x="273082" y="38243"/>
+                    <a:pt x="269938" y="44529"/>
+                    <a:pt x="266700" y="51006"/>
+                  </a:cubicBezTo>
+                  <a:cubicBezTo>
+                    <a:pt x="260413" y="49435"/>
+                    <a:pt x="254127" y="47863"/>
+                    <a:pt x="247650" y="46244"/>
+                  </a:cubicBezTo>
+                  <a:cubicBezTo>
+                    <a:pt x="211198" y="40167"/>
+                    <a:pt x="179899" y="39091"/>
+                    <a:pt x="142875" y="41481"/>
+                  </a:cubicBezTo>
+                  <a:cubicBezTo>
+                    <a:pt x="127997" y="54578"/>
+                    <a:pt x="127997" y="54578"/>
+                    <a:pt x="114300" y="70056"/>
+                  </a:cubicBezTo>
+                  <a:cubicBezTo>
+                    <a:pt x="108995" y="71533"/>
+                    <a:pt x="108995" y="71533"/>
+                    <a:pt x="82153" y="78991"/>
+                  </a:cubicBezTo>
+                  <a:cubicBezTo>
+                    <a:pt x="46406" y="89468"/>
+                    <a:pt x="27270" y="102413"/>
+                    <a:pt x="0" y="127206"/>
+                  </a:cubicBezTo>
+                  <a:cubicBezTo>
+                    <a:pt x="16669" y="62913"/>
+                    <a:pt x="16669" y="62913"/>
+                    <a:pt x="38100" y="41481"/>
+                  </a:cubicBezTo>
+                  <a:cubicBezTo>
+                    <a:pt x="113738" y="0"/>
+                    <a:pt x="196339" y="3553"/>
+                    <a:pt x="276225" y="31956"/>
+                  </a:cubicBezTo>
+                  <a:close/>
+                </a:path>
+              </a:pathLst>
+            </a:custGeom>
+            <a:solidFill>
+              <a:srgbClr val="2D3939"/>
+            </a:solidFill>
+            <a:ln>
+              <a:noFill/>
+            </a:ln>
+          </p:spPr>
+        </p:sp>
+        <p:sp>
+          <p:nvSpPr>
+            <p:cNvPr id="203" name="freeform-203"/>
+            <p:cNvSpPr/>
+            <p:nvPr/>
+          </p:nvSpPr>
+          <p:spPr>
+            <a:xfrm>
+              <a:off x="11341160" y="5372100"/>
+              <a:ext cx="79315" cy="200025"/>
+            </a:xfrm>
+            <a:custGeom>
+              <a:avLst/>
+              <a:gdLst/>
+              <a:ahLst/>
+              <a:cxnLst/>
+              <a:rect l="0" t="0" r="0" b="0"/>
+              <a:pathLst>
+                <a:path w="79315" h="200025">
+                  <a:moveTo>
+                    <a:pt x="22165" y="0"/>
+                  </a:moveTo>
+                  <a:cubicBezTo>
+                    <a:pt x="40805" y="5991"/>
+                    <a:pt x="40805" y="5991"/>
+                    <a:pt x="60265" y="19050"/>
+                  </a:cubicBezTo>
+                  <a:cubicBezTo>
+                    <a:pt x="65732" y="44910"/>
+                    <a:pt x="65732" y="44910"/>
+                    <a:pt x="66818" y="75609"/>
+                  </a:cubicBezTo>
+                  <a:cubicBezTo>
+                    <a:pt x="68161" y="107385"/>
+                    <a:pt x="69228" y="131655"/>
+                    <a:pt x="79315" y="161925"/>
+                  </a:cubicBezTo>
+                  <a:cubicBezTo>
+                    <a:pt x="73028" y="161925"/>
+                    <a:pt x="66742" y="161925"/>
+                    <a:pt x="60265" y="161925"/>
+                  </a:cubicBezTo>
+                  <a:cubicBezTo>
+                    <a:pt x="60265" y="174498"/>
+                    <a:pt x="60265" y="187071"/>
+                    <a:pt x="60265" y="200025"/>
+                  </a:cubicBezTo>
+                  <a:cubicBezTo>
+                    <a:pt x="50835" y="200025"/>
+                    <a:pt x="41405" y="200025"/>
+                    <a:pt x="31690" y="200025"/>
+                  </a:cubicBezTo>
+                  <a:cubicBezTo>
+                    <a:pt x="12221" y="134312"/>
+                    <a:pt x="0" y="66485"/>
+                    <a:pt x="22165" y="0"/>
+                  </a:cubicBezTo>
+                  <a:close/>
+                </a:path>
+              </a:pathLst>
+            </a:custGeom>
+            <a:solidFill>
+              <a:srgbClr val="16250B"/>
+            </a:solidFill>
+            <a:ln>
+              <a:noFill/>
+            </a:ln>
+          </p:spPr>
+        </p:sp>
+        <p:sp>
+          <p:nvSpPr>
+            <p:cNvPr id="204" name="freeform-204"/>
+            <p:cNvSpPr/>
+            <p:nvPr/>
+          </p:nvSpPr>
+          <p:spPr>
+            <a:xfrm>
+              <a:off x="11753850" y="5610225"/>
+              <a:ext cx="190500" cy="154219"/>
+            </a:xfrm>
+            <a:custGeom>
+              <a:avLst/>
+              <a:gdLst/>
+              <a:ahLst/>
+              <a:cxnLst/>
+              <a:rect l="0" t="0" r="0" b="0"/>
+              <a:pathLst>
+                <a:path w="190500" h="154219">
+                  <a:moveTo>
+                    <a:pt x="171450" y="0"/>
+                  </a:moveTo>
+                  <a:cubicBezTo>
+                    <a:pt x="182166" y="16669"/>
+                    <a:pt x="182166" y="16669"/>
+                    <a:pt x="190500" y="38100"/>
+                  </a:cubicBezTo>
+                  <a:cubicBezTo>
+                    <a:pt x="178603" y="72342"/>
+                    <a:pt x="160363" y="86716"/>
+                    <a:pt x="130378" y="105966"/>
+                  </a:cubicBezTo>
+                  <a:cubicBezTo>
+                    <a:pt x="123139" y="110709"/>
+                    <a:pt x="115910" y="115443"/>
+                    <a:pt x="108461" y="120329"/>
+                  </a:cubicBezTo>
+                  <a:cubicBezTo>
+                    <a:pt x="49301" y="154219"/>
+                    <a:pt x="49301" y="154219"/>
+                    <a:pt x="16078" y="148828"/>
+                  </a:cubicBezTo>
+                  <a:cubicBezTo>
+                    <a:pt x="10773" y="146866"/>
+                    <a:pt x="5467" y="144904"/>
+                    <a:pt x="0" y="142875"/>
+                  </a:cubicBezTo>
+                  <a:cubicBezTo>
+                    <a:pt x="6191" y="139084"/>
+                    <a:pt x="12373" y="135284"/>
+                    <a:pt x="18755" y="131378"/>
+                  </a:cubicBezTo>
+                  <a:cubicBezTo>
+                    <a:pt x="26708" y="126330"/>
+                    <a:pt x="34661" y="121282"/>
+                    <a:pt x="42862" y="116091"/>
+                  </a:cubicBezTo>
+                  <a:cubicBezTo>
+                    <a:pt x="50816" y="111109"/>
+                    <a:pt x="58779" y="106137"/>
+                    <a:pt x="66970" y="101013"/>
+                  </a:cubicBezTo>
+                  <a:cubicBezTo>
+                    <a:pt x="73162" y="95974"/>
+                    <a:pt x="79353" y="90926"/>
+                    <a:pt x="85725" y="85725"/>
+                  </a:cubicBezTo>
+                  <a:cubicBezTo>
+                    <a:pt x="85725" y="76295"/>
+                    <a:pt x="85725" y="66865"/>
+                    <a:pt x="85725" y="57150"/>
+                  </a:cubicBezTo>
+                  <a:cubicBezTo>
+                    <a:pt x="95155" y="54007"/>
+                    <a:pt x="104585" y="50864"/>
+                    <a:pt x="114300" y="47625"/>
+                  </a:cubicBezTo>
+                  <a:cubicBezTo>
+                    <a:pt x="117443" y="41339"/>
+                    <a:pt x="120587" y="35052"/>
+                    <a:pt x="123825" y="28575"/>
+                  </a:cubicBezTo>
+                  <a:cubicBezTo>
+                    <a:pt x="139541" y="31718"/>
+                    <a:pt x="155257" y="34861"/>
+                    <a:pt x="171450" y="38100"/>
+                  </a:cubicBezTo>
+                  <a:cubicBezTo>
+                    <a:pt x="171450" y="25527"/>
+                    <a:pt x="171450" y="12954"/>
+                    <a:pt x="171450" y="0"/>
+                  </a:cubicBezTo>
+                  <a:close/>
+                </a:path>
+              </a:pathLst>
+            </a:custGeom>
+            <a:solidFill>
+              <a:srgbClr val="0276C5"/>
+            </a:solidFill>
+            <a:ln>
+              <a:noFill/>
+            </a:ln>
+          </p:spPr>
+        </p:sp>
+        <p:sp>
+          <p:nvSpPr>
+            <p:cNvPr id="205" name="freeform-205"/>
+            <p:cNvSpPr/>
+            <p:nvPr/>
+          </p:nvSpPr>
+          <p:spPr>
+            <a:xfrm>
+              <a:off x="11449050" y="5162550"/>
+              <a:ext cx="190500" cy="152400"/>
+            </a:xfrm>
+            <a:custGeom>
+              <a:avLst/>
+              <a:gdLst/>
+              <a:ahLst/>
+              <a:cxnLst/>
+              <a:rect l="0" t="0" r="0" b="0"/>
+              <a:pathLst>
+                <a:path w="190500" h="152400">
+                  <a:moveTo>
+                    <a:pt x="85725" y="0"/>
+                  </a:moveTo>
+                  <a:cubicBezTo>
+                    <a:pt x="82582" y="18860"/>
+                    <a:pt x="79438" y="37719"/>
+                    <a:pt x="76200" y="57150"/>
+                  </a:cubicBezTo>
+                  <a:cubicBezTo>
+                    <a:pt x="101003" y="46520"/>
+                    <a:pt x="114881" y="37462"/>
+                    <a:pt x="133350" y="17259"/>
+                  </a:cubicBezTo>
+                  <a:cubicBezTo>
+                    <a:pt x="139637" y="11563"/>
+                    <a:pt x="145923" y="5867"/>
+                    <a:pt x="152400" y="0"/>
+                  </a:cubicBezTo>
+                  <a:cubicBezTo>
+                    <a:pt x="173831" y="2381"/>
+                    <a:pt x="173831" y="2381"/>
+                    <a:pt x="190500" y="9525"/>
+                  </a:cubicBezTo>
+                  <a:cubicBezTo>
+                    <a:pt x="184013" y="12868"/>
+                    <a:pt x="177536" y="16202"/>
+                    <a:pt x="170859" y="19641"/>
+                  </a:cubicBezTo>
+                  <a:cubicBezTo>
+                    <a:pt x="126825" y="48682"/>
+                    <a:pt x="83687" y="81334"/>
+                    <a:pt x="67266" y="132759"/>
+                  </a:cubicBezTo>
+                  <a:cubicBezTo>
+                    <a:pt x="67075" y="139236"/>
+                    <a:pt x="66875" y="145723"/>
+                    <a:pt x="66675" y="152400"/>
+                  </a:cubicBezTo>
+                  <a:cubicBezTo>
+                    <a:pt x="64513" y="146895"/>
+                    <a:pt x="62351" y="141399"/>
+                    <a:pt x="60122" y="135731"/>
+                  </a:cubicBezTo>
+                  <a:cubicBezTo>
+                    <a:pt x="44482" y="108909"/>
+                    <a:pt x="24813" y="94478"/>
+                    <a:pt x="0" y="76200"/>
+                  </a:cubicBezTo>
+                  <a:cubicBezTo>
+                    <a:pt x="14535" y="39195"/>
+                    <a:pt x="42882" y="0"/>
+                    <a:pt x="85725" y="0"/>
+                  </a:cubicBezTo>
+                  <a:close/>
+                </a:path>
+              </a:pathLst>
+            </a:custGeom>
+            <a:solidFill>
+              <a:srgbClr val="0272BF"/>
+            </a:solidFill>
+            <a:ln>
+              <a:noFill/>
+            </a:ln>
+          </p:spPr>
+        </p:sp>
+        <p:sp>
+          <p:nvSpPr>
+            <p:cNvPr id="206" name="freeform-206"/>
+            <p:cNvSpPr/>
+            <p:nvPr/>
+          </p:nvSpPr>
+          <p:spPr>
+            <a:xfrm>
+              <a:off x="11468100" y="5662451"/>
+              <a:ext cx="180975" cy="100174"/>
+            </a:xfrm>
+            <a:custGeom>
+              <a:avLst/>
+              <a:gdLst/>
+              <a:ahLst/>
+              <a:cxnLst/>
+              <a:rect l="0" t="0" r="0" b="0"/>
+              <a:pathLst>
+                <a:path w="180975" h="100174">
+                  <a:moveTo>
+                    <a:pt x="0" y="4924"/>
+                  </a:moveTo>
+                  <a:cubicBezTo>
+                    <a:pt x="51664" y="0"/>
+                    <a:pt x="72276" y="14726"/>
+                    <a:pt x="114300" y="43024"/>
+                  </a:cubicBezTo>
+                  <a:cubicBezTo>
+                    <a:pt x="151209" y="50168"/>
+                    <a:pt x="151209" y="50168"/>
+                    <a:pt x="180975" y="52549"/>
+                  </a:cubicBezTo>
+                  <a:cubicBezTo>
+                    <a:pt x="177832" y="68266"/>
+                    <a:pt x="174688" y="83982"/>
+                    <a:pt x="171450" y="100174"/>
+                  </a:cubicBezTo>
+                  <a:cubicBezTo>
+                    <a:pt x="103908" y="89449"/>
+                    <a:pt x="52235" y="69418"/>
+                    <a:pt x="0" y="23974"/>
+                  </a:cubicBezTo>
+                  <a:cubicBezTo>
+                    <a:pt x="0" y="17688"/>
+                    <a:pt x="0" y="11401"/>
+                    <a:pt x="0" y="4924"/>
+                  </a:cubicBezTo>
+                  <a:close/>
+                </a:path>
+              </a:pathLst>
+            </a:custGeom>
+            <a:solidFill>
+              <a:srgbClr val="4B9202"/>
+            </a:solidFill>
+            <a:ln>
+              <a:noFill/>
+            </a:ln>
+          </p:spPr>
+        </p:sp>
+        <p:sp>
+          <p:nvSpPr>
+            <p:cNvPr id="207" name="freeform-207"/>
+            <p:cNvSpPr/>
+            <p:nvPr/>
+          </p:nvSpPr>
+          <p:spPr>
+            <a:xfrm>
+              <a:off x="11310737" y="5162550"/>
+              <a:ext cx="128788" cy="457200"/>
+            </a:xfrm>
+            <a:custGeom>
+              <a:avLst/>
+              <a:gdLst/>
+              <a:ahLst/>
+              <a:cxnLst/>
+              <a:rect l="0" t="0" r="0" b="0"/>
+              <a:pathLst>
+                <a:path w="128788" h="457200">
+                  <a:moveTo>
+                    <a:pt x="109738" y="0"/>
+                  </a:moveTo>
+                  <a:cubicBezTo>
+                    <a:pt x="116024" y="0"/>
+                    <a:pt x="122311" y="0"/>
+                    <a:pt x="128788" y="0"/>
+                  </a:cubicBezTo>
+                  <a:cubicBezTo>
+                    <a:pt x="115462" y="28308"/>
+                    <a:pt x="99803" y="53054"/>
+                    <a:pt x="81753" y="78581"/>
+                  </a:cubicBezTo>
+                  <a:cubicBezTo>
+                    <a:pt x="18269" y="174679"/>
+                    <a:pt x="8487" y="272929"/>
+                    <a:pt x="30490" y="385572"/>
+                  </a:cubicBezTo>
+                  <a:cubicBezTo>
+                    <a:pt x="37071" y="409823"/>
+                    <a:pt x="44167" y="433540"/>
+                    <a:pt x="52588" y="457200"/>
+                  </a:cubicBezTo>
+                  <a:cubicBezTo>
+                    <a:pt x="46301" y="457200"/>
+                    <a:pt x="40015" y="457200"/>
+                    <a:pt x="33538" y="457200"/>
+                  </a:cubicBezTo>
+                  <a:cubicBezTo>
+                    <a:pt x="9382" y="396154"/>
+                    <a:pt x="0" y="342338"/>
+                    <a:pt x="791" y="276816"/>
+                  </a:cubicBezTo>
+                  <a:cubicBezTo>
+                    <a:pt x="867" y="268453"/>
+                    <a:pt x="943" y="260080"/>
+                    <a:pt x="1010" y="251450"/>
+                  </a:cubicBezTo>
+                  <a:cubicBezTo>
+                    <a:pt x="3581" y="150552"/>
+                    <a:pt x="37729" y="72009"/>
+                    <a:pt x="109738" y="0"/>
+                  </a:cubicBezTo>
+                  <a:close/>
+                </a:path>
+              </a:pathLst>
+            </a:custGeom>
+            <a:solidFill>
+              <a:srgbClr val="313131"/>
+            </a:solidFill>
+            <a:ln>
+              <a:noFill/>
+            </a:ln>
+          </p:spPr>
+        </p:sp>
+        <p:sp>
+          <p:nvSpPr>
+            <p:cNvPr id="208" name="freeform-208"/>
+            <p:cNvSpPr/>
+            <p:nvPr/>
+          </p:nvSpPr>
+          <p:spPr>
+            <a:xfrm>
+              <a:off x="11630025" y="5334000"/>
+              <a:ext cx="161925" cy="85725"/>
+            </a:xfrm>
+            <a:custGeom>
+              <a:avLst/>
+              <a:gdLst/>
+              <a:ahLst/>
+              <a:cxnLst/>
+              <a:rect l="0" t="0" r="0" b="0"/>
+              <a:pathLst>
+                <a:path w="161925" h="85725">
+                  <a:moveTo>
+                    <a:pt x="0" y="0"/>
+                  </a:moveTo>
+                  <a:cubicBezTo>
+                    <a:pt x="15716" y="0"/>
+                    <a:pt x="31432" y="0"/>
+                    <a:pt x="47625" y="0"/>
+                  </a:cubicBezTo>
+                  <a:cubicBezTo>
+                    <a:pt x="47625" y="6286"/>
+                    <a:pt x="47625" y="12573"/>
+                    <a:pt x="47625" y="19050"/>
+                  </a:cubicBezTo>
+                  <a:cubicBezTo>
+                    <a:pt x="56264" y="17478"/>
+                    <a:pt x="64913" y="15907"/>
+                    <a:pt x="73819" y="14288"/>
+                  </a:cubicBezTo>
+                  <a:cubicBezTo>
+                    <a:pt x="103603" y="9706"/>
+                    <a:pt x="131864" y="9525"/>
+                    <a:pt x="161925" y="9525"/>
+                  </a:cubicBezTo>
+                  <a:cubicBezTo>
+                    <a:pt x="158782" y="18955"/>
+                    <a:pt x="155638" y="28385"/>
+                    <a:pt x="152400" y="38100"/>
+                  </a:cubicBezTo>
+                  <a:cubicBezTo>
+                    <a:pt x="120968" y="38100"/>
+                    <a:pt x="89535" y="38100"/>
+                    <a:pt x="57150" y="38100"/>
+                  </a:cubicBezTo>
+                  <a:cubicBezTo>
+                    <a:pt x="57150" y="47530"/>
+                    <a:pt x="57150" y="56960"/>
+                    <a:pt x="57150" y="66675"/>
+                  </a:cubicBezTo>
+                  <a:cubicBezTo>
+                    <a:pt x="85439" y="66675"/>
+                    <a:pt x="113729" y="66675"/>
+                    <a:pt x="142875" y="66675"/>
+                  </a:cubicBezTo>
+                  <a:cubicBezTo>
+                    <a:pt x="139732" y="72961"/>
+                    <a:pt x="136588" y="79248"/>
+                    <a:pt x="133350" y="85725"/>
+                  </a:cubicBezTo>
+                  <a:cubicBezTo>
+                    <a:pt x="101918" y="85725"/>
+                    <a:pt x="70485" y="85725"/>
+                    <a:pt x="38100" y="85725"/>
+                  </a:cubicBezTo>
+                  <a:cubicBezTo>
+                    <a:pt x="38100" y="76295"/>
+                    <a:pt x="38100" y="66865"/>
+                    <a:pt x="38100" y="57150"/>
+                  </a:cubicBezTo>
+                  <a:cubicBezTo>
+                    <a:pt x="31813" y="57150"/>
+                    <a:pt x="25527" y="57150"/>
+                    <a:pt x="19050" y="57150"/>
+                  </a:cubicBezTo>
+                  <a:cubicBezTo>
+                    <a:pt x="19050" y="44577"/>
+                    <a:pt x="19050" y="32004"/>
+                    <a:pt x="19050" y="19050"/>
+                  </a:cubicBezTo>
+                  <a:cubicBezTo>
+                    <a:pt x="12763" y="19050"/>
+                    <a:pt x="6477" y="19050"/>
+                    <a:pt x="0" y="19050"/>
+                  </a:cubicBezTo>
+                  <a:cubicBezTo>
+                    <a:pt x="0" y="12764"/>
+                    <a:pt x="0" y="6477"/>
+                    <a:pt x="0" y="0"/>
+                  </a:cubicBezTo>
+                  <a:close/>
+                </a:path>
+              </a:pathLst>
+            </a:custGeom>
+            <a:solidFill>
+              <a:srgbClr val="026DB7"/>
+            </a:solidFill>
+            <a:ln>
+              <a:noFill/>
+            </a:ln>
+          </p:spPr>
+        </p:sp>
+        <p:sp>
+          <p:nvSpPr>
+            <p:cNvPr id="209" name="freeform-209"/>
+            <p:cNvSpPr/>
+            <p:nvPr/>
+          </p:nvSpPr>
+          <p:spPr>
+            <a:xfrm>
+              <a:off x="11763375" y="5410200"/>
+              <a:ext cx="135426" cy="257175"/>
+            </a:xfrm>
+            <a:custGeom>
+              <a:avLst/>
+              <a:gdLst/>
+              <a:ahLst/>
+              <a:cxnLst/>
+              <a:rect l="0" t="0" r="0" b="0"/>
+              <a:pathLst>
+                <a:path w="135426" h="257175">
+                  <a:moveTo>
+                    <a:pt x="85725" y="0"/>
+                  </a:moveTo>
+                  <a:cubicBezTo>
+                    <a:pt x="98298" y="3143"/>
+                    <a:pt x="110871" y="6286"/>
+                    <a:pt x="123825" y="9525"/>
+                  </a:cubicBezTo>
+                  <a:cubicBezTo>
+                    <a:pt x="131540" y="37290"/>
+                    <a:pt x="135426" y="52016"/>
+                    <a:pt x="124416" y="79172"/>
+                  </a:cubicBezTo>
+                  <a:cubicBezTo>
+                    <a:pt x="121082" y="84477"/>
+                    <a:pt x="117739" y="89783"/>
+                    <a:pt x="114300" y="95250"/>
+                  </a:cubicBezTo>
+                  <a:cubicBezTo>
+                    <a:pt x="111157" y="73247"/>
+                    <a:pt x="108013" y="51244"/>
+                    <a:pt x="104775" y="28575"/>
+                  </a:cubicBezTo>
+                  <a:cubicBezTo>
+                    <a:pt x="101632" y="31718"/>
+                    <a:pt x="98488" y="34861"/>
+                    <a:pt x="95250" y="38100"/>
+                  </a:cubicBezTo>
+                  <a:cubicBezTo>
+                    <a:pt x="96060" y="58150"/>
+                    <a:pt x="97088" y="78191"/>
+                    <a:pt x="98222" y="98222"/>
+                  </a:cubicBezTo>
+                  <a:cubicBezTo>
+                    <a:pt x="98669" y="132378"/>
+                    <a:pt x="98669" y="132378"/>
+                    <a:pt x="95250" y="161925"/>
+                  </a:cubicBezTo>
+                  <a:cubicBezTo>
+                    <a:pt x="67266" y="185147"/>
+                    <a:pt x="67266" y="185147"/>
+                    <a:pt x="38100" y="200025"/>
+                  </a:cubicBezTo>
+                  <a:cubicBezTo>
+                    <a:pt x="29766" y="230981"/>
+                    <a:pt x="29766" y="230981"/>
+                    <a:pt x="28575" y="257175"/>
+                  </a:cubicBezTo>
+                  <a:cubicBezTo>
+                    <a:pt x="19145" y="254032"/>
+                    <a:pt x="9715" y="250889"/>
+                    <a:pt x="0" y="247650"/>
+                  </a:cubicBezTo>
+                  <a:cubicBezTo>
+                    <a:pt x="17669" y="197425"/>
+                    <a:pt x="17669" y="197425"/>
+                    <a:pt x="28575" y="180975"/>
+                  </a:cubicBezTo>
+                  <a:cubicBezTo>
+                    <a:pt x="53464" y="169288"/>
+                    <a:pt x="53464" y="169288"/>
+                    <a:pt x="76200" y="161925"/>
+                  </a:cubicBezTo>
+                  <a:cubicBezTo>
+                    <a:pt x="75295" y="153429"/>
+                    <a:pt x="74381" y="144932"/>
+                    <a:pt x="73447" y="136179"/>
+                  </a:cubicBezTo>
+                  <a:cubicBezTo>
+                    <a:pt x="72390" y="125025"/>
+                    <a:pt x="71333" y="113881"/>
+                    <a:pt x="70247" y="102394"/>
+                  </a:cubicBezTo>
+                  <a:cubicBezTo>
+                    <a:pt x="69142" y="91345"/>
+                    <a:pt x="68037" y="80296"/>
+                    <a:pt x="66894" y="68904"/>
+                  </a:cubicBezTo>
+                  <a:cubicBezTo>
+                    <a:pt x="66675" y="38681"/>
+                    <a:pt x="69561" y="24927"/>
+                    <a:pt x="85725" y="0"/>
+                  </a:cubicBezTo>
+                  <a:close/>
+                </a:path>
+              </a:pathLst>
+            </a:custGeom>
+            <a:solidFill>
+              <a:srgbClr val="0C2414"/>
+            </a:solidFill>
+            <a:ln>
+              <a:noFill/>
+            </a:ln>
+          </p:spPr>
+        </p:sp>
+        <p:sp>
+          <p:nvSpPr>
+            <p:cNvPr id="210" name="freeform-210"/>
+            <p:cNvSpPr/>
+            <p:nvPr/>
+          </p:nvSpPr>
+          <p:spPr>
+            <a:xfrm>
+              <a:off x="11677650" y="5324475"/>
+              <a:ext cx="125244" cy="104775"/>
+            </a:xfrm>
+            <a:custGeom>
+              <a:avLst/>
+              <a:gdLst/>
+              <a:ahLst/>
+              <a:cxnLst/>
+              <a:rect l="0" t="0" r="0" b="0"/>
+              <a:pathLst>
+                <a:path w="125244" h="104775">
+                  <a:moveTo>
+                    <a:pt x="38100" y="0"/>
+                  </a:moveTo>
+                  <a:cubicBezTo>
+                    <a:pt x="47530" y="0"/>
+                    <a:pt x="56960" y="0"/>
+                    <a:pt x="66675" y="0"/>
+                  </a:cubicBezTo>
+                  <a:cubicBezTo>
+                    <a:pt x="66675" y="6286"/>
+                    <a:pt x="66675" y="12573"/>
+                    <a:pt x="66675" y="19050"/>
+                  </a:cubicBezTo>
+                  <a:cubicBezTo>
+                    <a:pt x="82391" y="12764"/>
+                    <a:pt x="98107" y="6477"/>
+                    <a:pt x="114300" y="0"/>
+                  </a:cubicBezTo>
+                  <a:cubicBezTo>
+                    <a:pt x="125244" y="33842"/>
+                    <a:pt x="124654" y="45720"/>
+                    <a:pt x="110128" y="79172"/>
+                  </a:cubicBezTo>
+                  <a:cubicBezTo>
+                    <a:pt x="105223" y="87620"/>
+                    <a:pt x="100308" y="96069"/>
+                    <a:pt x="95250" y="104775"/>
+                  </a:cubicBezTo>
+                  <a:cubicBezTo>
+                    <a:pt x="63818" y="104775"/>
+                    <a:pt x="32385" y="104775"/>
+                    <a:pt x="0" y="104775"/>
+                  </a:cubicBezTo>
+                  <a:cubicBezTo>
+                    <a:pt x="0" y="101632"/>
+                    <a:pt x="0" y="98489"/>
+                    <a:pt x="0" y="95250"/>
+                  </a:cubicBezTo>
+                  <a:cubicBezTo>
+                    <a:pt x="14145" y="93678"/>
+                    <a:pt x="14145" y="93678"/>
+                    <a:pt x="85725" y="85725"/>
+                  </a:cubicBezTo>
+                  <a:cubicBezTo>
+                    <a:pt x="60579" y="82582"/>
+                    <a:pt x="35433" y="79439"/>
+                    <a:pt x="9525" y="76200"/>
+                  </a:cubicBezTo>
+                  <a:cubicBezTo>
+                    <a:pt x="9525" y="66770"/>
+                    <a:pt x="9525" y="57340"/>
+                    <a:pt x="9525" y="47625"/>
+                  </a:cubicBezTo>
+                  <a:cubicBezTo>
+                    <a:pt x="12906" y="47396"/>
+                    <a:pt x="12906" y="47396"/>
+                    <a:pt x="30023" y="46215"/>
+                  </a:cubicBezTo>
+                  <a:cubicBezTo>
+                    <a:pt x="38776" y="45501"/>
+                    <a:pt x="47539" y="44787"/>
+                    <a:pt x="56559" y="44053"/>
+                  </a:cubicBezTo>
+                  <a:cubicBezTo>
+                    <a:pt x="65284" y="43386"/>
+                    <a:pt x="74019" y="42729"/>
+                    <a:pt x="83010" y="42043"/>
+                  </a:cubicBezTo>
+                  <a:cubicBezTo>
+                    <a:pt x="86601" y="41396"/>
+                    <a:pt x="86601" y="41396"/>
+                    <a:pt x="104775" y="38100"/>
+                  </a:cubicBezTo>
+                  <a:cubicBezTo>
+                    <a:pt x="107918" y="31814"/>
+                    <a:pt x="111062" y="25527"/>
+                    <a:pt x="114300" y="19050"/>
+                  </a:cubicBezTo>
+                  <a:cubicBezTo>
+                    <a:pt x="107423" y="22584"/>
+                    <a:pt x="100546" y="26118"/>
+                    <a:pt x="93459" y="29766"/>
+                  </a:cubicBezTo>
+                  <a:cubicBezTo>
+                    <a:pt x="60865" y="39910"/>
+                    <a:pt x="48749" y="34319"/>
+                    <a:pt x="19050" y="19050"/>
+                  </a:cubicBezTo>
+                  <a:cubicBezTo>
+                    <a:pt x="25337" y="12764"/>
+                    <a:pt x="31623" y="6477"/>
+                    <a:pt x="38100" y="0"/>
+                  </a:cubicBezTo>
+                  <a:close/>
+                </a:path>
+              </a:pathLst>
+            </a:custGeom>
+            <a:solidFill>
+              <a:srgbClr val="0A190A"/>
+            </a:solidFill>
+            <a:ln>
+              <a:noFill/>
+            </a:ln>
+          </p:spPr>
+        </p:sp>
+        <p:sp>
+          <p:nvSpPr>
+            <p:cNvPr id="211" name="freeform-211"/>
+            <p:cNvSpPr/>
+            <p:nvPr/>
+          </p:nvSpPr>
+          <p:spPr>
+            <a:xfrm>
+              <a:off x="11319681" y="5362575"/>
+              <a:ext cx="62694" cy="238125"/>
+            </a:xfrm>
+            <a:custGeom>
+              <a:avLst/>
+              <a:gdLst/>
+              <a:ahLst/>
+              <a:cxnLst/>
+              <a:rect l="0" t="0" r="0" b="0"/>
+              <a:pathLst>
+                <a:path w="62694" h="238125">
+                  <a:moveTo>
+                    <a:pt x="5544" y="0"/>
+                  </a:moveTo>
+                  <a:cubicBezTo>
+                    <a:pt x="36909" y="33680"/>
+                    <a:pt x="39938" y="63998"/>
+                    <a:pt x="44834" y="108947"/>
+                  </a:cubicBezTo>
+                  <a:cubicBezTo>
+                    <a:pt x="49406" y="149285"/>
+                    <a:pt x="53978" y="188919"/>
+                    <a:pt x="62694" y="228600"/>
+                  </a:cubicBezTo>
+                  <a:cubicBezTo>
+                    <a:pt x="53264" y="231743"/>
+                    <a:pt x="43834" y="234886"/>
+                    <a:pt x="34119" y="238125"/>
+                  </a:cubicBezTo>
+                  <a:cubicBezTo>
+                    <a:pt x="0" y="158506"/>
+                    <a:pt x="2724" y="84963"/>
+                    <a:pt x="5544" y="0"/>
+                  </a:cubicBezTo>
+                  <a:close/>
+                </a:path>
+              </a:pathLst>
+            </a:custGeom>
+            <a:solidFill>
+              <a:srgbClr val="DCDCDC"/>
+            </a:solidFill>
+            <a:ln>
+              <a:noFill/>
+            </a:ln>
+          </p:spPr>
+        </p:sp>
+        <p:sp>
+          <p:nvSpPr>
+            <p:cNvPr id="212" name="freeform-212"/>
+            <p:cNvSpPr/>
+            <p:nvPr/>
+          </p:nvSpPr>
+          <p:spPr>
+            <a:xfrm>
+              <a:off x="11391900" y="5248275"/>
+              <a:ext cx="152400" cy="123825"/>
+            </a:xfrm>
+            <a:custGeom>
+              <a:avLst/>
+              <a:gdLst/>
+              <a:ahLst/>
+              <a:cxnLst/>
+              <a:rect l="0" t="0" r="0" b="0"/>
+              <a:pathLst>
+                <a:path w="152400" h="123825">
+                  <a:moveTo>
+                    <a:pt x="38100" y="0"/>
+                  </a:moveTo>
+                  <a:cubicBezTo>
+                    <a:pt x="95250" y="28575"/>
+                    <a:pt x="95250" y="28575"/>
+                    <a:pt x="103584" y="51197"/>
+                  </a:cubicBezTo>
+                  <a:cubicBezTo>
+                    <a:pt x="115681" y="79429"/>
+                    <a:pt x="127768" y="87535"/>
+                    <a:pt x="152400" y="104775"/>
+                  </a:cubicBezTo>
+                  <a:cubicBezTo>
+                    <a:pt x="152400" y="111061"/>
+                    <a:pt x="152400" y="117348"/>
+                    <a:pt x="152400" y="123825"/>
+                  </a:cubicBezTo>
+                  <a:cubicBezTo>
+                    <a:pt x="146704" y="120882"/>
+                    <a:pt x="141008" y="117929"/>
+                    <a:pt x="135141" y="114891"/>
+                  </a:cubicBezTo>
+                  <a:cubicBezTo>
+                    <a:pt x="107632" y="101536"/>
+                    <a:pt x="87935" y="95250"/>
+                    <a:pt x="57150" y="95250"/>
+                  </a:cubicBezTo>
+                  <a:cubicBezTo>
+                    <a:pt x="54007" y="79534"/>
+                    <a:pt x="50863" y="63818"/>
+                    <a:pt x="47625" y="47625"/>
+                  </a:cubicBezTo>
+                  <a:cubicBezTo>
+                    <a:pt x="43301" y="52340"/>
+                    <a:pt x="38986" y="57055"/>
+                    <a:pt x="34528" y="61912"/>
+                  </a:cubicBezTo>
+                  <a:cubicBezTo>
+                    <a:pt x="19050" y="76200"/>
+                    <a:pt x="19050" y="76200"/>
+                    <a:pt x="0" y="76200"/>
+                  </a:cubicBezTo>
+                  <a:cubicBezTo>
+                    <a:pt x="10716" y="47892"/>
+                    <a:pt x="21174" y="25394"/>
+                    <a:pt x="38100" y="0"/>
+                  </a:cubicBezTo>
+                  <a:close/>
+                </a:path>
+              </a:pathLst>
+            </a:custGeom>
+            <a:solidFill>
+              <a:srgbClr val="478A02"/>
+            </a:solidFill>
+            <a:ln>
+              <a:noFill/>
+            </a:ln>
+          </p:spPr>
+        </p:sp>
+        <p:sp>
+          <p:nvSpPr>
+            <p:cNvPr id="213" name="freeform-213"/>
+            <p:cNvSpPr/>
+            <p:nvPr/>
+          </p:nvSpPr>
+          <p:spPr>
+            <a:xfrm>
+              <a:off x="11666334" y="5391150"/>
+              <a:ext cx="125616" cy="133350"/>
+            </a:xfrm>
+            <a:custGeom>
+              <a:avLst/>
+              <a:gdLst/>
+              <a:ahLst/>
+              <a:cxnLst/>
+              <a:rect l="0" t="0" r="0" b="0"/>
+              <a:pathLst>
+                <a:path w="125616" h="133350">
+                  <a:moveTo>
+                    <a:pt x="116091" y="0"/>
+                  </a:moveTo>
+                  <a:cubicBezTo>
+                    <a:pt x="119234" y="0"/>
+                    <a:pt x="122377" y="0"/>
+                    <a:pt x="125616" y="0"/>
+                  </a:cubicBezTo>
+                  <a:cubicBezTo>
+                    <a:pt x="125616" y="15716"/>
+                    <a:pt x="125616" y="31432"/>
+                    <a:pt x="125616" y="47625"/>
+                  </a:cubicBezTo>
+                  <a:cubicBezTo>
+                    <a:pt x="120444" y="49825"/>
+                    <a:pt x="115281" y="52016"/>
+                    <a:pt x="109947" y="54283"/>
+                  </a:cubicBezTo>
+                  <a:cubicBezTo>
+                    <a:pt x="66694" y="74009"/>
+                    <a:pt x="41005" y="87982"/>
+                    <a:pt x="20841" y="133350"/>
+                  </a:cubicBezTo>
+                  <a:cubicBezTo>
+                    <a:pt x="1791" y="114300"/>
+                    <a:pt x="1791" y="114300"/>
+                    <a:pt x="0" y="80372"/>
+                  </a:cubicBezTo>
+                  <a:cubicBezTo>
+                    <a:pt x="1791" y="47625"/>
+                    <a:pt x="1791" y="47625"/>
+                    <a:pt x="11316" y="38100"/>
+                  </a:cubicBezTo>
+                  <a:cubicBezTo>
+                    <a:pt x="27337" y="35881"/>
+                    <a:pt x="43424" y="34166"/>
+                    <a:pt x="59531" y="32747"/>
+                  </a:cubicBezTo>
+                  <a:cubicBezTo>
+                    <a:pt x="63913" y="32347"/>
+                    <a:pt x="63913" y="32347"/>
+                    <a:pt x="86068" y="30328"/>
+                  </a:cubicBezTo>
+                  <a:cubicBezTo>
+                    <a:pt x="92831" y="29747"/>
+                    <a:pt x="99593" y="29166"/>
+                    <a:pt x="106566" y="28575"/>
+                  </a:cubicBezTo>
+                  <a:cubicBezTo>
+                    <a:pt x="109709" y="19145"/>
+                    <a:pt x="112852" y="9715"/>
+                    <a:pt x="116091" y="0"/>
+                  </a:cubicBezTo>
+                  <a:close/>
+                </a:path>
+              </a:pathLst>
+            </a:custGeom>
+            <a:solidFill>
+              <a:srgbClr val="448501"/>
+            </a:solidFill>
+            <a:ln>
+              <a:noFill/>
+            </a:ln>
+          </p:spPr>
+        </p:sp>
+        <p:sp>
+          <p:nvSpPr>
+            <p:cNvPr id="214" name="freeform-214"/>
+            <p:cNvSpPr/>
+            <p:nvPr/>
+          </p:nvSpPr>
+          <p:spPr>
+            <a:xfrm>
+              <a:off x="11382375" y="5324475"/>
+              <a:ext cx="76200" cy="171450"/>
+            </a:xfrm>
+            <a:custGeom>
+              <a:avLst/>
+              <a:gdLst/>
+              <a:ahLst/>
+              <a:cxnLst/>
+              <a:rect l="0" t="0" r="0" b="0"/>
+              <a:pathLst>
+                <a:path w="76200" h="171450">
+                  <a:moveTo>
+                    <a:pt x="38100" y="0"/>
+                  </a:moveTo>
+                  <a:cubicBezTo>
+                    <a:pt x="58188" y="19755"/>
+                    <a:pt x="58188" y="19755"/>
+                    <a:pt x="76200" y="47625"/>
+                  </a:cubicBezTo>
+                  <a:cubicBezTo>
+                    <a:pt x="71590" y="79362"/>
+                    <a:pt x="71590" y="79362"/>
+                    <a:pt x="59531" y="112509"/>
+                  </a:cubicBezTo>
+                  <a:cubicBezTo>
+                    <a:pt x="55655" y="123577"/>
+                    <a:pt x="51768" y="134636"/>
+                    <a:pt x="47777" y="146037"/>
+                  </a:cubicBezTo>
+                  <a:cubicBezTo>
+                    <a:pt x="44577" y="154419"/>
+                    <a:pt x="41386" y="162811"/>
+                    <a:pt x="38100" y="171450"/>
+                  </a:cubicBezTo>
+                  <a:cubicBezTo>
+                    <a:pt x="34957" y="171450"/>
+                    <a:pt x="31813" y="171450"/>
+                    <a:pt x="28575" y="171450"/>
+                  </a:cubicBezTo>
+                  <a:cubicBezTo>
+                    <a:pt x="28346" y="168126"/>
+                    <a:pt x="28346" y="168126"/>
+                    <a:pt x="27165" y="151286"/>
+                  </a:cubicBezTo>
+                  <a:cubicBezTo>
+                    <a:pt x="26803" y="146952"/>
+                    <a:pt x="26803" y="146952"/>
+                    <a:pt x="25003" y="125016"/>
+                  </a:cubicBezTo>
+                  <a:cubicBezTo>
+                    <a:pt x="24336" y="116396"/>
+                    <a:pt x="23679" y="107775"/>
+                    <a:pt x="22993" y="98898"/>
+                  </a:cubicBezTo>
+                  <a:cubicBezTo>
+                    <a:pt x="19050" y="76200"/>
+                    <a:pt x="19050" y="76200"/>
+                    <a:pt x="0" y="57150"/>
+                  </a:cubicBezTo>
+                  <a:cubicBezTo>
+                    <a:pt x="0" y="44577"/>
+                    <a:pt x="0" y="32004"/>
+                    <a:pt x="0" y="19050"/>
+                  </a:cubicBezTo>
+                  <a:cubicBezTo>
+                    <a:pt x="12573" y="12764"/>
+                    <a:pt x="25146" y="6477"/>
+                    <a:pt x="38100" y="0"/>
+                  </a:cubicBezTo>
+                  <a:close/>
+                </a:path>
+              </a:pathLst>
+            </a:custGeom>
+            <a:solidFill>
+              <a:srgbClr val="0278C9"/>
+            </a:solidFill>
+            <a:ln>
+              <a:noFill/>
+            </a:ln>
+          </p:spPr>
+        </p:sp>
+        <p:sp>
+          <p:nvSpPr>
+            <p:cNvPr id="215" name="freeform-215"/>
+            <p:cNvSpPr/>
+            <p:nvPr/>
+          </p:nvSpPr>
+          <p:spPr>
+            <a:xfrm>
+              <a:off x="11887200" y="5429250"/>
+              <a:ext cx="89021" cy="133350"/>
+            </a:xfrm>
+            <a:custGeom>
+              <a:avLst/>
+              <a:gdLst/>
+              <a:ahLst/>
+              <a:cxnLst/>
+              <a:rect l="0" t="0" r="0" b="0"/>
+              <a:pathLst>
+                <a:path w="89021" h="133350">
+                  <a:moveTo>
+                    <a:pt x="85725" y="0"/>
+                  </a:moveTo>
+                  <a:cubicBezTo>
+                    <a:pt x="89021" y="53854"/>
+                    <a:pt x="80334" y="86011"/>
+                    <a:pt x="57150" y="133350"/>
+                  </a:cubicBezTo>
+                  <a:cubicBezTo>
+                    <a:pt x="38290" y="133350"/>
+                    <a:pt x="19431" y="133350"/>
+                    <a:pt x="0" y="133350"/>
+                  </a:cubicBezTo>
+                  <a:cubicBezTo>
+                    <a:pt x="0" y="127064"/>
+                    <a:pt x="0" y="120777"/>
+                    <a:pt x="0" y="114300"/>
+                  </a:cubicBezTo>
+                  <a:cubicBezTo>
+                    <a:pt x="6287" y="114300"/>
+                    <a:pt x="12573" y="114300"/>
+                    <a:pt x="19050" y="114300"/>
+                  </a:cubicBezTo>
+                  <a:cubicBezTo>
+                    <a:pt x="19050" y="108014"/>
+                    <a:pt x="19050" y="101727"/>
+                    <a:pt x="19050" y="95250"/>
+                  </a:cubicBezTo>
+                  <a:cubicBezTo>
+                    <a:pt x="28480" y="95250"/>
+                    <a:pt x="37910" y="95250"/>
+                    <a:pt x="47625" y="95250"/>
+                  </a:cubicBezTo>
+                  <a:cubicBezTo>
+                    <a:pt x="47625" y="66961"/>
+                    <a:pt x="47625" y="38671"/>
+                    <a:pt x="47625" y="9525"/>
+                  </a:cubicBezTo>
+                  <a:cubicBezTo>
+                    <a:pt x="66675" y="0"/>
+                    <a:pt x="66675" y="0"/>
+                    <a:pt x="85725" y="0"/>
+                  </a:cubicBezTo>
+                  <a:close/>
+                </a:path>
+              </a:pathLst>
+            </a:custGeom>
+            <a:solidFill>
+              <a:srgbClr val="048EED"/>
+            </a:solidFill>
+            <a:ln>
+              <a:noFill/>
+            </a:ln>
+          </p:spPr>
+        </p:sp>
+        <p:sp>
+          <p:nvSpPr>
+            <p:cNvPr id="216" name="freeform-216"/>
+            <p:cNvSpPr/>
+            <p:nvPr/>
+          </p:nvSpPr>
+          <p:spPr>
+            <a:xfrm>
+              <a:off x="11687175" y="5124450"/>
+              <a:ext cx="123825" cy="85725"/>
+            </a:xfrm>
+            <a:custGeom>
+              <a:avLst/>
+              <a:gdLst/>
+              <a:ahLst/>
+              <a:cxnLst/>
+              <a:rect l="0" t="0" r="0" b="0"/>
+              <a:pathLst>
+                <a:path w="123825" h="85725">
+                  <a:moveTo>
+                    <a:pt x="76200" y="0"/>
+                  </a:moveTo>
+                  <a:cubicBezTo>
+                    <a:pt x="102394" y="2381"/>
+                    <a:pt x="102394" y="2381"/>
+                    <a:pt x="123825" y="9525"/>
+                  </a:cubicBezTo>
+                  <a:cubicBezTo>
+                    <a:pt x="120682" y="31528"/>
+                    <a:pt x="117538" y="53531"/>
+                    <a:pt x="114300" y="76200"/>
+                  </a:cubicBezTo>
+                  <a:cubicBezTo>
+                    <a:pt x="97041" y="82153"/>
+                    <a:pt x="97041" y="82153"/>
+                    <a:pt x="76200" y="85725"/>
+                  </a:cubicBezTo>
+                  <a:cubicBezTo>
+                    <a:pt x="66770" y="79439"/>
+                    <a:pt x="57340" y="73152"/>
+                    <a:pt x="47625" y="66675"/>
+                  </a:cubicBezTo>
+                  <a:cubicBezTo>
+                    <a:pt x="31861" y="63008"/>
+                    <a:pt x="15983" y="59741"/>
+                    <a:pt x="0" y="57150"/>
+                  </a:cubicBezTo>
+                  <a:cubicBezTo>
+                    <a:pt x="5505" y="54797"/>
+                    <a:pt x="11001" y="52435"/>
+                    <a:pt x="16669" y="50006"/>
+                  </a:cubicBezTo>
+                  <a:cubicBezTo>
+                    <a:pt x="38100" y="38100"/>
+                    <a:pt x="38100" y="38100"/>
+                    <a:pt x="56559" y="17259"/>
+                  </a:cubicBezTo>
+                  <a:cubicBezTo>
+                    <a:pt x="63036" y="11563"/>
+                    <a:pt x="69523" y="5867"/>
+                    <a:pt x="76200" y="0"/>
+                  </a:cubicBezTo>
+                  <a:close/>
+                </a:path>
+              </a:pathLst>
+            </a:custGeom>
+            <a:solidFill>
+              <a:srgbClr val="0389E6"/>
+            </a:solidFill>
+            <a:ln>
+              <a:noFill/>
+            </a:ln>
+          </p:spPr>
+        </p:sp>
+        <p:sp>
+          <p:nvSpPr>
+            <p:cNvPr id="217" name="freeform-217"/>
+            <p:cNvSpPr/>
+            <p:nvPr/>
+          </p:nvSpPr>
+          <p:spPr>
+            <a:xfrm>
+              <a:off x="11601450" y="5271478"/>
+              <a:ext cx="133350" cy="81572"/>
+            </a:xfrm>
+            <a:custGeom>
+              <a:avLst/>
+              <a:gdLst/>
+              <a:ahLst/>
+              <a:cxnLst/>
+              <a:rect l="0" t="0" r="0" b="0"/>
+              <a:pathLst>
+                <a:path w="133350" h="81572">
+                  <a:moveTo>
+                    <a:pt x="104775" y="5372"/>
+                  </a:moveTo>
+                  <a:cubicBezTo>
+                    <a:pt x="114205" y="11659"/>
+                    <a:pt x="123635" y="17945"/>
+                    <a:pt x="133350" y="24422"/>
+                  </a:cubicBezTo>
+                  <a:cubicBezTo>
+                    <a:pt x="111347" y="27565"/>
+                    <a:pt x="89345" y="30709"/>
+                    <a:pt x="66675" y="33947"/>
+                  </a:cubicBezTo>
+                  <a:cubicBezTo>
+                    <a:pt x="76105" y="33947"/>
+                    <a:pt x="85535" y="33947"/>
+                    <a:pt x="95250" y="33947"/>
+                  </a:cubicBezTo>
+                  <a:cubicBezTo>
+                    <a:pt x="98393" y="49663"/>
+                    <a:pt x="101537" y="65380"/>
+                    <a:pt x="104775" y="81572"/>
+                  </a:cubicBezTo>
+                  <a:cubicBezTo>
+                    <a:pt x="95345" y="81572"/>
+                    <a:pt x="85915" y="81572"/>
+                    <a:pt x="76200" y="81572"/>
+                  </a:cubicBezTo>
+                  <a:cubicBezTo>
+                    <a:pt x="76200" y="75286"/>
+                    <a:pt x="76200" y="68999"/>
+                    <a:pt x="76200" y="62522"/>
+                  </a:cubicBezTo>
+                  <a:cubicBezTo>
+                    <a:pt x="67161" y="62722"/>
+                    <a:pt x="58122" y="62913"/>
+                    <a:pt x="48816" y="63113"/>
+                  </a:cubicBezTo>
+                  <a:cubicBezTo>
+                    <a:pt x="19050" y="62522"/>
+                    <a:pt x="19050" y="62522"/>
+                    <a:pt x="0" y="52997"/>
+                  </a:cubicBezTo>
+                  <a:cubicBezTo>
+                    <a:pt x="3572" y="34538"/>
+                    <a:pt x="3572" y="34538"/>
+                    <a:pt x="9525" y="14897"/>
+                  </a:cubicBezTo>
+                  <a:cubicBezTo>
+                    <a:pt x="39310" y="0"/>
+                    <a:pt x="72199" y="1562"/>
+                    <a:pt x="104775" y="5372"/>
+                  </a:cubicBezTo>
+                  <a:close/>
+                </a:path>
+              </a:pathLst>
+            </a:custGeom>
+            <a:solidFill>
+              <a:srgbClr val="052834"/>
+            </a:solidFill>
+            <a:ln>
+              <a:noFill/>
+            </a:ln>
+          </p:spPr>
+        </p:sp>
+        <p:sp>
+          <p:nvSpPr>
+            <p:cNvPr id="218" name="freeform-218"/>
+            <p:cNvSpPr/>
+            <p:nvPr/>
+          </p:nvSpPr>
+          <p:spPr>
+            <a:xfrm>
+              <a:off x="11334750" y="5229225"/>
+              <a:ext cx="85725" cy="171450"/>
+            </a:xfrm>
+            <a:custGeom>
+              <a:avLst/>
+              <a:gdLst/>
+              <a:ahLst/>
+              <a:cxnLst/>
+              <a:rect l="0" t="0" r="0" b="0"/>
+              <a:pathLst>
+                <a:path w="85725" h="171450">
+                  <a:moveTo>
+                    <a:pt x="66675" y="0"/>
+                  </a:moveTo>
+                  <a:cubicBezTo>
+                    <a:pt x="72962" y="3143"/>
+                    <a:pt x="79248" y="6286"/>
+                    <a:pt x="85725" y="9525"/>
+                  </a:cubicBezTo>
+                  <a:cubicBezTo>
+                    <a:pt x="84115" y="12573"/>
+                    <a:pt x="84115" y="12573"/>
+                    <a:pt x="75981" y="28013"/>
+                  </a:cubicBezTo>
+                  <a:cubicBezTo>
+                    <a:pt x="51568" y="75362"/>
+                    <a:pt x="31442" y="119615"/>
+                    <a:pt x="19050" y="171450"/>
+                  </a:cubicBezTo>
+                  <a:cubicBezTo>
+                    <a:pt x="12763" y="168307"/>
+                    <a:pt x="6477" y="165164"/>
+                    <a:pt x="0" y="161925"/>
+                  </a:cubicBezTo>
+                  <a:cubicBezTo>
+                    <a:pt x="2762" y="101013"/>
+                    <a:pt x="12878" y="60074"/>
+                    <a:pt x="47625" y="9525"/>
+                  </a:cubicBezTo>
+                  <a:cubicBezTo>
+                    <a:pt x="53912" y="6382"/>
+                    <a:pt x="60198" y="3239"/>
+                    <a:pt x="66675" y="0"/>
+                  </a:cubicBezTo>
+                  <a:close/>
+                </a:path>
+              </a:pathLst>
+            </a:custGeom>
+            <a:solidFill>
+              <a:srgbClr val="E6E6E6"/>
+            </a:solidFill>
+            <a:ln>
+              <a:noFill/>
+            </a:ln>
+          </p:spPr>
+        </p:sp>
+        <p:sp>
+          <p:nvSpPr>
+            <p:cNvPr id="219" name="freeform-219"/>
+            <p:cNvSpPr/>
+            <p:nvPr/>
+          </p:nvSpPr>
+          <p:spPr>
+            <a:xfrm>
+              <a:off x="11382375" y="5400675"/>
+              <a:ext cx="76200" cy="266700"/>
+            </a:xfrm>
+            <a:custGeom>
+              <a:avLst/>
+              <a:gdLst/>
+              <a:ahLst/>
+              <a:cxnLst/>
+              <a:rect l="0" t="0" r="0" b="0"/>
+              <a:pathLst>
+                <a:path w="76200" h="266700">
+                  <a:moveTo>
+                    <a:pt x="19050" y="0"/>
+                  </a:moveTo>
+                  <a:cubicBezTo>
+                    <a:pt x="22193" y="0"/>
+                    <a:pt x="25337" y="0"/>
+                    <a:pt x="28575" y="0"/>
+                  </a:cubicBezTo>
+                  <a:cubicBezTo>
+                    <a:pt x="28804" y="3324"/>
+                    <a:pt x="28804" y="3324"/>
+                    <a:pt x="29985" y="20164"/>
+                  </a:cubicBezTo>
+                  <a:cubicBezTo>
+                    <a:pt x="30699" y="28832"/>
+                    <a:pt x="31413" y="37500"/>
+                    <a:pt x="32147" y="46434"/>
+                  </a:cubicBezTo>
+                  <a:cubicBezTo>
+                    <a:pt x="32814" y="55054"/>
+                    <a:pt x="33471" y="63675"/>
+                    <a:pt x="34157" y="72552"/>
+                  </a:cubicBezTo>
+                  <a:cubicBezTo>
+                    <a:pt x="38100" y="95250"/>
+                    <a:pt x="38100" y="95250"/>
+                    <a:pt x="57150" y="114300"/>
+                  </a:cubicBezTo>
+                  <a:cubicBezTo>
+                    <a:pt x="57150" y="123730"/>
+                    <a:pt x="57150" y="133160"/>
+                    <a:pt x="57150" y="142875"/>
+                  </a:cubicBezTo>
+                  <a:cubicBezTo>
+                    <a:pt x="47720" y="142875"/>
+                    <a:pt x="38290" y="142875"/>
+                    <a:pt x="28575" y="142875"/>
+                  </a:cubicBezTo>
+                  <a:cubicBezTo>
+                    <a:pt x="31528" y="156572"/>
+                    <a:pt x="34509" y="170259"/>
+                    <a:pt x="37509" y="183947"/>
+                  </a:cubicBezTo>
+                  <a:cubicBezTo>
+                    <a:pt x="39167" y="191576"/>
+                    <a:pt x="40824" y="199206"/>
+                    <a:pt x="42529" y="207054"/>
+                  </a:cubicBezTo>
+                  <a:cubicBezTo>
+                    <a:pt x="47625" y="228600"/>
+                    <a:pt x="47625" y="228600"/>
+                    <a:pt x="57150" y="257175"/>
+                  </a:cubicBezTo>
+                  <a:cubicBezTo>
+                    <a:pt x="63437" y="260318"/>
+                    <a:pt x="69723" y="263461"/>
+                    <a:pt x="76200" y="266700"/>
+                  </a:cubicBezTo>
+                  <a:cubicBezTo>
+                    <a:pt x="66770" y="266700"/>
+                    <a:pt x="57340" y="266700"/>
+                    <a:pt x="47625" y="266700"/>
+                  </a:cubicBezTo>
+                  <a:cubicBezTo>
+                    <a:pt x="34414" y="250698"/>
+                    <a:pt x="34414" y="250698"/>
+                    <a:pt x="22022" y="229791"/>
+                  </a:cubicBezTo>
+                  <a:cubicBezTo>
+                    <a:pt x="17869" y="222942"/>
+                    <a:pt x="13706" y="216084"/>
+                    <a:pt x="9411" y="209026"/>
+                  </a:cubicBezTo>
+                  <a:cubicBezTo>
+                    <a:pt x="0" y="190500"/>
+                    <a:pt x="0" y="190500"/>
+                    <a:pt x="0" y="171450"/>
+                  </a:cubicBezTo>
+                  <a:cubicBezTo>
+                    <a:pt x="6287" y="171450"/>
+                    <a:pt x="12573" y="171450"/>
+                    <a:pt x="19050" y="171450"/>
+                  </a:cubicBezTo>
+                  <a:cubicBezTo>
+                    <a:pt x="19050" y="158877"/>
+                    <a:pt x="19050" y="146304"/>
+                    <a:pt x="19050" y="133350"/>
+                  </a:cubicBezTo>
+                  <a:cubicBezTo>
+                    <a:pt x="25337" y="133350"/>
+                    <a:pt x="31623" y="133350"/>
+                    <a:pt x="38100" y="133350"/>
+                  </a:cubicBezTo>
+                  <a:cubicBezTo>
+                    <a:pt x="31813" y="123920"/>
+                    <a:pt x="25527" y="114490"/>
+                    <a:pt x="19050" y="104775"/>
+                  </a:cubicBezTo>
+                  <a:cubicBezTo>
+                    <a:pt x="17193" y="79067"/>
+                    <a:pt x="17193" y="79067"/>
+                    <a:pt x="17859" y="50597"/>
+                  </a:cubicBezTo>
+                  <a:cubicBezTo>
+                    <a:pt x="18031" y="41138"/>
+                    <a:pt x="18202" y="31671"/>
+                    <a:pt x="18383" y="21917"/>
+                  </a:cubicBezTo>
+                  <a:cubicBezTo>
+                    <a:pt x="18602" y="14688"/>
+                    <a:pt x="18821" y="7449"/>
+                    <a:pt x="19050" y="0"/>
+                  </a:cubicBezTo>
+                  <a:close/>
+                </a:path>
+              </a:pathLst>
+            </a:custGeom>
+            <a:solidFill>
+              <a:srgbClr val="0B212B"/>
+            </a:solidFill>
+            <a:ln>
+              <a:noFill/>
+            </a:ln>
+          </p:spPr>
+        </p:sp>
+        <p:sp>
+          <p:nvSpPr>
+            <p:cNvPr id="220" name="freeform-220"/>
+            <p:cNvSpPr/>
+            <p:nvPr/>
+          </p:nvSpPr>
+          <p:spPr>
+            <a:xfrm>
+              <a:off x="11696700" y="5191125"/>
+              <a:ext cx="123825" cy="76200"/>
+            </a:xfrm>
+            <a:custGeom>
+              <a:avLst/>
+              <a:gdLst/>
+              <a:ahLst/>
+              <a:cxnLst/>
+              <a:rect l="0" t="0" r="0" b="0"/>
+              <a:pathLst>
+                <a:path w="123825" h="76200">
+                  <a:moveTo>
+                    <a:pt x="0" y="0"/>
+                  </a:moveTo>
+                  <a:cubicBezTo>
+                    <a:pt x="45244" y="7144"/>
+                    <a:pt x="45244" y="7144"/>
+                    <a:pt x="66675" y="28575"/>
+                  </a:cubicBezTo>
+                  <a:cubicBezTo>
+                    <a:pt x="79248" y="28575"/>
+                    <a:pt x="91821" y="28575"/>
+                    <a:pt x="104775" y="28575"/>
+                  </a:cubicBezTo>
+                  <a:cubicBezTo>
+                    <a:pt x="111062" y="22289"/>
+                    <a:pt x="117348" y="16002"/>
+                    <a:pt x="123825" y="9525"/>
+                  </a:cubicBezTo>
+                  <a:cubicBezTo>
+                    <a:pt x="123825" y="25241"/>
+                    <a:pt x="123825" y="40957"/>
+                    <a:pt x="123825" y="57150"/>
+                  </a:cubicBezTo>
+                  <a:cubicBezTo>
+                    <a:pt x="104965" y="63436"/>
+                    <a:pt x="86106" y="69723"/>
+                    <a:pt x="66675" y="76200"/>
+                  </a:cubicBezTo>
+                  <a:cubicBezTo>
+                    <a:pt x="64713" y="73943"/>
+                    <a:pt x="64713" y="73943"/>
+                    <a:pt x="54769" y="62503"/>
+                  </a:cubicBezTo>
+                  <a:cubicBezTo>
+                    <a:pt x="36366" y="46072"/>
+                    <a:pt x="23984" y="42234"/>
+                    <a:pt x="0" y="38100"/>
+                  </a:cubicBezTo>
+                  <a:cubicBezTo>
+                    <a:pt x="0" y="25527"/>
+                    <a:pt x="0" y="12954"/>
+                    <a:pt x="0" y="0"/>
+                  </a:cubicBezTo>
+                  <a:close/>
+                </a:path>
+              </a:pathLst>
+            </a:custGeom>
+            <a:solidFill>
+              <a:srgbClr val="3C7301"/>
+            </a:solidFill>
+            <a:ln>
+              <a:noFill/>
+            </a:ln>
+          </p:spPr>
+        </p:sp>
+        <p:sp>
+          <p:nvSpPr>
+            <p:cNvPr id="221" name="freeform-221"/>
+            <p:cNvSpPr/>
+            <p:nvPr/>
+          </p:nvSpPr>
+          <p:spPr>
+            <a:xfrm>
+              <a:off x="11582400" y="5353050"/>
+              <a:ext cx="76200" cy="77991"/>
+            </a:xfrm>
+            <a:custGeom>
+              <a:avLst/>
+              <a:gdLst/>
+              <a:ahLst/>
+              <a:cxnLst/>
+              <a:rect l="0" t="0" r="0" b="0"/>
+              <a:pathLst>
+                <a:path w="76200" h="77991">
+                  <a:moveTo>
+                    <a:pt x="66675" y="0"/>
+                  </a:moveTo>
+                  <a:cubicBezTo>
+                    <a:pt x="70304" y="22155"/>
+                    <a:pt x="73466" y="44396"/>
+                    <a:pt x="76200" y="66675"/>
+                  </a:cubicBezTo>
+                  <a:cubicBezTo>
+                    <a:pt x="66675" y="76200"/>
+                    <a:pt x="66675" y="76200"/>
+                    <a:pt x="43453" y="77991"/>
+                  </a:cubicBezTo>
+                  <a:cubicBezTo>
+                    <a:pt x="19050" y="76200"/>
+                    <a:pt x="19050" y="76200"/>
+                    <a:pt x="0" y="57150"/>
+                  </a:cubicBezTo>
+                  <a:cubicBezTo>
+                    <a:pt x="1191" y="38100"/>
+                    <a:pt x="1191" y="38100"/>
+                    <a:pt x="9525" y="19050"/>
+                  </a:cubicBezTo>
+                  <a:cubicBezTo>
+                    <a:pt x="29975" y="5858"/>
+                    <a:pt x="42281" y="0"/>
+                    <a:pt x="66675" y="0"/>
+                  </a:cubicBezTo>
+                  <a:close/>
+                </a:path>
+              </a:pathLst>
+            </a:custGeom>
+            <a:solidFill>
+              <a:srgbClr val="1C4214"/>
+            </a:solidFill>
+            <a:ln>
+              <a:noFill/>
+            </a:ln>
+          </p:spPr>
+        </p:sp>
+        <p:sp>
+          <p:nvSpPr>
+            <p:cNvPr id="222" name="freeform-222"/>
+            <p:cNvSpPr/>
+            <p:nvPr/>
+          </p:nvSpPr>
+          <p:spPr>
+            <a:xfrm>
+              <a:off x="11753850" y="5495925"/>
+              <a:ext cx="89906" cy="161925"/>
+            </a:xfrm>
+            <a:custGeom>
+              <a:avLst/>
+              <a:gdLst/>
+              <a:ahLst/>
+              <a:cxnLst/>
+              <a:rect l="0" t="0" r="0" b="0"/>
+              <a:pathLst>
+                <a:path w="89906" h="161925">
+                  <a:moveTo>
+                    <a:pt x="76200" y="0"/>
+                  </a:moveTo>
+                  <a:cubicBezTo>
+                    <a:pt x="79343" y="0"/>
+                    <a:pt x="82487" y="0"/>
+                    <a:pt x="85725" y="0"/>
+                  </a:cubicBezTo>
+                  <a:cubicBezTo>
+                    <a:pt x="89906" y="50978"/>
+                    <a:pt x="89906" y="50978"/>
+                    <a:pt x="85725" y="76200"/>
+                  </a:cubicBezTo>
+                  <a:cubicBezTo>
+                    <a:pt x="63103" y="91678"/>
+                    <a:pt x="63103" y="91678"/>
+                    <a:pt x="38100" y="104775"/>
+                  </a:cubicBezTo>
+                  <a:cubicBezTo>
+                    <a:pt x="25603" y="135141"/>
+                    <a:pt x="25603" y="135141"/>
+                    <a:pt x="19050" y="161925"/>
+                  </a:cubicBezTo>
+                  <a:cubicBezTo>
+                    <a:pt x="12763" y="155639"/>
+                    <a:pt x="6477" y="149352"/>
+                    <a:pt x="0" y="142875"/>
+                  </a:cubicBezTo>
+                  <a:cubicBezTo>
+                    <a:pt x="3181" y="106918"/>
+                    <a:pt x="23689" y="79705"/>
+                    <a:pt x="42862" y="50006"/>
+                  </a:cubicBezTo>
+                  <a:cubicBezTo>
+                    <a:pt x="48854" y="40624"/>
+                    <a:pt x="54845" y="31242"/>
+                    <a:pt x="61017" y="21584"/>
+                  </a:cubicBezTo>
+                  <a:cubicBezTo>
+                    <a:pt x="66027" y="14459"/>
+                    <a:pt x="71037" y="7334"/>
+                    <a:pt x="76200" y="0"/>
+                  </a:cubicBezTo>
+                  <a:close/>
+                </a:path>
+              </a:pathLst>
+            </a:custGeom>
+            <a:solidFill>
+              <a:srgbClr val="3D7701"/>
+            </a:solidFill>
+            <a:ln>
+              <a:noFill/>
+            </a:ln>
+          </p:spPr>
+        </p:sp>
+        <p:sp>
+          <p:nvSpPr>
+            <p:cNvPr id="223" name="freeform-223"/>
+            <p:cNvSpPr/>
+            <p:nvPr/>
+          </p:nvSpPr>
+          <p:spPr>
+            <a:xfrm>
+              <a:off x="11353800" y="5238750"/>
+              <a:ext cx="85725" cy="161925"/>
+            </a:xfrm>
+            <a:custGeom>
+              <a:avLst/>
+              <a:gdLst/>
+              <a:ahLst/>
+              <a:cxnLst/>
+              <a:rect l="0" t="0" r="0" b="0"/>
+              <a:pathLst>
+                <a:path w="85725" h="161925">
+                  <a:moveTo>
+                    <a:pt x="57150" y="0"/>
+                  </a:moveTo>
+                  <a:cubicBezTo>
+                    <a:pt x="62770" y="17412"/>
+                    <a:pt x="62770" y="17412"/>
+                    <a:pt x="66675" y="38100"/>
+                  </a:cubicBezTo>
+                  <a:cubicBezTo>
+                    <a:pt x="52978" y="64294"/>
+                    <a:pt x="52978" y="64294"/>
+                    <a:pt x="38100" y="85725"/>
+                  </a:cubicBezTo>
+                  <a:cubicBezTo>
+                    <a:pt x="44387" y="85725"/>
+                    <a:pt x="50673" y="85725"/>
+                    <a:pt x="57150" y="85725"/>
+                  </a:cubicBezTo>
+                  <a:cubicBezTo>
+                    <a:pt x="60293" y="76295"/>
+                    <a:pt x="63437" y="66865"/>
+                    <a:pt x="66675" y="57150"/>
+                  </a:cubicBezTo>
+                  <a:cubicBezTo>
+                    <a:pt x="72962" y="57150"/>
+                    <a:pt x="79248" y="57150"/>
+                    <a:pt x="85725" y="57150"/>
+                  </a:cubicBezTo>
+                  <a:cubicBezTo>
+                    <a:pt x="85725" y="63436"/>
+                    <a:pt x="85725" y="69723"/>
+                    <a:pt x="85725" y="76200"/>
+                  </a:cubicBezTo>
+                  <a:cubicBezTo>
+                    <a:pt x="79438" y="76200"/>
+                    <a:pt x="73152" y="76200"/>
+                    <a:pt x="66675" y="76200"/>
+                  </a:cubicBezTo>
+                  <a:cubicBezTo>
+                    <a:pt x="63532" y="85630"/>
+                    <a:pt x="60388" y="95060"/>
+                    <a:pt x="57150" y="104775"/>
+                  </a:cubicBezTo>
+                  <a:cubicBezTo>
+                    <a:pt x="47720" y="104775"/>
+                    <a:pt x="38290" y="104775"/>
+                    <a:pt x="28575" y="104775"/>
+                  </a:cubicBezTo>
+                  <a:cubicBezTo>
+                    <a:pt x="27394" y="110671"/>
+                    <a:pt x="26213" y="116567"/>
+                    <a:pt x="25003" y="122634"/>
+                  </a:cubicBezTo>
+                  <a:cubicBezTo>
+                    <a:pt x="19050" y="142875"/>
+                    <a:pt x="19050" y="142875"/>
+                    <a:pt x="0" y="161925"/>
+                  </a:cubicBezTo>
+                  <a:cubicBezTo>
+                    <a:pt x="4029" y="100098"/>
+                    <a:pt x="27727" y="53959"/>
+                    <a:pt x="57150" y="0"/>
+                  </a:cubicBezTo>
+                  <a:close/>
+                </a:path>
+              </a:pathLst>
+            </a:custGeom>
+            <a:solidFill>
+              <a:srgbClr val="233130"/>
+            </a:solidFill>
+            <a:ln>
+              <a:noFill/>
+            </a:ln>
+          </p:spPr>
+        </p:sp>
+        <p:sp>
+          <p:nvSpPr>
+            <p:cNvPr id="224" name="freeform-224"/>
+            <p:cNvSpPr/>
+            <p:nvPr/>
+          </p:nvSpPr>
+          <p:spPr>
+            <a:xfrm>
+              <a:off x="11820525" y="5578678"/>
+              <a:ext cx="104775" cy="88697"/>
+            </a:xfrm>
+            <a:custGeom>
+              <a:avLst/>
+              <a:gdLst/>
+              <a:ahLst/>
+              <a:cxnLst/>
+              <a:rect l="0" t="0" r="0" b="0"/>
+              <a:pathLst>
+                <a:path w="104775" h="88697">
+                  <a:moveTo>
+                    <a:pt x="57150" y="2972"/>
+                  </a:moveTo>
+                  <a:cubicBezTo>
+                    <a:pt x="82753" y="0"/>
+                    <a:pt x="82753" y="0"/>
+                    <a:pt x="104775" y="2972"/>
+                  </a:cubicBezTo>
+                  <a:cubicBezTo>
+                    <a:pt x="101632" y="21831"/>
+                    <a:pt x="98488" y="40691"/>
+                    <a:pt x="95250" y="60122"/>
+                  </a:cubicBezTo>
+                  <a:cubicBezTo>
+                    <a:pt x="79534" y="56979"/>
+                    <a:pt x="63818" y="53835"/>
+                    <a:pt x="47625" y="50597"/>
+                  </a:cubicBezTo>
+                  <a:cubicBezTo>
+                    <a:pt x="44482" y="60027"/>
+                    <a:pt x="41338" y="69456"/>
+                    <a:pt x="38100" y="79172"/>
+                  </a:cubicBezTo>
+                  <a:cubicBezTo>
+                    <a:pt x="18459" y="85725"/>
+                    <a:pt x="18459" y="85725"/>
+                    <a:pt x="0" y="88697"/>
+                  </a:cubicBezTo>
+                  <a:cubicBezTo>
+                    <a:pt x="3143" y="79267"/>
+                    <a:pt x="6287" y="69837"/>
+                    <a:pt x="9525" y="60122"/>
+                  </a:cubicBezTo>
+                  <a:cubicBezTo>
+                    <a:pt x="15812" y="56979"/>
+                    <a:pt x="22098" y="53835"/>
+                    <a:pt x="28575" y="50597"/>
+                  </a:cubicBezTo>
+                  <a:cubicBezTo>
+                    <a:pt x="32699" y="42539"/>
+                    <a:pt x="36824" y="34490"/>
+                    <a:pt x="41072" y="26194"/>
+                  </a:cubicBezTo>
+                  <a:cubicBezTo>
+                    <a:pt x="46377" y="18526"/>
+                    <a:pt x="51683" y="10868"/>
+                    <a:pt x="57150" y="2972"/>
+                  </a:cubicBezTo>
+                  <a:close/>
+                </a:path>
+              </a:pathLst>
+            </a:custGeom>
+            <a:solidFill>
+              <a:srgbClr val="448302"/>
+            </a:solidFill>
+            <a:ln>
+              <a:noFill/>
+            </a:ln>
+          </p:spPr>
+        </p:sp>
+        <p:sp>
+          <p:nvSpPr>
+            <p:cNvPr id="225" name="freeform-225"/>
+            <p:cNvSpPr/>
+            <p:nvPr/>
+          </p:nvSpPr>
+          <p:spPr>
+            <a:xfrm>
+              <a:off x="11368068" y="5400675"/>
+              <a:ext cx="52407" cy="152400"/>
+            </a:xfrm>
+            <a:custGeom>
+              <a:avLst/>
+              <a:gdLst/>
+              <a:ahLst/>
+              <a:cxnLst/>
+              <a:rect l="0" t="0" r="0" b="0"/>
+              <a:pathLst>
+                <a:path w="52407" h="152400">
+                  <a:moveTo>
+                    <a:pt x="4782" y="0"/>
+                  </a:moveTo>
+                  <a:cubicBezTo>
+                    <a:pt x="11068" y="0"/>
+                    <a:pt x="17355" y="0"/>
+                    <a:pt x="23832" y="0"/>
+                  </a:cubicBezTo>
+                  <a:cubicBezTo>
+                    <a:pt x="24298" y="5639"/>
+                    <a:pt x="24765" y="11268"/>
+                    <a:pt x="25241" y="17078"/>
+                  </a:cubicBezTo>
+                  <a:cubicBezTo>
+                    <a:pt x="29213" y="58969"/>
+                    <a:pt x="33833" y="94955"/>
+                    <a:pt x="52407" y="133350"/>
+                  </a:cubicBezTo>
+                  <a:cubicBezTo>
+                    <a:pt x="46120" y="133350"/>
+                    <a:pt x="39834" y="133350"/>
+                    <a:pt x="33357" y="133350"/>
+                  </a:cubicBezTo>
+                  <a:cubicBezTo>
+                    <a:pt x="33357" y="139636"/>
+                    <a:pt x="33357" y="145923"/>
+                    <a:pt x="33357" y="152400"/>
+                  </a:cubicBezTo>
+                  <a:cubicBezTo>
+                    <a:pt x="27070" y="152400"/>
+                    <a:pt x="20784" y="152400"/>
+                    <a:pt x="14307" y="152400"/>
+                  </a:cubicBezTo>
+                  <a:cubicBezTo>
+                    <a:pt x="0" y="123796"/>
+                    <a:pt x="3896" y="97241"/>
+                    <a:pt x="4191" y="65484"/>
+                  </a:cubicBezTo>
+                  <a:cubicBezTo>
+                    <a:pt x="4277" y="53283"/>
+                    <a:pt x="4362" y="41072"/>
+                    <a:pt x="4448" y="28499"/>
+                  </a:cubicBezTo>
+                  <a:cubicBezTo>
+                    <a:pt x="4553" y="19098"/>
+                    <a:pt x="4667" y="9687"/>
+                    <a:pt x="4782" y="0"/>
+                  </a:cubicBezTo>
+                  <a:close/>
+                </a:path>
+              </a:pathLst>
+            </a:custGeom>
+            <a:solidFill>
+              <a:srgbClr val="468802"/>
+            </a:solidFill>
+            <a:ln>
+              <a:noFill/>
+            </a:ln>
+          </p:spPr>
+        </p:sp>
+        <p:sp>
+          <p:nvSpPr>
+            <p:cNvPr id="226" name="freeform-226"/>
+            <p:cNvSpPr/>
+            <p:nvPr/>
+          </p:nvSpPr>
+          <p:spPr>
+            <a:xfrm>
+              <a:off x="11753850" y="5610225"/>
+              <a:ext cx="190500" cy="152400"/>
+            </a:xfrm>
+            <a:custGeom>
+              <a:avLst/>
+              <a:gdLst/>
+              <a:ahLst/>
+              <a:cxnLst/>
+              <a:rect l="0" t="0" r="0" b="0"/>
+              <a:pathLst>
+                <a:path w="190500" h="152400">
+                  <a:moveTo>
+                    <a:pt x="171450" y="0"/>
+                  </a:moveTo>
+                  <a:cubicBezTo>
+                    <a:pt x="181566" y="17859"/>
+                    <a:pt x="181566" y="17859"/>
+                    <a:pt x="190500" y="38100"/>
+                  </a:cubicBezTo>
+                  <a:cubicBezTo>
+                    <a:pt x="187357" y="44386"/>
+                    <a:pt x="184213" y="50673"/>
+                    <a:pt x="180975" y="57150"/>
+                  </a:cubicBezTo>
+                  <a:cubicBezTo>
+                    <a:pt x="177336" y="56950"/>
+                    <a:pt x="177336" y="56950"/>
+                    <a:pt x="158953" y="55959"/>
+                  </a:cubicBezTo>
+                  <a:cubicBezTo>
+                    <a:pt x="133350" y="57150"/>
+                    <a:pt x="133350" y="57150"/>
+                    <a:pt x="104775" y="76200"/>
+                  </a:cubicBezTo>
+                  <a:cubicBezTo>
+                    <a:pt x="98488" y="69914"/>
+                    <a:pt x="92202" y="63627"/>
+                    <a:pt x="85725" y="57150"/>
+                  </a:cubicBezTo>
+                  <a:cubicBezTo>
+                    <a:pt x="95155" y="54007"/>
+                    <a:pt x="104585" y="50864"/>
+                    <a:pt x="114300" y="47625"/>
+                  </a:cubicBezTo>
+                  <a:cubicBezTo>
+                    <a:pt x="117443" y="41339"/>
+                    <a:pt x="120587" y="35052"/>
+                    <a:pt x="123825" y="28575"/>
+                  </a:cubicBezTo>
+                  <a:cubicBezTo>
+                    <a:pt x="139541" y="31718"/>
+                    <a:pt x="155257" y="34861"/>
+                    <a:pt x="171450" y="38100"/>
+                  </a:cubicBezTo>
+                  <a:cubicBezTo>
+                    <a:pt x="171450" y="25527"/>
+                    <a:pt x="171450" y="12954"/>
+                    <a:pt x="171450" y="0"/>
+                  </a:cubicBezTo>
+                  <a:close/>
+                  <a:moveTo>
+                    <a:pt x="47625" y="114300"/>
+                  </a:moveTo>
+                  <a:cubicBezTo>
+                    <a:pt x="57055" y="117443"/>
+                    <a:pt x="66485" y="120586"/>
+                    <a:pt x="76200" y="123825"/>
+                  </a:cubicBezTo>
+                  <a:cubicBezTo>
+                    <a:pt x="73057" y="130111"/>
+                    <a:pt x="69913" y="136398"/>
+                    <a:pt x="66675" y="142875"/>
+                  </a:cubicBezTo>
+                  <a:cubicBezTo>
+                    <a:pt x="44558" y="146752"/>
+                    <a:pt x="22317" y="149962"/>
+                    <a:pt x="0" y="152400"/>
+                  </a:cubicBezTo>
+                  <a:cubicBezTo>
+                    <a:pt x="22022" y="132759"/>
+                    <a:pt x="22022" y="132759"/>
+                    <a:pt x="47625" y="114300"/>
+                  </a:cubicBezTo>
+                  <a:close/>
+                </a:path>
+              </a:pathLst>
+            </a:custGeom>
+            <a:solidFill>
+              <a:srgbClr val="0269B0"/>
+            </a:solidFill>
+            <a:ln>
+              <a:noFill/>
+            </a:ln>
+          </p:spPr>
+        </p:sp>
+        <p:sp>
+          <p:nvSpPr>
+            <p:cNvPr id="227" name="freeform-227"/>
+            <p:cNvSpPr/>
+            <p:nvPr/>
+          </p:nvSpPr>
+          <p:spPr>
+            <a:xfrm>
+              <a:off x="11325225" y="5162550"/>
+              <a:ext cx="114300" cy="180975"/>
+            </a:xfrm>
+            <a:custGeom>
+              <a:avLst/>
+              <a:gdLst/>
+              <a:ahLst/>
+              <a:cxnLst/>
+              <a:rect l="0" t="0" r="0" b="0"/>
+              <a:pathLst>
+                <a:path w="114300" h="180975">
+                  <a:moveTo>
+                    <a:pt x="114300" y="0"/>
+                  </a:moveTo>
+                  <a:cubicBezTo>
+                    <a:pt x="100803" y="28680"/>
+                    <a:pt x="84868" y="53854"/>
+                    <a:pt x="66675" y="79772"/>
+                  </a:cubicBezTo>
+                  <a:cubicBezTo>
+                    <a:pt x="44453" y="112566"/>
+                    <a:pt x="28985" y="142227"/>
+                    <a:pt x="19050" y="180975"/>
+                  </a:cubicBezTo>
+                  <a:cubicBezTo>
+                    <a:pt x="7963" y="165202"/>
+                    <a:pt x="7963" y="165202"/>
+                    <a:pt x="0" y="142875"/>
+                  </a:cubicBezTo>
+                  <a:cubicBezTo>
+                    <a:pt x="9306" y="117577"/>
+                    <a:pt x="9306" y="117577"/>
+                    <a:pt x="25003" y="90488"/>
+                  </a:cubicBezTo>
+                  <a:cubicBezTo>
+                    <a:pt x="27518" y="86020"/>
+                    <a:pt x="27518" y="86020"/>
+                    <a:pt x="40262" y="63398"/>
+                  </a:cubicBezTo>
+                  <a:cubicBezTo>
+                    <a:pt x="82591" y="0"/>
+                    <a:pt x="82591" y="0"/>
+                    <a:pt x="114300" y="0"/>
+                  </a:cubicBezTo>
+                  <a:close/>
+                </a:path>
+              </a:pathLst>
+            </a:custGeom>
+            <a:solidFill>
+              <a:srgbClr val="434343"/>
+            </a:solidFill>
+            <a:ln>
+              <a:noFill/>
+            </a:ln>
+          </p:spPr>
+        </p:sp>
+        <p:sp>
+          <p:nvSpPr>
+            <p:cNvPr id="228" name="freeform-228"/>
+            <p:cNvSpPr/>
+            <p:nvPr/>
+          </p:nvSpPr>
+          <p:spPr>
+            <a:xfrm>
+              <a:off x="11658605" y="5245298"/>
+              <a:ext cx="152400" cy="52378"/>
+            </a:xfrm>
+            <a:custGeom>
+              <a:avLst/>
+              <a:gdLst/>
+              <a:ahLst/>
+              <a:cxnLst/>
+              <a:rect l="0" t="0" r="0" b="0"/>
+              <a:pathLst>
+                <a:path w="152400" h="52378">
+                  <a:moveTo>
+                    <a:pt x="52978" y="0"/>
+                  </a:moveTo>
+                  <a:cubicBezTo>
+                    <a:pt x="76200" y="2972"/>
+                    <a:pt x="76200" y="2972"/>
+                    <a:pt x="95250" y="22022"/>
+                  </a:cubicBezTo>
+                  <a:cubicBezTo>
+                    <a:pt x="125006" y="18459"/>
+                    <a:pt x="125006" y="18459"/>
+                    <a:pt x="152400" y="12497"/>
+                  </a:cubicBezTo>
+                  <a:cubicBezTo>
+                    <a:pt x="149257" y="21927"/>
+                    <a:pt x="146113" y="31366"/>
+                    <a:pt x="142875" y="41072"/>
+                  </a:cubicBezTo>
+                  <a:cubicBezTo>
+                    <a:pt x="88640" y="52378"/>
+                    <a:pt x="53092" y="47387"/>
+                    <a:pt x="0" y="31547"/>
+                  </a:cubicBezTo>
+                  <a:cubicBezTo>
+                    <a:pt x="17250" y="9763"/>
+                    <a:pt x="24832" y="3429"/>
+                    <a:pt x="52978" y="0"/>
+                  </a:cubicBezTo>
+                  <a:close/>
+                </a:path>
+              </a:pathLst>
+            </a:custGeom>
+            <a:solidFill>
+              <a:srgbClr val="037ACD"/>
+            </a:solidFill>
+            <a:ln>
+              <a:noFill/>
+            </a:ln>
+          </p:spPr>
+        </p:sp>
+        <p:sp>
+          <p:nvSpPr>
+            <p:cNvPr id="229" name="freeform-229"/>
+            <p:cNvSpPr/>
+            <p:nvPr/>
+          </p:nvSpPr>
+          <p:spPr>
+            <a:xfrm>
+              <a:off x="11534775" y="5123126"/>
+              <a:ext cx="114300" cy="87049"/>
+            </a:xfrm>
+            <a:custGeom>
+              <a:avLst/>
+              <a:gdLst/>
+              <a:ahLst/>
+              <a:cxnLst/>
+              <a:rect l="0" t="0" r="0" b="0"/>
+              <a:pathLst>
+                <a:path w="114300" h="87049">
+                  <a:moveTo>
+                    <a:pt x="114300" y="1324"/>
+                  </a:moveTo>
+                  <a:cubicBezTo>
+                    <a:pt x="111157" y="10754"/>
+                    <a:pt x="108013" y="20183"/>
+                    <a:pt x="104775" y="29899"/>
+                  </a:cubicBezTo>
+                  <a:cubicBezTo>
+                    <a:pt x="85773" y="36376"/>
+                    <a:pt x="66713" y="42710"/>
+                    <a:pt x="47625" y="48949"/>
+                  </a:cubicBezTo>
+                  <a:cubicBezTo>
+                    <a:pt x="20241" y="69190"/>
+                    <a:pt x="20241" y="69190"/>
+                    <a:pt x="0" y="87049"/>
+                  </a:cubicBezTo>
+                  <a:cubicBezTo>
+                    <a:pt x="13868" y="24632"/>
+                    <a:pt x="13868" y="24632"/>
+                    <a:pt x="35719" y="6677"/>
+                  </a:cubicBezTo>
+                  <a:cubicBezTo>
+                    <a:pt x="62465" y="0"/>
+                    <a:pt x="86849" y="76"/>
+                    <a:pt x="114300" y="1324"/>
+                  </a:cubicBezTo>
+                  <a:close/>
+                </a:path>
+              </a:pathLst>
+            </a:custGeom>
+            <a:solidFill>
+              <a:srgbClr val="448302"/>
+            </a:solidFill>
+            <a:ln>
+              <a:noFill/>
+            </a:ln>
+          </p:spPr>
+        </p:sp>
+        <p:sp>
+          <p:nvSpPr>
+            <p:cNvPr id="230" name="freeform-230"/>
+            <p:cNvSpPr/>
+            <p:nvPr/>
+          </p:nvSpPr>
+          <p:spPr>
+            <a:xfrm>
+              <a:off x="11944350" y="5581650"/>
+              <a:ext cx="114300" cy="152400"/>
+            </a:xfrm>
+            <a:custGeom>
+              <a:avLst/>
+              <a:gdLst/>
+              <a:ahLst/>
+              <a:cxnLst/>
+              <a:rect l="0" t="0" r="0" b="0"/>
+              <a:pathLst>
+                <a:path w="114300" h="152400">
+                  <a:moveTo>
+                    <a:pt x="95250" y="0"/>
+                  </a:moveTo>
+                  <a:cubicBezTo>
+                    <a:pt x="101537" y="0"/>
+                    <a:pt x="107823" y="0"/>
+                    <a:pt x="114300" y="0"/>
+                  </a:cubicBezTo>
+                  <a:cubicBezTo>
+                    <a:pt x="102003" y="44129"/>
+                    <a:pt x="85306" y="73323"/>
+                    <a:pt x="55959" y="108347"/>
+                  </a:cubicBezTo>
+                  <a:cubicBezTo>
+                    <a:pt x="52511" y="112509"/>
+                    <a:pt x="52511" y="112509"/>
+                    <a:pt x="35052" y="133569"/>
+                  </a:cubicBezTo>
+                  <a:cubicBezTo>
+                    <a:pt x="32414" y="136684"/>
+                    <a:pt x="32414" y="136684"/>
+                    <a:pt x="19050" y="152400"/>
+                  </a:cubicBezTo>
+                  <a:cubicBezTo>
+                    <a:pt x="12763" y="146114"/>
+                    <a:pt x="6477" y="139827"/>
+                    <a:pt x="0" y="133350"/>
+                  </a:cubicBezTo>
+                  <a:cubicBezTo>
+                    <a:pt x="4486" y="128511"/>
+                    <a:pt x="8963" y="123673"/>
+                    <a:pt x="13583" y="118691"/>
+                  </a:cubicBezTo>
+                  <a:cubicBezTo>
+                    <a:pt x="47787" y="80867"/>
+                    <a:pt x="75267" y="47015"/>
+                    <a:pt x="95250" y="0"/>
+                  </a:cubicBezTo>
+                  <a:close/>
+                </a:path>
+              </a:pathLst>
+            </a:custGeom>
+            <a:solidFill>
+              <a:srgbClr val="404040"/>
+            </a:solidFill>
+            <a:ln>
+              <a:noFill/>
+            </a:ln>
+          </p:spPr>
+        </p:sp>
+        <p:sp>
+          <p:nvSpPr>
+            <p:cNvPr id="231" name="freeform-231"/>
+            <p:cNvSpPr/>
+            <p:nvPr/>
+          </p:nvSpPr>
+          <p:spPr>
+            <a:xfrm>
+              <a:off x="11934825" y="5314950"/>
+              <a:ext cx="47625" cy="104775"/>
+            </a:xfrm>
+            <a:custGeom>
+              <a:avLst/>
+              <a:gdLst/>
+              <a:ahLst/>
+              <a:cxnLst/>
+              <a:rect l="0" t="0" r="0" b="0"/>
+              <a:pathLst>
+                <a:path w="47625" h="104775">
+                  <a:moveTo>
+                    <a:pt x="19050" y="0"/>
+                  </a:moveTo>
+                  <a:cubicBezTo>
+                    <a:pt x="22193" y="12573"/>
+                    <a:pt x="25337" y="25146"/>
+                    <a:pt x="28575" y="38100"/>
+                  </a:cubicBezTo>
+                  <a:cubicBezTo>
+                    <a:pt x="34862" y="38100"/>
+                    <a:pt x="41148" y="38100"/>
+                    <a:pt x="47625" y="38100"/>
+                  </a:cubicBezTo>
+                  <a:cubicBezTo>
+                    <a:pt x="47625" y="60103"/>
+                    <a:pt x="47625" y="82106"/>
+                    <a:pt x="47625" y="104775"/>
+                  </a:cubicBezTo>
+                  <a:cubicBezTo>
+                    <a:pt x="31909" y="92202"/>
+                    <a:pt x="16193" y="79629"/>
+                    <a:pt x="0" y="66675"/>
+                  </a:cubicBezTo>
+                  <a:cubicBezTo>
+                    <a:pt x="8334" y="10716"/>
+                    <a:pt x="8334" y="10716"/>
+                    <a:pt x="19050" y="0"/>
+                  </a:cubicBezTo>
+                  <a:close/>
+                </a:path>
+              </a:pathLst>
+            </a:custGeom>
+            <a:solidFill>
+              <a:srgbClr val="048BE9"/>
+            </a:solidFill>
+            <a:ln>
+              <a:noFill/>
+            </a:ln>
+          </p:spPr>
+        </p:sp>
+        <p:sp>
+          <p:nvSpPr>
+            <p:cNvPr id="232" name="freeform-232"/>
+            <p:cNvSpPr/>
+            <p:nvPr/>
+          </p:nvSpPr>
+          <p:spPr>
+            <a:xfrm>
+              <a:off x="11449050" y="5676900"/>
+              <a:ext cx="161925" cy="95250"/>
+            </a:xfrm>
+            <a:custGeom>
+              <a:avLst/>
+              <a:gdLst/>
+              <a:ahLst/>
+              <a:cxnLst/>
+              <a:rect l="0" t="0" r="0" b="0"/>
+              <a:pathLst>
+                <a:path w="161925" h="95250">
+                  <a:moveTo>
+                    <a:pt x="0" y="0"/>
+                  </a:moveTo>
+                  <a:cubicBezTo>
+                    <a:pt x="38748" y="13316"/>
+                    <a:pt x="70980" y="32899"/>
+                    <a:pt x="105108" y="55064"/>
+                  </a:cubicBezTo>
+                  <a:cubicBezTo>
+                    <a:pt x="123587" y="66523"/>
+                    <a:pt x="142342" y="76305"/>
+                    <a:pt x="161925" y="85725"/>
+                  </a:cubicBezTo>
+                  <a:cubicBezTo>
+                    <a:pt x="145885" y="92088"/>
+                    <a:pt x="145885" y="92088"/>
+                    <a:pt x="123825" y="95250"/>
+                  </a:cubicBezTo>
+                  <a:cubicBezTo>
+                    <a:pt x="100270" y="85020"/>
+                    <a:pt x="100270" y="85020"/>
+                    <a:pt x="75609" y="69647"/>
+                  </a:cubicBezTo>
+                  <a:cubicBezTo>
+                    <a:pt x="67437" y="64703"/>
+                    <a:pt x="59274" y="59760"/>
+                    <a:pt x="50863" y="54654"/>
+                  </a:cubicBezTo>
+                  <a:cubicBezTo>
+                    <a:pt x="28813" y="38281"/>
+                    <a:pt x="15116" y="22755"/>
+                    <a:pt x="0" y="0"/>
+                  </a:cubicBezTo>
+                  <a:close/>
+                </a:path>
+              </a:pathLst>
+            </a:custGeom>
+            <a:solidFill>
+              <a:srgbClr val="27301E"/>
+            </a:solidFill>
+            <a:ln>
+              <a:noFill/>
+            </a:ln>
+          </p:spPr>
+        </p:sp>
+        <p:sp>
+          <p:nvSpPr>
+            <p:cNvPr id="233" name="freeform-233"/>
+            <p:cNvSpPr/>
+            <p:nvPr/>
+          </p:nvSpPr>
+          <p:spPr>
+            <a:xfrm>
+              <a:off x="11696700" y="5295900"/>
+              <a:ext cx="104775" cy="47625"/>
+            </a:xfrm>
+            <a:custGeom>
+              <a:avLst/>
+              <a:gdLst/>
+              <a:ahLst/>
+              <a:cxnLst/>
+              <a:rect l="0" t="0" r="0" b="0"/>
+              <a:pathLst>
+                <a:path w="104775" h="47625">
+                  <a:moveTo>
+                    <a:pt x="95250" y="0"/>
+                  </a:moveTo>
+                  <a:cubicBezTo>
+                    <a:pt x="98393" y="12573"/>
+                    <a:pt x="101537" y="25146"/>
+                    <a:pt x="104775" y="38100"/>
+                  </a:cubicBezTo>
+                  <a:cubicBezTo>
+                    <a:pt x="85915" y="41243"/>
+                    <a:pt x="67056" y="44386"/>
+                    <a:pt x="47625" y="47625"/>
+                  </a:cubicBezTo>
+                  <a:cubicBezTo>
+                    <a:pt x="47625" y="41339"/>
+                    <a:pt x="47625" y="35052"/>
+                    <a:pt x="47625" y="28575"/>
+                  </a:cubicBezTo>
+                  <a:cubicBezTo>
+                    <a:pt x="31909" y="31718"/>
+                    <a:pt x="16193" y="34861"/>
+                    <a:pt x="0" y="38100"/>
+                  </a:cubicBezTo>
+                  <a:cubicBezTo>
+                    <a:pt x="0" y="28670"/>
+                    <a:pt x="0" y="19240"/>
+                    <a:pt x="0" y="9525"/>
+                  </a:cubicBezTo>
+                  <a:cubicBezTo>
+                    <a:pt x="31432" y="6382"/>
+                    <a:pt x="62865" y="3239"/>
+                    <a:pt x="95250" y="0"/>
+                  </a:cubicBezTo>
+                  <a:close/>
+                </a:path>
+              </a:pathLst>
+            </a:custGeom>
+            <a:solidFill>
+              <a:srgbClr val="396F01"/>
+            </a:solidFill>
+            <a:ln>
+              <a:noFill/>
+            </a:ln>
+          </p:spPr>
+        </p:sp>
+        <p:sp>
+          <p:nvSpPr>
+            <p:cNvPr id="234" name="freeform-234"/>
+            <p:cNvSpPr/>
+            <p:nvPr/>
+          </p:nvSpPr>
+          <p:spPr>
+            <a:xfrm>
+              <a:off x="11515725" y="5143500"/>
+              <a:ext cx="133350" cy="85725"/>
+            </a:xfrm>
+            <a:custGeom>
+              <a:avLst/>
+              <a:gdLst/>
+              <a:ahLst/>
+              <a:cxnLst/>
+              <a:rect l="0" t="0" r="0" b="0"/>
+              <a:pathLst>
+                <a:path w="133350" h="85725">
+                  <a:moveTo>
+                    <a:pt x="123825" y="0"/>
+                  </a:moveTo>
+                  <a:cubicBezTo>
+                    <a:pt x="126968" y="6286"/>
+                    <a:pt x="130112" y="12573"/>
+                    <a:pt x="133350" y="19050"/>
+                  </a:cubicBezTo>
+                  <a:cubicBezTo>
+                    <a:pt x="124901" y="21212"/>
+                    <a:pt x="116453" y="23374"/>
+                    <a:pt x="107747" y="25603"/>
+                  </a:cubicBezTo>
+                  <a:cubicBezTo>
+                    <a:pt x="72066" y="39738"/>
+                    <a:pt x="53940" y="57379"/>
+                    <a:pt x="28575" y="85725"/>
+                  </a:cubicBezTo>
+                  <a:cubicBezTo>
+                    <a:pt x="19145" y="82582"/>
+                    <a:pt x="9715" y="79439"/>
+                    <a:pt x="0" y="76200"/>
+                  </a:cubicBezTo>
+                  <a:cubicBezTo>
+                    <a:pt x="6287" y="57340"/>
+                    <a:pt x="12573" y="38481"/>
+                    <a:pt x="19050" y="19050"/>
+                  </a:cubicBezTo>
+                  <a:cubicBezTo>
+                    <a:pt x="22193" y="31623"/>
+                    <a:pt x="25337" y="44196"/>
+                    <a:pt x="28575" y="57150"/>
+                  </a:cubicBezTo>
+                  <a:cubicBezTo>
+                    <a:pt x="35452" y="49492"/>
+                    <a:pt x="42329" y="41824"/>
+                    <a:pt x="49416" y="33928"/>
+                  </a:cubicBezTo>
+                  <a:cubicBezTo>
+                    <a:pt x="76438" y="9306"/>
+                    <a:pt x="88316" y="3048"/>
+                    <a:pt x="123825" y="0"/>
+                  </a:cubicBezTo>
+                  <a:close/>
+                </a:path>
+              </a:pathLst>
+            </a:custGeom>
+            <a:solidFill>
+              <a:srgbClr val="041717"/>
+            </a:solidFill>
+            <a:ln>
+              <a:noFill/>
+            </a:ln>
+          </p:spPr>
+        </p:sp>
+        <p:sp>
+          <p:nvSpPr>
+            <p:cNvPr id="235" name="freeform-235"/>
+            <p:cNvSpPr/>
+            <p:nvPr/>
+          </p:nvSpPr>
+          <p:spPr>
+            <a:xfrm>
+              <a:off x="11991975" y="5286375"/>
+              <a:ext cx="47625" cy="190500"/>
+            </a:xfrm>
+            <a:custGeom>
+              <a:avLst/>
+              <a:gdLst/>
+              <a:ahLst/>
+              <a:cxnLst/>
+              <a:rect l="0" t="0" r="0" b="0"/>
+              <a:pathLst>
+                <a:path w="47625" h="190500">
+                  <a:moveTo>
+                    <a:pt x="9525" y="0"/>
+                  </a:moveTo>
+                  <a:cubicBezTo>
+                    <a:pt x="40586" y="31061"/>
+                    <a:pt x="42729" y="71676"/>
+                    <a:pt x="47625" y="114300"/>
+                  </a:cubicBezTo>
+                  <a:cubicBezTo>
+                    <a:pt x="46568" y="140675"/>
+                    <a:pt x="42920" y="164449"/>
+                    <a:pt x="38100" y="190500"/>
+                  </a:cubicBezTo>
+                  <a:cubicBezTo>
+                    <a:pt x="34957" y="190500"/>
+                    <a:pt x="31813" y="190500"/>
+                    <a:pt x="28575" y="190500"/>
+                  </a:cubicBezTo>
+                  <a:cubicBezTo>
+                    <a:pt x="28108" y="182909"/>
+                    <a:pt x="27642" y="175327"/>
+                    <a:pt x="27165" y="167507"/>
+                  </a:cubicBezTo>
+                  <a:cubicBezTo>
+                    <a:pt x="23441" y="114767"/>
+                    <a:pt x="18393" y="68980"/>
+                    <a:pt x="0" y="19050"/>
+                  </a:cubicBezTo>
+                  <a:cubicBezTo>
+                    <a:pt x="3143" y="12764"/>
+                    <a:pt x="6287" y="6477"/>
+                    <a:pt x="9525" y="0"/>
+                  </a:cubicBezTo>
+                  <a:close/>
+                </a:path>
+              </a:pathLst>
+            </a:custGeom>
+            <a:solidFill>
+              <a:srgbClr val="223B4C"/>
+            </a:solidFill>
+            <a:ln>
+              <a:noFill/>
+            </a:ln>
+          </p:spPr>
+        </p:sp>
+        <p:sp>
+          <p:nvSpPr>
+            <p:cNvPr id="236" name="freeform-236"/>
+            <p:cNvSpPr/>
+            <p:nvPr/>
+          </p:nvSpPr>
+          <p:spPr>
+            <a:xfrm>
+              <a:off x="11677650" y="5580921"/>
+              <a:ext cx="104775" cy="105508"/>
+            </a:xfrm>
+            <a:custGeom>
+              <a:avLst/>
+              <a:gdLst/>
+              <a:ahLst/>
+              <a:cxnLst/>
+              <a:rect l="0" t="0" r="0" b="0"/>
+              <a:pathLst>
+                <a:path w="104775" h="105508">
+                  <a:moveTo>
+                    <a:pt x="59531" y="3705"/>
+                  </a:moveTo>
+                  <a:cubicBezTo>
+                    <a:pt x="62284" y="4782"/>
+                    <a:pt x="62284" y="4782"/>
+                    <a:pt x="76200" y="10258"/>
+                  </a:cubicBezTo>
+                  <a:cubicBezTo>
+                    <a:pt x="79343" y="35404"/>
+                    <a:pt x="82487" y="60550"/>
+                    <a:pt x="85725" y="86458"/>
+                  </a:cubicBezTo>
+                  <a:cubicBezTo>
+                    <a:pt x="92012" y="86458"/>
+                    <a:pt x="98298" y="86458"/>
+                    <a:pt x="104775" y="86458"/>
+                  </a:cubicBezTo>
+                  <a:cubicBezTo>
+                    <a:pt x="104775" y="92735"/>
+                    <a:pt x="104775" y="99031"/>
+                    <a:pt x="104775" y="105508"/>
+                  </a:cubicBezTo>
+                  <a:cubicBezTo>
+                    <a:pt x="95345" y="102365"/>
+                    <a:pt x="85915" y="99222"/>
+                    <a:pt x="76200" y="95983"/>
+                  </a:cubicBezTo>
+                  <a:cubicBezTo>
+                    <a:pt x="64884" y="62046"/>
+                    <a:pt x="64884" y="62046"/>
+                    <a:pt x="57150" y="29308"/>
+                  </a:cubicBezTo>
+                  <a:cubicBezTo>
+                    <a:pt x="38290" y="29308"/>
+                    <a:pt x="19431" y="29308"/>
+                    <a:pt x="0" y="29308"/>
+                  </a:cubicBezTo>
+                  <a:cubicBezTo>
+                    <a:pt x="32823" y="0"/>
+                    <a:pt x="32823" y="0"/>
+                    <a:pt x="59531" y="3705"/>
+                  </a:cubicBezTo>
+                  <a:close/>
+                </a:path>
+              </a:pathLst>
+            </a:custGeom>
+            <a:solidFill>
+              <a:srgbClr val="062020"/>
+            </a:solidFill>
+            <a:ln>
+              <a:noFill/>
+            </a:ln>
+          </p:spPr>
+        </p:sp>
+        <p:sp>
+          <p:nvSpPr>
+            <p:cNvPr id="237" name="freeform-237"/>
+            <p:cNvSpPr/>
+            <p:nvPr/>
+          </p:nvSpPr>
+          <p:spPr>
+            <a:xfrm>
+              <a:off x="11715750" y="5762625"/>
+              <a:ext cx="123825" cy="47625"/>
+            </a:xfrm>
+            <a:custGeom>
+              <a:avLst/>
+              <a:gdLst/>
+              <a:ahLst/>
+              <a:cxnLst/>
+              <a:rect l="0" t="0" r="0" b="0"/>
+              <a:pathLst>
+                <a:path w="123825" h="47625">
+                  <a:moveTo>
+                    <a:pt x="114300" y="9525"/>
+                  </a:moveTo>
+                  <a:cubicBezTo>
+                    <a:pt x="117443" y="15811"/>
+                    <a:pt x="120587" y="22098"/>
+                    <a:pt x="123825" y="28575"/>
+                  </a:cubicBezTo>
+                  <a:cubicBezTo>
+                    <a:pt x="98679" y="34861"/>
+                    <a:pt x="73533" y="41148"/>
+                    <a:pt x="47625" y="47625"/>
+                  </a:cubicBezTo>
+                  <a:cubicBezTo>
+                    <a:pt x="47625" y="41339"/>
+                    <a:pt x="47625" y="35052"/>
+                    <a:pt x="47625" y="28575"/>
+                  </a:cubicBezTo>
+                  <a:cubicBezTo>
+                    <a:pt x="31909" y="28575"/>
+                    <a:pt x="16193" y="28575"/>
+                    <a:pt x="0" y="28575"/>
+                  </a:cubicBezTo>
+                  <a:cubicBezTo>
+                    <a:pt x="0" y="25432"/>
+                    <a:pt x="0" y="22289"/>
+                    <a:pt x="0" y="19050"/>
+                  </a:cubicBezTo>
+                  <a:cubicBezTo>
+                    <a:pt x="15459" y="15602"/>
+                    <a:pt x="30947" y="12240"/>
+                    <a:pt x="46434" y="8934"/>
+                  </a:cubicBezTo>
+                  <a:cubicBezTo>
+                    <a:pt x="55054" y="7049"/>
+                    <a:pt x="63675" y="5172"/>
+                    <a:pt x="72552" y="3239"/>
+                  </a:cubicBezTo>
+                  <a:cubicBezTo>
+                    <a:pt x="95250" y="0"/>
+                    <a:pt x="95250" y="0"/>
+                    <a:pt x="114300" y="9525"/>
+                  </a:cubicBezTo>
+                  <a:close/>
+                </a:path>
+              </a:pathLst>
+            </a:custGeom>
+            <a:solidFill>
+              <a:srgbClr val="D5D5D5"/>
+            </a:solidFill>
+            <a:ln>
+              <a:noFill/>
+            </a:ln>
+          </p:spPr>
+        </p:sp>
+        <p:sp>
+          <p:nvSpPr>
+            <p:cNvPr id="238" name="freeform-238"/>
+            <p:cNvSpPr/>
+            <p:nvPr/>
+          </p:nvSpPr>
+          <p:spPr>
+            <a:xfrm>
+              <a:off x="11610975" y="5305425"/>
+              <a:ext cx="95250" cy="47625"/>
+            </a:xfrm>
+            <a:custGeom>
+              <a:avLst/>
+              <a:gdLst/>
+              <a:ahLst/>
+              <a:cxnLst/>
+              <a:rect l="0" t="0" r="0" b="0"/>
+              <a:pathLst>
+                <a:path w="95250" h="47625">
+                  <a:moveTo>
+                    <a:pt x="85725" y="0"/>
+                  </a:moveTo>
+                  <a:cubicBezTo>
+                    <a:pt x="88868" y="15716"/>
+                    <a:pt x="92012" y="31432"/>
+                    <a:pt x="95250" y="47625"/>
+                  </a:cubicBezTo>
+                  <a:cubicBezTo>
+                    <a:pt x="85820" y="47625"/>
+                    <a:pt x="76390" y="47625"/>
+                    <a:pt x="66675" y="47625"/>
+                  </a:cubicBezTo>
+                  <a:cubicBezTo>
+                    <a:pt x="66675" y="41339"/>
+                    <a:pt x="66675" y="35052"/>
+                    <a:pt x="66675" y="28575"/>
+                  </a:cubicBezTo>
+                  <a:cubicBezTo>
+                    <a:pt x="47815" y="28575"/>
+                    <a:pt x="28956" y="28575"/>
+                    <a:pt x="9525" y="28575"/>
+                  </a:cubicBezTo>
+                  <a:cubicBezTo>
+                    <a:pt x="6382" y="22289"/>
+                    <a:pt x="3238" y="16002"/>
+                    <a:pt x="0" y="9525"/>
+                  </a:cubicBezTo>
+                  <a:cubicBezTo>
+                    <a:pt x="29127" y="4343"/>
+                    <a:pt x="56083" y="0"/>
+                    <a:pt x="85725" y="0"/>
+                  </a:cubicBezTo>
+                  <a:close/>
+                </a:path>
+              </a:pathLst>
+            </a:custGeom>
+            <a:solidFill>
+              <a:srgbClr val="062228"/>
+            </a:solidFill>
+            <a:ln>
+              <a:noFill/>
+            </a:ln>
+          </p:spPr>
+        </p:sp>
+        <p:sp>
+          <p:nvSpPr>
+            <p:cNvPr id="239" name="freeform-239"/>
+            <p:cNvSpPr/>
+            <p:nvPr/>
+          </p:nvSpPr>
+          <p:spPr>
+            <a:xfrm>
+              <a:off x="11391900" y="5248275"/>
+              <a:ext cx="66675" cy="76200"/>
+            </a:xfrm>
+            <a:custGeom>
+              <a:avLst/>
+              <a:gdLst/>
+              <a:ahLst/>
+              <a:cxnLst/>
+              <a:rect l="0" t="0" r="0" b="0"/>
+              <a:pathLst>
+                <a:path w="66675" h="76200">
+                  <a:moveTo>
+                    <a:pt x="38100" y="0"/>
+                  </a:moveTo>
+                  <a:cubicBezTo>
+                    <a:pt x="47530" y="3143"/>
+                    <a:pt x="56960" y="6286"/>
+                    <a:pt x="66675" y="9525"/>
+                  </a:cubicBezTo>
+                  <a:cubicBezTo>
+                    <a:pt x="63532" y="28385"/>
+                    <a:pt x="60388" y="47244"/>
+                    <a:pt x="57150" y="66675"/>
+                  </a:cubicBezTo>
+                  <a:cubicBezTo>
+                    <a:pt x="54007" y="60389"/>
+                    <a:pt x="50863" y="54102"/>
+                    <a:pt x="47625" y="47625"/>
+                  </a:cubicBezTo>
+                  <a:cubicBezTo>
+                    <a:pt x="43301" y="52340"/>
+                    <a:pt x="38986" y="57055"/>
+                    <a:pt x="34528" y="61912"/>
+                  </a:cubicBezTo>
+                  <a:cubicBezTo>
+                    <a:pt x="19050" y="76200"/>
+                    <a:pt x="19050" y="76200"/>
+                    <a:pt x="0" y="76200"/>
+                  </a:cubicBezTo>
+                  <a:cubicBezTo>
+                    <a:pt x="10716" y="47892"/>
+                    <a:pt x="21174" y="25394"/>
+                    <a:pt x="38100" y="0"/>
+                  </a:cubicBezTo>
+                  <a:close/>
+                </a:path>
+              </a:pathLst>
+            </a:custGeom>
+            <a:solidFill>
+              <a:srgbClr val="3B7301"/>
+            </a:solidFill>
+            <a:ln>
+              <a:noFill/>
+            </a:ln>
+          </p:spPr>
+        </p:sp>
+        <p:sp>
+          <p:nvSpPr>
+            <p:cNvPr id="240" name="freeform-240"/>
+            <p:cNvSpPr/>
+            <p:nvPr/>
+          </p:nvSpPr>
+          <p:spPr>
+            <a:xfrm>
+              <a:off x="11572875" y="5772150"/>
+              <a:ext cx="95250" cy="38100"/>
+            </a:xfrm>
+            <a:custGeom>
+              <a:avLst/>
+              <a:gdLst/>
+              <a:ahLst/>
+              <a:cxnLst/>
+              <a:rect l="0" t="0" r="0" b="0"/>
+              <a:pathLst>
+                <a:path w="95250" h="38100">
+                  <a:moveTo>
+                    <a:pt x="0" y="0"/>
+                  </a:moveTo>
+                  <a:cubicBezTo>
+                    <a:pt x="31432" y="3143"/>
+                    <a:pt x="62865" y="6286"/>
+                    <a:pt x="95250" y="9525"/>
+                  </a:cubicBezTo>
+                  <a:cubicBezTo>
+                    <a:pt x="92107" y="14240"/>
+                    <a:pt x="92107" y="14240"/>
+                    <a:pt x="76200" y="38100"/>
+                  </a:cubicBezTo>
+                  <a:cubicBezTo>
+                    <a:pt x="51054" y="34957"/>
+                    <a:pt x="25908" y="31814"/>
+                    <a:pt x="0" y="28575"/>
+                  </a:cubicBezTo>
+                  <a:cubicBezTo>
+                    <a:pt x="0" y="19145"/>
+                    <a:pt x="0" y="9715"/>
+                    <a:pt x="0" y="0"/>
+                  </a:cubicBezTo>
+                  <a:close/>
+                </a:path>
+              </a:pathLst>
+            </a:custGeom>
+            <a:solidFill>
+              <a:srgbClr val="DBDBDB"/>
+            </a:solidFill>
+            <a:ln>
+              <a:noFill/>
+            </a:ln>
+          </p:spPr>
+        </p:sp>
+        <p:sp>
+          <p:nvSpPr>
+            <p:cNvPr id="241" name="freeform-241"/>
+            <p:cNvSpPr/>
+            <p:nvPr/>
+          </p:nvSpPr>
+          <p:spPr>
+            <a:xfrm>
+              <a:off x="11801475" y="5124450"/>
+              <a:ext cx="57150" cy="95250"/>
+            </a:xfrm>
+            <a:custGeom>
+              <a:avLst/>
+              <a:gdLst/>
+              <a:ahLst/>
+              <a:cxnLst/>
+              <a:rect l="0" t="0" r="0" b="0"/>
+              <a:pathLst>
+                <a:path w="57150" h="95250">
+                  <a:moveTo>
+                    <a:pt x="0" y="0"/>
+                  </a:moveTo>
+                  <a:cubicBezTo>
+                    <a:pt x="9430" y="1572"/>
+                    <a:pt x="9430" y="1572"/>
+                    <a:pt x="57150" y="9525"/>
+                  </a:cubicBezTo>
+                  <a:cubicBezTo>
+                    <a:pt x="47720" y="12668"/>
+                    <a:pt x="38290" y="15811"/>
+                    <a:pt x="28575" y="19050"/>
+                  </a:cubicBezTo>
+                  <a:cubicBezTo>
+                    <a:pt x="21622" y="36652"/>
+                    <a:pt x="21622" y="36652"/>
+                    <a:pt x="17259" y="57741"/>
+                  </a:cubicBezTo>
+                  <a:cubicBezTo>
+                    <a:pt x="15754" y="64732"/>
+                    <a:pt x="14240" y="71714"/>
+                    <a:pt x="12687" y="78915"/>
+                  </a:cubicBezTo>
+                  <a:cubicBezTo>
+                    <a:pt x="12163" y="81610"/>
+                    <a:pt x="12163" y="81610"/>
+                    <a:pt x="9525" y="95250"/>
+                  </a:cubicBezTo>
+                  <a:cubicBezTo>
+                    <a:pt x="6382" y="95250"/>
+                    <a:pt x="3238" y="95250"/>
+                    <a:pt x="0" y="95250"/>
+                  </a:cubicBezTo>
+                  <a:cubicBezTo>
+                    <a:pt x="0" y="63818"/>
+                    <a:pt x="0" y="32385"/>
+                    <a:pt x="0" y="0"/>
+                  </a:cubicBezTo>
+                  <a:close/>
+                </a:path>
+              </a:pathLst>
+            </a:custGeom>
+            <a:solidFill>
+              <a:srgbClr val="12241E"/>
+            </a:solidFill>
+            <a:ln>
+              <a:noFill/>
+            </a:ln>
+          </p:spPr>
+        </p:sp>
+        <p:sp>
+          <p:nvSpPr>
+            <p:cNvPr id="242" name="freeform-242"/>
+            <p:cNvSpPr/>
+            <p:nvPr/>
+          </p:nvSpPr>
+          <p:spPr>
+            <a:xfrm>
+              <a:off x="11468100" y="5666184"/>
+              <a:ext cx="76200" cy="39291"/>
+            </a:xfrm>
+            <a:custGeom>
+              <a:avLst/>
+              <a:gdLst/>
+              <a:ahLst/>
+              <a:cxnLst/>
+              <a:rect l="0" t="0" r="0" b="0"/>
+              <a:pathLst>
+                <a:path w="76200" h="39291">
+                  <a:moveTo>
+                    <a:pt x="0" y="1191"/>
+                  </a:moveTo>
+                  <a:cubicBezTo>
+                    <a:pt x="27384" y="0"/>
+                    <a:pt x="27384" y="0"/>
+                    <a:pt x="57150" y="1191"/>
+                  </a:cubicBezTo>
+                  <a:cubicBezTo>
+                    <a:pt x="63437" y="7477"/>
+                    <a:pt x="69723" y="13764"/>
+                    <a:pt x="76200" y="20241"/>
+                  </a:cubicBezTo>
+                  <a:cubicBezTo>
+                    <a:pt x="54178" y="30956"/>
+                    <a:pt x="54178" y="30956"/>
+                    <a:pt x="28575" y="39291"/>
+                  </a:cubicBezTo>
+                  <a:cubicBezTo>
+                    <a:pt x="19145" y="33004"/>
+                    <a:pt x="9715" y="26718"/>
+                    <a:pt x="0" y="20241"/>
+                  </a:cubicBezTo>
+                  <a:cubicBezTo>
+                    <a:pt x="0" y="13954"/>
+                    <a:pt x="0" y="7668"/>
+                    <a:pt x="0" y="1191"/>
+                  </a:cubicBezTo>
+                  <a:close/>
+                </a:path>
+              </a:pathLst>
+            </a:custGeom>
+            <a:solidFill>
+              <a:srgbClr val="3E7A01"/>
+            </a:solidFill>
+            <a:ln>
+              <a:noFill/>
+            </a:ln>
+          </p:spPr>
+        </p:sp>
+        <p:sp>
+          <p:nvSpPr>
+            <p:cNvPr id="243" name="freeform-243"/>
+            <p:cNvSpPr/>
+            <p:nvPr/>
+          </p:nvSpPr>
+          <p:spPr>
+            <a:xfrm>
+              <a:off x="11372850" y="5648325"/>
+              <a:ext cx="66675" cy="76200"/>
+            </a:xfrm>
+            <a:custGeom>
+              <a:avLst/>
+              <a:gdLst/>
+              <a:ahLst/>
+              <a:cxnLst/>
+              <a:rect l="0" t="0" r="0" b="0"/>
+              <a:pathLst>
+                <a:path w="66675" h="76200">
+                  <a:moveTo>
+                    <a:pt x="0" y="0"/>
+                  </a:moveTo>
+                  <a:cubicBezTo>
+                    <a:pt x="6287" y="0"/>
+                    <a:pt x="12573" y="0"/>
+                    <a:pt x="19050" y="0"/>
+                  </a:cubicBezTo>
+                  <a:cubicBezTo>
+                    <a:pt x="66675" y="52159"/>
+                    <a:pt x="66675" y="52159"/>
+                    <a:pt x="66675" y="76200"/>
+                  </a:cubicBezTo>
+                  <a:cubicBezTo>
+                    <a:pt x="34709" y="62970"/>
+                    <a:pt x="18355" y="48416"/>
+                    <a:pt x="0" y="19050"/>
+                  </a:cubicBezTo>
+                  <a:cubicBezTo>
+                    <a:pt x="0" y="12764"/>
+                    <a:pt x="0" y="6477"/>
+                    <a:pt x="0" y="0"/>
+                  </a:cubicBezTo>
+                  <a:close/>
+                </a:path>
+              </a:pathLst>
+            </a:custGeom>
+            <a:solidFill>
+              <a:srgbClr val="3C3C3C"/>
+            </a:solidFill>
+            <a:ln>
+              <a:noFill/>
+            </a:ln>
+          </p:spPr>
+        </p:sp>
+        <p:sp>
+          <p:nvSpPr>
+            <p:cNvPr id="244" name="freeform-244"/>
+            <p:cNvSpPr/>
+            <p:nvPr/>
+          </p:nvSpPr>
+          <p:spPr>
+            <a:xfrm>
+              <a:off x="11972925" y="5591175"/>
+              <a:ext cx="57150" cy="57150"/>
+            </a:xfrm>
+            <a:custGeom>
+              <a:avLst/>
+              <a:gdLst/>
+              <a:ahLst/>
+              <a:cxnLst/>
+              <a:rect l="0" t="0" r="0" b="0"/>
+              <a:pathLst>
+                <a:path w="57150" h="57150">
+                  <a:moveTo>
+                    <a:pt x="28575" y="0"/>
+                  </a:moveTo>
+                  <a:cubicBezTo>
+                    <a:pt x="38005" y="3143"/>
+                    <a:pt x="47435" y="6286"/>
+                    <a:pt x="57150" y="9525"/>
+                  </a:cubicBezTo>
+                  <a:cubicBezTo>
+                    <a:pt x="50863" y="25241"/>
+                    <a:pt x="44577" y="40957"/>
+                    <a:pt x="38100" y="57150"/>
+                  </a:cubicBezTo>
+                  <a:cubicBezTo>
+                    <a:pt x="25527" y="54007"/>
+                    <a:pt x="12954" y="50864"/>
+                    <a:pt x="0" y="47625"/>
+                  </a:cubicBezTo>
+                  <a:cubicBezTo>
+                    <a:pt x="9430" y="31909"/>
+                    <a:pt x="18860" y="16193"/>
+                    <a:pt x="28575" y="0"/>
+                  </a:cubicBezTo>
+                  <a:close/>
+                </a:path>
+              </a:pathLst>
+            </a:custGeom>
+            <a:solidFill>
+              <a:srgbClr val="DEDEDE"/>
+            </a:solidFill>
+            <a:ln>
+              <a:noFill/>
+            </a:ln>
+          </p:spPr>
+        </p:sp>
+        <p:sp>
+          <p:nvSpPr>
+            <p:cNvPr id="245" name="freeform-245"/>
+            <p:cNvSpPr/>
+            <p:nvPr/>
+          </p:nvSpPr>
+          <p:spPr>
+            <a:xfrm>
+              <a:off x="11344275" y="5534025"/>
+              <a:ext cx="38100" cy="66675"/>
+            </a:xfrm>
+            <a:custGeom>
+              <a:avLst/>
+              <a:gdLst/>
+              <a:ahLst/>
+              <a:cxnLst/>
+              <a:rect l="0" t="0" r="0" b="0"/>
+              <a:pathLst>
+                <a:path w="38100" h="66675">
+                  <a:moveTo>
+                    <a:pt x="0" y="0"/>
+                  </a:moveTo>
+                  <a:cubicBezTo>
+                    <a:pt x="9430" y="3143"/>
+                    <a:pt x="18860" y="6286"/>
+                    <a:pt x="28575" y="9525"/>
+                  </a:cubicBezTo>
+                  <a:cubicBezTo>
+                    <a:pt x="31718" y="25241"/>
+                    <a:pt x="34862" y="40957"/>
+                    <a:pt x="38100" y="57150"/>
+                  </a:cubicBezTo>
+                  <a:cubicBezTo>
+                    <a:pt x="28670" y="60293"/>
+                    <a:pt x="19240" y="63436"/>
+                    <a:pt x="9525" y="66675"/>
+                  </a:cubicBezTo>
+                  <a:cubicBezTo>
+                    <a:pt x="6382" y="44672"/>
+                    <a:pt x="3238" y="22669"/>
+                    <a:pt x="0" y="0"/>
+                  </a:cubicBezTo>
+                  <a:close/>
+                </a:path>
+              </a:pathLst>
+            </a:custGeom>
+            <a:solidFill>
+              <a:srgbClr val="E4E4E4"/>
+            </a:solidFill>
+            <a:ln>
+              <a:noFill/>
+            </a:ln>
+          </p:spPr>
+        </p:sp>
+        <p:sp>
+          <p:nvSpPr>
+            <p:cNvPr id="246" name="freeform-246"/>
+            <p:cNvSpPr/>
+            <p:nvPr/>
+          </p:nvSpPr>
+          <p:spPr>
+            <a:xfrm>
+              <a:off x="11334750" y="5314950"/>
+              <a:ext cx="28575" cy="85725"/>
+            </a:xfrm>
+            <a:custGeom>
+              <a:avLst/>
+              <a:gdLst/>
+              <a:ahLst/>
+              <a:cxnLst/>
+              <a:rect l="0" t="0" r="0" b="0"/>
+              <a:pathLst>
+                <a:path w="28575" h="85725">
+                  <a:moveTo>
+                    <a:pt x="19050" y="0"/>
+                  </a:moveTo>
+                  <a:cubicBezTo>
+                    <a:pt x="22193" y="0"/>
+                    <a:pt x="25337" y="0"/>
+                    <a:pt x="28575" y="0"/>
+                  </a:cubicBezTo>
+                  <a:cubicBezTo>
+                    <a:pt x="25432" y="28289"/>
+                    <a:pt x="22288" y="56579"/>
+                    <a:pt x="19050" y="85725"/>
+                  </a:cubicBezTo>
+                  <a:cubicBezTo>
+                    <a:pt x="12763" y="82582"/>
+                    <a:pt x="6477" y="79439"/>
+                    <a:pt x="0" y="76200"/>
+                  </a:cubicBezTo>
+                  <a:cubicBezTo>
+                    <a:pt x="8334" y="10716"/>
+                    <a:pt x="8334" y="10716"/>
+                    <a:pt x="19050" y="0"/>
+                  </a:cubicBezTo>
+                  <a:close/>
+                </a:path>
+              </a:pathLst>
+            </a:custGeom>
+            <a:solidFill>
+              <a:srgbClr val="F7F7F7"/>
+            </a:solidFill>
+            <a:ln>
+              <a:noFill/>
+            </a:ln>
+          </p:spPr>
+        </p:sp>
+        <p:sp>
+          <p:nvSpPr>
+            <p:cNvPr id="247" name="freeform-247"/>
+            <p:cNvSpPr/>
+            <p:nvPr/>
+          </p:nvSpPr>
+          <p:spPr>
+            <a:xfrm>
+              <a:off x="11696700" y="5191125"/>
+              <a:ext cx="47625" cy="38100"/>
+            </a:xfrm>
+            <a:custGeom>
+              <a:avLst/>
+              <a:gdLst/>
+              <a:ahLst/>
+              <a:cxnLst/>
+              <a:rect l="0" t="0" r="0" b="0"/>
+              <a:pathLst>
+                <a:path w="47625" h="38100">
+                  <a:moveTo>
+                    <a:pt x="0" y="0"/>
+                  </a:moveTo>
+                  <a:cubicBezTo>
+                    <a:pt x="7858" y="1572"/>
+                    <a:pt x="7858" y="1572"/>
+                    <a:pt x="47625" y="9525"/>
+                  </a:cubicBezTo>
+                  <a:cubicBezTo>
+                    <a:pt x="47625" y="18955"/>
+                    <a:pt x="47625" y="28385"/>
+                    <a:pt x="47625" y="38100"/>
+                  </a:cubicBezTo>
+                  <a:cubicBezTo>
+                    <a:pt x="31909" y="38100"/>
+                    <a:pt x="16193" y="38100"/>
+                    <a:pt x="0" y="38100"/>
+                  </a:cubicBezTo>
+                  <a:cubicBezTo>
+                    <a:pt x="0" y="25527"/>
+                    <a:pt x="0" y="12954"/>
+                    <a:pt x="0" y="0"/>
+                  </a:cubicBezTo>
+                  <a:close/>
+                </a:path>
+              </a:pathLst>
+            </a:custGeom>
+            <a:solidFill>
+              <a:srgbClr val="458602"/>
+            </a:solidFill>
+            <a:ln>
+              <a:noFill/>
+            </a:ln>
+          </p:spPr>
+        </p:sp>
+        <p:sp>
+          <p:nvSpPr>
+            <p:cNvPr id="248" name="freeform-248"/>
+            <p:cNvSpPr/>
+            <p:nvPr/>
+          </p:nvSpPr>
+          <p:spPr>
+            <a:xfrm>
+              <a:off x="11944350" y="5286375"/>
+              <a:ext cx="57150" cy="57150"/>
+            </a:xfrm>
+            <a:custGeom>
+              <a:avLst/>
+              <a:gdLst/>
+              <a:ahLst/>
+              <a:cxnLst/>
+              <a:rect l="0" t="0" r="0" b="0"/>
+              <a:pathLst>
+                <a:path w="57150" h="57150">
+                  <a:moveTo>
+                    <a:pt x="38100" y="0"/>
+                  </a:moveTo>
+                  <a:cubicBezTo>
+                    <a:pt x="44387" y="0"/>
+                    <a:pt x="50673" y="0"/>
+                    <a:pt x="57150" y="0"/>
+                  </a:cubicBezTo>
+                  <a:cubicBezTo>
+                    <a:pt x="54007" y="18860"/>
+                    <a:pt x="50863" y="37719"/>
+                    <a:pt x="47625" y="57150"/>
+                  </a:cubicBezTo>
+                  <a:cubicBezTo>
+                    <a:pt x="39767" y="54007"/>
+                    <a:pt x="39767" y="54007"/>
+                    <a:pt x="0" y="38100"/>
+                  </a:cubicBezTo>
+                  <a:cubicBezTo>
+                    <a:pt x="0" y="31814"/>
+                    <a:pt x="0" y="25527"/>
+                    <a:pt x="0" y="19050"/>
+                  </a:cubicBezTo>
+                  <a:cubicBezTo>
+                    <a:pt x="9430" y="19050"/>
+                    <a:pt x="18860" y="19050"/>
+                    <a:pt x="28575" y="19050"/>
+                  </a:cubicBezTo>
+                  <a:cubicBezTo>
+                    <a:pt x="31718" y="12764"/>
+                    <a:pt x="34862" y="6477"/>
+                    <a:pt x="38100" y="0"/>
+                  </a:cubicBezTo>
+                  <a:close/>
+                </a:path>
+              </a:pathLst>
+            </a:custGeom>
+            <a:solidFill>
+              <a:srgbClr val="010D12"/>
+            </a:solidFill>
+            <a:ln>
+              <a:noFill/>
+            </a:ln>
+          </p:spPr>
+        </p:sp>
+      </p:grpSp>
+      <p:sp>
+        <p:nvSpPr>
+          <p:cNvPr id="249" name="af-environment-label-text-01" descr="{&quot;autofigure_element_id&quot;:&quot;environment-label&quot;}"/>
           <p:cNvSpPr txBox="1"/>
           <p:nvPr/>
         </p:nvSpPr>
@@ -12499,13 +18345,13 @@
 
 <file path=ppt/tags/tag2.xml><?xml version="1.0" encoding="utf-8"?>
 <ns0:tagLst xmlns:ns0="http://schemas.openxmlformats.org/presentationml/2006/main">
-  <ns0:tag name="AISCIENTIFICILLUSTRATORASSETID" val="atomic:environment-globe"/>
-  <ns0:tag name="AISCIENTIFICILLUSTRATORSOURCESHA256" val="3bfe64f24f546aab0797223e0256f9da48314e668dc18d93a0b27347b84ba21d"/>
-  <ns0:tag name="AISCIENTIFICILLUSTRATORRASTERREASON" val="The illustrated globe is a creative microasset whose native redraw materially reduces reference fidelity."/>
-  <ns0:tag name="AISCIENTIFICILLUSTRATORSOURCETIGHTLYCROPPED" val="True"/>
-  <ns0:tag name="AISCIENTIFICILLUSTRATORATOMICRASTERUNIT" val="True"/>
-  <ns0:tag name="AISCIENTIFICILLUSTRATORCONTAINSRECONSTRUCTABLECONTENT" val="False"/>
-  <ns0:tag name="AISCIENTIFICILLUSTRATORDECOMPOSITIONNOTE" val="Only the globe is raster; the Environment label and interaction arrows remain native editable objects."/>
+  <ns0:tag name="AISCIENTIFICILLUSTRATORASSETID" val="atomic:environment-globe-vector"/>
+  <ns0:tag name="AISCIENTIFICILLUSTRATORSOURCESHA256" val="e161bd1c29549ff3c2503a4047d7390685bb861693faaf45120324a44fbd3cba"/>
+  <ns0:tag name="AISCIENTIFICILLUSTRATORREPRESENTATION" val="atomic-vector"/>
+  <ns0:tag name="AISCIENTIFICILLUSTRATOREDITABLE" val="True"/>
+  <ns0:tag name="AISCIENTIFICILLUSTRATORORIGIN" val="vtracer-provider"/>
+  <ns0:tag name="AISCIENTIFICILLUSTRATORTRACEMETHOD" val="vtracer-color-stacked-spline"/>
+  <ns0:tag name="AISCIENTIFICILLUSTRATORTRACEENGINEVERSION" val="0.6.15"/>
 </ns0:tagLst>
 </file>
 
